--- a/outputs/presentation/thermal_cell_benchmark_review_9slides_20260928.pptx
+++ b/outputs/presentation/thermal_cell_benchmark_review_9slides_20260928.pptx
@@ -136,7 +136,7 @@
           <c:idx val="0"/>
           <c:order val="0"/>
           <c:tx>
-            <c:v>mean RMSE</c:v>
+            <c:v>result</c:v>
           </c:tx>
           <c:spPr>
             <a:solidFill>
@@ -150,32 +150,12 @@
             <c:bubble3D val="0"/>
             <c:extLst>
               <c:ext xmlns:c16="http://schemas.microsoft.com/office/drawing/2014/chart" uri="{C3380CC4-5D6E-409C-BE32-E72D297353CC}">
-                <c16:uniqueId val="{00000001-E5C6-478E-A80B-66AD045CA98D}"/>
+                <c16:uniqueId val="{00000001-6D78-4C7D-910B-07D37DEFE19F}"/>
               </c:ext>
             </c:extLst>
           </c:dPt>
           <c:dPt>
             <c:idx val="1"/>
-            <c:invertIfNegative val="0"/>
-            <c:bubble3D val="0"/>
-            <c:extLst>
-              <c:ext xmlns:c16="http://schemas.microsoft.com/office/drawing/2014/chart" uri="{C3380CC4-5D6E-409C-BE32-E72D297353CC}">
-                <c16:uniqueId val="{00000003-E5C6-478E-A80B-66AD045CA98D}"/>
-              </c:ext>
-            </c:extLst>
-          </c:dPt>
-          <c:dPt>
-            <c:idx val="2"/>
-            <c:invertIfNegative val="0"/>
-            <c:bubble3D val="0"/>
-            <c:extLst>
-              <c:ext xmlns:c16="http://schemas.microsoft.com/office/drawing/2014/chart" uri="{C3380CC4-5D6E-409C-BE32-E72D297353CC}">
-                <c16:uniqueId val="{00000005-E5C6-478E-A80B-66AD045CA98D}"/>
-              </c:ext>
-            </c:extLst>
-          </c:dPt>
-          <c:dPt>
-            <c:idx val="3"/>
             <c:invertIfNegative val="0"/>
             <c:bubble3D val="0"/>
             <c:spPr>
@@ -185,17 +165,7 @@
             </c:spPr>
             <c:extLst>
               <c:ext xmlns:c16="http://schemas.microsoft.com/office/drawing/2014/chart" uri="{C3380CC4-5D6E-409C-BE32-E72D297353CC}">
-                <c16:uniqueId val="{00000007-E5C6-478E-A80B-66AD045CA98D}"/>
-              </c:ext>
-            </c:extLst>
-          </c:dPt>
-          <c:dPt>
-            <c:idx val="4"/>
-            <c:invertIfNegative val="0"/>
-            <c:bubble3D val="0"/>
-            <c:extLst>
-              <c:ext xmlns:c16="http://schemas.microsoft.com/office/drawing/2014/chart" uri="{C3380CC4-5D6E-409C-BE32-E72D297353CC}">
-                <c16:uniqueId val="{00000009-E5C6-478E-A80B-66AD045CA98D}"/>
+                <c16:uniqueId val="{00000003-6D78-4C7D-910B-07D37DEFE19F}"/>
               </c:ext>
             </c:extLst>
           </c:dPt>
@@ -240,47 +210,25 @@
           </c:dLbls>
           <c:cat>
             <c:strLit>
-              <c:ptCount val="5"/>
+              <c:ptCount val="2"/>
               <c:pt idx="0">
-                <c:v>interpolation
-n=2</c:v>
+                <c:v>11-case mean</c:v>
               </c:pt>
               <c:pt idx="1">
-                <c:v>extrapolation
-n=2</c:v>
-              </c:pt>
-              <c:pt idx="2">
-                <c:v>dynamics
-n=3</c:v>
-              </c:pt>
-              <c:pt idx="3">
-                <c:v>initialization
-n=3</c:v>
-              </c:pt>
-              <c:pt idx="4">
-                <c:v>sampling
-n=1</c:v>
+                <c:v>worst case
+F09 sparse init</c:v>
               </c:pt>
             </c:strLit>
           </c:cat>
           <c:val>
             <c:numLit>
               <c:formatCode>0.000</c:formatCode>
-              <c:ptCount val="5"/>
+              <c:ptCount val="2"/>
               <c:pt idx="0">
-                <c:v>2.1449288887062573E-2</c:v>
+                <c:v>0.14291188741464964</c:v>
               </c:pt>
               <c:pt idx="1">
-                <c:v>1.6240458498950963E-2</c:v>
-              </c:pt>
-              <c:pt idx="2">
-                <c:v>3.1637711283009677E-2</c:v>
-              </c:pt>
-              <c:pt idx="3">
-                <c:v>0.4505382897125047</c:v>
-              </c:pt>
-              <c:pt idx="4">
-                <c:v>5.0123263802575826E-2</c:v>
+                <c:v>1.3026765542304839</c:v>
               </c:pt>
             </c:numLit>
           </c:val>
@@ -295,7 +243,97 @@
               </c14:invertSolidFillFmt>
             </c:ext>
             <c:ext xmlns:c16="http://schemas.microsoft.com/office/drawing/2014/chart" uri="{C3380CC4-5D6E-409C-BE32-E72D297353CC}">
-              <c16:uniqueId val="{0000000A-E5C6-478E-A80B-66AD045CA98D}"/>
+              <c16:uniqueId val="{00000004-6D78-4C7D-910B-07D37DEFE19F}"/>
+            </c:ext>
+          </c:extLst>
+        </c:ser>
+        <c:ser>
+          <c:idx val="1"/>
+          <c:order val="1"/>
+          <c:tx>
+            <c:v>acceptance limit</c:v>
+          </c:tx>
+          <c:spPr>
+            <a:solidFill>
+              <a:srgbClr val="D3D3D3"/>
+            </a:solidFill>
+          </c:spPr>
+          <c:invertIfNegative val="1"/>
+          <c:dLbls>
+            <c:spPr>
+              <a:noFill/>
+              <a:ln>
+                <a:noFill/>
+              </a:ln>
+              <a:effectLst/>
+            </c:spPr>
+            <c:txPr>
+              <a:bodyPr anchorCtr="1"/>
+              <a:lstStyle/>
+              <a:p>
+                <a:pPr>
+                  <a:defRPr sz="788" b="1">
+                    <a:solidFill>
+                      <a:srgbClr val="555555"/>
+                    </a:solidFill>
+                    <a:latin typeface="Yu Gothic"/>
+                    <a:ea typeface="Yu Gothic"/>
+                    <a:cs typeface="Yu Gothic"/>
+                  </a:defRPr>
+                </a:pPr>
+                <a:endParaRPr lang="ja-JP"/>
+              </a:p>
+            </c:txPr>
+            <c:dLblPos val="outEnd"/>
+            <c:showLegendKey val="0"/>
+            <c:showVal val="1"/>
+            <c:showCatName val="0"/>
+            <c:showSerName val="0"/>
+            <c:showPercent val="0"/>
+            <c:showBubbleSize val="0"/>
+            <c:showLeaderLines val="0"/>
+            <c:extLst>
+              <c:ext xmlns:c15="http://schemas.microsoft.com/office/drawing/2012/chart" uri="{CE6537A1-D6FC-4f65-9D91-7224C49458BB}">
+                <c15:showLeaderLines val="0"/>
+              </c:ext>
+            </c:extLst>
+          </c:dLbls>
+          <c:cat>
+            <c:strLit>
+              <c:ptCount val="2"/>
+              <c:pt idx="0">
+                <c:v>11-case mean</c:v>
+              </c:pt>
+              <c:pt idx="1">
+                <c:v>worst case
+F09 sparse init</c:v>
+              </c:pt>
+            </c:strLit>
+          </c:cat>
+          <c:val>
+            <c:numLit>
+              <c:formatCode>0.000</c:formatCode>
+              <c:ptCount val="2"/>
+              <c:pt idx="0">
+                <c:v>1</c:v>
+              </c:pt>
+              <c:pt idx="1">
+                <c:v>1.5</c:v>
+              </c:pt>
+            </c:numLit>
+          </c:val>
+          <c:extLst>
+            <c:ext xmlns:c14="http://schemas.microsoft.com/office/drawing/2007/8/2/chart" uri="{6F2FDCE9-48DA-4B69-8628-5D25D57E5C99}">
+              <c14:invertSolidFillFmt>
+                <c14:spPr xmlns:c14="http://schemas.microsoft.com/office/drawing/2007/8/2/chart">
+                  <a:solidFill>
+                    <a:srgbClr val="FFFFFF"/>
+                  </a:solidFill>
+                </c14:spPr>
+              </c14:invertSolidFillFmt>
+            </c:ext>
+            <c:ext xmlns:c16="http://schemas.microsoft.com/office/drawing/2014/chart" uri="{C3380CC4-5D6E-409C-BE32-E72D297353CC}">
+              <c16:uniqueId val="{00000005-6D78-4C7D-910B-07D37DEFE19F}"/>
             </c:ext>
           </c:extLst>
         </c:ser>
@@ -308,7 +346,7 @@
           <c:showPercent val="0"/>
           <c:showBubbleSize val="0"/>
         </c:dLbls>
-        <c:gapWidth val="38"/>
+        <c:gapWidth val="42"/>
         <c:axId val="48650112"/>
         <c:axId val="48672768"/>
       </c:barChart>
@@ -434,6 +472,27 @@
         </a:ln>
       </c:spPr>
     </c:plotArea>
+    <c:legend>
+      <c:legendPos val="b"/>
+      <c:overlay val="0"/>
+      <c:txPr>
+        <a:bodyPr anchorCtr="1"/>
+        <a:lstStyle/>
+        <a:p>
+          <a:pPr>
+            <a:defRPr sz="788">
+              <a:solidFill>
+                <a:srgbClr val="555555"/>
+              </a:solidFill>
+              <a:latin typeface="Yu Gothic"/>
+              <a:ea typeface="Yu Gothic"/>
+              <a:cs typeface="Yu Gothic"/>
+            </a:defRPr>
+          </a:pPr>
+          <a:endParaRPr lang="ja-JP"/>
+        </a:p>
+      </c:txPr>
+    </c:legend>
     <c:plotVisOnly val="1"/>
     <c:dispBlanksAs val="zero"/>
     <c:showDLblsOverMax val="1"/>
@@ -480,14 +539,29 @@
             <c:idx val="0"/>
             <c:invertIfNegative val="0"/>
             <c:bubble3D val="0"/>
+            <c:spPr>
+              <a:solidFill>
+                <a:srgbClr val="D3D3D3"/>
+              </a:solidFill>
+            </c:spPr>
             <c:extLst>
               <c:ext xmlns:c16="http://schemas.microsoft.com/office/drawing/2014/chart" uri="{C3380CC4-5D6E-409C-BE32-E72D297353CC}">
-                <c16:uniqueId val="{00000001-059A-4F81-A82F-8CF363905414}"/>
+                <c16:uniqueId val="{00000001-A50A-4C98-B108-E5D89CF93401}"/>
               </c:ext>
             </c:extLst>
           </c:dPt>
           <c:dPt>
             <c:idx val="1"/>
+            <c:invertIfNegative val="0"/>
+            <c:bubble3D val="0"/>
+            <c:extLst>
+              <c:ext xmlns:c16="http://schemas.microsoft.com/office/drawing/2014/chart" uri="{C3380CC4-5D6E-409C-BE32-E72D297353CC}">
+                <c16:uniqueId val="{00000003-A50A-4C98-B108-E5D89CF93401}"/>
+              </c:ext>
+            </c:extLst>
+          </c:dPt>
+          <c:dPt>
+            <c:idx val="2"/>
             <c:invertIfNegative val="0"/>
             <c:bubble3D val="0"/>
             <c:spPr>
@@ -497,12 +571,12 @@
             </c:spPr>
             <c:extLst>
               <c:ext xmlns:c16="http://schemas.microsoft.com/office/drawing/2014/chart" uri="{C3380CC4-5D6E-409C-BE32-E72D297353CC}">
-                <c16:uniqueId val="{00000003-059A-4F81-A82F-8CF363905414}"/>
+                <c16:uniqueId val="{00000005-A50A-4C98-B108-E5D89CF93401}"/>
               </c:ext>
             </c:extLst>
           </c:dPt>
           <c:dPt>
-            <c:idx val="2"/>
+            <c:idx val="3"/>
             <c:invertIfNegative val="0"/>
             <c:bubble3D val="0"/>
             <c:spPr>
@@ -512,7 +586,7 @@
             </c:spPr>
             <c:extLst>
               <c:ext xmlns:c16="http://schemas.microsoft.com/office/drawing/2014/chart" uri="{C3380CC4-5D6E-409C-BE32-E72D297353CC}">
-                <c16:uniqueId val="{00000005-059A-4F81-A82F-8CF363905414}"/>
+                <c16:uniqueId val="{00000007-A50A-4C98-B108-E5D89CF93401}"/>
               </c:ext>
             </c:extLst>
           </c:dPt>
@@ -557,33 +631,40 @@
           </c:dLbls>
           <c:cat>
             <c:strLit>
-              <c:ptCount val="3"/>
+              <c:ptCount val="4"/>
               <c:pt idx="0">
-                <c:v>core mean
-11 cases</c:v>
-              </c:pt>
-              <c:pt idx="1">
                 <c:v>engineering
 prior</c:v>
               </c:pt>
+              <c:pt idx="1">
+                <c:v>fitted
+core mean</c:v>
+              </c:pt>
               <c:pt idx="2">
-                <c:v>F11 model gap
-negative control</c:v>
+                <c:v>gap detection
+floor</c:v>
+              </c:pt>
+              <c:pt idx="3">
+                <c:v>F11 model
+gap</c:v>
               </c:pt>
             </c:strLit>
           </c:cat>
           <c:val>
             <c:numLit>
               <c:formatCode>0.000</c:formatCode>
-              <c:ptCount val="3"/>
+              <c:ptCount val="4"/>
               <c:pt idx="0">
-                <c:v>0.14291188739999999</c:v>
+                <c:v>7.1850140684763479</c:v>
               </c:pt>
               <c:pt idx="1">
-                <c:v>7.1850140685000001</c:v>
+                <c:v>0.14291188741464964</c:v>
               </c:pt>
               <c:pt idx="2">
-                <c:v>9.8234057479000008</c:v>
+                <c:v>0.5</c:v>
+              </c:pt>
+              <c:pt idx="3">
+                <c:v>9.8234057479115275</c:v>
               </c:pt>
             </c:numLit>
           </c:val>
@@ -598,7 +679,7 @@
               </c14:invertSolidFillFmt>
             </c:ext>
             <c:ext xmlns:c16="http://schemas.microsoft.com/office/drawing/2014/chart" uri="{C3380CC4-5D6E-409C-BE32-E72D297353CC}">
-              <c16:uniqueId val="{00000006-059A-4F81-A82F-8CF363905414}"/>
+              <c16:uniqueId val="{00000008-A50A-4C98-B108-E5D89CF93401}"/>
             </c:ext>
           </c:extLst>
         </c:ser>
@@ -611,7 +692,7 @@
           <c:showPercent val="0"/>
           <c:showBubbleSize val="0"/>
         </c:dLbls>
-        <c:gapWidth val="58"/>
+        <c:gapWidth val="52"/>
         <c:axId val="48650112"/>
         <c:axId val="48672768"/>
       </c:barChart>
@@ -999,7 +1080,7 @@
           <c:smooth val="0"/>
           <c:extLst>
             <c:ext xmlns:c16="http://schemas.microsoft.com/office/drawing/2014/chart" uri="{C3380CC4-5D6E-409C-BE32-E72D297353CC}">
-              <c16:uniqueId val="{00000000-3452-4678-8462-DACB2C1EEBBE}"/>
+              <c16:uniqueId val="{00000000-BC57-4335-BEEF-3C1CB2099088}"/>
             </c:ext>
           </c:extLst>
         </c:ser>
@@ -1233,7 +1314,7 @@
           <c:smooth val="0"/>
           <c:extLst>
             <c:ext xmlns:c16="http://schemas.microsoft.com/office/drawing/2014/chart" uri="{C3380CC4-5D6E-409C-BE32-E72D297353CC}">
-              <c16:uniqueId val="{00000001-3452-4678-8462-DACB2C1EEBBE}"/>
+              <c16:uniqueId val="{00000001-BC57-4335-BEEF-3C1CB2099088}"/>
             </c:ext>
           </c:extLst>
         </c:ser>
@@ -1440,465 +1521,138 @@
     <c:autoTitleDeleted val="1"/>
     <c:plotArea>
       <c:layout/>
-      <c:lineChart>
-        <c:grouping val="standard"/>
+      <c:barChart>
+        <c:barDir val="col"/>
+        <c:grouping val="clustered"/>
         <c:varyColors val="0"/>
         <c:ser>
           <c:idx val="0"/>
           <c:order val="0"/>
           <c:tx>
-            <c:v>truth bias</c:v>
+            <c:v>F12 / F09</c:v>
           </c:tx>
           <c:spPr>
-            <a:ln w="28575">
+            <a:solidFill>
+              <a:srgbClr val="76BE18"/>
+            </a:solidFill>
+          </c:spPr>
+          <c:invertIfNegative val="1"/>
+          <c:dPt>
+            <c:idx val="0"/>
+            <c:invertIfNegative val="0"/>
+            <c:bubble3D val="0"/>
+            <c:extLst>
+              <c:ext xmlns:c16="http://schemas.microsoft.com/office/drawing/2014/chart" uri="{C3380CC4-5D6E-409C-BE32-E72D297353CC}">
+                <c16:uniqueId val="{00000001-4904-4105-BEEC-BA2C40AE8245}"/>
+              </c:ext>
+            </c:extLst>
+          </c:dPt>
+          <c:dPt>
+            <c:idx val="1"/>
+            <c:invertIfNegative val="0"/>
+            <c:bubble3D val="0"/>
+            <c:spPr>
               <a:solidFill>
-                <a:srgbClr val="161616"/>
+                <a:srgbClr val="D3D3D3"/>
               </a:solidFill>
-              <a:prstDash val="solid"/>
-            </a:ln>
-          </c:spPr>
-          <c:marker>
-            <c:symbol val="none"/>
-          </c:marker>
+            </c:spPr>
+            <c:extLst>
+              <c:ext xmlns:c16="http://schemas.microsoft.com/office/drawing/2014/chart" uri="{C3380CC4-5D6E-409C-BE32-E72D297353CC}">
+                <c16:uniqueId val="{00000003-4904-4105-BEEC-BA2C40AE8245}"/>
+              </c:ext>
+            </c:extLst>
+          </c:dPt>
+          <c:dLbls>
+            <c:spPr>
+              <a:noFill/>
+              <a:ln>
+                <a:noFill/>
+              </a:ln>
+              <a:effectLst/>
+            </c:spPr>
+            <c:txPr>
+              <a:bodyPr anchorCtr="1"/>
+              <a:lstStyle/>
+              <a:p>
+                <a:pPr>
+                  <a:defRPr sz="825" b="1">
+                    <a:solidFill>
+                      <a:srgbClr val="555555"/>
+                    </a:solidFill>
+                    <a:latin typeface="Yu Gothic"/>
+                    <a:ea typeface="Yu Gothic"/>
+                    <a:cs typeface="Yu Gothic"/>
+                  </a:defRPr>
+                </a:pPr>
+                <a:endParaRPr lang="ja-JP"/>
+              </a:p>
+            </c:txPr>
+            <c:dLblPos val="outEnd"/>
+            <c:showLegendKey val="0"/>
+            <c:showVal val="1"/>
+            <c:showCatName val="0"/>
+            <c:showSerName val="0"/>
+            <c:showPercent val="0"/>
+            <c:showBubbleSize val="0"/>
+            <c:showLeaderLines val="0"/>
+            <c:extLst>
+              <c:ext xmlns:c15="http://schemas.microsoft.com/office/drawing/2012/chart" uri="{CE6537A1-D6FC-4f65-9D91-7224C49458BB}">
+                <c15:showLeaderLines val="0"/>
+              </c:ext>
+            </c:extLst>
+          </c:dLbls>
           <c:cat>
-            <c:numLit>
-              <c:formatCode>General</c:formatCode>
-              <c:ptCount val="31"/>
+            <c:strLit>
+              <c:ptCount val="2"/>
               <c:pt idx="0">
-                <c:v>0</c:v>
+                <c:v>actual</c:v>
               </c:pt>
               <c:pt idx="1">
-                <c:v>20</c:v>
+                <c:v>acceptance
+maximum</c:v>
               </c:pt>
-              <c:pt idx="2">
-                <c:v>40</c:v>
-              </c:pt>
-              <c:pt idx="3">
-                <c:v>60</c:v>
-              </c:pt>
-              <c:pt idx="4">
-                <c:v>80</c:v>
-              </c:pt>
-              <c:pt idx="5">
-                <c:v>100</c:v>
-              </c:pt>
-              <c:pt idx="6">
-                <c:v>120</c:v>
-              </c:pt>
-              <c:pt idx="7">
-                <c:v>140</c:v>
-              </c:pt>
-              <c:pt idx="8">
-                <c:v>160</c:v>
-              </c:pt>
-              <c:pt idx="9">
-                <c:v>180</c:v>
-              </c:pt>
-              <c:pt idx="10">
-                <c:v>200</c:v>
-              </c:pt>
-              <c:pt idx="11">
-                <c:v>220</c:v>
-              </c:pt>
-              <c:pt idx="12">
-                <c:v>240</c:v>
-              </c:pt>
-              <c:pt idx="13">
-                <c:v>260</c:v>
-              </c:pt>
-              <c:pt idx="14">
-                <c:v>280</c:v>
-              </c:pt>
-              <c:pt idx="15">
-                <c:v>300</c:v>
-              </c:pt>
-              <c:pt idx="16">
-                <c:v>320</c:v>
-              </c:pt>
-              <c:pt idx="17">
-                <c:v>340</c:v>
-              </c:pt>
-              <c:pt idx="18">
-                <c:v>360</c:v>
-              </c:pt>
-              <c:pt idx="19">
-                <c:v>380</c:v>
-              </c:pt>
-              <c:pt idx="20">
-                <c:v>400</c:v>
-              </c:pt>
-              <c:pt idx="21">
-                <c:v>420</c:v>
-              </c:pt>
-              <c:pt idx="22">
-                <c:v>440</c:v>
-              </c:pt>
-              <c:pt idx="23">
-                <c:v>460</c:v>
-              </c:pt>
-              <c:pt idx="24">
-                <c:v>480</c:v>
-              </c:pt>
-              <c:pt idx="25">
-                <c:v>500</c:v>
-              </c:pt>
-              <c:pt idx="26">
-                <c:v>520</c:v>
-              </c:pt>
-              <c:pt idx="27">
-                <c:v>540</c:v>
-              </c:pt>
-              <c:pt idx="28">
-                <c:v>560</c:v>
-              </c:pt>
-              <c:pt idx="29">
-                <c:v>580</c:v>
-              </c:pt>
-              <c:pt idx="30">
-                <c:v>600</c:v>
-              </c:pt>
-            </c:numLit>
+            </c:strLit>
           </c:cat>
           <c:val>
             <c:numLit>
               <c:formatCode>0.0</c:formatCode>
-              <c:ptCount val="31"/>
+              <c:ptCount val="2"/>
               <c:pt idx="0">
-                <c:v>0</c:v>
+                <c:v>2.924315229330487</c:v>
               </c:pt>
               <c:pt idx="1">
-                <c:v>0</c:v>
-              </c:pt>
-              <c:pt idx="2">
-                <c:v>0</c:v>
-              </c:pt>
-              <c:pt idx="3">
-                <c:v>0</c:v>
-              </c:pt>
-              <c:pt idx="4">
-                <c:v>0</c:v>
-              </c:pt>
-              <c:pt idx="5">
-                <c:v>0</c:v>
-              </c:pt>
-              <c:pt idx="6">
-                <c:v>0</c:v>
-              </c:pt>
-              <c:pt idx="7">
-                <c:v>0</c:v>
-              </c:pt>
-              <c:pt idx="8">
-                <c:v>0</c:v>
-              </c:pt>
-              <c:pt idx="9">
-                <c:v>0</c:v>
-              </c:pt>
-              <c:pt idx="10">
-                <c:v>0</c:v>
-              </c:pt>
-              <c:pt idx="11">
-                <c:v>0</c:v>
-              </c:pt>
-              <c:pt idx="12">
-                <c:v>0</c:v>
-              </c:pt>
-              <c:pt idx="13">
-                <c:v>0</c:v>
-              </c:pt>
-              <c:pt idx="14">
-                <c:v>0</c:v>
-              </c:pt>
-              <c:pt idx="15">
-                <c:v>3</c:v>
-              </c:pt>
-              <c:pt idx="16">
-                <c:v>3</c:v>
-              </c:pt>
-              <c:pt idx="17">
-                <c:v>3</c:v>
-              </c:pt>
-              <c:pt idx="18">
-                <c:v>3</c:v>
-              </c:pt>
-              <c:pt idx="19">
-                <c:v>3</c:v>
-              </c:pt>
-              <c:pt idx="20">
-                <c:v>3</c:v>
-              </c:pt>
-              <c:pt idx="21">
-                <c:v>3</c:v>
-              </c:pt>
-              <c:pt idx="22">
-                <c:v>3</c:v>
-              </c:pt>
-              <c:pt idx="23">
-                <c:v>3</c:v>
-              </c:pt>
-              <c:pt idx="24">
-                <c:v>3</c:v>
-              </c:pt>
-              <c:pt idx="25">
-                <c:v>3</c:v>
-              </c:pt>
-              <c:pt idx="26">
-                <c:v>3</c:v>
-              </c:pt>
-              <c:pt idx="27">
-                <c:v>3</c:v>
-              </c:pt>
-              <c:pt idx="28">
-                <c:v>3</c:v>
-              </c:pt>
-              <c:pt idx="29">
-                <c:v>3</c:v>
-              </c:pt>
-              <c:pt idx="30">
-                <c:v>3</c:v>
+                <c:v>25</c:v>
               </c:pt>
             </c:numLit>
           </c:val>
-          <c:smooth val="0"/>
           <c:extLst>
+            <c:ext xmlns:c14="http://schemas.microsoft.com/office/drawing/2007/8/2/chart" uri="{6F2FDCE9-48DA-4B69-8628-5D25D57E5C99}">
+              <c14:invertSolidFillFmt>
+                <c14:spPr xmlns:c14="http://schemas.microsoft.com/office/drawing/2007/8/2/chart">
+                  <a:solidFill>
+                    <a:srgbClr val="FFFFFF"/>
+                  </a:solidFill>
+                </c14:spPr>
+              </c14:invertSolidFillFmt>
+            </c:ext>
             <c:ext xmlns:c16="http://schemas.microsoft.com/office/drawing/2014/chart" uri="{C3380CC4-5D6E-409C-BE32-E72D297353CC}">
-              <c16:uniqueId val="{00000000-27E9-48A4-B211-F0E07487BD87}"/>
-            </c:ext>
-          </c:extLst>
-        </c:ser>
-        <c:ser>
-          <c:idx val="1"/>
-          <c:order val="1"/>
-          <c:tx>
-            <c:v>estimated bias</c:v>
-          </c:tx>
-          <c:spPr>
-            <a:ln w="28575">
-              <a:solidFill>
-                <a:srgbClr val="7B2DAF"/>
-              </a:solidFill>
-              <a:prstDash val="solid"/>
-            </a:ln>
-          </c:spPr>
-          <c:marker>
-            <c:symbol val="none"/>
-          </c:marker>
-          <c:cat>
-            <c:numLit>
-              <c:formatCode>General</c:formatCode>
-              <c:ptCount val="31"/>
-              <c:pt idx="0">
-                <c:v>0</c:v>
-              </c:pt>
-              <c:pt idx="1">
-                <c:v>20</c:v>
-              </c:pt>
-              <c:pt idx="2">
-                <c:v>40</c:v>
-              </c:pt>
-              <c:pt idx="3">
-                <c:v>60</c:v>
-              </c:pt>
-              <c:pt idx="4">
-                <c:v>80</c:v>
-              </c:pt>
-              <c:pt idx="5">
-                <c:v>100</c:v>
-              </c:pt>
-              <c:pt idx="6">
-                <c:v>120</c:v>
-              </c:pt>
-              <c:pt idx="7">
-                <c:v>140</c:v>
-              </c:pt>
-              <c:pt idx="8">
-                <c:v>160</c:v>
-              </c:pt>
-              <c:pt idx="9">
-                <c:v>180</c:v>
-              </c:pt>
-              <c:pt idx="10">
-                <c:v>200</c:v>
-              </c:pt>
-              <c:pt idx="11">
-                <c:v>220</c:v>
-              </c:pt>
-              <c:pt idx="12">
-                <c:v>240</c:v>
-              </c:pt>
-              <c:pt idx="13">
-                <c:v>260</c:v>
-              </c:pt>
-              <c:pt idx="14">
-                <c:v>280</c:v>
-              </c:pt>
-              <c:pt idx="15">
-                <c:v>300</c:v>
-              </c:pt>
-              <c:pt idx="16">
-                <c:v>320</c:v>
-              </c:pt>
-              <c:pt idx="17">
-                <c:v>340</c:v>
-              </c:pt>
-              <c:pt idx="18">
-                <c:v>360</c:v>
-              </c:pt>
-              <c:pt idx="19">
-                <c:v>380</c:v>
-              </c:pt>
-              <c:pt idx="20">
-                <c:v>400</c:v>
-              </c:pt>
-              <c:pt idx="21">
-                <c:v>420</c:v>
-              </c:pt>
-              <c:pt idx="22">
-                <c:v>440</c:v>
-              </c:pt>
-              <c:pt idx="23">
-                <c:v>460</c:v>
-              </c:pt>
-              <c:pt idx="24">
-                <c:v>480</c:v>
-              </c:pt>
-              <c:pt idx="25">
-                <c:v>500</c:v>
-              </c:pt>
-              <c:pt idx="26">
-                <c:v>520</c:v>
-              </c:pt>
-              <c:pt idx="27">
-                <c:v>540</c:v>
-              </c:pt>
-              <c:pt idx="28">
-                <c:v>560</c:v>
-              </c:pt>
-              <c:pt idx="29">
-                <c:v>580</c:v>
-              </c:pt>
-              <c:pt idx="30">
-                <c:v>600</c:v>
-              </c:pt>
-            </c:numLit>
-          </c:cat>
-          <c:val>
-            <c:numLit>
-              <c:formatCode>0.0</c:formatCode>
-              <c:ptCount val="31"/>
-              <c:pt idx="0">
-                <c:v>3.6483158777367106E-10</c:v>
-              </c:pt>
-              <c:pt idx="1">
-                <c:v>-3.5995325262426145E-2</c:v>
-              </c:pt>
-              <c:pt idx="2">
-                <c:v>-4.1134557032185756E-2</c:v>
-              </c:pt>
-              <c:pt idx="3">
-                <c:v>-1.6305761748382514E-2</c:v>
-              </c:pt>
-              <c:pt idx="4">
-                <c:v>-3.0393401485985145E-2</c:v>
-              </c:pt>
-              <c:pt idx="5">
-                <c:v>-1.4587392803566652E-2</c:v>
-              </c:pt>
-              <c:pt idx="6">
-                <c:v>-2.0111781893785333E-2</c:v>
-              </c:pt>
-              <c:pt idx="7">
-                <c:v>-4.0923132944896148E-2</c:v>
-              </c:pt>
-              <c:pt idx="8">
-                <c:v>-3.5595231122348754E-2</c:v>
-              </c:pt>
-              <c:pt idx="9">
-                <c:v>-2.6865820815962067E-2</c:v>
-              </c:pt>
-              <c:pt idx="10">
-                <c:v>-4.0842658369288964E-2</c:v>
-              </c:pt>
-              <c:pt idx="11">
-                <c:v>-6.0944584825476905E-2</c:v>
-              </c:pt>
-              <c:pt idx="12">
-                <c:v>-8.3868867102192147E-3</c:v>
-              </c:pt>
-              <c:pt idx="13">
-                <c:v>-3.1355948046273736E-2</c:v>
-              </c:pt>
-              <c:pt idx="14">
-                <c:v>-2.8832358865428669E-2</c:v>
-              </c:pt>
-              <c:pt idx="15">
-                <c:v>-2.4019084737479945E-2</c:v>
-              </c:pt>
-              <c:pt idx="16">
-                <c:v>6.4535326036400761E-2</c:v>
-              </c:pt>
-              <c:pt idx="17">
-                <c:v>0.20349682716731979</c:v>
-              </c:pt>
-              <c:pt idx="18">
-                <c:v>0.37653593295012533</c:v>
-              </c:pt>
-              <c:pt idx="19">
-                <c:v>0.59200156127345815</c:v>
-              </c:pt>
-              <c:pt idx="20">
-                <c:v>0.86725629483498023</c:v>
-              </c:pt>
-              <c:pt idx="21">
-                <c:v>1.2153799841027542</c:v>
-              </c:pt>
-              <c:pt idx="22">
-                <c:v>1.5925286294685734</c:v>
-              </c:pt>
-              <c:pt idx="23">
-                <c:v>2.0515807868734433</c:v>
-              </c:pt>
-              <c:pt idx="24">
-                <c:v>2.3622136047101456</c:v>
-              </c:pt>
-              <c:pt idx="25">
-                <c:v>2.5602252944079424</c:v>
-              </c:pt>
-              <c:pt idx="26">
-                <c:v>2.6818340264776448</c:v>
-              </c:pt>
-              <c:pt idx="27">
-                <c:v>2.7759459656094321</c:v>
-              </c:pt>
-              <c:pt idx="28">
-                <c:v>2.8881396505577102</c:v>
-              </c:pt>
-              <c:pt idx="29">
-                <c:v>2.9208971440204783</c:v>
-              </c:pt>
-              <c:pt idx="30">
-                <c:v>2.8888068634314448</c:v>
-              </c:pt>
-            </c:numLit>
-          </c:val>
-          <c:smooth val="0"/>
-          <c:extLst>
-            <c:ext xmlns:c16="http://schemas.microsoft.com/office/drawing/2014/chart" uri="{C3380CC4-5D6E-409C-BE32-E72D297353CC}">
-              <c16:uniqueId val="{00000001-27E9-48A4-B211-F0E07487BD87}"/>
+              <c16:uniqueId val="{00000004-4904-4105-BEEC-BA2C40AE8245}"/>
             </c:ext>
           </c:extLst>
         </c:ser>
         <c:dLbls>
+          <c:dLblPos val="outEnd"/>
           <c:showLegendKey val="0"/>
-          <c:showVal val="0"/>
+          <c:showVal val="1"/>
           <c:showCatName val="0"/>
           <c:showSerName val="0"/>
           <c:showPercent val="0"/>
           <c:showBubbleSize val="0"/>
         </c:dLbls>
-        <c:smooth val="0"/>
+        <c:gapWidth val="58"/>
         <c:axId val="48650112"/>
         <c:axId val="48672768"/>
-      </c:lineChart>
+      </c:barChart>
       <c:catAx>
         <c:axId val="48650112"/>
         <c:scaling>
@@ -1906,25 +1660,6 @@
         </c:scaling>
         <c:delete val="0"/>
         <c:axPos val="b"/>
-        <c:title>
-          <c:tx>
-            <c:rich>
-              <a:bodyPr/>
-              <a:lstStyle/>
-              <a:p>
-                <a:r>
-                  <a:rPr>
-                    <a:latin typeface="Yu Gothic"/>
-                    <a:ea typeface="Yu Gothic"/>
-                    <a:cs typeface="Yu Gothic"/>
-                  </a:rPr>
-                  <a:t>time [s]</a:t>
-                </a:r>
-              </a:p>
-            </c:rich>
-          </c:tx>
-          <c:overlay val="0"/>
-        </c:title>
         <c:numFmt formatCode="General" sourceLinked="1"/>
         <c:majorTickMark val="none"/>
         <c:minorTickMark val="none"/>
@@ -1942,9 +1677,9 @@
           <a:lstStyle/>
           <a:p>
             <a:pPr>
-              <a:defRPr sz="638">
-                <a:solidFill>
-                  <a:srgbClr val="777777"/>
+              <a:defRPr sz="750">
+                <a:solidFill>
+                  <a:srgbClr val="555555"/>
                 </a:solidFill>
                 <a:latin typeface="Yu Gothic"/>
                 <a:ea typeface="Yu Gothic"/>
@@ -1965,8 +1700,8 @@
         <c:axId val="48672768"/>
         <c:scaling>
           <c:orientation val="minMax"/>
-          <c:max val="3.5"/>
-          <c:min val="-0.5"/>
+          <c:max val="30"/>
+          <c:min val="0"/>
         </c:scaling>
         <c:delete val="0"/>
         <c:axPos val="l"/>
@@ -1992,7 +1727,7 @@
                     <a:ea typeface="Yu Gothic"/>
                     <a:cs typeface="Yu Gothic"/>
                   </a:rPr>
-                  <a:t>chip sensor bias [K]</a:t>
+                  <a:t>ratio [%]</a:t>
                 </a:r>
               </a:p>
             </c:rich>
@@ -2031,7 +1766,7 @@
         <c:crossAx val="48650112"/>
         <c:crosses val="autoZero"/>
         <c:crossBetween val="between"/>
-        <c:majorUnit val="0.5"/>
+        <c:majorUnit val="5"/>
       </c:valAx>
       <c:spPr>
         <a:solidFill>
@@ -2043,27 +1778,6 @@
         </a:ln>
       </c:spPr>
     </c:plotArea>
-    <c:legend>
-      <c:legendPos val="b"/>
-      <c:overlay val="0"/>
-      <c:txPr>
-        <a:bodyPr anchorCtr="1"/>
-        <a:lstStyle/>
-        <a:p>
-          <a:pPr>
-            <a:defRPr sz="750">
-              <a:solidFill>
-                <a:srgbClr val="555555"/>
-              </a:solidFill>
-              <a:latin typeface="Yu Gothic"/>
-              <a:ea typeface="Yu Gothic"/>
-              <a:cs typeface="Yu Gothic"/>
-            </a:defRPr>
-          </a:pPr>
-          <a:endParaRPr lang="ja-JP"/>
-        </a:p>
-      </c:txPr>
-    </c:legend>
     <c:plotVisOnly val="1"/>
     <c:dispBlanksAs val="zero"/>
     <c:showDLblsOverMax val="1"/>
@@ -2090,240 +1804,196 @@
     <c:autoTitleDeleted val="1"/>
     <c:plotArea>
       <c:layout/>
-      <c:lineChart>
-        <c:grouping val="standard"/>
+      <c:barChart>
+        <c:barDir val="bar"/>
+        <c:grouping val="clustered"/>
         <c:varyColors val="0"/>
         <c:ser>
           <c:idx val="0"/>
           <c:order val="0"/>
           <c:tx>
-            <c:v>truth hidden heat</c:v>
+            <c:v>actual / limit</c:v>
           </c:tx>
           <c:spPr>
-            <a:ln w="28575">
+            <a:solidFill>
+              <a:srgbClr val="00A5D8"/>
+            </a:solidFill>
+          </c:spPr>
+          <c:invertIfNegative val="1"/>
+          <c:dPt>
+            <c:idx val="0"/>
+            <c:invertIfNegative val="0"/>
+            <c:bubble3D val="0"/>
+            <c:extLst>
+              <c:ext xmlns:c16="http://schemas.microsoft.com/office/drawing/2014/chart" uri="{C3380CC4-5D6E-409C-BE32-E72D297353CC}">
+                <c16:uniqueId val="{00000001-0284-4C0A-8A5C-7721E2F0ECA3}"/>
+              </c:ext>
+            </c:extLst>
+          </c:dPt>
+          <c:dPt>
+            <c:idx val="1"/>
+            <c:invertIfNegative val="0"/>
+            <c:bubble3D val="0"/>
+            <c:extLst>
+              <c:ext xmlns:c16="http://schemas.microsoft.com/office/drawing/2014/chart" uri="{C3380CC4-5D6E-409C-BE32-E72D297353CC}">
+                <c16:uniqueId val="{00000003-0284-4C0A-8A5C-7721E2F0ECA3}"/>
+              </c:ext>
+            </c:extLst>
+          </c:dPt>
+          <c:dPt>
+            <c:idx val="2"/>
+            <c:invertIfNegative val="0"/>
+            <c:bubble3D val="0"/>
+            <c:spPr>
               <a:solidFill>
-                <a:srgbClr val="161616"/>
+                <a:srgbClr val="76BE18"/>
               </a:solidFill>
-              <a:prstDash val="solid"/>
-            </a:ln>
-          </c:spPr>
-          <c:marker>
-            <c:symbol val="none"/>
-          </c:marker>
+            </c:spPr>
+            <c:extLst>
+              <c:ext xmlns:c16="http://schemas.microsoft.com/office/drawing/2014/chart" uri="{C3380CC4-5D6E-409C-BE32-E72D297353CC}">
+                <c16:uniqueId val="{00000005-0284-4C0A-8A5C-7721E2F0ECA3}"/>
+              </c:ext>
+            </c:extLst>
+          </c:dPt>
+          <c:dPt>
+            <c:idx val="3"/>
+            <c:invertIfNegative val="0"/>
+            <c:bubble3D val="0"/>
+            <c:extLst>
+              <c:ext xmlns:c16="http://schemas.microsoft.com/office/drawing/2014/chart" uri="{C3380CC4-5D6E-409C-BE32-E72D297353CC}">
+                <c16:uniqueId val="{00000007-0284-4C0A-8A5C-7721E2F0ECA3}"/>
+              </c:ext>
+            </c:extLst>
+          </c:dPt>
+          <c:dPt>
+            <c:idx val="4"/>
+            <c:invertIfNegative val="0"/>
+            <c:bubble3D val="0"/>
+            <c:spPr>
+              <a:solidFill>
+                <a:srgbClr val="76BE18"/>
+              </a:solidFill>
+            </c:spPr>
+            <c:extLst>
+              <c:ext xmlns:c16="http://schemas.microsoft.com/office/drawing/2014/chart" uri="{C3380CC4-5D6E-409C-BE32-E72D297353CC}">
+                <c16:uniqueId val="{00000009-0284-4C0A-8A5C-7721E2F0ECA3}"/>
+              </c:ext>
+            </c:extLst>
+          </c:dPt>
+          <c:dPt>
+            <c:idx val="5"/>
+            <c:invertIfNegative val="0"/>
+            <c:bubble3D val="0"/>
+            <c:extLst>
+              <c:ext xmlns:c16="http://schemas.microsoft.com/office/drawing/2014/chart" uri="{C3380CC4-5D6E-409C-BE32-E72D297353CC}">
+                <c16:uniqueId val="{0000000B-0284-4C0A-8A5C-7721E2F0ECA3}"/>
+              </c:ext>
+            </c:extLst>
+          </c:dPt>
+          <c:dLbls>
+            <c:spPr>
+              <a:noFill/>
+              <a:ln>
+                <a:noFill/>
+              </a:ln>
+              <a:effectLst/>
+            </c:spPr>
+            <c:txPr>
+              <a:bodyPr anchorCtr="1"/>
+              <a:lstStyle/>
+              <a:p>
+                <a:pPr>
+                  <a:defRPr sz="713" b="1">
+                    <a:solidFill>
+                      <a:srgbClr val="555555"/>
+                    </a:solidFill>
+                    <a:latin typeface="Yu Gothic"/>
+                    <a:ea typeface="Yu Gothic"/>
+                    <a:cs typeface="Yu Gothic"/>
+                  </a:defRPr>
+                </a:pPr>
+                <a:endParaRPr lang="ja-JP"/>
+              </a:p>
+            </c:txPr>
+            <c:dLblPos val="outEnd"/>
+            <c:showLegendKey val="0"/>
+            <c:showVal val="1"/>
+            <c:showCatName val="0"/>
+            <c:showSerName val="0"/>
+            <c:showPercent val="0"/>
+            <c:showBubbleSize val="0"/>
+            <c:showLeaderLines val="0"/>
+            <c:extLst>
+              <c:ext xmlns:c15="http://schemas.microsoft.com/office/drawing/2012/chart" uri="{CE6537A1-D6FC-4f65-9D91-7224C49458BB}">
+                <c15:showLeaderLines val="0"/>
+              </c:ext>
+            </c:extLst>
+          </c:dLbls>
           <c:cat>
-            <c:numLit>
-              <c:formatCode>General</c:formatCode>
-              <c:ptCount val="33"/>
+            <c:strLit>
+              <c:ptCount val="6"/>
               <c:pt idx="0">
-                <c:v>0</c:v>
+                <c:v>M01 innovation
+0.168 / 0.350 K</c:v>
               </c:pt>
               <c:pt idx="1">
-                <c:v>20</c:v>
+                <c:v>M02 bias RMSE
+0.104 / 0.150 K</c:v>
               </c:pt>
               <c:pt idx="2">
-                <c:v>40</c:v>
+                <c:v>M03 detection
+0.0 / 2.0 s</c:v>
               </c:pt>
               <c:pt idx="3">
-                <c:v>60</c:v>
+                <c:v>M04 missing RMSE
+0.084 / 0.250 K</c:v>
               </c:pt>
               <c:pt idx="4">
-                <c:v>80</c:v>
+                <c:v>M05 detection
+1.0 / 5.0 s</c:v>
               </c:pt>
               <c:pt idx="5">
-                <c:v>100</c:v>
+                <c:v>M05 heat RMSE
+0.135 / 0.250 W</c:v>
               </c:pt>
-              <c:pt idx="6">
-                <c:v>120</c:v>
-              </c:pt>
-              <c:pt idx="7">
-                <c:v>140</c:v>
-              </c:pt>
-              <c:pt idx="8">
-                <c:v>160</c:v>
-              </c:pt>
-              <c:pt idx="9">
-                <c:v>180</c:v>
-              </c:pt>
-              <c:pt idx="10">
-                <c:v>200</c:v>
-              </c:pt>
-              <c:pt idx="11">
-                <c:v>220</c:v>
-              </c:pt>
-              <c:pt idx="12">
-                <c:v>240</c:v>
-              </c:pt>
-              <c:pt idx="13">
-                <c:v>260</c:v>
-              </c:pt>
-              <c:pt idx="14">
-                <c:v>280</c:v>
-              </c:pt>
-              <c:pt idx="15">
-                <c:v>282</c:v>
-              </c:pt>
-              <c:pt idx="16">
-                <c:v>292</c:v>
-              </c:pt>
-              <c:pt idx="17">
-                <c:v>300</c:v>
-              </c:pt>
-              <c:pt idx="18">
-                <c:v>320</c:v>
-              </c:pt>
-              <c:pt idx="19">
-                <c:v>340</c:v>
-              </c:pt>
-              <c:pt idx="20">
-                <c:v>360</c:v>
-              </c:pt>
-              <c:pt idx="21">
-                <c:v>380</c:v>
-              </c:pt>
-              <c:pt idx="22">
-                <c:v>400</c:v>
-              </c:pt>
-              <c:pt idx="23">
-                <c:v>420</c:v>
-              </c:pt>
-              <c:pt idx="24">
-                <c:v>440</c:v>
-              </c:pt>
-              <c:pt idx="25">
-                <c:v>460</c:v>
-              </c:pt>
-              <c:pt idx="26">
-                <c:v>480</c:v>
-              </c:pt>
-              <c:pt idx="27">
-                <c:v>500</c:v>
-              </c:pt>
-              <c:pt idx="28">
-                <c:v>520</c:v>
-              </c:pt>
-              <c:pt idx="29">
-                <c:v>540</c:v>
-              </c:pt>
-              <c:pt idx="30">
-                <c:v>560</c:v>
-              </c:pt>
-              <c:pt idx="31">
-                <c:v>580</c:v>
-              </c:pt>
-              <c:pt idx="32">
-                <c:v>600</c:v>
-              </c:pt>
-            </c:numLit>
+            </c:strLit>
           </c:cat>
           <c:val>
             <c:numLit>
-              <c:formatCode>0.0</c:formatCode>
-              <c:ptCount val="33"/>
+              <c:formatCode>0</c:formatCode>
+              <c:ptCount val="6"/>
               <c:pt idx="0">
-                <c:v>0</c:v>
+                <c:v>47.863982371725555</c:v>
               </c:pt>
               <c:pt idx="1">
-                <c:v>0</c:v>
+                <c:v>69.202564166836808</c:v>
               </c:pt>
               <c:pt idx="2">
                 <c:v>0</c:v>
               </c:pt>
               <c:pt idx="3">
-                <c:v>0</c:v>
+                <c:v>33.685508219760635</c:v>
               </c:pt>
               <c:pt idx="4">
-                <c:v>0</c:v>
+                <c:v>20</c:v>
               </c:pt>
               <c:pt idx="5">
-                <c:v>0</c:v>
-              </c:pt>
-              <c:pt idx="6">
-                <c:v>0</c:v>
-              </c:pt>
-              <c:pt idx="7">
-                <c:v>0</c:v>
-              </c:pt>
-              <c:pt idx="8">
-                <c:v>0</c:v>
-              </c:pt>
-              <c:pt idx="9">
-                <c:v>0</c:v>
-              </c:pt>
-              <c:pt idx="10">
-                <c:v>0</c:v>
-              </c:pt>
-              <c:pt idx="11">
-                <c:v>0</c:v>
-              </c:pt>
-              <c:pt idx="12">
-                <c:v>0</c:v>
-              </c:pt>
-              <c:pt idx="13">
-                <c:v>0</c:v>
-              </c:pt>
-              <c:pt idx="14">
-                <c:v>0</c:v>
-              </c:pt>
-              <c:pt idx="15">
-                <c:v>3</c:v>
-              </c:pt>
-              <c:pt idx="16">
-                <c:v>3</c:v>
-              </c:pt>
-              <c:pt idx="17">
-                <c:v>3</c:v>
-              </c:pt>
-              <c:pt idx="18">
-                <c:v>3</c:v>
-              </c:pt>
-              <c:pt idx="19">
-                <c:v>3</c:v>
-              </c:pt>
-              <c:pt idx="20">
-                <c:v>3</c:v>
-              </c:pt>
-              <c:pt idx="21">
-                <c:v>3</c:v>
-              </c:pt>
-              <c:pt idx="22">
-                <c:v>0</c:v>
-              </c:pt>
-              <c:pt idx="23">
-                <c:v>0</c:v>
-              </c:pt>
-              <c:pt idx="24">
-                <c:v>0</c:v>
-              </c:pt>
-              <c:pt idx="25">
-                <c:v>0</c:v>
-              </c:pt>
-              <c:pt idx="26">
-                <c:v>0</c:v>
-              </c:pt>
-              <c:pt idx="27">
-                <c:v>0</c:v>
-              </c:pt>
-              <c:pt idx="28">
-                <c:v>0</c:v>
-              </c:pt>
-              <c:pt idx="29">
-                <c:v>0</c:v>
-              </c:pt>
-              <c:pt idx="30">
-                <c:v>0</c:v>
-              </c:pt>
-              <c:pt idx="31">
-                <c:v>0</c:v>
-              </c:pt>
-              <c:pt idx="32">
-                <c:v>0</c:v>
+                <c:v>54.099680520756756</c:v>
               </c:pt>
             </c:numLit>
           </c:val>
-          <c:smooth val="0"/>
           <c:extLst>
+            <c:ext xmlns:c14="http://schemas.microsoft.com/office/drawing/2007/8/2/chart" uri="{6F2FDCE9-48DA-4B69-8628-5D25D57E5C99}">
+              <c14:invertSolidFillFmt>
+                <c14:spPr xmlns:c14="http://schemas.microsoft.com/office/drawing/2007/8/2/chart">
+                  <a:solidFill>
+                    <a:srgbClr val="FFFFFF"/>
+                  </a:solidFill>
+                </c14:spPr>
+              </c14:invertSolidFillFmt>
+            </c:ext>
             <c:ext xmlns:c16="http://schemas.microsoft.com/office/drawing/2014/chart" uri="{C3380CC4-5D6E-409C-BE32-E72D297353CC}">
-              <c16:uniqueId val="{00000000-D96A-4A6E-8BB9-BF4377E15536}"/>
+              <c16:uniqueId val="{0000000C-0284-4C0A-8A5C-7721E2F0ECA3}"/>
             </c:ext>
           </c:extLst>
         </c:ser>
@@ -2331,316 +2001,138 @@
           <c:idx val="1"/>
           <c:order val="1"/>
           <c:tx>
-            <c:v>estimated disturbance</c:v>
+            <c:v>acceptance boundary</c:v>
           </c:tx>
           <c:spPr>
-            <a:ln w="28575">
-              <a:solidFill>
-                <a:srgbClr val="00A5D8"/>
-              </a:solidFill>
-              <a:prstDash val="solid"/>
-            </a:ln>
+            <a:solidFill>
+              <a:srgbClr val="D3D3D3"/>
+            </a:solidFill>
           </c:spPr>
-          <c:marker>
-            <c:symbol val="none"/>
-          </c:marker>
+          <c:invertIfNegative val="1"/>
+          <c:dLbls>
+            <c:spPr>
+              <a:noFill/>
+              <a:ln>
+                <a:noFill/>
+              </a:ln>
+              <a:effectLst/>
+            </c:spPr>
+            <c:txPr>
+              <a:bodyPr anchorCtr="1"/>
+              <a:lstStyle/>
+              <a:p>
+                <a:pPr>
+                  <a:defRPr sz="713" b="1">
+                    <a:solidFill>
+                      <a:srgbClr val="555555"/>
+                    </a:solidFill>
+                    <a:latin typeface="Yu Gothic"/>
+                    <a:ea typeface="Yu Gothic"/>
+                    <a:cs typeface="Yu Gothic"/>
+                  </a:defRPr>
+                </a:pPr>
+                <a:endParaRPr lang="ja-JP"/>
+              </a:p>
+            </c:txPr>
+            <c:dLblPos val="outEnd"/>
+            <c:showLegendKey val="0"/>
+            <c:showVal val="1"/>
+            <c:showCatName val="0"/>
+            <c:showSerName val="0"/>
+            <c:showPercent val="0"/>
+            <c:showBubbleSize val="0"/>
+            <c:showLeaderLines val="0"/>
+            <c:extLst>
+              <c:ext xmlns:c15="http://schemas.microsoft.com/office/drawing/2012/chart" uri="{CE6537A1-D6FC-4f65-9D91-7224C49458BB}">
+                <c15:showLeaderLines val="0"/>
+              </c:ext>
+            </c:extLst>
+          </c:dLbls>
           <c:cat>
-            <c:numLit>
-              <c:formatCode>General</c:formatCode>
-              <c:ptCount val="33"/>
+            <c:strLit>
+              <c:ptCount val="6"/>
               <c:pt idx="0">
-                <c:v>0</c:v>
+                <c:v>M01 innovation
+0.168 / 0.350 K</c:v>
               </c:pt>
               <c:pt idx="1">
-                <c:v>20</c:v>
+                <c:v>M02 bias RMSE
+0.104 / 0.150 K</c:v>
               </c:pt>
               <c:pt idx="2">
-                <c:v>40</c:v>
+                <c:v>M03 detection
+0.0 / 2.0 s</c:v>
               </c:pt>
               <c:pt idx="3">
-                <c:v>60</c:v>
+                <c:v>M04 missing RMSE
+0.084 / 0.250 K</c:v>
               </c:pt>
               <c:pt idx="4">
-                <c:v>80</c:v>
+                <c:v>M05 detection
+1.0 / 5.0 s</c:v>
+              </c:pt>
+              <c:pt idx="5">
+                <c:v>M05 heat RMSE
+0.135 / 0.250 W</c:v>
+              </c:pt>
+            </c:strLit>
+          </c:cat>
+          <c:val>
+            <c:numLit>
+              <c:formatCode>0</c:formatCode>
+              <c:ptCount val="6"/>
+              <c:pt idx="0">
+                <c:v>100</c:v>
+              </c:pt>
+              <c:pt idx="1">
+                <c:v>100</c:v>
+              </c:pt>
+              <c:pt idx="2">
+                <c:v>100</c:v>
+              </c:pt>
+              <c:pt idx="3">
+                <c:v>100</c:v>
+              </c:pt>
+              <c:pt idx="4">
+                <c:v>100</c:v>
               </c:pt>
               <c:pt idx="5">
                 <c:v>100</c:v>
               </c:pt>
-              <c:pt idx="6">
-                <c:v>120</c:v>
-              </c:pt>
-              <c:pt idx="7">
-                <c:v>140</c:v>
-              </c:pt>
-              <c:pt idx="8">
-                <c:v>160</c:v>
-              </c:pt>
-              <c:pt idx="9">
-                <c:v>180</c:v>
-              </c:pt>
-              <c:pt idx="10">
-                <c:v>200</c:v>
-              </c:pt>
-              <c:pt idx="11">
-                <c:v>220</c:v>
-              </c:pt>
-              <c:pt idx="12">
-                <c:v>240</c:v>
-              </c:pt>
-              <c:pt idx="13">
-                <c:v>260</c:v>
-              </c:pt>
-              <c:pt idx="14">
-                <c:v>280</c:v>
-              </c:pt>
-              <c:pt idx="15">
-                <c:v>282</c:v>
-              </c:pt>
-              <c:pt idx="16">
-                <c:v>292</c:v>
-              </c:pt>
-              <c:pt idx="17">
-                <c:v>300</c:v>
-              </c:pt>
-              <c:pt idx="18">
-                <c:v>320</c:v>
-              </c:pt>
-              <c:pt idx="19">
-                <c:v>340</c:v>
-              </c:pt>
-              <c:pt idx="20">
-                <c:v>360</c:v>
-              </c:pt>
-              <c:pt idx="21">
-                <c:v>380</c:v>
-              </c:pt>
-              <c:pt idx="22">
-                <c:v>400</c:v>
-              </c:pt>
-              <c:pt idx="23">
-                <c:v>420</c:v>
-              </c:pt>
-              <c:pt idx="24">
-                <c:v>440</c:v>
-              </c:pt>
-              <c:pt idx="25">
-                <c:v>460</c:v>
-              </c:pt>
-              <c:pt idx="26">
-                <c:v>480</c:v>
-              </c:pt>
-              <c:pt idx="27">
-                <c:v>500</c:v>
-              </c:pt>
-              <c:pt idx="28">
-                <c:v>520</c:v>
-              </c:pt>
-              <c:pt idx="29">
-                <c:v>540</c:v>
-              </c:pt>
-              <c:pt idx="30">
-                <c:v>560</c:v>
-              </c:pt>
-              <c:pt idx="31">
-                <c:v>580</c:v>
-              </c:pt>
-              <c:pt idx="32">
-                <c:v>600</c:v>
-              </c:pt>
-            </c:numLit>
-          </c:cat>
-          <c:val>
-            <c:numLit>
-              <c:formatCode>0.0</c:formatCode>
-              <c:ptCount val="33"/>
-              <c:pt idx="0">
-                <c:v>0</c:v>
-              </c:pt>
-              <c:pt idx="1">
-                <c:v>0.11405454155908504</c:v>
-              </c:pt>
-              <c:pt idx="2">
-                <c:v>-0.3237511316769392</c:v>
-              </c:pt>
-              <c:pt idx="3">
-                <c:v>-0.13436329701591565</c:v>
-              </c:pt>
-              <c:pt idx="4">
-                <c:v>4.2929790326587794E-2</c:v>
-              </c:pt>
-              <c:pt idx="5">
-                <c:v>3.7636851927696946E-2</c:v>
-              </c:pt>
-              <c:pt idx="6">
-                <c:v>-4.8703330931933034E-2</c:v>
-              </c:pt>
-              <c:pt idx="7">
-                <c:v>2.3309510196777884E-3</c:v>
-              </c:pt>
-              <c:pt idx="8">
-                <c:v>5.487416485256056E-2</c:v>
-              </c:pt>
-              <c:pt idx="9">
-                <c:v>-5.153298951683196E-2</c:v>
-              </c:pt>
-              <c:pt idx="10">
-                <c:v>-3.0860559850656801E-2</c:v>
-              </c:pt>
-              <c:pt idx="11">
-                <c:v>-1.8639531503134847E-2</c:v>
-              </c:pt>
-              <c:pt idx="12">
-                <c:v>-3.4339136861510307E-2</c:v>
-              </c:pt>
-              <c:pt idx="13">
-                <c:v>-3.5886283053816324E-2</c:v>
-              </c:pt>
-              <c:pt idx="14">
-                <c:v>-6.1647723741180147E-2</c:v>
-              </c:pt>
-              <c:pt idx="15">
-                <c:v>-7.1469554557021545E-2</c:v>
-              </c:pt>
-              <c:pt idx="16">
-                <c:v>0.24686282424242165</c:v>
-              </c:pt>
-              <c:pt idx="17">
-                <c:v>0.63656371175540905</c:v>
-              </c:pt>
-              <c:pt idx="18">
-                <c:v>1.8948691173207985</c:v>
-              </c:pt>
-              <c:pt idx="19">
-                <c:v>2.5700216887680107</c:v>
-              </c:pt>
-              <c:pt idx="20">
-                <c:v>3.0754272736641157</c:v>
-              </c:pt>
-              <c:pt idx="21">
-                <c:v>3.1324595955393257</c:v>
-              </c:pt>
-              <c:pt idx="22">
-                <c:v>2.5002193451574688</c:v>
-              </c:pt>
-              <c:pt idx="23">
-                <c:v>1.2955912969540631</c:v>
-              </c:pt>
-              <c:pt idx="24">
-                <c:v>0.41039953158960191</c:v>
-              </c:pt>
-              <c:pt idx="25">
-                <c:v>9.1521992578863787E-3</c:v>
-              </c:pt>
-              <c:pt idx="26">
-                <c:v>-4.6182568808582999E-2</c:v>
-              </c:pt>
-              <c:pt idx="27">
-                <c:v>-1.098919738798531E-2</c:v>
-              </c:pt>
-              <c:pt idx="28">
-                <c:v>-0.183639930154647</c:v>
-              </c:pt>
-              <c:pt idx="29">
-                <c:v>-0.16546984052602859</c:v>
-              </c:pt>
-              <c:pt idx="30">
-                <c:v>1.6644616410510533E-2</c:v>
-              </c:pt>
-              <c:pt idx="31">
-                <c:v>-3.4909348232923673E-2</c:v>
-              </c:pt>
-              <c:pt idx="32">
-                <c:v>-9.3837855342512114E-2</c:v>
-              </c:pt>
             </c:numLit>
           </c:val>
-          <c:smooth val="0"/>
           <c:extLst>
+            <c:ext xmlns:c14="http://schemas.microsoft.com/office/drawing/2007/8/2/chart" uri="{6F2FDCE9-48DA-4B69-8628-5D25D57E5C99}">
+              <c14:invertSolidFillFmt>
+                <c14:spPr xmlns:c14="http://schemas.microsoft.com/office/drawing/2007/8/2/chart">
+                  <a:solidFill>
+                    <a:srgbClr val="FFFFFF"/>
+                  </a:solidFill>
+                </c14:spPr>
+              </c14:invertSolidFillFmt>
+            </c:ext>
             <c:ext xmlns:c16="http://schemas.microsoft.com/office/drawing/2014/chart" uri="{C3380CC4-5D6E-409C-BE32-E72D297353CC}">
-              <c16:uniqueId val="{00000001-D96A-4A6E-8BB9-BF4377E15536}"/>
+              <c16:uniqueId val="{0000000D-0284-4C0A-8A5C-7721E2F0ECA3}"/>
             </c:ext>
           </c:extLst>
         </c:ser>
         <c:dLbls>
+          <c:dLblPos val="outEnd"/>
           <c:showLegendKey val="0"/>
-          <c:showVal val="0"/>
+          <c:showVal val="1"/>
           <c:showCatName val="0"/>
           <c:showSerName val="0"/>
           <c:showPercent val="0"/>
           <c:showBubbleSize val="0"/>
         </c:dLbls>
-        <c:smooth val="0"/>
+        <c:gapWidth val="34"/>
         <c:axId val="48650112"/>
         <c:axId val="48672768"/>
-      </c:lineChart>
+      </c:barChart>
       <c:catAx>
         <c:axId val="48650112"/>
         <c:scaling>
           <c:orientation val="minMax"/>
-        </c:scaling>
-        <c:delete val="0"/>
-        <c:axPos val="b"/>
-        <c:title>
-          <c:tx>
-            <c:rich>
-              <a:bodyPr/>
-              <a:lstStyle/>
-              <a:p>
-                <a:r>
-                  <a:rPr>
-                    <a:latin typeface="Yu Gothic"/>
-                    <a:ea typeface="Yu Gothic"/>
-                    <a:cs typeface="Yu Gothic"/>
-                  </a:rPr>
-                  <a:t>time [s]</a:t>
-                </a:r>
-              </a:p>
-            </c:rich>
-          </c:tx>
-          <c:overlay val="0"/>
-        </c:title>
-        <c:numFmt formatCode="General" sourceLinked="1"/>
-        <c:majorTickMark val="none"/>
-        <c:minorTickMark val="none"/>
-        <c:tickLblPos val="nextTo"/>
-        <c:spPr>
-          <a:ln w="9525">
-            <a:solidFill>
-              <a:srgbClr val="D3D3D3"/>
-            </a:solidFill>
-            <a:prstDash val="solid"/>
-          </a:ln>
-        </c:spPr>
-        <c:txPr>
-          <a:bodyPr anchorCtr="1"/>
-          <a:lstStyle/>
-          <a:p>
-            <a:pPr>
-              <a:defRPr sz="638">
-                <a:solidFill>
-                  <a:srgbClr val="777777"/>
-                </a:solidFill>
-                <a:latin typeface="Yu Gothic"/>
-                <a:ea typeface="Yu Gothic"/>
-                <a:cs typeface="Yu Gothic"/>
-              </a:defRPr>
-            </a:pPr>
-            <a:endParaRPr lang="ja-JP"/>
-          </a:p>
-        </c:txPr>
-        <c:crossAx val="48672768"/>
-        <c:crosses val="autoZero"/>
-        <c:auto val="1"/>
-        <c:lblAlgn val="ctr"/>
-        <c:lblOffset val="100"/>
-        <c:noMultiLvlLbl val="1"/>
-      </c:catAx>
-      <c:valAx>
-        <c:axId val="48672768"/>
-        <c:scaling>
-          <c:orientation val="minMax"/>
-          <c:max val="3.8"/>
-          <c:min val="-0.5"/>
         </c:scaling>
         <c:delete val="0"/>
         <c:axPos val="l"/>
@@ -2666,14 +2158,14 @@
                     <a:ea typeface="Yu Gothic"/>
                     <a:cs typeface="Yu Gothic"/>
                   </a:rPr>
-                  <a:t>heat rate [W]</a:t>
+                  <a:t>acceptance-limit utilization [%]</a:t>
                 </a:r>
               </a:p>
             </c:rich>
           </c:tx>
           <c:overlay val="0"/>
         </c:title>
-        <c:numFmt formatCode="0.0" sourceLinked="1"/>
+        <c:numFmt formatCode="General" sourceLinked="1"/>
         <c:majorTickMark val="none"/>
         <c:minorTickMark val="none"/>
         <c:tickLblPos val="nextTo"/>
@@ -2702,10 +2194,52 @@
             <a:endParaRPr lang="ja-JP"/>
           </a:p>
         </c:txPr>
+        <c:crossAx val="48672768"/>
+        <c:crosses val="autoZero"/>
+        <c:auto val="1"/>
+        <c:lblAlgn val="ctr"/>
+        <c:lblOffset val="100"/>
+        <c:noMultiLvlLbl val="1"/>
+      </c:catAx>
+      <c:valAx>
+        <c:axId val="48672768"/>
+        <c:scaling>
+          <c:orientation val="minMax"/>
+        </c:scaling>
+        <c:delete val="0"/>
+        <c:axPos val="b"/>
+        <c:numFmt formatCode="0" sourceLinked="1"/>
+        <c:majorTickMark val="none"/>
+        <c:minorTickMark val="none"/>
+        <c:tickLblPos val="nextTo"/>
+        <c:spPr>
+          <a:ln w="9525">
+            <a:solidFill>
+              <a:srgbClr val="D3D3D3"/>
+            </a:solidFill>
+            <a:prstDash val="solid"/>
+          </a:ln>
+        </c:spPr>
+        <c:txPr>
+          <a:bodyPr anchorCtr="1"/>
+          <a:lstStyle/>
+          <a:p>
+            <a:pPr>
+              <a:defRPr sz="713">
+                <a:solidFill>
+                  <a:srgbClr val="555555"/>
+                </a:solidFill>
+                <a:latin typeface="Yu Gothic"/>
+                <a:ea typeface="Yu Gothic"/>
+                <a:cs typeface="Yu Gothic"/>
+              </a:defRPr>
+            </a:pPr>
+            <a:endParaRPr lang="ja-JP"/>
+          </a:p>
+        </c:txPr>
         <c:crossAx val="48650112"/>
         <c:crosses val="autoZero"/>
         <c:crossBetween val="between"/>
-        <c:majorUnit val="0.5"/>
       </c:valAx>
       <c:spPr>
         <a:solidFill>
@@ -2725,7 +2259,7 @@
         <a:lstStyle/>
         <a:p>
           <a:pPr>
-            <a:defRPr sz="750">
+            <a:defRPr sz="788">
               <a:solidFill>
                 <a:srgbClr val="555555"/>
               </a:solidFill>
@@ -2772,7 +2306,7 @@
           <c:idx val="0"/>
           <c:order val="0"/>
           <c:tx>
-            <c:v>chip-average difference</c:v>
+            <c:v>actual |ΔT|</c:v>
           </c:tx>
           <c:spPr>
             <a:solidFill>
@@ -2780,46 +2314,6 @@
             </a:solidFill>
           </c:spPr>
           <c:invertIfNegative val="1"/>
-          <c:dPt>
-            <c:idx val="0"/>
-            <c:invertIfNegative val="0"/>
-            <c:bubble3D val="0"/>
-            <c:extLst>
-              <c:ext xmlns:c16="http://schemas.microsoft.com/office/drawing/2014/chart" uri="{C3380CC4-5D6E-409C-BE32-E72D297353CC}">
-                <c16:uniqueId val="{00000001-12FA-40AA-B58F-7B7E29EE6E04}"/>
-              </c:ext>
-            </c:extLst>
-          </c:dPt>
-          <c:dPt>
-            <c:idx val="1"/>
-            <c:invertIfNegative val="0"/>
-            <c:bubble3D val="0"/>
-            <c:spPr>
-              <a:solidFill>
-                <a:srgbClr val="76BE18"/>
-              </a:solidFill>
-            </c:spPr>
-            <c:extLst>
-              <c:ext xmlns:c16="http://schemas.microsoft.com/office/drawing/2014/chart" uri="{C3380CC4-5D6E-409C-BE32-E72D297353CC}">
-                <c16:uniqueId val="{00000003-12FA-40AA-B58F-7B7E29EE6E04}"/>
-              </c:ext>
-            </c:extLst>
-          </c:dPt>
-          <c:dPt>
-            <c:idx val="2"/>
-            <c:invertIfNegative val="0"/>
-            <c:bubble3D val="0"/>
-            <c:spPr>
-              <a:solidFill>
-                <a:srgbClr val="C4493D"/>
-              </a:solidFill>
-            </c:spPr>
-            <c:extLst>
-              <c:ext xmlns:c16="http://schemas.microsoft.com/office/drawing/2014/chart" uri="{C3380CC4-5D6E-409C-BE32-E72D297353CC}">
-                <c16:uniqueId val="{00000005-12FA-40AA-B58F-7B7E29EE6E04}"/>
-              </c:ext>
-            </c:extLst>
-          </c:dPt>
           <c:dLbls>
             <c:spPr>
               <a:noFill/>
@@ -2861,7 +2355,7 @@
           </c:dLbls>
           <c:cat>
             <c:strLit>
-              <c:ptCount val="3"/>
+              <c:ptCount val="2"/>
               <c:pt idx="0">
                 <c:v>MC01
 nominal</c:v>
@@ -2870,23 +2364,107 @@
                 <c:v>MC02
 hot + radiation</c:v>
               </c:pt>
-              <c:pt idx="2">
-                <c:v>strict
-criterion</c:v>
+            </c:strLit>
+          </c:cat>
+          <c:val>
+            <c:numLit>
+              <c:formatCode>0.000</c:formatCode>
+              <c:ptCount val="2"/>
+              <c:pt idx="0">
+                <c:v>0.49620860000000278</c:v>
+              </c:pt>
+              <c:pt idx="1">
+                <c:v>0.15442749999999705</c:v>
+              </c:pt>
+            </c:numLit>
+          </c:val>
+          <c:extLst>
+            <c:ext xmlns:c14="http://schemas.microsoft.com/office/drawing/2007/8/2/chart" uri="{6F2FDCE9-48DA-4B69-8628-5D25D57E5C99}">
+              <c14:invertSolidFillFmt>
+                <c14:spPr xmlns:c14="http://schemas.microsoft.com/office/drawing/2007/8/2/chart">
+                  <a:solidFill>
+                    <a:srgbClr val="FFFFFF"/>
+                  </a:solidFill>
+                </c14:spPr>
+              </c14:invertSolidFillFmt>
+            </c:ext>
+            <c:ext xmlns:c16="http://schemas.microsoft.com/office/drawing/2014/chart" uri="{C3380CC4-5D6E-409C-BE32-E72D297353CC}">
+              <c16:uniqueId val="{00000000-E9FE-4BA8-B519-75A48DB40260}"/>
+            </c:ext>
+          </c:extLst>
+        </c:ser>
+        <c:ser>
+          <c:idx val="1"/>
+          <c:order val="1"/>
+          <c:tx>
+            <c:v>strict max</c:v>
+          </c:tx>
+          <c:spPr>
+            <a:solidFill>
+              <a:srgbClr val="FBE9E7"/>
+            </a:solidFill>
+          </c:spPr>
+          <c:invertIfNegative val="1"/>
+          <c:dLbls>
+            <c:spPr>
+              <a:noFill/>
+              <a:ln>
+                <a:noFill/>
+              </a:ln>
+              <a:effectLst/>
+            </c:spPr>
+            <c:txPr>
+              <a:bodyPr anchorCtr="1"/>
+              <a:lstStyle/>
+              <a:p>
+                <a:pPr>
+                  <a:defRPr sz="788" b="1">
+                    <a:solidFill>
+                      <a:srgbClr val="555555"/>
+                    </a:solidFill>
+                    <a:latin typeface="Yu Gothic"/>
+                    <a:ea typeface="Yu Gothic"/>
+                    <a:cs typeface="Yu Gothic"/>
+                  </a:defRPr>
+                </a:pPr>
+                <a:endParaRPr lang="ja-JP"/>
+              </a:p>
+            </c:txPr>
+            <c:dLblPos val="outEnd"/>
+            <c:showLegendKey val="0"/>
+            <c:showVal val="1"/>
+            <c:showCatName val="0"/>
+            <c:showSerName val="0"/>
+            <c:showPercent val="0"/>
+            <c:showBubbleSize val="0"/>
+            <c:showLeaderLines val="0"/>
+            <c:extLst>
+              <c:ext xmlns:c15="http://schemas.microsoft.com/office/drawing/2012/chart" uri="{CE6537A1-D6FC-4f65-9D91-7224C49458BB}">
+                <c15:showLeaderLines val="0"/>
+              </c:ext>
+            </c:extLst>
+          </c:dLbls>
+          <c:cat>
+            <c:strLit>
+              <c:ptCount val="2"/>
+              <c:pt idx="0">
+                <c:v>MC01
+nominal</c:v>
+              </c:pt>
+              <c:pt idx="1">
+                <c:v>MC02
+hot + radiation</c:v>
               </c:pt>
             </c:strLit>
           </c:cat>
           <c:val>
             <c:numLit>
               <c:formatCode>0.000</c:formatCode>
-              <c:ptCount val="3"/>
+              <c:ptCount val="2"/>
               <c:pt idx="0">
-                <c:v>0.49620860000000278</c:v>
+                <c:v>0.25</c:v>
               </c:pt>
               <c:pt idx="1">
-                <c:v>0.15442749999999705</c:v>
-              </c:pt>
-              <c:pt idx="2">
                 <c:v>0.25</c:v>
               </c:pt>
             </c:numLit>
@@ -2902,7 +2480,98 @@
               </c14:invertSolidFillFmt>
             </c:ext>
             <c:ext xmlns:c16="http://schemas.microsoft.com/office/drawing/2014/chart" uri="{C3380CC4-5D6E-409C-BE32-E72D297353CC}">
-              <c16:uniqueId val="{00000006-12FA-40AA-B58F-7B7E29EE6E04}"/>
+              <c16:uniqueId val="{00000001-E9FE-4BA8-B519-75A48DB40260}"/>
+            </c:ext>
+          </c:extLst>
+        </c:ser>
+        <c:ser>
+          <c:idx val="2"/>
+          <c:order val="2"/>
+          <c:tx>
+            <c:v>benchmark max</c:v>
+          </c:tx>
+          <c:spPr>
+            <a:solidFill>
+              <a:srgbClr val="D3D3D3"/>
+            </a:solidFill>
+          </c:spPr>
+          <c:invertIfNegative val="1"/>
+          <c:dLbls>
+            <c:spPr>
+              <a:noFill/>
+              <a:ln>
+                <a:noFill/>
+              </a:ln>
+              <a:effectLst/>
+            </c:spPr>
+            <c:txPr>
+              <a:bodyPr anchorCtr="1"/>
+              <a:lstStyle/>
+              <a:p>
+                <a:pPr>
+                  <a:defRPr sz="788" b="1">
+                    <a:solidFill>
+                      <a:srgbClr val="555555"/>
+                    </a:solidFill>
+                    <a:latin typeface="Yu Gothic"/>
+                    <a:ea typeface="Yu Gothic"/>
+                    <a:cs typeface="Yu Gothic"/>
+                  </a:defRPr>
+                </a:pPr>
+                <a:endParaRPr lang="ja-JP"/>
+              </a:p>
+            </c:txPr>
+            <c:dLblPos val="outEnd"/>
+            <c:showLegendKey val="0"/>
+            <c:showVal val="1"/>
+            <c:showCatName val="0"/>
+            <c:showSerName val="0"/>
+            <c:showPercent val="0"/>
+            <c:showBubbleSize val="0"/>
+            <c:showLeaderLines val="0"/>
+            <c:extLst>
+              <c:ext xmlns:c15="http://schemas.microsoft.com/office/drawing/2012/chart" uri="{CE6537A1-D6FC-4f65-9D91-7224C49458BB}">
+                <c15:showLeaderLines val="0"/>
+              </c:ext>
+            </c:extLst>
+          </c:dLbls>
+          <c:cat>
+            <c:strLit>
+              <c:ptCount val="2"/>
+              <c:pt idx="0">
+                <c:v>MC01
+nominal</c:v>
+              </c:pt>
+              <c:pt idx="1">
+                <c:v>MC02
+hot + radiation</c:v>
+              </c:pt>
+            </c:strLit>
+          </c:cat>
+          <c:val>
+            <c:numLit>
+              <c:formatCode>0.000</c:formatCode>
+              <c:ptCount val="2"/>
+              <c:pt idx="0">
+                <c:v>0.5</c:v>
+              </c:pt>
+              <c:pt idx="1">
+                <c:v>0.5</c:v>
+              </c:pt>
+            </c:numLit>
+          </c:val>
+          <c:extLst>
+            <c:ext xmlns:c14="http://schemas.microsoft.com/office/drawing/2007/8/2/chart" uri="{6F2FDCE9-48DA-4B69-8628-5D25D57E5C99}">
+              <c14:invertSolidFillFmt>
+                <c14:spPr xmlns:c14="http://schemas.microsoft.com/office/drawing/2007/8/2/chart">
+                  <a:solidFill>
+                    <a:srgbClr val="FFFFFF"/>
+                  </a:solidFill>
+                </c14:spPr>
+              </c14:invertSolidFillFmt>
+            </c:ext>
+            <c:ext xmlns:c16="http://schemas.microsoft.com/office/drawing/2014/chart" uri="{C3380CC4-5D6E-409C-BE32-E72D297353CC}">
+              <c16:uniqueId val="{00000002-E9FE-4BA8-B519-75A48DB40260}"/>
             </c:ext>
           </c:extLst>
         </c:ser>
@@ -2915,7 +2584,7 @@
           <c:showPercent val="0"/>
           <c:showBubbleSize val="0"/>
         </c:dLbls>
-        <c:gapWidth val="56"/>
+        <c:gapWidth val="46"/>
         <c:axId val="48650112"/>
         <c:axId val="48672768"/>
       </c:barChart>
@@ -3044,6 +2713,27 @@
         </a:ln>
       </c:spPr>
     </c:plotArea>
+    <c:legend>
+      <c:legendPos val="b"/>
+      <c:overlay val="0"/>
+      <c:txPr>
+        <a:bodyPr anchorCtr="1"/>
+        <a:lstStyle/>
+        <a:p>
+          <a:pPr>
+            <a:defRPr sz="713">
+              <a:solidFill>
+                <a:srgbClr val="555555"/>
+              </a:solidFill>
+              <a:latin typeface="Yu Gothic"/>
+              <a:ea typeface="Yu Gothic"/>
+              <a:cs typeface="Yu Gothic"/>
+            </a:defRPr>
+          </a:pPr>
+          <a:endParaRPr lang="ja-JP"/>
+        </a:p>
+      </c:txPr>
+    </c:legend>
     <c:plotVisOnly val="1"/>
     <c:dispBlanksAs val="zero"/>
     <c:showDLblsOverMax val="1"/>
@@ -3070,250 +2760,137 @@
     <c:autoTitleDeleted val="1"/>
     <c:plotArea>
       <c:layout/>
-      <c:lineChart>
-        <c:grouping val="standard"/>
+      <c:barChart>
+        <c:barDir val="col"/>
+        <c:grouping val="clustered"/>
         <c:varyColors val="0"/>
         <c:ser>
           <c:idx val="0"/>
           <c:order val="0"/>
           <c:tx>
-            <c:v>CAE truth ΔT</c:v>
+            <c:v>|HV02 − HV01|</c:v>
           </c:tx>
           <c:spPr>
-            <a:ln w="28575">
-              <a:solidFill>
-                <a:srgbClr val="7B2DAF"/>
-              </a:solidFill>
-              <a:prstDash val="solid"/>
-            </a:ln>
+            <a:solidFill>
+              <a:srgbClr val="7B2DAF"/>
+            </a:solidFill>
           </c:spPr>
-          <c:marker>
-            <c:symbol val="circle"/>
-            <c:size val="4"/>
-            <c:spPr>
-              <a:solidFill>
-                <a:srgbClr val="7B2DAF"/>
-              </a:solidFill>
-            </c:spPr>
-          </c:marker>
-          <c:cat>
-            <c:numLit>
-              <c:formatCode>General</c:formatCode>
-              <c:ptCount val="12"/>
-              <c:pt idx="0">
-                <c:v>0</c:v>
-              </c:pt>
-              <c:pt idx="1">
-                <c:v>20</c:v>
-              </c:pt>
-              <c:pt idx="2">
-                <c:v>40</c:v>
-              </c:pt>
-              <c:pt idx="3">
-                <c:v>60</c:v>
-              </c:pt>
-              <c:pt idx="4">
-                <c:v>80</c:v>
-              </c:pt>
-              <c:pt idx="5">
-                <c:v>100</c:v>
-              </c:pt>
-              <c:pt idx="6">
-                <c:v>120</c:v>
-              </c:pt>
-              <c:pt idx="7">
-                <c:v>140</c:v>
-              </c:pt>
-              <c:pt idx="8">
-                <c:v>160</c:v>
-              </c:pt>
-              <c:pt idx="9">
-                <c:v>180</c:v>
-              </c:pt>
-              <c:pt idx="10">
-                <c:v>200</c:v>
-              </c:pt>
-              <c:pt idx="11">
-                <c:v>220</c:v>
-              </c:pt>
-            </c:numLit>
-          </c:cat>
-          <c:val>
-            <c:numLit>
-              <c:formatCode>0.0</c:formatCode>
-              <c:ptCount val="12"/>
-              <c:pt idx="0">
-                <c:v>-1.8545700000025533E-3</c:v>
-              </c:pt>
-              <c:pt idx="1">
-                <c:v>-1.8549800000009498E-3</c:v>
-              </c:pt>
-              <c:pt idx="2">
-                <c:v>-1.8553600000004167E-3</c:v>
-              </c:pt>
-              <c:pt idx="3">
-                <c:v>-1.8556099999997855E-3</c:v>
-              </c:pt>
-              <c:pt idx="4">
-                <c:v>-7.4855300000002956E-3</c:v>
-              </c:pt>
-              <c:pt idx="5">
-                <c:v>-1.1850699999982339E-3</c:v>
-              </c:pt>
-              <c:pt idx="6">
-                <c:v>-2.2883150000001962E-2</c:v>
-              </c:pt>
-              <c:pt idx="7">
-                <c:v>-8.4162999999996657E-2</c:v>
-              </c:pt>
-              <c:pt idx="8">
-                <c:v>-0.16855853000000565</c:v>
-              </c:pt>
-              <c:pt idx="9">
-                <c:v>-0.24409413000000058</c:v>
-              </c:pt>
-              <c:pt idx="10">
-                <c:v>-0.31718865999999935</c:v>
-              </c:pt>
-              <c:pt idx="11">
-                <c:v>-0.38133367000000362</c:v>
-              </c:pt>
-            </c:numLit>
-          </c:val>
-          <c:smooth val="0"/>
-          <c:extLst>
-            <c:ext xmlns:c16="http://schemas.microsoft.com/office/drawing/2014/chart" uri="{C3380CC4-5D6E-409C-BE32-E72D297353CC}">
-              <c16:uniqueId val="{00000000-5173-4AE4-B743-2AF6DF7E1E9F}"/>
-            </c:ext>
-          </c:extLst>
-        </c:ser>
-        <c:ser>
-          <c:idx val="1"/>
-          <c:order val="1"/>
-          <c:tx>
-            <c:v>RC model ΔT</c:v>
-          </c:tx>
-          <c:spPr>
-            <a:ln w="28575">
-              <a:solidFill>
-                <a:srgbClr val="00A5D8"/>
-              </a:solidFill>
-              <a:prstDash val="solid"/>
-            </a:ln>
-          </c:spPr>
-          <c:marker>
-            <c:symbol val="square"/>
-            <c:size val="4"/>
+          <c:invertIfNegative val="1"/>
+          <c:dPt>
+            <c:idx val="0"/>
+            <c:invertIfNegative val="0"/>
+            <c:bubble3D val="0"/>
+            <c:extLst>
+              <c:ext xmlns:c16="http://schemas.microsoft.com/office/drawing/2014/chart" uri="{C3380CC4-5D6E-409C-BE32-E72D297353CC}">
+                <c16:uniqueId val="{00000001-46B7-4DEB-B61E-61E3B955CF98}"/>
+              </c:ext>
+            </c:extLst>
+          </c:dPt>
+          <c:dPt>
+            <c:idx val="1"/>
+            <c:invertIfNegative val="0"/>
+            <c:bubble3D val="0"/>
             <c:spPr>
               <a:solidFill>
                 <a:srgbClr val="00A5D8"/>
               </a:solidFill>
             </c:spPr>
-          </c:marker>
+            <c:extLst>
+              <c:ext xmlns:c16="http://schemas.microsoft.com/office/drawing/2014/chart" uri="{C3380CC4-5D6E-409C-BE32-E72D297353CC}">
+                <c16:uniqueId val="{00000003-46B7-4DEB-B61E-61E3B955CF98}"/>
+              </c:ext>
+            </c:extLst>
+          </c:dPt>
+          <c:dLbls>
+            <c:spPr>
+              <a:noFill/>
+              <a:ln>
+                <a:noFill/>
+              </a:ln>
+              <a:effectLst/>
+            </c:spPr>
+            <c:txPr>
+              <a:bodyPr anchorCtr="1"/>
+              <a:lstStyle/>
+              <a:p>
+                <a:pPr>
+                  <a:defRPr sz="825" b="1">
+                    <a:solidFill>
+                      <a:srgbClr val="555555"/>
+                    </a:solidFill>
+                    <a:latin typeface="Yu Gothic"/>
+                    <a:ea typeface="Yu Gothic"/>
+                    <a:cs typeface="Yu Gothic"/>
+                  </a:defRPr>
+                </a:pPr>
+                <a:endParaRPr lang="ja-JP"/>
+              </a:p>
+            </c:txPr>
+            <c:dLblPos val="outEnd"/>
+            <c:showLegendKey val="0"/>
+            <c:showVal val="1"/>
+            <c:showCatName val="0"/>
+            <c:showSerName val="0"/>
+            <c:showPercent val="0"/>
+            <c:showBubbleSize val="0"/>
+            <c:showLeaderLines val="0"/>
+            <c:extLst>
+              <c:ext xmlns:c15="http://schemas.microsoft.com/office/drawing/2012/chart" uri="{CE6537A1-D6FC-4f65-9D91-7224C49458BB}">
+                <c15:showLeaderLines val="0"/>
+              </c:ext>
+            </c:extLst>
+          </c:dLbls>
           <c:cat>
-            <c:numLit>
-              <c:formatCode>General</c:formatCode>
-              <c:ptCount val="12"/>
+            <c:strLit>
+              <c:ptCount val="2"/>
               <c:pt idx="0">
-                <c:v>0</c:v>
+                <c:v>CAE truth</c:v>
               </c:pt>
               <c:pt idx="1">
-                <c:v>20</c:v>
+                <c:v>RC model</c:v>
               </c:pt>
-              <c:pt idx="2">
-                <c:v>40</c:v>
-              </c:pt>
-              <c:pt idx="3">
-                <c:v>60</c:v>
-              </c:pt>
-              <c:pt idx="4">
-                <c:v>80</c:v>
-              </c:pt>
-              <c:pt idx="5">
-                <c:v>100</c:v>
-              </c:pt>
-              <c:pt idx="6">
-                <c:v>120</c:v>
-              </c:pt>
-              <c:pt idx="7">
-                <c:v>140</c:v>
-              </c:pt>
-              <c:pt idx="8">
-                <c:v>160</c:v>
-              </c:pt>
-              <c:pt idx="9">
-                <c:v>180</c:v>
-              </c:pt>
-              <c:pt idx="10">
-                <c:v>200</c:v>
-              </c:pt>
-              <c:pt idx="11">
-                <c:v>220</c:v>
-              </c:pt>
-            </c:numLit>
+            </c:strLit>
           </c:cat>
           <c:val>
             <c:numLit>
-              <c:formatCode>0.0</c:formatCode>
-              <c:ptCount val="12"/>
+              <c:formatCode>0.000</c:formatCode>
+              <c:ptCount val="2"/>
               <c:pt idx="0">
-                <c:v>-1.8545700000025533E-3</c:v>
+                <c:v>0.38133367000000362</c:v>
               </c:pt>
               <c:pt idx="1">
-                <c:v>-1.777789999998447E-3</c:v>
-              </c:pt>
-              <c:pt idx="2">
-                <c:v>-1.7016000000005249E-3</c:v>
-              </c:pt>
-              <c:pt idx="3">
-                <c:v>-1.6286799999996049E-3</c:v>
-              </c:pt>
-              <c:pt idx="4">
-                <c:v>-1.5588800000010394E-3</c:v>
-              </c:pt>
-              <c:pt idx="5">
-                <c:v>-1.492069999997625E-3</c:v>
-              </c:pt>
-              <c:pt idx="6">
-                <c:v>-1.4281300000007491E-3</c:v>
-              </c:pt>
-              <c:pt idx="7">
-                <c:v>-1.3735799999992082E-3</c:v>
-              </c:pt>
-              <c:pt idx="8">
-                <c:v>-1.3282800000027351E-3</c:v>
-              </c:pt>
-              <c:pt idx="9">
-                <c:v>-1.2915400000039767E-3</c:v>
-              </c:pt>
-              <c:pt idx="10">
-                <c:v>-1.2564700000012863E-3</c:v>
-              </c:pt>
-              <c:pt idx="11">
-                <c:v>-1.2223400000053175E-3</c:v>
+                <c:v>1.2223400000053175E-3</c:v>
               </c:pt>
             </c:numLit>
           </c:val>
-          <c:smooth val="0"/>
           <c:extLst>
+            <c:ext xmlns:c14="http://schemas.microsoft.com/office/drawing/2007/8/2/chart" uri="{6F2FDCE9-48DA-4B69-8628-5D25D57E5C99}">
+              <c14:invertSolidFillFmt>
+                <c14:spPr xmlns:c14="http://schemas.microsoft.com/office/drawing/2007/8/2/chart">
+                  <a:solidFill>
+                    <a:srgbClr val="FFFFFF"/>
+                  </a:solidFill>
+                </c14:spPr>
+              </c14:invertSolidFillFmt>
+            </c:ext>
             <c:ext xmlns:c16="http://schemas.microsoft.com/office/drawing/2014/chart" uri="{C3380CC4-5D6E-409C-BE32-E72D297353CC}">
-              <c16:uniqueId val="{00000001-5173-4AE4-B743-2AF6DF7E1E9F}"/>
+              <c16:uniqueId val="{00000004-46B7-4DEB-B61E-61E3B955CF98}"/>
             </c:ext>
           </c:extLst>
         </c:ser>
         <c:dLbls>
+          <c:dLblPos val="outEnd"/>
           <c:showLegendKey val="0"/>
-          <c:showVal val="0"/>
+          <c:showVal val="1"/>
           <c:showCatName val="0"/>
           <c:showSerName val="0"/>
           <c:showPercent val="0"/>
           <c:showBubbleSize val="0"/>
         </c:dLbls>
-        <c:marker val="1"/>
-        <c:smooth val="0"/>
+        <c:gapWidth val="60"/>
         <c:axId val="48650112"/>
         <c:axId val="48672768"/>
-      </c:lineChart>
+      </c:barChart>
       <c:catAx>
         <c:axId val="48650112"/>
         <c:scaling>
@@ -3321,25 +2898,6 @@
         </c:scaling>
         <c:delete val="0"/>
         <c:axPos val="b"/>
-        <c:title>
-          <c:tx>
-            <c:rich>
-              <a:bodyPr/>
-              <a:lstStyle/>
-              <a:p>
-                <a:r>
-                  <a:rPr>
-                    <a:latin typeface="Yu Gothic"/>
-                    <a:ea typeface="Yu Gothic"/>
-                    <a:cs typeface="Yu Gothic"/>
-                  </a:rPr>
-                  <a:t>time [s]</a:t>
-                </a:r>
-              </a:p>
-            </c:rich>
-          </c:tx>
-          <c:overlay val="0"/>
-        </c:title>
         <c:numFmt formatCode="General" sourceLinked="1"/>
         <c:majorTickMark val="none"/>
         <c:minorTickMark val="none"/>
@@ -3357,9 +2915,9 @@
           <a:lstStyle/>
           <a:p>
             <a:pPr>
-              <a:defRPr sz="675">
-                <a:solidFill>
-                  <a:srgbClr val="777777"/>
+              <a:defRPr sz="825">
+                <a:solidFill>
+                  <a:srgbClr val="555555"/>
                 </a:solidFill>
                 <a:latin typeface="Yu Gothic"/>
                 <a:ea typeface="Yu Gothic"/>
@@ -3380,8 +2938,8 @@
         <c:axId val="48672768"/>
         <c:scaling>
           <c:orientation val="minMax"/>
-          <c:max val="0.05"/>
-          <c:min val="-0.45"/>
+          <c:max val="0.45"/>
+          <c:min val="0"/>
         </c:scaling>
         <c:delete val="0"/>
         <c:axPos val="l"/>
@@ -3407,14 +2965,14 @@
                     <a:ea typeface="Yu Gothic"/>
                     <a:cs typeface="Yu Gothic"/>
                   </a:rPr>
-                  <a:t>HV02 − HV01 chip ΔT [K]</a:t>
+                  <a:t>chip |ΔT| [K]</a:t>
                 </a:r>
               </a:p>
             </c:rich>
           </c:tx>
           <c:overlay val="0"/>
         </c:title>
-        <c:numFmt formatCode="0.0" sourceLinked="1"/>
+        <c:numFmt formatCode="0.000" sourceLinked="1"/>
         <c:majorTickMark val="none"/>
         <c:minorTickMark val="none"/>
         <c:tickLblPos val="nextTo"/>
@@ -3446,7 +3004,7 @@
         <c:crossAx val="48650112"/>
         <c:crosses val="autoZero"/>
         <c:crossBetween val="between"/>
-        <c:majorUnit val="0.1"/>
+        <c:majorUnit val="0.05"/>
       </c:valAx>
       <c:spPr>
         <a:solidFill>
@@ -3458,27 +3016,6 @@
         </a:ln>
       </c:spPr>
     </c:plotArea>
-    <c:legend>
-      <c:legendPos val="b"/>
-      <c:overlay val="0"/>
-      <c:txPr>
-        <a:bodyPr anchorCtr="1"/>
-        <a:lstStyle/>
-        <a:p>
-          <a:pPr>
-            <a:defRPr sz="750">
-              <a:solidFill>
-                <a:srgbClr val="555555"/>
-              </a:solidFill>
-              <a:latin typeface="Yu Gothic"/>
-              <a:ea typeface="Yu Gothic"/>
-              <a:cs typeface="Yu Gothic"/>
-            </a:defRPr>
-          </a:pPr>
-          <a:endParaRPr lang="ja-JP"/>
-        </a:p>
-      </c:txPr>
-    </c:legend>
     <c:plotVisOnly val="1"/>
     <c:dispBlanksAs val="zero"/>
     <c:showDLblsOverMax val="1"/>
@@ -4079,7 +3616,12 @@
           </a:p>
           <a:p>
             <a:r>
-              <a:t>The benchmark was rerun on 2026-09-28 with: uv run --locked --with-editable . python benchmarks/topcell/run.py. Status: pass.</a:t>
+              <a:t>The benchmark was rerun on 2026-09-28 with: uv run --locked --with-editable . python benchmarks/topcell/run.py.</a:t>
+            </a:r>
+          </a:p>
+          <a:p>
+            <a:r>
+              <a:t>Status=pass; core mean=0.142912 K; worst=1.302677 K; prior mean=7.185014 K.</a:t>
             </a:r>
           </a:p>
           <a:p>
@@ -4181,7 +3723,12 @@
           </a:p>
           <a:p>
             <a:r>
-              <a:t>The benchmark primary metric compares the published F09 full-horizon score with the F12 origin-after-history score. The common-window calculation is added here to make the comparison conservative and time-aligned.</a:t>
+              <a:t>Benchmark primary ratio F12/F09=2.924%; acceptance maximum=25.0%.</a:t>
+            </a:r>
+          </a:p>
+          <a:p>
+            <a:r>
+              <a:t>The benchmark primary metric compares the published F09 full-horizon score with the F12 origin-after-history score. The common-window calculation is added to make the comparison conservative and time-aligned.</a:t>
             </a:r>
           </a:p>
           <a:p>
@@ -4263,37 +3810,27 @@
           <a:lstStyle/>
           <a:p>
             <a:r>
-              <a:t>M03 estimate: external_tools/comsol_chip_cooling/work/outputs/monitor/M03_sensor_offset.csv.</a:t>
-            </a:r>
-          </a:p>
-          <a:p>
-            <a:r>
-              <a:t>M03 truth: external_tools/comsol_chip_cooling/data/eval/monitor/M03_sensor_offset.csv.</a:t>
-            </a:r>
-          </a:p>
-          <a:p>
-            <a:r>
-              <a:t>M05 estimate: external_tools/comsol_chip_cooling/work/outputs/monitor/M05_uncommanded_heat.csv.</a:t>
-            </a:r>
-          </a:p>
-          <a:p>
-            <a:r>
-              <a:t>M05 truth: external_tools/comsol_chip_cooling/data/eval/monitor/M05_uncommanded_heat.csv.</a:t>
-            </a:r>
-          </a:p>
-          <a:p>
-            <a:r>
-              <a:t>Event metrics: external_tools/comsol_chip_cooling/work/evaluation/monitor_events.csv and summary.json.</a:t>
-            </a:r>
-          </a:p>
-          <a:p>
-            <a:r>
-              <a:t>M03 event starts at 300 s and is detected immediately. M05 event starts at 282 s and is first detected at 292 s.</a:t>
-            </a:r>
-          </a:p>
-          <a:p>
-            <a:r>
-              <a:t>Charts use every tenth row plus event timestamps for display. Reported metrics use the full trajectories.</a:t>
+              <a:t>Source: benchmarks/topcell/work/outputs/benchmark/monitor_by_case.csv.</a:t>
+            </a:r>
+          </a:p>
+          <a:p>
+            <a:r>
+              <a:t>Source: benchmarks/topcell/work/outputs/benchmark/benchmark_summary.json.</a:t>
+            </a:r>
+          </a:p>
+          <a:p>
+            <a:r>
+              <a:t>Acceptance-limit utilization equals the measured metric divided by its benchmark acceptance maximum. Lower is better and 100% is the boundary.</a:t>
+            </a:r>
+          </a:p>
+          <a:p>
+            <a:r>
+              <a:t>M03 localization is checked separately because first-alert sensor identity is categorical. M04 posterior finite-state behavior is also checked separately.</a:t>
+            </a:r>
+          </a:p>
+          <a:p>
+            <a:r>
+              <a:t>Monitor checks passed: 8/8.</a:t>
             </a:r>
           </a:p>
         </p:txBody>
@@ -4395,7 +3932,12 @@
           </a:p>
           <a:p>
             <a:r>
-              <a:t>At 220 s, CAE radiation-pair chip delta is -0.38133367 K and the RC-model delta is -0.00122234 K. The conservative adjacent-mesh difference is 0.49620860 K.</a:t>
+              <a:t>At 220 s, CAE radiation-pair chip delta magnitude is 0.38133367 K and the RC-model magnitude is 0.00122234 K.</a:t>
+            </a:r>
+          </a:p>
+          <a:p>
+            <a:r>
+              <a:t>High-fidelity mean RMSE=0.09561862 K; worst=0.14358424 K; scalar predictions=66.</a:t>
             </a:r>
           </a:p>
           <a:p>
@@ -4887,7 +4429,7 @@
           <p:cNvPr id="22" name="正方形/長方形 21">
             <a:extLst>
               <a:ext uri="{FF2B5EF4-FFF2-40B4-BE49-F238E27FC236}">
-                <a16:creationId xmlns:a16="http://schemas.microsoft.com/office/drawing/2014/main" id="{529AF96F-1A69-4838-8ADE-D21C243BBF59}"/>
+                <a16:creationId xmlns:a16="http://schemas.microsoft.com/office/drawing/2014/main" id="{4B4CD0F4-FA09-4EFD-A57D-4F90FF78560D}"/>
               </a:ext>
             </a:extLst>
           </p:cNvPr>
@@ -4918,7 +4460,7 @@
           <p:cNvPr id="2" name="正方形/長方形 1">
             <a:extLst>
               <a:ext uri="{FF2B5EF4-FFF2-40B4-BE49-F238E27FC236}">
-                <a16:creationId xmlns:a16="http://schemas.microsoft.com/office/drawing/2014/main" id="{8CBEBBF7-B846-4EC2-B4BA-3992B2EFBB74}"/>
+                <a16:creationId xmlns:a16="http://schemas.microsoft.com/office/drawing/2014/main" id="{C90281BC-16D6-4C69-9FBF-7694D99C16F9}"/>
               </a:ext>
             </a:extLst>
           </p:cNvPr>
@@ -4980,7 +4522,7 @@
           <p:cNvPr id="3" name="正方形/長方形 2">
             <a:extLst>
               <a:ext uri="{FF2B5EF4-FFF2-40B4-BE49-F238E27FC236}">
-                <a16:creationId xmlns:a16="http://schemas.microsoft.com/office/drawing/2014/main" id="{507C5582-7EEA-4699-A19C-6B83744C3ED3}"/>
+                <a16:creationId xmlns:a16="http://schemas.microsoft.com/office/drawing/2014/main" id="{BB685BBF-10C5-46E0-9867-852AF569F5F0}"/>
               </a:ext>
             </a:extLst>
           </p:cNvPr>
@@ -5069,7 +4611,7 @@
           <p:cNvPr id="4" name="正方形/長方形 3">
             <a:extLst>
               <a:ext uri="{FF2B5EF4-FFF2-40B4-BE49-F238E27FC236}">
-                <a16:creationId xmlns:a16="http://schemas.microsoft.com/office/drawing/2014/main" id="{6930EC41-040F-416E-81BA-E14E06702402}"/>
+                <a16:creationId xmlns:a16="http://schemas.microsoft.com/office/drawing/2014/main" id="{0E9F438F-FD35-45C9-877B-7EE0ABD8FB66}"/>
               </a:ext>
             </a:extLst>
           </p:cNvPr>
@@ -5131,7 +4673,7 @@
           <p:cNvPr id="5" name="正方形/長方形 4">
             <a:extLst>
               <a:ext uri="{FF2B5EF4-FFF2-40B4-BE49-F238E27FC236}">
-                <a16:creationId xmlns:a16="http://schemas.microsoft.com/office/drawing/2014/main" id="{06C85FB4-BB5C-4BAE-8CFA-D8F6036AE972}"/>
+                <a16:creationId xmlns:a16="http://schemas.microsoft.com/office/drawing/2014/main" id="{4BA5572F-08B1-4C7A-A2A6-8CD7CE9CDB4D}"/>
               </a:ext>
             </a:extLst>
           </p:cNvPr>
@@ -5193,7 +4735,7 @@
           <p:cNvPr id="6" name="正方形/長方形 5">
             <a:extLst>
               <a:ext uri="{FF2B5EF4-FFF2-40B4-BE49-F238E27FC236}">
-                <a16:creationId xmlns:a16="http://schemas.microsoft.com/office/drawing/2014/main" id="{B24DCC85-1449-4FBA-A5EE-95FF06992AEE}"/>
+                <a16:creationId xmlns:a16="http://schemas.microsoft.com/office/drawing/2014/main" id="{BF888389-6512-4329-93D2-52A38F6F9626}"/>
               </a:ext>
             </a:extLst>
           </p:cNvPr>
@@ -5224,7 +4766,7 @@
           <p:cNvPr id="7" name="正方形/長方形 6">
             <a:extLst>
               <a:ext uri="{FF2B5EF4-FFF2-40B4-BE49-F238E27FC236}">
-                <a16:creationId xmlns:a16="http://schemas.microsoft.com/office/drawing/2014/main" id="{19A3B961-1E80-4B21-936A-FE2DF42BE852}"/>
+                <a16:creationId xmlns:a16="http://schemas.microsoft.com/office/drawing/2014/main" id="{FFA8857E-B1E9-4275-95FE-21225FF02EB3}"/>
               </a:ext>
             </a:extLst>
           </p:cNvPr>
@@ -5255,7 +4797,7 @@
           <p:cNvPr id="8" name="正方形/長方形 7">
             <a:extLst>
               <a:ext uri="{FF2B5EF4-FFF2-40B4-BE49-F238E27FC236}">
-                <a16:creationId xmlns:a16="http://schemas.microsoft.com/office/drawing/2014/main" id="{00F8FCC7-B961-404B-AD15-3746E8EF7EE3}"/>
+                <a16:creationId xmlns:a16="http://schemas.microsoft.com/office/drawing/2014/main" id="{55C1BDCF-EA53-4A29-AF7F-F6334720FF04}"/>
               </a:ext>
             </a:extLst>
           </p:cNvPr>
@@ -5286,7 +4828,7 @@
           <p:cNvPr id="9" name="正方形/長方形 8">
             <a:extLst>
               <a:ext uri="{FF2B5EF4-FFF2-40B4-BE49-F238E27FC236}">
-                <a16:creationId xmlns:a16="http://schemas.microsoft.com/office/drawing/2014/main" id="{7DC15602-D74D-4000-B699-2C9E7738C88D}"/>
+                <a16:creationId xmlns:a16="http://schemas.microsoft.com/office/drawing/2014/main" id="{572CDB6C-1F25-4265-B9A5-6877927FAB9F}"/>
               </a:ext>
             </a:extLst>
           </p:cNvPr>
@@ -5317,7 +4859,7 @@
           <p:cNvPr id="10" name="正方形/長方形 9">
             <a:extLst>
               <a:ext uri="{FF2B5EF4-FFF2-40B4-BE49-F238E27FC236}">
-                <a16:creationId xmlns:a16="http://schemas.microsoft.com/office/drawing/2014/main" id="{ADD2DA29-1699-4225-8C30-2470FA8671EB}"/>
+                <a16:creationId xmlns:a16="http://schemas.microsoft.com/office/drawing/2014/main" id="{4E20F237-DF41-4AE1-9167-ACDFA374ADF0}"/>
               </a:ext>
             </a:extLst>
           </p:cNvPr>
@@ -5348,7 +4890,7 @@
           <p:cNvPr id="11" name="正方形/長方形 10">
             <a:extLst>
               <a:ext uri="{FF2B5EF4-FFF2-40B4-BE49-F238E27FC236}">
-                <a16:creationId xmlns:a16="http://schemas.microsoft.com/office/drawing/2014/main" id="{8451A6E2-A880-4D7C-84E1-74AEB1800143}"/>
+                <a16:creationId xmlns:a16="http://schemas.microsoft.com/office/drawing/2014/main" id="{28CD771A-D6BF-4AD9-A641-43109671DA20}"/>
               </a:ext>
             </a:extLst>
           </p:cNvPr>
@@ -5410,7 +4952,7 @@
           <p:cNvPr id="12" name="正方形/長方形 11">
             <a:extLst>
               <a:ext uri="{FF2B5EF4-FFF2-40B4-BE49-F238E27FC236}">
-                <a16:creationId xmlns:a16="http://schemas.microsoft.com/office/drawing/2014/main" id="{C2E07627-8308-4437-A34E-5320869DA335}"/>
+                <a16:creationId xmlns:a16="http://schemas.microsoft.com/office/drawing/2014/main" id="{625D7134-99AE-4919-A2D5-BB08C5A0696F}"/>
               </a:ext>
             </a:extLst>
           </p:cNvPr>
@@ -5472,7 +5014,7 @@
           <p:cNvPr id="13" name="正方形/長方形 12">
             <a:extLst>
               <a:ext uri="{FF2B5EF4-FFF2-40B4-BE49-F238E27FC236}">
-                <a16:creationId xmlns:a16="http://schemas.microsoft.com/office/drawing/2014/main" id="{A9265514-BC8C-4F81-BAA4-91588F9A4833}"/>
+                <a16:creationId xmlns:a16="http://schemas.microsoft.com/office/drawing/2014/main" id="{23EEDEA9-C49D-4E5B-8638-F4C76E0C8648}"/>
               </a:ext>
             </a:extLst>
           </p:cNvPr>
@@ -5534,7 +5076,7 @@
           <p:cNvPr id="14" name="直線コネクタ 13">
             <a:extLst>
               <a:ext uri="{FF2B5EF4-FFF2-40B4-BE49-F238E27FC236}">
-                <a16:creationId xmlns:a16="http://schemas.microsoft.com/office/drawing/2014/main" id="{A887C4BB-8F82-495E-9116-E6BC1E794F32}"/>
+                <a16:creationId xmlns:a16="http://schemas.microsoft.com/office/drawing/2014/main" id="{062DBA8E-8560-4B8C-948E-ED5BE6110D8C}"/>
               </a:ext>
             </a:extLst>
           </p:cNvPr>
@@ -5565,7 +5107,7 @@
           <p:cNvPr id="15" name="直線コネクタ 14">
             <a:extLst>
               <a:ext uri="{FF2B5EF4-FFF2-40B4-BE49-F238E27FC236}">
-                <a16:creationId xmlns:a16="http://schemas.microsoft.com/office/drawing/2014/main" id="{E5EFAAB7-4769-45A8-B012-3372B4BB57CB}"/>
+                <a16:creationId xmlns:a16="http://schemas.microsoft.com/office/drawing/2014/main" id="{6CD95948-FAE6-4BD5-BE9A-5E41587A563D}"/>
               </a:ext>
             </a:extLst>
           </p:cNvPr>
@@ -5596,7 +5138,7 @@
           <p:cNvPr id="16" name="直線コネクタ 15">
             <a:extLst>
               <a:ext uri="{FF2B5EF4-FFF2-40B4-BE49-F238E27FC236}">
-                <a16:creationId xmlns:a16="http://schemas.microsoft.com/office/drawing/2014/main" id="{C8126827-E021-47FA-8BEB-1E107E4DF4BB}"/>
+                <a16:creationId xmlns:a16="http://schemas.microsoft.com/office/drawing/2014/main" id="{067447B1-E2EA-4C0C-BC3C-B2F9F779ADC6}"/>
               </a:ext>
             </a:extLst>
           </p:cNvPr>
@@ -5627,7 +5169,7 @@
           <p:cNvPr id="17" name="楕円 16">
             <a:extLst>
               <a:ext uri="{FF2B5EF4-FFF2-40B4-BE49-F238E27FC236}">
-                <a16:creationId xmlns:a16="http://schemas.microsoft.com/office/drawing/2014/main" id="{79D1CA1D-6951-4C50-A0D8-5C487AB9AECD}"/>
+                <a16:creationId xmlns:a16="http://schemas.microsoft.com/office/drawing/2014/main" id="{3F7507D3-2893-41B3-A06D-99370389AEDA}"/>
               </a:ext>
             </a:extLst>
           </p:cNvPr>
@@ -5658,7 +5200,7 @@
           <p:cNvPr id="18" name="楕円 17">
             <a:extLst>
               <a:ext uri="{FF2B5EF4-FFF2-40B4-BE49-F238E27FC236}">
-                <a16:creationId xmlns:a16="http://schemas.microsoft.com/office/drawing/2014/main" id="{9593B49C-B972-4829-9859-7ADD16D3AFC8}"/>
+                <a16:creationId xmlns:a16="http://schemas.microsoft.com/office/drawing/2014/main" id="{75C2A25D-5056-44D0-8C19-68C461A02CB7}"/>
               </a:ext>
             </a:extLst>
           </p:cNvPr>
@@ -5689,7 +5231,7 @@
           <p:cNvPr id="19" name="楕円 18">
             <a:extLst>
               <a:ext uri="{FF2B5EF4-FFF2-40B4-BE49-F238E27FC236}">
-                <a16:creationId xmlns:a16="http://schemas.microsoft.com/office/drawing/2014/main" id="{83E4DB2A-9B19-4980-B53B-10362107C476}"/>
+                <a16:creationId xmlns:a16="http://schemas.microsoft.com/office/drawing/2014/main" id="{11524065-6651-4D25-90BC-7B96A2350D07}"/>
               </a:ext>
             </a:extLst>
           </p:cNvPr>
@@ -5720,7 +5262,7 @@
           <p:cNvPr id="20" name="楕円 19">
             <a:extLst>
               <a:ext uri="{FF2B5EF4-FFF2-40B4-BE49-F238E27FC236}">
-                <a16:creationId xmlns:a16="http://schemas.microsoft.com/office/drawing/2014/main" id="{A0C3AF2F-0A6D-4AB7-974B-B037E17A7C2A}"/>
+                <a16:creationId xmlns:a16="http://schemas.microsoft.com/office/drawing/2014/main" id="{4B188218-91FB-4A19-998D-56B9D7CA2260}"/>
               </a:ext>
             </a:extLst>
           </p:cNvPr>
@@ -5751,7 +5293,7 @@
           <p:cNvPr id="21" name="正方形/長方形 20">
             <a:extLst>
               <a:ext uri="{FF2B5EF4-FFF2-40B4-BE49-F238E27FC236}">
-                <a16:creationId xmlns:a16="http://schemas.microsoft.com/office/drawing/2014/main" id="{62E18FED-4D4C-43D4-A892-BCF096CFC5A7}"/>
+                <a16:creationId xmlns:a16="http://schemas.microsoft.com/office/drawing/2014/main" id="{044516E6-BFA6-47F8-AE9E-51D0CA0C1F26}"/>
               </a:ext>
             </a:extLst>
           </p:cNvPr>
@@ -5811,7 +5353,7 @@
     </p:spTree>
     <p:extLst>
       <p:ext uri="{BB962C8B-B14F-4D97-AF65-F5344CB8AC3E}">
-        <p14:creationId xmlns:p14="http://schemas.microsoft.com/office/powerpoint/2010/main" val="1315572428"/>
+        <p14:creationId xmlns:p14="http://schemas.microsoft.com/office/powerpoint/2010/main" val="1596721236"/>
       </p:ext>
     </p:extLst>
   </p:cSld>
@@ -5851,7 +5393,7 @@
           <p:cNvPr id="66" name="正方形/長方形 65">
             <a:extLst>
               <a:ext uri="{FF2B5EF4-FFF2-40B4-BE49-F238E27FC236}">
-                <a16:creationId xmlns:a16="http://schemas.microsoft.com/office/drawing/2014/main" id="{0F640164-9D31-4015-AF22-A4544FF4976F}"/>
+                <a16:creationId xmlns:a16="http://schemas.microsoft.com/office/drawing/2014/main" id="{FDCEDD56-AA75-4DE6-815B-DA16586D9FAF}"/>
               </a:ext>
             </a:extLst>
           </p:cNvPr>
@@ -5882,7 +5424,7 @@
           <p:cNvPr id="2" name="正方形/長方形 1">
             <a:extLst>
               <a:ext uri="{FF2B5EF4-FFF2-40B4-BE49-F238E27FC236}">
-                <a16:creationId xmlns:a16="http://schemas.microsoft.com/office/drawing/2014/main" id="{9ACC2D3C-22F4-43EB-B93A-F8C631ECC6C8}"/>
+                <a16:creationId xmlns:a16="http://schemas.microsoft.com/office/drawing/2014/main" id="{A1376985-E018-4DCE-986D-DB62CE52C083}"/>
               </a:ext>
             </a:extLst>
           </p:cNvPr>
@@ -5944,7 +5486,7 @@
           <p:cNvPr id="3" name="正方形/長方形 2">
             <a:extLst>
               <a:ext uri="{FF2B5EF4-FFF2-40B4-BE49-F238E27FC236}">
-                <a16:creationId xmlns:a16="http://schemas.microsoft.com/office/drawing/2014/main" id="{1226E8AD-EBBD-49D0-824C-2D9ABE3C2A2E}"/>
+                <a16:creationId xmlns:a16="http://schemas.microsoft.com/office/drawing/2014/main" id="{12D6AE00-8721-4143-B614-23F8BCCE8A2A}"/>
               </a:ext>
             </a:extLst>
           </p:cNvPr>
@@ -6006,7 +5548,7 @@
           <p:cNvPr id="4" name="正方形/長方形 3">
             <a:extLst>
               <a:ext uri="{FF2B5EF4-FFF2-40B4-BE49-F238E27FC236}">
-                <a16:creationId xmlns:a16="http://schemas.microsoft.com/office/drawing/2014/main" id="{9FE78C1D-4F78-43B0-BCD0-0BB1C8585B65}"/>
+                <a16:creationId xmlns:a16="http://schemas.microsoft.com/office/drawing/2014/main" id="{F121B0D7-9375-493F-B2CE-E7E929E6827E}"/>
               </a:ext>
             </a:extLst>
           </p:cNvPr>
@@ -6068,7 +5610,7 @@
           <p:cNvPr id="5" name="直線コネクタ 4">
             <a:extLst>
               <a:ext uri="{FF2B5EF4-FFF2-40B4-BE49-F238E27FC236}">
-                <a16:creationId xmlns:a16="http://schemas.microsoft.com/office/drawing/2014/main" id="{8D0E7FAC-BB20-41D5-BC60-500663BC53AD}"/>
+                <a16:creationId xmlns:a16="http://schemas.microsoft.com/office/drawing/2014/main" id="{30F8C908-C8D6-4202-9836-A574F1DEFEC6}"/>
               </a:ext>
             </a:extLst>
           </p:cNvPr>
@@ -6099,7 +5641,7 @@
           <p:cNvPr id="6" name="直線コネクタ 5">
             <a:extLst>
               <a:ext uri="{FF2B5EF4-FFF2-40B4-BE49-F238E27FC236}">
-                <a16:creationId xmlns:a16="http://schemas.microsoft.com/office/drawing/2014/main" id="{7A9C53A9-3223-4933-97E3-9BE7735C1218}"/>
+                <a16:creationId xmlns:a16="http://schemas.microsoft.com/office/drawing/2014/main" id="{21BA9540-EDDE-46FE-B15C-233F3E3C832D}"/>
               </a:ext>
             </a:extLst>
           </p:cNvPr>
@@ -6130,7 +5672,7 @@
           <p:cNvPr id="7" name="正方形/長方形 6">
             <a:extLst>
               <a:ext uri="{FF2B5EF4-FFF2-40B4-BE49-F238E27FC236}">
-                <a16:creationId xmlns:a16="http://schemas.microsoft.com/office/drawing/2014/main" id="{632E5316-B538-4141-AC3D-1664FE8FE0FC}"/>
+                <a16:creationId xmlns:a16="http://schemas.microsoft.com/office/drawing/2014/main" id="{36E803DE-02AB-4000-8FFA-778E9E0FE2CF}"/>
               </a:ext>
             </a:extLst>
           </p:cNvPr>
@@ -6192,7 +5734,7 @@
           <p:cNvPr id="8" name="正方形/長方形 7">
             <a:extLst>
               <a:ext uri="{FF2B5EF4-FFF2-40B4-BE49-F238E27FC236}">
-                <a16:creationId xmlns:a16="http://schemas.microsoft.com/office/drawing/2014/main" id="{ABD8C33E-DFBB-47A9-B791-CEF4EB05B5FE}"/>
+                <a16:creationId xmlns:a16="http://schemas.microsoft.com/office/drawing/2014/main" id="{767AE8A6-D168-4C9C-9CCF-B4450A6D6126}"/>
               </a:ext>
             </a:extLst>
           </p:cNvPr>
@@ -6254,7 +5796,7 @@
           <p:cNvPr id="9" name="正方形/長方形 8">
             <a:extLst>
               <a:ext uri="{FF2B5EF4-FFF2-40B4-BE49-F238E27FC236}">
-                <a16:creationId xmlns:a16="http://schemas.microsoft.com/office/drawing/2014/main" id="{77BFBF0F-6EFD-4115-808B-8E6D6908C22A}"/>
+                <a16:creationId xmlns:a16="http://schemas.microsoft.com/office/drawing/2014/main" id="{B4A5C31F-B3D2-4F8E-BBFE-F45B7C6EBC77}"/>
               </a:ext>
             </a:extLst>
           </p:cNvPr>
@@ -6316,7 +5858,7 @@
           <p:cNvPr id="10" name="正方形/長方形 9">
             <a:extLst>
               <a:ext uri="{FF2B5EF4-FFF2-40B4-BE49-F238E27FC236}">
-                <a16:creationId xmlns:a16="http://schemas.microsoft.com/office/drawing/2014/main" id="{FA777A21-82A6-4AD9-84CF-D37B5C8221C2}"/>
+                <a16:creationId xmlns:a16="http://schemas.microsoft.com/office/drawing/2014/main" id="{E0E14C07-3029-4D83-A710-B66110D45054}"/>
               </a:ext>
             </a:extLst>
           </p:cNvPr>
@@ -6378,7 +5920,7 @@
           <p:cNvPr id="11" name="正方形/長方形 10">
             <a:extLst>
               <a:ext uri="{FF2B5EF4-FFF2-40B4-BE49-F238E27FC236}">
-                <a16:creationId xmlns:a16="http://schemas.microsoft.com/office/drawing/2014/main" id="{F2B26029-A01B-4A5D-8655-AE84859E21D4}"/>
+                <a16:creationId xmlns:a16="http://schemas.microsoft.com/office/drawing/2014/main" id="{839E0D82-E23E-468A-A8A6-8B2B5C421CC1}"/>
               </a:ext>
             </a:extLst>
           </p:cNvPr>
@@ -6411,7 +5953,7 @@
           <p:cNvPr id="12" name="正方形/長方形 11">
             <a:extLst>
               <a:ext uri="{FF2B5EF4-FFF2-40B4-BE49-F238E27FC236}">
-                <a16:creationId xmlns:a16="http://schemas.microsoft.com/office/drawing/2014/main" id="{F7C76446-E4DE-4401-ABE0-266B9155EE34}"/>
+                <a16:creationId xmlns:a16="http://schemas.microsoft.com/office/drawing/2014/main" id="{CF444C40-06E1-4489-85B8-8466B3F49582}"/>
               </a:ext>
             </a:extLst>
           </p:cNvPr>
@@ -6444,7 +5986,7 @@
           <p:cNvPr id="13" name="正方形/長方形 12">
             <a:extLst>
               <a:ext uri="{FF2B5EF4-FFF2-40B4-BE49-F238E27FC236}">
-                <a16:creationId xmlns:a16="http://schemas.microsoft.com/office/drawing/2014/main" id="{9D9AB54F-688C-4842-9ED1-1AFD635D45E4}"/>
+                <a16:creationId xmlns:a16="http://schemas.microsoft.com/office/drawing/2014/main" id="{3A30C924-3FBD-4575-90FB-DF951359B0B8}"/>
               </a:ext>
             </a:extLst>
           </p:cNvPr>
@@ -6533,7 +6075,7 @@
           <p:cNvPr id="14" name="正方形/長方形 13">
             <a:extLst>
               <a:ext uri="{FF2B5EF4-FFF2-40B4-BE49-F238E27FC236}">
-                <a16:creationId xmlns:a16="http://schemas.microsoft.com/office/drawing/2014/main" id="{FDED3C5C-9ACA-4767-A56A-1494F5D6A909}"/>
+                <a16:creationId xmlns:a16="http://schemas.microsoft.com/office/drawing/2014/main" id="{F5864854-DDEA-4101-8594-EF50F9326773}"/>
               </a:ext>
             </a:extLst>
           </p:cNvPr>
@@ -6566,7 +6108,7 @@
           <p:cNvPr id="15" name="正方形/長方形 14">
             <a:extLst>
               <a:ext uri="{FF2B5EF4-FFF2-40B4-BE49-F238E27FC236}">
-                <a16:creationId xmlns:a16="http://schemas.microsoft.com/office/drawing/2014/main" id="{8A603ECF-503F-41B7-8C99-33FCFE3D4A90}"/>
+                <a16:creationId xmlns:a16="http://schemas.microsoft.com/office/drawing/2014/main" id="{B0AA4A75-C599-4808-943F-95C2934DCE6B}"/>
               </a:ext>
             </a:extLst>
           </p:cNvPr>
@@ -6628,7 +6170,7 @@
           <p:cNvPr id="16" name="正方形/長方形 15">
             <a:extLst>
               <a:ext uri="{FF2B5EF4-FFF2-40B4-BE49-F238E27FC236}">
-                <a16:creationId xmlns:a16="http://schemas.microsoft.com/office/drawing/2014/main" id="{A56925CF-86CC-4020-B3D3-3D980B05BA29}"/>
+                <a16:creationId xmlns:a16="http://schemas.microsoft.com/office/drawing/2014/main" id="{A743F6E1-45DE-443C-BEE3-0CB66861DFEF}"/>
               </a:ext>
             </a:extLst>
           </p:cNvPr>
@@ -6661,7 +6203,7 @@
           <p:cNvPr id="17" name="正方形/長方形 16">
             <a:extLst>
               <a:ext uri="{FF2B5EF4-FFF2-40B4-BE49-F238E27FC236}">
-                <a16:creationId xmlns:a16="http://schemas.microsoft.com/office/drawing/2014/main" id="{A0A37025-45ED-42C1-AAC5-38342E0C15CE}"/>
+                <a16:creationId xmlns:a16="http://schemas.microsoft.com/office/drawing/2014/main" id="{9DD37855-4A04-4535-A6E0-1137826E14EC}"/>
               </a:ext>
             </a:extLst>
           </p:cNvPr>
@@ -6723,7 +6265,7 @@
           <p:cNvPr id="18" name="正方形/長方形 17">
             <a:extLst>
               <a:ext uri="{FF2B5EF4-FFF2-40B4-BE49-F238E27FC236}">
-                <a16:creationId xmlns:a16="http://schemas.microsoft.com/office/drawing/2014/main" id="{6A8E20E9-41DC-4C18-85C2-EBBC32071F70}"/>
+                <a16:creationId xmlns:a16="http://schemas.microsoft.com/office/drawing/2014/main" id="{AF78A7AF-0744-4453-9CE2-5D13E2E0C2B4}"/>
               </a:ext>
             </a:extLst>
           </p:cNvPr>
@@ -6756,7 +6298,7 @@
           <p:cNvPr id="19" name="正方形/長方形 18">
             <a:extLst>
               <a:ext uri="{FF2B5EF4-FFF2-40B4-BE49-F238E27FC236}">
-                <a16:creationId xmlns:a16="http://schemas.microsoft.com/office/drawing/2014/main" id="{F2E1AA67-9E95-47D1-B9A2-FA39AB65E847}"/>
+                <a16:creationId xmlns:a16="http://schemas.microsoft.com/office/drawing/2014/main" id="{3AFAB26F-2F2F-4234-823B-8E2F5AF44909}"/>
               </a:ext>
             </a:extLst>
           </p:cNvPr>
@@ -6896,7 +6438,7 @@
           <p:cNvPr id="23" name="直線コネクタ 22">
             <a:extLst>
               <a:ext uri="{FF2B5EF4-FFF2-40B4-BE49-F238E27FC236}">
-                <a16:creationId xmlns:a16="http://schemas.microsoft.com/office/drawing/2014/main" id="{06566A12-34B8-4177-8844-A732ADC2A137}"/>
+                <a16:creationId xmlns:a16="http://schemas.microsoft.com/office/drawing/2014/main" id="{A694D69A-6330-4077-A078-F757C2967F8E}"/>
               </a:ext>
             </a:extLst>
           </p:cNvPr>
@@ -6927,7 +6469,7 @@
           <p:cNvPr id="24" name="直線コネクタ 23">
             <a:extLst>
               <a:ext uri="{FF2B5EF4-FFF2-40B4-BE49-F238E27FC236}">
-                <a16:creationId xmlns:a16="http://schemas.microsoft.com/office/drawing/2014/main" id="{10B6A900-8C6F-4E95-BBDA-30F95ABEC42A}"/>
+                <a16:creationId xmlns:a16="http://schemas.microsoft.com/office/drawing/2014/main" id="{E4CED520-C4F6-4AC3-AA93-E0E9604BA915}"/>
               </a:ext>
             </a:extLst>
           </p:cNvPr>
@@ -6958,7 +6500,7 @@
           <p:cNvPr id="25" name="直線コネクタ 24">
             <a:extLst>
               <a:ext uri="{FF2B5EF4-FFF2-40B4-BE49-F238E27FC236}">
-                <a16:creationId xmlns:a16="http://schemas.microsoft.com/office/drawing/2014/main" id="{82040581-83C0-4540-AEE1-0AECF61F98D4}"/>
+                <a16:creationId xmlns:a16="http://schemas.microsoft.com/office/drawing/2014/main" id="{B2F4E2E3-E38A-452C-99A4-D8D675E64F74}"/>
               </a:ext>
             </a:extLst>
           </p:cNvPr>
@@ -6989,7 +6531,7 @@
           <p:cNvPr id="26" name="直線コネクタ 25">
             <a:extLst>
               <a:ext uri="{FF2B5EF4-FFF2-40B4-BE49-F238E27FC236}">
-                <a16:creationId xmlns:a16="http://schemas.microsoft.com/office/drawing/2014/main" id="{24F0DDE5-607D-4AA2-8CD1-8C5F9655788A}"/>
+                <a16:creationId xmlns:a16="http://schemas.microsoft.com/office/drawing/2014/main" id="{6C4EF8C7-FBEF-4BB3-8540-2D2C912E1AFB}"/>
               </a:ext>
             </a:extLst>
           </p:cNvPr>
@@ -7020,7 +6562,7 @@
           <p:cNvPr id="27" name="正方形/長方形 26">
             <a:extLst>
               <a:ext uri="{FF2B5EF4-FFF2-40B4-BE49-F238E27FC236}">
-                <a16:creationId xmlns:a16="http://schemas.microsoft.com/office/drawing/2014/main" id="{73D6B4B7-FD3F-4447-98B5-898C84A54C23}"/>
+                <a16:creationId xmlns:a16="http://schemas.microsoft.com/office/drawing/2014/main" id="{4C038BDC-3DDB-4898-8900-C8A9B0E51355}"/>
               </a:ext>
             </a:extLst>
           </p:cNvPr>
@@ -7082,7 +6624,7 @@
           <p:cNvPr id="28" name="楕円 27">
             <a:extLst>
               <a:ext uri="{FF2B5EF4-FFF2-40B4-BE49-F238E27FC236}">
-                <a16:creationId xmlns:a16="http://schemas.microsoft.com/office/drawing/2014/main" id="{C5A875B9-0BBF-4C6A-B303-7B6051A75C10}"/>
+                <a16:creationId xmlns:a16="http://schemas.microsoft.com/office/drawing/2014/main" id="{558B6FA9-23D7-4609-94ED-99F82D520ECD}"/>
               </a:ext>
             </a:extLst>
           </p:cNvPr>
@@ -7115,7 +6657,7 @@
           <p:cNvPr id="29" name="正方形/長方形 28">
             <a:extLst>
               <a:ext uri="{FF2B5EF4-FFF2-40B4-BE49-F238E27FC236}">
-                <a16:creationId xmlns:a16="http://schemas.microsoft.com/office/drawing/2014/main" id="{D2E5BF5B-FB5D-4669-9229-AF32967DF2C1}"/>
+                <a16:creationId xmlns:a16="http://schemas.microsoft.com/office/drawing/2014/main" id="{F7BA5604-71D4-4D7A-8F8D-C48CA1BE930F}"/>
               </a:ext>
             </a:extLst>
           </p:cNvPr>
@@ -7177,7 +6719,7 @@
           <p:cNvPr id="30" name="楕円 29">
             <a:extLst>
               <a:ext uri="{FF2B5EF4-FFF2-40B4-BE49-F238E27FC236}">
-                <a16:creationId xmlns:a16="http://schemas.microsoft.com/office/drawing/2014/main" id="{F872701F-D7B5-4F58-83A6-263E61CEA9B0}"/>
+                <a16:creationId xmlns:a16="http://schemas.microsoft.com/office/drawing/2014/main" id="{05E4C4A1-84D7-468D-AF11-0205EC93FA87}"/>
               </a:ext>
             </a:extLst>
           </p:cNvPr>
@@ -7210,7 +6752,7 @@
           <p:cNvPr id="31" name="正方形/長方形 30">
             <a:extLst>
               <a:ext uri="{FF2B5EF4-FFF2-40B4-BE49-F238E27FC236}">
-                <a16:creationId xmlns:a16="http://schemas.microsoft.com/office/drawing/2014/main" id="{E84CB5DE-F777-4771-99B7-F12FF62B42F5}"/>
+                <a16:creationId xmlns:a16="http://schemas.microsoft.com/office/drawing/2014/main" id="{79C2BA6D-F094-47FD-A30B-6F414E2A15DB}"/>
               </a:ext>
             </a:extLst>
           </p:cNvPr>
@@ -7272,7 +6814,7 @@
           <p:cNvPr id="32" name="楕円 31">
             <a:extLst>
               <a:ext uri="{FF2B5EF4-FFF2-40B4-BE49-F238E27FC236}">
-                <a16:creationId xmlns:a16="http://schemas.microsoft.com/office/drawing/2014/main" id="{9C966F01-E86C-415A-B2B5-319A29C89D2B}"/>
+                <a16:creationId xmlns:a16="http://schemas.microsoft.com/office/drawing/2014/main" id="{407A6EE7-1209-4C37-AB28-5DFAAFD7FC5F}"/>
               </a:ext>
             </a:extLst>
           </p:cNvPr>
@@ -7305,7 +6847,7 @@
           <p:cNvPr id="33" name="正方形/長方形 32">
             <a:extLst>
               <a:ext uri="{FF2B5EF4-FFF2-40B4-BE49-F238E27FC236}">
-                <a16:creationId xmlns:a16="http://schemas.microsoft.com/office/drawing/2014/main" id="{EA55FE91-CD75-4B54-B9A5-DBCAE07946E9}"/>
+                <a16:creationId xmlns:a16="http://schemas.microsoft.com/office/drawing/2014/main" id="{E88ED27C-B4A1-4C7E-A151-19E993747845}"/>
               </a:ext>
             </a:extLst>
           </p:cNvPr>
@@ -7367,7 +6909,7 @@
           <p:cNvPr id="34" name="正方形/長方形 33">
             <a:extLst>
               <a:ext uri="{FF2B5EF4-FFF2-40B4-BE49-F238E27FC236}">
-                <a16:creationId xmlns:a16="http://schemas.microsoft.com/office/drawing/2014/main" id="{7A19CED0-14EF-43EC-B074-6C21123861BD}"/>
+                <a16:creationId xmlns:a16="http://schemas.microsoft.com/office/drawing/2014/main" id="{011B0C99-356C-4F0D-A0A1-EF5C184F47F6}"/>
               </a:ext>
             </a:extLst>
           </p:cNvPr>
@@ -7429,7 +6971,7 @@
           <p:cNvPr id="35" name="正方形/長方形 34">
             <a:extLst>
               <a:ext uri="{FF2B5EF4-FFF2-40B4-BE49-F238E27FC236}">
-                <a16:creationId xmlns:a16="http://schemas.microsoft.com/office/drawing/2014/main" id="{651BB750-94C6-40B0-889B-9AC2B7EF0710}"/>
+                <a16:creationId xmlns:a16="http://schemas.microsoft.com/office/drawing/2014/main" id="{E328C600-EFE3-4B98-9163-50737642CE2D}"/>
               </a:ext>
             </a:extLst>
           </p:cNvPr>
@@ -7491,7 +7033,7 @@
           <p:cNvPr id="36" name="正方形/長方形 35">
             <a:extLst>
               <a:ext uri="{FF2B5EF4-FFF2-40B4-BE49-F238E27FC236}">
-                <a16:creationId xmlns:a16="http://schemas.microsoft.com/office/drawing/2014/main" id="{8452A9D8-EB5D-422C-875D-80AFB73F0423}"/>
+                <a16:creationId xmlns:a16="http://schemas.microsoft.com/office/drawing/2014/main" id="{F9D0C5BB-C5CB-4EBB-BB86-95FED770F6F9}"/>
               </a:ext>
             </a:extLst>
           </p:cNvPr>
@@ -7553,7 +7095,7 @@
           <p:cNvPr id="37" name="直線コネクタ 36">
             <a:extLst>
               <a:ext uri="{FF2B5EF4-FFF2-40B4-BE49-F238E27FC236}">
-                <a16:creationId xmlns:a16="http://schemas.microsoft.com/office/drawing/2014/main" id="{D97AFD19-019C-44D3-A517-366AF56D21BD}"/>
+                <a16:creationId xmlns:a16="http://schemas.microsoft.com/office/drawing/2014/main" id="{F410D2EC-49B4-4451-855D-0FC9C8219ACE}"/>
               </a:ext>
             </a:extLst>
           </p:cNvPr>
@@ -7584,7 +7126,7 @@
           <p:cNvPr id="38" name="直線コネクタ 37">
             <a:extLst>
               <a:ext uri="{FF2B5EF4-FFF2-40B4-BE49-F238E27FC236}">
-                <a16:creationId xmlns:a16="http://schemas.microsoft.com/office/drawing/2014/main" id="{3C5ADB11-673F-4D0E-BB21-49FB2EADEE93}"/>
+                <a16:creationId xmlns:a16="http://schemas.microsoft.com/office/drawing/2014/main" id="{5D0E46F0-3EDA-4E37-9E60-19F382D3983F}"/>
               </a:ext>
             </a:extLst>
           </p:cNvPr>
@@ -7615,7 +7157,7 @@
           <p:cNvPr id="39" name="楕円 38">
             <a:extLst>
               <a:ext uri="{FF2B5EF4-FFF2-40B4-BE49-F238E27FC236}">
-                <a16:creationId xmlns:a16="http://schemas.microsoft.com/office/drawing/2014/main" id="{2B7FA7F1-8A41-41EE-B162-3629C08CC32D}"/>
+                <a16:creationId xmlns:a16="http://schemas.microsoft.com/office/drawing/2014/main" id="{DB69C416-60F4-4C55-8E2C-BFAECB000956}"/>
               </a:ext>
             </a:extLst>
           </p:cNvPr>
@@ -7646,7 +7188,7 @@
           <p:cNvPr id="40" name="正方形/長方形 39">
             <a:extLst>
               <a:ext uri="{FF2B5EF4-FFF2-40B4-BE49-F238E27FC236}">
-                <a16:creationId xmlns:a16="http://schemas.microsoft.com/office/drawing/2014/main" id="{DAC9D301-0305-4B37-BBF2-BD4D7D1F49FA}"/>
+                <a16:creationId xmlns:a16="http://schemas.microsoft.com/office/drawing/2014/main" id="{4DBFC951-A309-41EE-8E0C-45AE4B99C126}"/>
               </a:ext>
             </a:extLst>
           </p:cNvPr>
@@ -7708,7 +7250,7 @@
           <p:cNvPr id="41" name="正方形/長方形 40">
             <a:extLst>
               <a:ext uri="{FF2B5EF4-FFF2-40B4-BE49-F238E27FC236}">
-                <a16:creationId xmlns:a16="http://schemas.microsoft.com/office/drawing/2014/main" id="{58245865-03F2-4E31-8531-8932A26CC36B}"/>
+                <a16:creationId xmlns:a16="http://schemas.microsoft.com/office/drawing/2014/main" id="{41D4B8E9-681B-4FDE-B4EA-64947E694D5C}"/>
               </a:ext>
             </a:extLst>
           </p:cNvPr>
@@ -7770,7 +7312,7 @@
           <p:cNvPr id="42" name="正方形/長方形 41">
             <a:extLst>
               <a:ext uri="{FF2B5EF4-FFF2-40B4-BE49-F238E27FC236}">
-                <a16:creationId xmlns:a16="http://schemas.microsoft.com/office/drawing/2014/main" id="{E4A7637C-94CE-4EEF-8F99-9CDD49C33186}"/>
+                <a16:creationId xmlns:a16="http://schemas.microsoft.com/office/drawing/2014/main" id="{9F5DBE7E-3434-4140-B980-AF686BC2FC8A}"/>
               </a:ext>
             </a:extLst>
           </p:cNvPr>
@@ -7832,7 +7374,7 @@
           <p:cNvPr id="43" name="直線コネクタ 42">
             <a:extLst>
               <a:ext uri="{FF2B5EF4-FFF2-40B4-BE49-F238E27FC236}">
-                <a16:creationId xmlns:a16="http://schemas.microsoft.com/office/drawing/2014/main" id="{F29FC7C6-F963-45E2-BA58-1CD555916ADC}"/>
+                <a16:creationId xmlns:a16="http://schemas.microsoft.com/office/drawing/2014/main" id="{F138A907-F005-451A-99AE-51E4B25EBC72}"/>
               </a:ext>
             </a:extLst>
           </p:cNvPr>
@@ -7863,7 +7405,7 @@
           <p:cNvPr id="44" name="楕円 43">
             <a:extLst>
               <a:ext uri="{FF2B5EF4-FFF2-40B4-BE49-F238E27FC236}">
-                <a16:creationId xmlns:a16="http://schemas.microsoft.com/office/drawing/2014/main" id="{98A13BD6-93A1-40B0-A90F-44DBAB7FB00F}"/>
+                <a16:creationId xmlns:a16="http://schemas.microsoft.com/office/drawing/2014/main" id="{CE6685D9-C90B-4A03-A5B4-EEA9A3EB6E49}"/>
               </a:ext>
             </a:extLst>
           </p:cNvPr>
@@ -7894,7 +7436,7 @@
           <p:cNvPr id="45" name="正方形/長方形 44">
             <a:extLst>
               <a:ext uri="{FF2B5EF4-FFF2-40B4-BE49-F238E27FC236}">
-                <a16:creationId xmlns:a16="http://schemas.microsoft.com/office/drawing/2014/main" id="{35FBEE4C-D55D-4F5F-B6AC-565658C5FCD6}"/>
+                <a16:creationId xmlns:a16="http://schemas.microsoft.com/office/drawing/2014/main" id="{BD726DE0-8F7D-4CFF-936A-785657DC94CE}"/>
               </a:ext>
             </a:extLst>
           </p:cNvPr>
@@ -7956,7 +7498,7 @@
           <p:cNvPr id="46" name="正方形/長方形 45">
             <a:extLst>
               <a:ext uri="{FF2B5EF4-FFF2-40B4-BE49-F238E27FC236}">
-                <a16:creationId xmlns:a16="http://schemas.microsoft.com/office/drawing/2014/main" id="{8D4C8989-8791-462D-B9DB-B8EACA49D4F3}"/>
+                <a16:creationId xmlns:a16="http://schemas.microsoft.com/office/drawing/2014/main" id="{A3646194-2068-4B10-A6EE-78605BDB86AC}"/>
               </a:ext>
             </a:extLst>
           </p:cNvPr>
@@ -8018,7 +7560,7 @@
           <p:cNvPr id="47" name="正方形/長方形 46">
             <a:extLst>
               <a:ext uri="{FF2B5EF4-FFF2-40B4-BE49-F238E27FC236}">
-                <a16:creationId xmlns:a16="http://schemas.microsoft.com/office/drawing/2014/main" id="{A00A3486-67A3-47BD-914E-6A584791FDD8}"/>
+                <a16:creationId xmlns:a16="http://schemas.microsoft.com/office/drawing/2014/main" id="{7481AE8B-4E13-4ADE-9C74-1E46E6545BE0}"/>
               </a:ext>
             </a:extLst>
           </p:cNvPr>
@@ -8080,7 +7622,7 @@
           <p:cNvPr id="48" name="直線コネクタ 47">
             <a:extLst>
               <a:ext uri="{FF2B5EF4-FFF2-40B4-BE49-F238E27FC236}">
-                <a16:creationId xmlns:a16="http://schemas.microsoft.com/office/drawing/2014/main" id="{4D6D4ED3-3AE0-42C1-99EB-AD39006A422F}"/>
+                <a16:creationId xmlns:a16="http://schemas.microsoft.com/office/drawing/2014/main" id="{91F5D624-D51A-4EA4-B3B9-AB2C142140DB}"/>
               </a:ext>
             </a:extLst>
           </p:cNvPr>
@@ -8111,7 +7653,7 @@
           <p:cNvPr id="49" name="楕円 48">
             <a:extLst>
               <a:ext uri="{FF2B5EF4-FFF2-40B4-BE49-F238E27FC236}">
-                <a16:creationId xmlns:a16="http://schemas.microsoft.com/office/drawing/2014/main" id="{044A04B4-5B0E-490D-91B0-5395B1EBBD8E}"/>
+                <a16:creationId xmlns:a16="http://schemas.microsoft.com/office/drawing/2014/main" id="{61015DDC-8399-4E21-9CE1-96CB96A0F1A5}"/>
               </a:ext>
             </a:extLst>
           </p:cNvPr>
@@ -8142,7 +7684,7 @@
           <p:cNvPr id="50" name="正方形/長方形 49">
             <a:extLst>
               <a:ext uri="{FF2B5EF4-FFF2-40B4-BE49-F238E27FC236}">
-                <a16:creationId xmlns:a16="http://schemas.microsoft.com/office/drawing/2014/main" id="{2FD5A3DA-DDCB-407F-B053-217C3AE07F29}"/>
+                <a16:creationId xmlns:a16="http://schemas.microsoft.com/office/drawing/2014/main" id="{75C5AD12-BE0F-4AC0-883D-906B553282F2}"/>
               </a:ext>
             </a:extLst>
           </p:cNvPr>
@@ -8204,7 +7746,7 @@
           <p:cNvPr id="51" name="正方形/長方形 50">
             <a:extLst>
               <a:ext uri="{FF2B5EF4-FFF2-40B4-BE49-F238E27FC236}">
-                <a16:creationId xmlns:a16="http://schemas.microsoft.com/office/drawing/2014/main" id="{FC7F0E8C-3E77-4EDF-B003-7B1D383357DE}"/>
+                <a16:creationId xmlns:a16="http://schemas.microsoft.com/office/drawing/2014/main" id="{87A34E1F-4178-4DE2-83CC-10E0C04F9E4E}"/>
               </a:ext>
             </a:extLst>
           </p:cNvPr>
@@ -8266,7 +7808,7 @@
           <p:cNvPr id="52" name="正方形/長方形 51">
             <a:extLst>
               <a:ext uri="{FF2B5EF4-FFF2-40B4-BE49-F238E27FC236}">
-                <a16:creationId xmlns:a16="http://schemas.microsoft.com/office/drawing/2014/main" id="{FCCCAB48-C86F-44B8-8F08-5D8F5485D1E5}"/>
+                <a16:creationId xmlns:a16="http://schemas.microsoft.com/office/drawing/2014/main" id="{32100A46-E8F5-46F7-A7B8-D127FC42CFAA}"/>
               </a:ext>
             </a:extLst>
           </p:cNvPr>
@@ -8328,7 +7870,7 @@
           <p:cNvPr id="53" name="正方形/長方形 52">
             <a:extLst>
               <a:ext uri="{FF2B5EF4-FFF2-40B4-BE49-F238E27FC236}">
-                <a16:creationId xmlns:a16="http://schemas.microsoft.com/office/drawing/2014/main" id="{5CD87C75-04A2-4680-859C-0C29B052209E}"/>
+                <a16:creationId xmlns:a16="http://schemas.microsoft.com/office/drawing/2014/main" id="{D19F0574-CA8A-4CB6-81A0-9B0AB5A2E30B}"/>
               </a:ext>
             </a:extLst>
           </p:cNvPr>
@@ -8359,7 +7901,7 @@
           <p:cNvPr id="54" name="正方形/長方形 53">
             <a:extLst>
               <a:ext uri="{FF2B5EF4-FFF2-40B4-BE49-F238E27FC236}">
-                <a16:creationId xmlns:a16="http://schemas.microsoft.com/office/drawing/2014/main" id="{C6A7E302-7B66-4C2B-B3BE-9A8C1227E0D1}"/>
+                <a16:creationId xmlns:a16="http://schemas.microsoft.com/office/drawing/2014/main" id="{127B53A2-8011-4883-8D54-4A9EA846EF07}"/>
               </a:ext>
             </a:extLst>
           </p:cNvPr>
@@ -8421,7 +7963,7 @@
           <p:cNvPr id="55" name="正方形/長方形 54">
             <a:extLst>
               <a:ext uri="{FF2B5EF4-FFF2-40B4-BE49-F238E27FC236}">
-                <a16:creationId xmlns:a16="http://schemas.microsoft.com/office/drawing/2014/main" id="{1D6321D5-B3A2-4134-9D13-80396E4C65A3}"/>
+                <a16:creationId xmlns:a16="http://schemas.microsoft.com/office/drawing/2014/main" id="{8235A35B-75E8-444B-92D4-0D6262C0F36C}"/>
               </a:ext>
             </a:extLst>
           </p:cNvPr>
@@ -8483,7 +8025,7 @@
           <p:cNvPr id="56" name="正方形/長方形 55">
             <a:extLst>
               <a:ext uri="{FF2B5EF4-FFF2-40B4-BE49-F238E27FC236}">
-                <a16:creationId xmlns:a16="http://schemas.microsoft.com/office/drawing/2014/main" id="{FD49796A-3A7D-41C6-B4A3-FB06453508ED}"/>
+                <a16:creationId xmlns:a16="http://schemas.microsoft.com/office/drawing/2014/main" id="{7ABE0983-DD8E-4307-A70F-54997F50BE18}"/>
               </a:ext>
             </a:extLst>
           </p:cNvPr>
@@ -8545,7 +8087,7 @@
           <p:cNvPr id="57" name="直線コネクタ 56">
             <a:extLst>
               <a:ext uri="{FF2B5EF4-FFF2-40B4-BE49-F238E27FC236}">
-                <a16:creationId xmlns:a16="http://schemas.microsoft.com/office/drawing/2014/main" id="{A42565C8-32DD-43A1-8C34-5829D54CFF54}"/>
+                <a16:creationId xmlns:a16="http://schemas.microsoft.com/office/drawing/2014/main" id="{5D25142B-9F49-4324-9A86-5CC56524023E}"/>
               </a:ext>
             </a:extLst>
           </p:cNvPr>
@@ -8576,7 +8118,7 @@
           <p:cNvPr id="58" name="正方形/長方形 57">
             <a:extLst>
               <a:ext uri="{FF2B5EF4-FFF2-40B4-BE49-F238E27FC236}">
-                <a16:creationId xmlns:a16="http://schemas.microsoft.com/office/drawing/2014/main" id="{16303114-775D-4A44-84C0-53AAF48117AD}"/>
+                <a16:creationId xmlns:a16="http://schemas.microsoft.com/office/drawing/2014/main" id="{AD2A4BAB-6E28-4D7C-920D-CEADA6E65272}"/>
               </a:ext>
             </a:extLst>
           </p:cNvPr>
@@ -8638,7 +8180,7 @@
           <p:cNvPr id="59" name="正方形/長方形 58">
             <a:extLst>
               <a:ext uri="{FF2B5EF4-FFF2-40B4-BE49-F238E27FC236}">
-                <a16:creationId xmlns:a16="http://schemas.microsoft.com/office/drawing/2014/main" id="{B4111508-60CD-454C-8AD0-9839A49BD6B8}"/>
+                <a16:creationId xmlns:a16="http://schemas.microsoft.com/office/drawing/2014/main" id="{1332798B-D7AA-4420-9739-67CA845AE4A0}"/>
               </a:ext>
             </a:extLst>
           </p:cNvPr>
@@ -8700,7 +8242,7 @@
           <p:cNvPr id="60" name="直線コネクタ 59">
             <a:extLst>
               <a:ext uri="{FF2B5EF4-FFF2-40B4-BE49-F238E27FC236}">
-                <a16:creationId xmlns:a16="http://schemas.microsoft.com/office/drawing/2014/main" id="{A8F7EDBA-E6DC-4FF7-8A05-0801516133B6}"/>
+                <a16:creationId xmlns:a16="http://schemas.microsoft.com/office/drawing/2014/main" id="{2B7A74A5-6A80-4A3D-831A-C172F1C1AE96}"/>
               </a:ext>
             </a:extLst>
           </p:cNvPr>
@@ -8731,7 +8273,7 @@
           <p:cNvPr id="61" name="正方形/長方形 60">
             <a:extLst>
               <a:ext uri="{FF2B5EF4-FFF2-40B4-BE49-F238E27FC236}">
-                <a16:creationId xmlns:a16="http://schemas.microsoft.com/office/drawing/2014/main" id="{E32F4877-1D3D-4566-B0F6-7FAAFC18CFDB}"/>
+                <a16:creationId xmlns:a16="http://schemas.microsoft.com/office/drawing/2014/main" id="{45DDD9FB-1B7C-403E-B436-EAE4425618DE}"/>
               </a:ext>
             </a:extLst>
           </p:cNvPr>
@@ -8793,7 +8335,7 @@
           <p:cNvPr id="62" name="正方形/長方形 61">
             <a:extLst>
               <a:ext uri="{FF2B5EF4-FFF2-40B4-BE49-F238E27FC236}">
-                <a16:creationId xmlns:a16="http://schemas.microsoft.com/office/drawing/2014/main" id="{A730AE37-072D-452D-BDFD-C660A42EA5C7}"/>
+                <a16:creationId xmlns:a16="http://schemas.microsoft.com/office/drawing/2014/main" id="{51960388-27C2-40EF-9E94-6063FB40FCA3}"/>
               </a:ext>
             </a:extLst>
           </p:cNvPr>
@@ -8855,7 +8397,7 @@
           <p:cNvPr id="63" name="直線コネクタ 62">
             <a:extLst>
               <a:ext uri="{FF2B5EF4-FFF2-40B4-BE49-F238E27FC236}">
-                <a16:creationId xmlns:a16="http://schemas.microsoft.com/office/drawing/2014/main" id="{B0FDDF91-9745-4F97-88C6-BFF79E7540ED}"/>
+                <a16:creationId xmlns:a16="http://schemas.microsoft.com/office/drawing/2014/main" id="{A4F5B083-0A8D-4781-B9D2-C4FBCEB93F50}"/>
               </a:ext>
             </a:extLst>
           </p:cNvPr>
@@ -8886,7 +8428,7 @@
           <p:cNvPr id="64" name="正方形/長方形 63">
             <a:extLst>
               <a:ext uri="{FF2B5EF4-FFF2-40B4-BE49-F238E27FC236}">
-                <a16:creationId xmlns:a16="http://schemas.microsoft.com/office/drawing/2014/main" id="{B7624BCA-D9B5-480D-B7AA-80F534576001}"/>
+                <a16:creationId xmlns:a16="http://schemas.microsoft.com/office/drawing/2014/main" id="{BAB972A5-E294-4F30-AE77-E074A866FCF4}"/>
               </a:ext>
             </a:extLst>
           </p:cNvPr>
@@ -8948,7 +8490,7 @@
           <p:cNvPr id="65" name="正方形/長方形 64">
             <a:extLst>
               <a:ext uri="{FF2B5EF4-FFF2-40B4-BE49-F238E27FC236}">
-                <a16:creationId xmlns:a16="http://schemas.microsoft.com/office/drawing/2014/main" id="{E3B79174-2972-47A7-974C-3A3E0A1EE967}"/>
+                <a16:creationId xmlns:a16="http://schemas.microsoft.com/office/drawing/2014/main" id="{414BD49D-BC19-450B-81EB-C3E78DF96FA7}"/>
               </a:ext>
             </a:extLst>
           </p:cNvPr>
@@ -9008,7 +8550,7 @@
     </p:spTree>
     <p:extLst>
       <p:ext uri="{BB962C8B-B14F-4D97-AF65-F5344CB8AC3E}">
-        <p14:creationId xmlns:p14="http://schemas.microsoft.com/office/powerpoint/2010/main" val="1372020794"/>
+        <p14:creationId xmlns:p14="http://schemas.microsoft.com/office/powerpoint/2010/main" val="1547848777"/>
       </p:ext>
     </p:extLst>
   </p:cSld>
@@ -9048,7 +8590,7 @@
           <p:cNvPr id="54" name="正方形/長方形 53">
             <a:extLst>
               <a:ext uri="{FF2B5EF4-FFF2-40B4-BE49-F238E27FC236}">
-                <a16:creationId xmlns:a16="http://schemas.microsoft.com/office/drawing/2014/main" id="{885F4BA8-99BE-4AF3-9B07-04B014FA0D5D}"/>
+                <a16:creationId xmlns:a16="http://schemas.microsoft.com/office/drawing/2014/main" id="{C8C80B79-BEC7-40A2-A6E2-4DB460E0B2E0}"/>
               </a:ext>
             </a:extLst>
           </p:cNvPr>
@@ -9079,7 +8621,7 @@
           <p:cNvPr id="2" name="正方形/長方形 1">
             <a:extLst>
               <a:ext uri="{FF2B5EF4-FFF2-40B4-BE49-F238E27FC236}">
-                <a16:creationId xmlns:a16="http://schemas.microsoft.com/office/drawing/2014/main" id="{3DE0851C-FDD2-40BB-B1FC-17AAF1C223A2}"/>
+                <a16:creationId xmlns:a16="http://schemas.microsoft.com/office/drawing/2014/main" id="{D11BF06E-32E5-4688-9FEC-50C8CBFAF02F}"/>
               </a:ext>
             </a:extLst>
           </p:cNvPr>
@@ -9141,7 +8683,7 @@
           <p:cNvPr id="3" name="正方形/長方形 2">
             <a:extLst>
               <a:ext uri="{FF2B5EF4-FFF2-40B4-BE49-F238E27FC236}">
-                <a16:creationId xmlns:a16="http://schemas.microsoft.com/office/drawing/2014/main" id="{C3D40E42-46E1-49B0-B1AF-922FD6495904}"/>
+                <a16:creationId xmlns:a16="http://schemas.microsoft.com/office/drawing/2014/main" id="{02D4723E-CF3F-420B-BD6A-6130B3ABCAF0}"/>
               </a:ext>
             </a:extLst>
           </p:cNvPr>
@@ -9203,7 +8745,7 @@
           <p:cNvPr id="4" name="正方形/長方形 3">
             <a:extLst>
               <a:ext uri="{FF2B5EF4-FFF2-40B4-BE49-F238E27FC236}">
-                <a16:creationId xmlns:a16="http://schemas.microsoft.com/office/drawing/2014/main" id="{6481E684-B00A-4633-B8C3-F16F08B94F24}"/>
+                <a16:creationId xmlns:a16="http://schemas.microsoft.com/office/drawing/2014/main" id="{0C7DDC1E-FAC1-4FB5-95C7-BD64FD291E5E}"/>
               </a:ext>
             </a:extLst>
           </p:cNvPr>
@@ -9265,7 +8807,7 @@
           <p:cNvPr id="5" name="直線コネクタ 4">
             <a:extLst>
               <a:ext uri="{FF2B5EF4-FFF2-40B4-BE49-F238E27FC236}">
-                <a16:creationId xmlns:a16="http://schemas.microsoft.com/office/drawing/2014/main" id="{A3EADA99-384A-471C-A3E8-039D507E9B82}"/>
+                <a16:creationId xmlns:a16="http://schemas.microsoft.com/office/drawing/2014/main" id="{57A81267-5BC9-4CB5-8BC3-6687D5817CB9}"/>
               </a:ext>
             </a:extLst>
           </p:cNvPr>
@@ -9296,7 +8838,7 @@
           <p:cNvPr id="6" name="直線コネクタ 5">
             <a:extLst>
               <a:ext uri="{FF2B5EF4-FFF2-40B4-BE49-F238E27FC236}">
-                <a16:creationId xmlns:a16="http://schemas.microsoft.com/office/drawing/2014/main" id="{DEF88BF4-6DC0-49A4-B674-5F4168DA7CC1}"/>
+                <a16:creationId xmlns:a16="http://schemas.microsoft.com/office/drawing/2014/main" id="{AF2AAD9C-8886-4EBB-9DBC-BF4A61284E5D}"/>
               </a:ext>
             </a:extLst>
           </p:cNvPr>
@@ -9327,7 +8869,7 @@
           <p:cNvPr id="7" name="正方形/長方形 6">
             <a:extLst>
               <a:ext uri="{FF2B5EF4-FFF2-40B4-BE49-F238E27FC236}">
-                <a16:creationId xmlns:a16="http://schemas.microsoft.com/office/drawing/2014/main" id="{2FF9D606-F44F-4A62-AA24-7FBA6B333B8D}"/>
+                <a16:creationId xmlns:a16="http://schemas.microsoft.com/office/drawing/2014/main" id="{89951BC6-C912-4526-B1B5-D5C6F27DBB4E}"/>
               </a:ext>
             </a:extLst>
           </p:cNvPr>
@@ -9389,7 +8931,7 @@
           <p:cNvPr id="8" name="正方形/長方形 7">
             <a:extLst>
               <a:ext uri="{FF2B5EF4-FFF2-40B4-BE49-F238E27FC236}">
-                <a16:creationId xmlns:a16="http://schemas.microsoft.com/office/drawing/2014/main" id="{0ABDEA4A-258A-4F63-A54F-8A0DA62469CF}"/>
+                <a16:creationId xmlns:a16="http://schemas.microsoft.com/office/drawing/2014/main" id="{01706295-1D6F-4B34-989B-80C0D5E52E80}"/>
               </a:ext>
             </a:extLst>
           </p:cNvPr>
@@ -9451,7 +8993,7 @@
           <p:cNvPr id="9" name="正方形/長方形 8">
             <a:extLst>
               <a:ext uri="{FF2B5EF4-FFF2-40B4-BE49-F238E27FC236}">
-                <a16:creationId xmlns:a16="http://schemas.microsoft.com/office/drawing/2014/main" id="{1A2AB6C5-16B0-4144-8721-F6D28052B325}"/>
+                <a16:creationId xmlns:a16="http://schemas.microsoft.com/office/drawing/2014/main" id="{8843B2E5-D7E5-4954-A3BD-3E1D289778F5}"/>
               </a:ext>
             </a:extLst>
           </p:cNvPr>
@@ -9513,7 +9055,7 @@
           <p:cNvPr id="10" name="正方形/長方形 9">
             <a:extLst>
               <a:ext uri="{FF2B5EF4-FFF2-40B4-BE49-F238E27FC236}">
-                <a16:creationId xmlns:a16="http://schemas.microsoft.com/office/drawing/2014/main" id="{E5C94DB5-4D19-4F6B-BBDB-EA9CBBFE8126}"/>
+                <a16:creationId xmlns:a16="http://schemas.microsoft.com/office/drawing/2014/main" id="{30A857D3-1F37-47A1-8DE4-5997F672B713}"/>
               </a:ext>
             </a:extLst>
           </p:cNvPr>
@@ -9546,7 +9088,7 @@
           <p:cNvPr id="11" name="正方形/長方形 10">
             <a:extLst>
               <a:ext uri="{FF2B5EF4-FFF2-40B4-BE49-F238E27FC236}">
-                <a16:creationId xmlns:a16="http://schemas.microsoft.com/office/drawing/2014/main" id="{D3F1585F-ECD4-4721-81FA-DC7A5047DFFB}"/>
+                <a16:creationId xmlns:a16="http://schemas.microsoft.com/office/drawing/2014/main" id="{07278605-1A16-4307-AD3D-82592F6BCA53}"/>
               </a:ext>
             </a:extLst>
           </p:cNvPr>
@@ -9577,7 +9119,7 @@
           <p:cNvPr id="12" name="正方形/長方形 11">
             <a:extLst>
               <a:ext uri="{FF2B5EF4-FFF2-40B4-BE49-F238E27FC236}">
-                <a16:creationId xmlns:a16="http://schemas.microsoft.com/office/drawing/2014/main" id="{4C8EFB3B-8482-4DE0-9806-C6C8503EC859}"/>
+                <a16:creationId xmlns:a16="http://schemas.microsoft.com/office/drawing/2014/main" id="{854D605F-2283-4D70-96F4-3AEA15B8AA4E}"/>
               </a:ext>
             </a:extLst>
           </p:cNvPr>
@@ -9639,7 +9181,7 @@
           <p:cNvPr id="13" name="正方形/長方形 12">
             <a:extLst>
               <a:ext uri="{FF2B5EF4-FFF2-40B4-BE49-F238E27FC236}">
-                <a16:creationId xmlns:a16="http://schemas.microsoft.com/office/drawing/2014/main" id="{ADB9CA85-B523-4F5C-A502-3048E5032A5F}"/>
+                <a16:creationId xmlns:a16="http://schemas.microsoft.com/office/drawing/2014/main" id="{BEF99A81-5ABF-43A5-9D00-10C9829EC6D7}"/>
               </a:ext>
             </a:extLst>
           </p:cNvPr>
@@ -9701,7 +9243,7 @@
           <p:cNvPr id="14" name="正方形/長方形 13">
             <a:extLst>
               <a:ext uri="{FF2B5EF4-FFF2-40B4-BE49-F238E27FC236}">
-                <a16:creationId xmlns:a16="http://schemas.microsoft.com/office/drawing/2014/main" id="{9DC8A17A-44C0-4814-A3F8-1243B98AF201}"/>
+                <a16:creationId xmlns:a16="http://schemas.microsoft.com/office/drawing/2014/main" id="{3ABFBCEF-0809-4F72-B543-0F6A698034D2}"/>
               </a:ext>
             </a:extLst>
           </p:cNvPr>
@@ -9734,7 +9276,7 @@
           <p:cNvPr id="15" name="正方形/長方形 14">
             <a:extLst>
               <a:ext uri="{FF2B5EF4-FFF2-40B4-BE49-F238E27FC236}">
-                <a16:creationId xmlns:a16="http://schemas.microsoft.com/office/drawing/2014/main" id="{22E064AF-11A0-4E29-9F6A-F235F2116ADA}"/>
+                <a16:creationId xmlns:a16="http://schemas.microsoft.com/office/drawing/2014/main" id="{8AEA8CF1-2D3E-489F-AC8A-3FC9D02CB69C}"/>
               </a:ext>
             </a:extLst>
           </p:cNvPr>
@@ -9765,7 +9307,7 @@
           <p:cNvPr id="16" name="正方形/長方形 15">
             <a:extLst>
               <a:ext uri="{FF2B5EF4-FFF2-40B4-BE49-F238E27FC236}">
-                <a16:creationId xmlns:a16="http://schemas.microsoft.com/office/drawing/2014/main" id="{6936A061-D9C9-44A8-9B0E-FC91D3D6FDAB}"/>
+                <a16:creationId xmlns:a16="http://schemas.microsoft.com/office/drawing/2014/main" id="{285C7F8A-3120-415E-A570-98AEACBF26BB}"/>
               </a:ext>
             </a:extLst>
           </p:cNvPr>
@@ -9827,7 +9369,7 @@
           <p:cNvPr id="17" name="正方形/長方形 16">
             <a:extLst>
               <a:ext uri="{FF2B5EF4-FFF2-40B4-BE49-F238E27FC236}">
-                <a16:creationId xmlns:a16="http://schemas.microsoft.com/office/drawing/2014/main" id="{9A8B42D9-D6CB-4197-90E1-4037A469E6E2}"/>
+                <a16:creationId xmlns:a16="http://schemas.microsoft.com/office/drawing/2014/main" id="{EF8C6CEE-4C5F-42AC-8B0A-0367A432474D}"/>
               </a:ext>
             </a:extLst>
           </p:cNvPr>
@@ -9889,7 +9431,7 @@
           <p:cNvPr id="18" name="正方形/長方形 17">
             <a:extLst>
               <a:ext uri="{FF2B5EF4-FFF2-40B4-BE49-F238E27FC236}">
-                <a16:creationId xmlns:a16="http://schemas.microsoft.com/office/drawing/2014/main" id="{BDD442F6-9AD0-49F5-860B-162257535310}"/>
+                <a16:creationId xmlns:a16="http://schemas.microsoft.com/office/drawing/2014/main" id="{268D6F80-EFF0-483C-984D-CBD71DAFCC4F}"/>
               </a:ext>
             </a:extLst>
           </p:cNvPr>
@@ -9922,7 +9464,7 @@
           <p:cNvPr id="19" name="正方形/長方形 18">
             <a:extLst>
               <a:ext uri="{FF2B5EF4-FFF2-40B4-BE49-F238E27FC236}">
-                <a16:creationId xmlns:a16="http://schemas.microsoft.com/office/drawing/2014/main" id="{210C1283-40B0-4D04-82C3-84BDFAD35A57}"/>
+                <a16:creationId xmlns:a16="http://schemas.microsoft.com/office/drawing/2014/main" id="{2E37842F-7766-4A0D-8505-C059F38E0339}"/>
               </a:ext>
             </a:extLst>
           </p:cNvPr>
@@ -9953,7 +9495,7 @@
           <p:cNvPr id="20" name="正方形/長方形 19">
             <a:extLst>
               <a:ext uri="{FF2B5EF4-FFF2-40B4-BE49-F238E27FC236}">
-                <a16:creationId xmlns:a16="http://schemas.microsoft.com/office/drawing/2014/main" id="{234A7902-E4AA-41A5-9D47-546A175D1A3C}"/>
+                <a16:creationId xmlns:a16="http://schemas.microsoft.com/office/drawing/2014/main" id="{D7B969FF-1C3A-43E7-99D0-47A65D89108D}"/>
               </a:ext>
             </a:extLst>
           </p:cNvPr>
@@ -10015,7 +9557,7 @@
           <p:cNvPr id="21" name="正方形/長方形 20">
             <a:extLst>
               <a:ext uri="{FF2B5EF4-FFF2-40B4-BE49-F238E27FC236}">
-                <a16:creationId xmlns:a16="http://schemas.microsoft.com/office/drawing/2014/main" id="{1E39E50B-7606-4433-8610-F4E49E627153}"/>
+                <a16:creationId xmlns:a16="http://schemas.microsoft.com/office/drawing/2014/main" id="{152C67BD-4B87-4965-BD1B-3FFDD5446E49}"/>
               </a:ext>
             </a:extLst>
           </p:cNvPr>
@@ -10077,7 +9619,7 @@
           <p:cNvPr id="22" name="正方形/長方形 21">
             <a:extLst>
               <a:ext uri="{FF2B5EF4-FFF2-40B4-BE49-F238E27FC236}">
-                <a16:creationId xmlns:a16="http://schemas.microsoft.com/office/drawing/2014/main" id="{55F522E3-2E34-47C3-B9CE-9632EDD19F90}"/>
+                <a16:creationId xmlns:a16="http://schemas.microsoft.com/office/drawing/2014/main" id="{6785FCF7-CD34-4813-8C38-5272D510025A}"/>
               </a:ext>
             </a:extLst>
           </p:cNvPr>
@@ -10110,7 +9652,7 @@
           <p:cNvPr id="23" name="正方形/長方形 22">
             <a:extLst>
               <a:ext uri="{FF2B5EF4-FFF2-40B4-BE49-F238E27FC236}">
-                <a16:creationId xmlns:a16="http://schemas.microsoft.com/office/drawing/2014/main" id="{649B2537-9F97-4962-AD6C-146730DE5539}"/>
+                <a16:creationId xmlns:a16="http://schemas.microsoft.com/office/drawing/2014/main" id="{9AD05574-B413-4252-AA0B-1CF41A2F1872}"/>
               </a:ext>
             </a:extLst>
           </p:cNvPr>
@@ -10141,7 +9683,7 @@
           <p:cNvPr id="24" name="正方形/長方形 23">
             <a:extLst>
               <a:ext uri="{FF2B5EF4-FFF2-40B4-BE49-F238E27FC236}">
-                <a16:creationId xmlns:a16="http://schemas.microsoft.com/office/drawing/2014/main" id="{1FB83B37-0B5F-418A-8B75-4794F9044E9E}"/>
+                <a16:creationId xmlns:a16="http://schemas.microsoft.com/office/drawing/2014/main" id="{C0641A17-2320-4B77-B847-9BEBC76737BF}"/>
               </a:ext>
             </a:extLst>
           </p:cNvPr>
@@ -10203,7 +9745,7 @@
           <p:cNvPr id="25" name="正方形/長方形 24">
             <a:extLst>
               <a:ext uri="{FF2B5EF4-FFF2-40B4-BE49-F238E27FC236}">
-                <a16:creationId xmlns:a16="http://schemas.microsoft.com/office/drawing/2014/main" id="{23074AF1-0180-40DB-808D-AC5E4C080F11}"/>
+                <a16:creationId xmlns:a16="http://schemas.microsoft.com/office/drawing/2014/main" id="{0F37E18E-7D10-4F74-B607-81B2E588D735}"/>
               </a:ext>
             </a:extLst>
           </p:cNvPr>
@@ -10265,7 +9807,7 @@
           <p:cNvPr id="26" name="正方形/長方形 25">
             <a:extLst>
               <a:ext uri="{FF2B5EF4-FFF2-40B4-BE49-F238E27FC236}">
-                <a16:creationId xmlns:a16="http://schemas.microsoft.com/office/drawing/2014/main" id="{DD459DEC-4822-4EF8-8193-AE92A711D356}"/>
+                <a16:creationId xmlns:a16="http://schemas.microsoft.com/office/drawing/2014/main" id="{B6CEC407-049B-421C-BFFA-012D2D66ACFF}"/>
               </a:ext>
             </a:extLst>
           </p:cNvPr>
@@ -10298,7 +9840,7 @@
           <p:cNvPr id="27" name="正方形/長方形 26">
             <a:extLst>
               <a:ext uri="{FF2B5EF4-FFF2-40B4-BE49-F238E27FC236}">
-                <a16:creationId xmlns:a16="http://schemas.microsoft.com/office/drawing/2014/main" id="{D1F0BA40-AB44-436D-90C9-39E4CE52EAA2}"/>
+                <a16:creationId xmlns:a16="http://schemas.microsoft.com/office/drawing/2014/main" id="{CFE358F8-8849-442E-8CF3-8430D80ED554}"/>
               </a:ext>
             </a:extLst>
           </p:cNvPr>
@@ -10329,7 +9871,7 @@
           <p:cNvPr id="28" name="正方形/長方形 27">
             <a:extLst>
               <a:ext uri="{FF2B5EF4-FFF2-40B4-BE49-F238E27FC236}">
-                <a16:creationId xmlns:a16="http://schemas.microsoft.com/office/drawing/2014/main" id="{F630E326-E7FC-437A-BFF5-D74824B7E7EC}"/>
+                <a16:creationId xmlns:a16="http://schemas.microsoft.com/office/drawing/2014/main" id="{27806D9E-B19C-4852-9E77-71175BEB9344}"/>
               </a:ext>
             </a:extLst>
           </p:cNvPr>
@@ -10391,7 +9933,7 @@
           <p:cNvPr id="29" name="正方形/長方形 28">
             <a:extLst>
               <a:ext uri="{FF2B5EF4-FFF2-40B4-BE49-F238E27FC236}">
-                <a16:creationId xmlns:a16="http://schemas.microsoft.com/office/drawing/2014/main" id="{D8C472EC-5D2B-46B7-9C81-C7EDCCC49973}"/>
+                <a16:creationId xmlns:a16="http://schemas.microsoft.com/office/drawing/2014/main" id="{70BEE60D-78C5-4352-B5C2-523111651EDF}"/>
               </a:ext>
             </a:extLst>
           </p:cNvPr>
@@ -10557,7 +10099,7 @@
           <p:cNvPr id="34" name="正方形/長方形 33">
             <a:extLst>
               <a:ext uri="{FF2B5EF4-FFF2-40B4-BE49-F238E27FC236}">
-                <a16:creationId xmlns:a16="http://schemas.microsoft.com/office/drawing/2014/main" id="{5B5F49A0-9F10-4DCA-A442-EA876E848C70}"/>
+                <a16:creationId xmlns:a16="http://schemas.microsoft.com/office/drawing/2014/main" id="{4ACBB506-4A91-4CA6-BB2A-C0CF29B18C30}"/>
               </a:ext>
             </a:extLst>
           </p:cNvPr>
@@ -10588,7 +10130,7 @@
           <p:cNvPr id="35" name="正方形/長方形 34">
             <a:extLst>
               <a:ext uri="{FF2B5EF4-FFF2-40B4-BE49-F238E27FC236}">
-                <a16:creationId xmlns:a16="http://schemas.microsoft.com/office/drawing/2014/main" id="{BDCFBCF2-7151-4FD2-8467-123908443641}"/>
+                <a16:creationId xmlns:a16="http://schemas.microsoft.com/office/drawing/2014/main" id="{76B824F3-78A0-42D3-8C55-16FEEF78A664}"/>
               </a:ext>
             </a:extLst>
           </p:cNvPr>
@@ -10650,7 +10192,7 @@
           <p:cNvPr id="36" name="正方形/長方形 35">
             <a:extLst>
               <a:ext uri="{FF2B5EF4-FFF2-40B4-BE49-F238E27FC236}">
-                <a16:creationId xmlns:a16="http://schemas.microsoft.com/office/drawing/2014/main" id="{8797BA36-41EC-4724-B81B-2B967796ADC6}"/>
+                <a16:creationId xmlns:a16="http://schemas.microsoft.com/office/drawing/2014/main" id="{BA6E64E6-C995-405A-A102-D6B36EC7F601}"/>
               </a:ext>
             </a:extLst>
           </p:cNvPr>
@@ -10712,7 +10254,7 @@
           <p:cNvPr id="37" name="正方形/長方形 36">
             <a:extLst>
               <a:ext uri="{FF2B5EF4-FFF2-40B4-BE49-F238E27FC236}">
-                <a16:creationId xmlns:a16="http://schemas.microsoft.com/office/drawing/2014/main" id="{30AF3585-5966-47EE-85CE-CC33B55ABEF2}"/>
+                <a16:creationId xmlns:a16="http://schemas.microsoft.com/office/drawing/2014/main" id="{533F31D1-4A0F-4977-B4F3-5F4DE28AB6F5}"/>
               </a:ext>
             </a:extLst>
           </p:cNvPr>
@@ -10774,7 +10316,7 @@
           <p:cNvPr id="38" name="正方形/長方形 37">
             <a:extLst>
               <a:ext uri="{FF2B5EF4-FFF2-40B4-BE49-F238E27FC236}">
-                <a16:creationId xmlns:a16="http://schemas.microsoft.com/office/drawing/2014/main" id="{B5A618ED-A25B-4953-9C60-98E0A1B05F09}"/>
+                <a16:creationId xmlns:a16="http://schemas.microsoft.com/office/drawing/2014/main" id="{A1902167-4F80-4917-A6B5-1806DFBC53FD}"/>
               </a:ext>
             </a:extLst>
           </p:cNvPr>
@@ -10807,7 +10349,7 @@
           <p:cNvPr id="39" name="正方形/長方形 38">
             <a:extLst>
               <a:ext uri="{FF2B5EF4-FFF2-40B4-BE49-F238E27FC236}">
-                <a16:creationId xmlns:a16="http://schemas.microsoft.com/office/drawing/2014/main" id="{ECD55F42-7F19-467B-B427-94CA7A8BAF18}"/>
+                <a16:creationId xmlns:a16="http://schemas.microsoft.com/office/drawing/2014/main" id="{C39DFEC1-8CEF-4029-8C71-025C196433B0}"/>
               </a:ext>
             </a:extLst>
           </p:cNvPr>
@@ -10869,7 +10411,7 @@
           <p:cNvPr id="40" name="正方形/長方形 39">
             <a:extLst>
               <a:ext uri="{FF2B5EF4-FFF2-40B4-BE49-F238E27FC236}">
-                <a16:creationId xmlns:a16="http://schemas.microsoft.com/office/drawing/2014/main" id="{24FDD533-A54E-4FA0-B83F-68288CA343E7}"/>
+                <a16:creationId xmlns:a16="http://schemas.microsoft.com/office/drawing/2014/main" id="{2F1D1866-407C-4EEF-BDD3-14C3F5F212AE}"/>
               </a:ext>
             </a:extLst>
           </p:cNvPr>
@@ -10985,7 +10527,7 @@
           <p:cNvPr id="41" name="正方形/長方形 40">
             <a:extLst>
               <a:ext uri="{FF2B5EF4-FFF2-40B4-BE49-F238E27FC236}">
-                <a16:creationId xmlns:a16="http://schemas.microsoft.com/office/drawing/2014/main" id="{15A54768-6CB0-4B54-BC64-4F07FAB438F8}"/>
+                <a16:creationId xmlns:a16="http://schemas.microsoft.com/office/drawing/2014/main" id="{DF010814-5713-41C0-A836-76B27F1084C7}"/>
               </a:ext>
             </a:extLst>
           </p:cNvPr>
@@ -11018,7 +10560,7 @@
           <p:cNvPr id="42" name="正方形/長方形 41">
             <a:extLst>
               <a:ext uri="{FF2B5EF4-FFF2-40B4-BE49-F238E27FC236}">
-                <a16:creationId xmlns:a16="http://schemas.microsoft.com/office/drawing/2014/main" id="{8A4AA386-1484-45F5-847F-43E27497196F}"/>
+                <a16:creationId xmlns:a16="http://schemas.microsoft.com/office/drawing/2014/main" id="{9D18A012-7E7F-4B40-8DA4-598D3665B0E8}"/>
               </a:ext>
             </a:extLst>
           </p:cNvPr>
@@ -11080,7 +10622,7 @@
           <p:cNvPr id="43" name="正方形/長方形 42">
             <a:extLst>
               <a:ext uri="{FF2B5EF4-FFF2-40B4-BE49-F238E27FC236}">
-                <a16:creationId xmlns:a16="http://schemas.microsoft.com/office/drawing/2014/main" id="{CF535A22-E3F0-48A6-B905-FA5CEE0044F0}"/>
+                <a16:creationId xmlns:a16="http://schemas.microsoft.com/office/drawing/2014/main" id="{9C0EF796-9631-40CB-8567-E81A1ED492EB}"/>
               </a:ext>
             </a:extLst>
           </p:cNvPr>
@@ -11142,7 +10684,7 @@
           <p:cNvPr id="44" name="正方形/長方形 43">
             <a:extLst>
               <a:ext uri="{FF2B5EF4-FFF2-40B4-BE49-F238E27FC236}">
-                <a16:creationId xmlns:a16="http://schemas.microsoft.com/office/drawing/2014/main" id="{461C1CAC-1C5E-4136-B677-06D87064D3D5}"/>
+                <a16:creationId xmlns:a16="http://schemas.microsoft.com/office/drawing/2014/main" id="{B317BAC7-0423-41C9-9946-86D8FFAAE850}"/>
               </a:ext>
             </a:extLst>
           </p:cNvPr>
@@ -11204,7 +10746,7 @@
           <p:cNvPr id="45" name="正方形/長方形 44">
             <a:extLst>
               <a:ext uri="{FF2B5EF4-FFF2-40B4-BE49-F238E27FC236}">
-                <a16:creationId xmlns:a16="http://schemas.microsoft.com/office/drawing/2014/main" id="{286ACE62-F436-4CE6-8313-83BBF1E47714}"/>
+                <a16:creationId xmlns:a16="http://schemas.microsoft.com/office/drawing/2014/main" id="{9472454F-3086-4738-A14A-81B0A27FD420}"/>
               </a:ext>
             </a:extLst>
           </p:cNvPr>
@@ -11237,7 +10779,7 @@
           <p:cNvPr id="46" name="正方形/長方形 45">
             <a:extLst>
               <a:ext uri="{FF2B5EF4-FFF2-40B4-BE49-F238E27FC236}">
-                <a16:creationId xmlns:a16="http://schemas.microsoft.com/office/drawing/2014/main" id="{C1B9223D-BC26-4A24-8FF2-A97081E1365E}"/>
+                <a16:creationId xmlns:a16="http://schemas.microsoft.com/office/drawing/2014/main" id="{88D39284-4C5E-4E96-AEA1-C16CE7D2EE8E}"/>
               </a:ext>
             </a:extLst>
           </p:cNvPr>
@@ -11299,7 +10841,7 @@
           <p:cNvPr id="47" name="正方形/長方形 46">
             <a:extLst>
               <a:ext uri="{FF2B5EF4-FFF2-40B4-BE49-F238E27FC236}">
-                <a16:creationId xmlns:a16="http://schemas.microsoft.com/office/drawing/2014/main" id="{37B78822-3D7A-411A-B075-338BFD14D9F2}"/>
+                <a16:creationId xmlns:a16="http://schemas.microsoft.com/office/drawing/2014/main" id="{26DC8C97-1400-43BB-9A32-B55BB61608C1}"/>
               </a:ext>
             </a:extLst>
           </p:cNvPr>
@@ -11361,7 +10903,7 @@
           <p:cNvPr id="48" name="正方形/長方形 47">
             <a:extLst>
               <a:ext uri="{FF2B5EF4-FFF2-40B4-BE49-F238E27FC236}">
-                <a16:creationId xmlns:a16="http://schemas.microsoft.com/office/drawing/2014/main" id="{6CB73E6B-9BC3-43BD-89B8-9884688766E9}"/>
+                <a16:creationId xmlns:a16="http://schemas.microsoft.com/office/drawing/2014/main" id="{B4DFF9DE-E676-40BF-8A3E-B9AAFE9FF3B9}"/>
               </a:ext>
             </a:extLst>
           </p:cNvPr>
@@ -11475,7 +11017,7 @@
           <p:cNvPr id="51" name="直線コネクタ 50">
             <a:extLst>
               <a:ext uri="{FF2B5EF4-FFF2-40B4-BE49-F238E27FC236}">
-                <a16:creationId xmlns:a16="http://schemas.microsoft.com/office/drawing/2014/main" id="{7C016C1E-8879-459F-8C2A-EA26BDAB273A}"/>
+                <a16:creationId xmlns:a16="http://schemas.microsoft.com/office/drawing/2014/main" id="{C98F62F7-E6CB-46B1-8F30-9ABA686BB768}"/>
               </a:ext>
             </a:extLst>
           </p:cNvPr>
@@ -11506,7 +11048,7 @@
           <p:cNvPr id="52" name="正方形/長方形 51">
             <a:extLst>
               <a:ext uri="{FF2B5EF4-FFF2-40B4-BE49-F238E27FC236}">
-                <a16:creationId xmlns:a16="http://schemas.microsoft.com/office/drawing/2014/main" id="{A698F147-E897-49C4-82B0-D08B5CF33CED}"/>
+                <a16:creationId xmlns:a16="http://schemas.microsoft.com/office/drawing/2014/main" id="{98C7E521-364B-4899-AD9A-2183928794DA}"/>
               </a:ext>
             </a:extLst>
           </p:cNvPr>
@@ -11568,7 +11110,7 @@
           <p:cNvPr id="53" name="正方形/長方形 52">
             <a:extLst>
               <a:ext uri="{FF2B5EF4-FFF2-40B4-BE49-F238E27FC236}">
-                <a16:creationId xmlns:a16="http://schemas.microsoft.com/office/drawing/2014/main" id="{0E8F8019-2696-4D06-B8FD-3B42ACF8A53B}"/>
+                <a16:creationId xmlns:a16="http://schemas.microsoft.com/office/drawing/2014/main" id="{42591A7A-0234-4B2C-865A-641E4B5B6334}"/>
               </a:ext>
             </a:extLst>
           </p:cNvPr>
@@ -11628,7 +11170,7 @@
     </p:spTree>
     <p:extLst>
       <p:ext uri="{BB962C8B-B14F-4D97-AF65-F5344CB8AC3E}">
-        <p14:creationId xmlns:p14="http://schemas.microsoft.com/office/powerpoint/2010/main" val="248855842"/>
+        <p14:creationId xmlns:p14="http://schemas.microsoft.com/office/powerpoint/2010/main" val="1283391645"/>
       </p:ext>
     </p:extLst>
   </p:cSld>
@@ -11668,7 +11210,7 @@
           <p:cNvPr id="77" name="正方形/長方形 76">
             <a:extLst>
               <a:ext uri="{FF2B5EF4-FFF2-40B4-BE49-F238E27FC236}">
-                <a16:creationId xmlns:a16="http://schemas.microsoft.com/office/drawing/2014/main" id="{3C69B5A8-F0A2-4B94-812C-F0514B6C1412}"/>
+                <a16:creationId xmlns:a16="http://schemas.microsoft.com/office/drawing/2014/main" id="{928F1196-1CA9-4224-A949-D2E6EC2D7691}"/>
               </a:ext>
             </a:extLst>
           </p:cNvPr>
@@ -11699,7 +11241,7 @@
           <p:cNvPr id="2" name="正方形/長方形 1">
             <a:extLst>
               <a:ext uri="{FF2B5EF4-FFF2-40B4-BE49-F238E27FC236}">
-                <a16:creationId xmlns:a16="http://schemas.microsoft.com/office/drawing/2014/main" id="{2DEE65BC-101C-4C23-9598-BE516D8D6F01}"/>
+                <a16:creationId xmlns:a16="http://schemas.microsoft.com/office/drawing/2014/main" id="{F8463898-C48C-4656-ABA9-B773FC00ABAA}"/>
               </a:ext>
             </a:extLst>
           </p:cNvPr>
@@ -11761,7 +11303,7 @@
           <p:cNvPr id="3" name="正方形/長方形 2">
             <a:extLst>
               <a:ext uri="{FF2B5EF4-FFF2-40B4-BE49-F238E27FC236}">
-                <a16:creationId xmlns:a16="http://schemas.microsoft.com/office/drawing/2014/main" id="{E679D589-FBFF-4C7E-9959-7D32BB3E333A}"/>
+                <a16:creationId xmlns:a16="http://schemas.microsoft.com/office/drawing/2014/main" id="{C6111B70-8C05-4A50-901B-71684850CC64}"/>
               </a:ext>
             </a:extLst>
           </p:cNvPr>
@@ -11823,7 +11365,7 @@
           <p:cNvPr id="4" name="正方形/長方形 3">
             <a:extLst>
               <a:ext uri="{FF2B5EF4-FFF2-40B4-BE49-F238E27FC236}">
-                <a16:creationId xmlns:a16="http://schemas.microsoft.com/office/drawing/2014/main" id="{98623017-18AF-405A-8385-CDB1E09297E0}"/>
+                <a16:creationId xmlns:a16="http://schemas.microsoft.com/office/drawing/2014/main" id="{D2D81498-561A-4D57-9385-9D84DF27DBE6}"/>
               </a:ext>
             </a:extLst>
           </p:cNvPr>
@@ -11885,7 +11427,7 @@
           <p:cNvPr id="5" name="直線コネクタ 4">
             <a:extLst>
               <a:ext uri="{FF2B5EF4-FFF2-40B4-BE49-F238E27FC236}">
-                <a16:creationId xmlns:a16="http://schemas.microsoft.com/office/drawing/2014/main" id="{6AC6B833-B631-416C-82CC-EA22CD8D7D80}"/>
+                <a16:creationId xmlns:a16="http://schemas.microsoft.com/office/drawing/2014/main" id="{A46E10C3-62F9-4719-825A-C5298025BAD6}"/>
               </a:ext>
             </a:extLst>
           </p:cNvPr>
@@ -11916,7 +11458,7 @@
           <p:cNvPr id="6" name="直線コネクタ 5">
             <a:extLst>
               <a:ext uri="{FF2B5EF4-FFF2-40B4-BE49-F238E27FC236}">
-                <a16:creationId xmlns:a16="http://schemas.microsoft.com/office/drawing/2014/main" id="{EE038810-DB50-456D-BEF8-362E08BAF62C}"/>
+                <a16:creationId xmlns:a16="http://schemas.microsoft.com/office/drawing/2014/main" id="{080FEF97-F272-4B41-9FD6-194F624ECA44}"/>
               </a:ext>
             </a:extLst>
           </p:cNvPr>
@@ -11947,7 +11489,7 @@
           <p:cNvPr id="7" name="正方形/長方形 6">
             <a:extLst>
               <a:ext uri="{FF2B5EF4-FFF2-40B4-BE49-F238E27FC236}">
-                <a16:creationId xmlns:a16="http://schemas.microsoft.com/office/drawing/2014/main" id="{F906295D-691D-4ED7-8BB5-96A9D5BE2605}"/>
+                <a16:creationId xmlns:a16="http://schemas.microsoft.com/office/drawing/2014/main" id="{1F310BCE-B3E2-49D9-B75E-EC1C3A902C6F}"/>
               </a:ext>
             </a:extLst>
           </p:cNvPr>
@@ -12009,7 +11551,7 @@
           <p:cNvPr id="8" name="正方形/長方形 7">
             <a:extLst>
               <a:ext uri="{FF2B5EF4-FFF2-40B4-BE49-F238E27FC236}">
-                <a16:creationId xmlns:a16="http://schemas.microsoft.com/office/drawing/2014/main" id="{5F6D82F4-D77C-4A95-B942-E25AB92799AF}"/>
+                <a16:creationId xmlns:a16="http://schemas.microsoft.com/office/drawing/2014/main" id="{92468BA0-6D0A-46FE-A026-ABCC4E0BAD0C}"/>
               </a:ext>
             </a:extLst>
           </p:cNvPr>
@@ -12071,7 +11613,7 @@
           <p:cNvPr id="9" name="正方形/長方形 8">
             <a:extLst>
               <a:ext uri="{FF2B5EF4-FFF2-40B4-BE49-F238E27FC236}">
-                <a16:creationId xmlns:a16="http://schemas.microsoft.com/office/drawing/2014/main" id="{1001316D-BF0D-41C0-A480-0F4128A99093}"/>
+                <a16:creationId xmlns:a16="http://schemas.microsoft.com/office/drawing/2014/main" id="{692D057C-D9F0-4EC2-BCBA-3D9B611D1C38}"/>
               </a:ext>
             </a:extLst>
           </p:cNvPr>
@@ -12133,7 +11675,7 @@
           <p:cNvPr id="10" name="正方形/長方形 9">
             <a:extLst>
               <a:ext uri="{FF2B5EF4-FFF2-40B4-BE49-F238E27FC236}">
-                <a16:creationId xmlns:a16="http://schemas.microsoft.com/office/drawing/2014/main" id="{5E92F6FE-B32F-4953-BCEF-E6A36DEABA0C}"/>
+                <a16:creationId xmlns:a16="http://schemas.microsoft.com/office/drawing/2014/main" id="{ACA05F0B-209C-4523-881A-21D105758027}"/>
               </a:ext>
             </a:extLst>
           </p:cNvPr>
@@ -12195,7 +11737,7 @@
           <p:cNvPr id="11" name="正方形/長方形 10">
             <a:extLst>
               <a:ext uri="{FF2B5EF4-FFF2-40B4-BE49-F238E27FC236}">
-                <a16:creationId xmlns:a16="http://schemas.microsoft.com/office/drawing/2014/main" id="{941BB32C-3942-4474-9AF8-167E1180F5FD}"/>
+                <a16:creationId xmlns:a16="http://schemas.microsoft.com/office/drawing/2014/main" id="{088E704B-E7CC-4D97-8EC0-136393DFE3F6}"/>
               </a:ext>
             </a:extLst>
           </p:cNvPr>
@@ -12228,7 +11770,7 @@
           <p:cNvPr id="12" name="楕円 11">
             <a:extLst>
               <a:ext uri="{FF2B5EF4-FFF2-40B4-BE49-F238E27FC236}">
-                <a16:creationId xmlns:a16="http://schemas.microsoft.com/office/drawing/2014/main" id="{1E5F1506-3EBE-429B-A028-C611AFBC4161}"/>
+                <a16:creationId xmlns:a16="http://schemas.microsoft.com/office/drawing/2014/main" id="{62EA39C6-820C-415B-88D5-2AAAA69992C5}"/>
               </a:ext>
             </a:extLst>
           </p:cNvPr>
@@ -12261,7 +11803,7 @@
           <p:cNvPr id="13" name="正方形/長方形 12">
             <a:extLst>
               <a:ext uri="{FF2B5EF4-FFF2-40B4-BE49-F238E27FC236}">
-                <a16:creationId xmlns:a16="http://schemas.microsoft.com/office/drawing/2014/main" id="{B3353F4E-D968-4935-996B-A28BF8FDDE9A}"/>
+                <a16:creationId xmlns:a16="http://schemas.microsoft.com/office/drawing/2014/main" id="{BCFD68C0-D13C-418A-9F73-9D1412FD2860}"/>
               </a:ext>
             </a:extLst>
           </p:cNvPr>
@@ -12323,7 +11865,7 @@
           <p:cNvPr id="14" name="正方形/長方形 13">
             <a:extLst>
               <a:ext uri="{FF2B5EF4-FFF2-40B4-BE49-F238E27FC236}">
-                <a16:creationId xmlns:a16="http://schemas.microsoft.com/office/drawing/2014/main" id="{C57D002D-E0D4-4542-8FFC-EA12D06FC7CE}"/>
+                <a16:creationId xmlns:a16="http://schemas.microsoft.com/office/drawing/2014/main" id="{668EAF0A-0672-4621-A046-EC3AEEE74D7C}"/>
               </a:ext>
             </a:extLst>
           </p:cNvPr>
@@ -12385,7 +11927,7 @@
           <p:cNvPr id="15" name="楕円 14">
             <a:extLst>
               <a:ext uri="{FF2B5EF4-FFF2-40B4-BE49-F238E27FC236}">
-                <a16:creationId xmlns:a16="http://schemas.microsoft.com/office/drawing/2014/main" id="{F702A54E-1387-4095-9A75-AEFBAC8C0535}"/>
+                <a16:creationId xmlns:a16="http://schemas.microsoft.com/office/drawing/2014/main" id="{77371899-775D-4195-9732-1D0B397E6830}"/>
               </a:ext>
             </a:extLst>
           </p:cNvPr>
@@ -12418,7 +11960,7 @@
           <p:cNvPr id="16" name="正方形/長方形 15">
             <a:extLst>
               <a:ext uri="{FF2B5EF4-FFF2-40B4-BE49-F238E27FC236}">
-                <a16:creationId xmlns:a16="http://schemas.microsoft.com/office/drawing/2014/main" id="{A48D5832-8FDB-4491-B0C9-26365A7824A9}"/>
+                <a16:creationId xmlns:a16="http://schemas.microsoft.com/office/drawing/2014/main" id="{E0290C32-59F3-4E25-B481-63936378346B}"/>
               </a:ext>
             </a:extLst>
           </p:cNvPr>
@@ -12480,7 +12022,7 @@
           <p:cNvPr id="17" name="正方形/長方形 16">
             <a:extLst>
               <a:ext uri="{FF2B5EF4-FFF2-40B4-BE49-F238E27FC236}">
-                <a16:creationId xmlns:a16="http://schemas.microsoft.com/office/drawing/2014/main" id="{2017A509-0F4E-4F61-A90A-E50F6902272A}"/>
+                <a16:creationId xmlns:a16="http://schemas.microsoft.com/office/drawing/2014/main" id="{E4D529E2-7982-4E45-8DD2-EEE2CC36AAC0}"/>
               </a:ext>
             </a:extLst>
           </p:cNvPr>
@@ -12542,7 +12084,7 @@
           <p:cNvPr id="18" name="楕円 17">
             <a:extLst>
               <a:ext uri="{FF2B5EF4-FFF2-40B4-BE49-F238E27FC236}">
-                <a16:creationId xmlns:a16="http://schemas.microsoft.com/office/drawing/2014/main" id="{3A81CD84-A421-4F20-91BB-7CD89C59938E}"/>
+                <a16:creationId xmlns:a16="http://schemas.microsoft.com/office/drawing/2014/main" id="{8B417041-CFC7-44EF-A2D7-AF8C62AECDA8}"/>
               </a:ext>
             </a:extLst>
           </p:cNvPr>
@@ -12575,7 +12117,7 @@
           <p:cNvPr id="19" name="正方形/長方形 18">
             <a:extLst>
               <a:ext uri="{FF2B5EF4-FFF2-40B4-BE49-F238E27FC236}">
-                <a16:creationId xmlns:a16="http://schemas.microsoft.com/office/drawing/2014/main" id="{F3E2274E-8295-46F8-A168-9717583BA4BE}"/>
+                <a16:creationId xmlns:a16="http://schemas.microsoft.com/office/drawing/2014/main" id="{B35388BC-05F9-4C3D-B0F4-8EA3043C3FEB}"/>
               </a:ext>
             </a:extLst>
           </p:cNvPr>
@@ -12637,7 +12179,7 @@
           <p:cNvPr id="20" name="正方形/長方形 19">
             <a:extLst>
               <a:ext uri="{FF2B5EF4-FFF2-40B4-BE49-F238E27FC236}">
-                <a16:creationId xmlns:a16="http://schemas.microsoft.com/office/drawing/2014/main" id="{7B0CD039-FC15-471E-A7BE-895F53C092C0}"/>
+                <a16:creationId xmlns:a16="http://schemas.microsoft.com/office/drawing/2014/main" id="{4E2C2320-CEFD-461D-B075-33870EAEF731}"/>
               </a:ext>
             </a:extLst>
           </p:cNvPr>
@@ -12699,7 +12241,7 @@
           <p:cNvPr id="21" name="楕円 20">
             <a:extLst>
               <a:ext uri="{FF2B5EF4-FFF2-40B4-BE49-F238E27FC236}">
-                <a16:creationId xmlns:a16="http://schemas.microsoft.com/office/drawing/2014/main" id="{1097B867-3185-4592-B52D-032310B7BCF3}"/>
+                <a16:creationId xmlns:a16="http://schemas.microsoft.com/office/drawing/2014/main" id="{A6D0A604-D4F1-4390-8B55-0AF0A2087FDA}"/>
               </a:ext>
             </a:extLst>
           </p:cNvPr>
@@ -12732,7 +12274,7 @@
           <p:cNvPr id="22" name="正方形/長方形 21">
             <a:extLst>
               <a:ext uri="{FF2B5EF4-FFF2-40B4-BE49-F238E27FC236}">
-                <a16:creationId xmlns:a16="http://schemas.microsoft.com/office/drawing/2014/main" id="{7BA6AE51-DBC2-465F-80CB-B8468B464A29}"/>
+                <a16:creationId xmlns:a16="http://schemas.microsoft.com/office/drawing/2014/main" id="{718A8D51-C435-46E0-B168-9E3896068D30}"/>
               </a:ext>
             </a:extLst>
           </p:cNvPr>
@@ -12794,7 +12336,7 @@
           <p:cNvPr id="23" name="正方形/長方形 22">
             <a:extLst>
               <a:ext uri="{FF2B5EF4-FFF2-40B4-BE49-F238E27FC236}">
-                <a16:creationId xmlns:a16="http://schemas.microsoft.com/office/drawing/2014/main" id="{DEF0109D-3468-492E-A046-F2A76A05FB21}"/>
+                <a16:creationId xmlns:a16="http://schemas.microsoft.com/office/drawing/2014/main" id="{4DC8770E-AE44-4659-BC80-F93B20FB9F9C}"/>
               </a:ext>
             </a:extLst>
           </p:cNvPr>
@@ -12931,7 +12473,7 @@
           <p:cNvPr id="27" name="直線コネクタ 26">
             <a:extLst>
               <a:ext uri="{FF2B5EF4-FFF2-40B4-BE49-F238E27FC236}">
-                <a16:creationId xmlns:a16="http://schemas.microsoft.com/office/drawing/2014/main" id="{1FD1A307-55FF-4667-A208-DD52FD430E8E}"/>
+                <a16:creationId xmlns:a16="http://schemas.microsoft.com/office/drawing/2014/main" id="{C18035B6-10A1-43F1-B595-7BB0751989AC}"/>
               </a:ext>
             </a:extLst>
           </p:cNvPr>
@@ -12962,7 +12504,7 @@
           <p:cNvPr id="28" name="正方形/長方形 27">
             <a:extLst>
               <a:ext uri="{FF2B5EF4-FFF2-40B4-BE49-F238E27FC236}">
-                <a16:creationId xmlns:a16="http://schemas.microsoft.com/office/drawing/2014/main" id="{1C4CD84E-B0A4-4347-AC1F-665796168C80}"/>
+                <a16:creationId xmlns:a16="http://schemas.microsoft.com/office/drawing/2014/main" id="{99703E41-2B74-4DA4-B055-3FBEE7889C20}"/>
               </a:ext>
             </a:extLst>
           </p:cNvPr>
@@ -13024,7 +12566,7 @@
           <p:cNvPr id="29" name="直線コネクタ 28">
             <a:extLst>
               <a:ext uri="{FF2B5EF4-FFF2-40B4-BE49-F238E27FC236}">
-                <a16:creationId xmlns:a16="http://schemas.microsoft.com/office/drawing/2014/main" id="{BD16258A-0258-4CCE-AE9F-7DA680C0B533}"/>
+                <a16:creationId xmlns:a16="http://schemas.microsoft.com/office/drawing/2014/main" id="{AA413F48-3920-4E66-8142-3B50FFE014FE}"/>
               </a:ext>
             </a:extLst>
           </p:cNvPr>
@@ -13055,7 +12597,7 @@
           <p:cNvPr id="30" name="正方形/長方形 29">
             <a:extLst>
               <a:ext uri="{FF2B5EF4-FFF2-40B4-BE49-F238E27FC236}">
-                <a16:creationId xmlns:a16="http://schemas.microsoft.com/office/drawing/2014/main" id="{A490F83F-E339-45F9-96E9-97CDF4C30311}"/>
+                <a16:creationId xmlns:a16="http://schemas.microsoft.com/office/drawing/2014/main" id="{95CFDAEC-EEC9-4C6F-A45A-754CDBB7671A}"/>
               </a:ext>
             </a:extLst>
           </p:cNvPr>
@@ -13117,7 +12659,7 @@
           <p:cNvPr id="31" name="直線コネクタ 30">
             <a:extLst>
               <a:ext uri="{FF2B5EF4-FFF2-40B4-BE49-F238E27FC236}">
-                <a16:creationId xmlns:a16="http://schemas.microsoft.com/office/drawing/2014/main" id="{871E02AA-1247-4279-AB50-0F6A4A6816AA}"/>
+                <a16:creationId xmlns:a16="http://schemas.microsoft.com/office/drawing/2014/main" id="{C7C0B944-FE7E-4651-AC17-A29FBB3AFA54}"/>
               </a:ext>
             </a:extLst>
           </p:cNvPr>
@@ -13148,7 +12690,7 @@
           <p:cNvPr id="32" name="正方形/長方形 31">
             <a:extLst>
               <a:ext uri="{FF2B5EF4-FFF2-40B4-BE49-F238E27FC236}">
-                <a16:creationId xmlns:a16="http://schemas.microsoft.com/office/drawing/2014/main" id="{57266126-3C43-49A5-B78B-870D891F7DD2}"/>
+                <a16:creationId xmlns:a16="http://schemas.microsoft.com/office/drawing/2014/main" id="{BC178F45-7C0A-479D-8BEC-360263B7ADAA}"/>
               </a:ext>
             </a:extLst>
           </p:cNvPr>
@@ -13210,7 +12752,7 @@
           <p:cNvPr id="33" name="直線コネクタ 32">
             <a:extLst>
               <a:ext uri="{FF2B5EF4-FFF2-40B4-BE49-F238E27FC236}">
-                <a16:creationId xmlns:a16="http://schemas.microsoft.com/office/drawing/2014/main" id="{BD7F40E5-B455-4DCA-9D41-207B95E49C11}"/>
+                <a16:creationId xmlns:a16="http://schemas.microsoft.com/office/drawing/2014/main" id="{96D523D0-77C7-48BA-8C8D-642AFAB36466}"/>
               </a:ext>
             </a:extLst>
           </p:cNvPr>
@@ -13241,7 +12783,7 @@
           <p:cNvPr id="34" name="正方形/長方形 33">
             <a:extLst>
               <a:ext uri="{FF2B5EF4-FFF2-40B4-BE49-F238E27FC236}">
-                <a16:creationId xmlns:a16="http://schemas.microsoft.com/office/drawing/2014/main" id="{72B0B737-84C1-483E-9EFF-B4875CE88C90}"/>
+                <a16:creationId xmlns:a16="http://schemas.microsoft.com/office/drawing/2014/main" id="{E111181F-641D-4192-A68F-C5D69E82FE46}"/>
               </a:ext>
             </a:extLst>
           </p:cNvPr>
@@ -13303,7 +12845,7 @@
           <p:cNvPr id="35" name="直線コネクタ 34">
             <a:extLst>
               <a:ext uri="{FF2B5EF4-FFF2-40B4-BE49-F238E27FC236}">
-                <a16:creationId xmlns:a16="http://schemas.microsoft.com/office/drawing/2014/main" id="{198337CA-3E25-4558-B34D-10D94F3543E0}"/>
+                <a16:creationId xmlns:a16="http://schemas.microsoft.com/office/drawing/2014/main" id="{BDB3C8D9-35B5-43E1-AADD-5D3164AF89C0}"/>
               </a:ext>
             </a:extLst>
           </p:cNvPr>
@@ -13334,7 +12876,7 @@
           <p:cNvPr id="36" name="正方形/長方形 35">
             <a:extLst>
               <a:ext uri="{FF2B5EF4-FFF2-40B4-BE49-F238E27FC236}">
-                <a16:creationId xmlns:a16="http://schemas.microsoft.com/office/drawing/2014/main" id="{93DDB66E-B5F8-4B71-B955-A03CC6FFB8BD}"/>
+                <a16:creationId xmlns:a16="http://schemas.microsoft.com/office/drawing/2014/main" id="{226F239C-5BB4-4281-8E27-DBCF7BEC96AC}"/>
               </a:ext>
             </a:extLst>
           </p:cNvPr>
@@ -13396,7 +12938,7 @@
           <p:cNvPr id="37" name="直線コネクタ 36">
             <a:extLst>
               <a:ext uri="{FF2B5EF4-FFF2-40B4-BE49-F238E27FC236}">
-                <a16:creationId xmlns:a16="http://schemas.microsoft.com/office/drawing/2014/main" id="{409F9737-5186-4A0B-9207-61B400AF3608}"/>
+                <a16:creationId xmlns:a16="http://schemas.microsoft.com/office/drawing/2014/main" id="{68486C36-48F0-4796-8488-A1AAF6A62E53}"/>
               </a:ext>
             </a:extLst>
           </p:cNvPr>
@@ -13427,7 +12969,7 @@
           <p:cNvPr id="38" name="正方形/長方形 37">
             <a:extLst>
               <a:ext uri="{FF2B5EF4-FFF2-40B4-BE49-F238E27FC236}">
-                <a16:creationId xmlns:a16="http://schemas.microsoft.com/office/drawing/2014/main" id="{AE1B5F3A-D3C5-40FF-A218-88D634D392A6}"/>
+                <a16:creationId xmlns:a16="http://schemas.microsoft.com/office/drawing/2014/main" id="{C86DF357-9A03-4696-8895-D7A722D70989}"/>
               </a:ext>
             </a:extLst>
           </p:cNvPr>
@@ -13489,7 +13031,7 @@
           <p:cNvPr id="39" name="正方形/長方形 38">
             <a:extLst>
               <a:ext uri="{FF2B5EF4-FFF2-40B4-BE49-F238E27FC236}">
-                <a16:creationId xmlns:a16="http://schemas.microsoft.com/office/drawing/2014/main" id="{45FBC15E-7A54-4916-972E-B8C7B2E2AC11}"/>
+                <a16:creationId xmlns:a16="http://schemas.microsoft.com/office/drawing/2014/main" id="{16B1E21D-4D03-4EE0-A0F2-D7D1ABBAC054}"/>
               </a:ext>
             </a:extLst>
           </p:cNvPr>
@@ -13551,7 +13093,7 @@
           <p:cNvPr id="40" name="正方形/長方形 39">
             <a:extLst>
               <a:ext uri="{FF2B5EF4-FFF2-40B4-BE49-F238E27FC236}">
-                <a16:creationId xmlns:a16="http://schemas.microsoft.com/office/drawing/2014/main" id="{D36672C5-5613-41DC-9302-0D8AF10BCEFC}"/>
+                <a16:creationId xmlns:a16="http://schemas.microsoft.com/office/drawing/2014/main" id="{4D276497-FABC-47B9-B9E0-C29AFDD4F5F7}"/>
               </a:ext>
             </a:extLst>
           </p:cNvPr>
@@ -13613,7 +13155,7 @@
           <p:cNvPr id="41" name="正方形/長方形 40">
             <a:extLst>
               <a:ext uri="{FF2B5EF4-FFF2-40B4-BE49-F238E27FC236}">
-                <a16:creationId xmlns:a16="http://schemas.microsoft.com/office/drawing/2014/main" id="{53F883B2-0E40-4455-8075-B7F3CEE250DE}"/>
+                <a16:creationId xmlns:a16="http://schemas.microsoft.com/office/drawing/2014/main" id="{76BA5B43-CA39-4F76-B2E1-A1797D8B9002}"/>
               </a:ext>
             </a:extLst>
           </p:cNvPr>
@@ -13675,7 +13217,7 @@
           <p:cNvPr id="42" name="正方形/長方形 41">
             <a:extLst>
               <a:ext uri="{FF2B5EF4-FFF2-40B4-BE49-F238E27FC236}">
-                <a16:creationId xmlns:a16="http://schemas.microsoft.com/office/drawing/2014/main" id="{611D79BF-7C4D-410C-9CE8-F3C7EBFA0F65}"/>
+                <a16:creationId xmlns:a16="http://schemas.microsoft.com/office/drawing/2014/main" id="{AA541F3C-B762-438F-8DF4-964C650BA1CA}"/>
               </a:ext>
             </a:extLst>
           </p:cNvPr>
@@ -13737,7 +13279,7 @@
           <p:cNvPr id="43" name="正方形/長方形 42">
             <a:extLst>
               <a:ext uri="{FF2B5EF4-FFF2-40B4-BE49-F238E27FC236}">
-                <a16:creationId xmlns:a16="http://schemas.microsoft.com/office/drawing/2014/main" id="{C42FAB33-6848-4660-8A44-C2748FF59688}"/>
+                <a16:creationId xmlns:a16="http://schemas.microsoft.com/office/drawing/2014/main" id="{E5B1A5C1-5495-4CAD-87E7-C3FC6BBA3DBD}"/>
               </a:ext>
             </a:extLst>
           </p:cNvPr>
@@ -13770,7 +13312,7 @@
           <p:cNvPr id="44" name="正方形/長方形 43">
             <a:extLst>
               <a:ext uri="{FF2B5EF4-FFF2-40B4-BE49-F238E27FC236}">
-                <a16:creationId xmlns:a16="http://schemas.microsoft.com/office/drawing/2014/main" id="{3FC59DA4-30BB-430A-8BC9-D57378FA0695}"/>
+                <a16:creationId xmlns:a16="http://schemas.microsoft.com/office/drawing/2014/main" id="{8BF8E6FE-C583-4FC2-8B8C-0BCDDCE39454}"/>
               </a:ext>
             </a:extLst>
           </p:cNvPr>
@@ -13832,7 +13374,7 @@
           <p:cNvPr id="45" name="正方形/長方形 44">
             <a:extLst>
               <a:ext uri="{FF2B5EF4-FFF2-40B4-BE49-F238E27FC236}">
-                <a16:creationId xmlns:a16="http://schemas.microsoft.com/office/drawing/2014/main" id="{B62B88B2-A9EB-4D39-8855-FA43DBAC564B}"/>
+                <a16:creationId xmlns:a16="http://schemas.microsoft.com/office/drawing/2014/main" id="{1CF1BE82-C8D3-4B90-905B-6D482D651BB2}"/>
               </a:ext>
             </a:extLst>
           </p:cNvPr>
@@ -13894,7 +13436,7 @@
           <p:cNvPr id="46" name="正方形/長方形 45">
             <a:extLst>
               <a:ext uri="{FF2B5EF4-FFF2-40B4-BE49-F238E27FC236}">
-                <a16:creationId xmlns:a16="http://schemas.microsoft.com/office/drawing/2014/main" id="{1FF32C32-F527-48C4-9D66-BF2390FB9E6F}"/>
+                <a16:creationId xmlns:a16="http://schemas.microsoft.com/office/drawing/2014/main" id="{7DA99225-1E7D-435F-AC46-42944BD9EFA3}"/>
               </a:ext>
             </a:extLst>
           </p:cNvPr>
@@ -13927,7 +13469,7 @@
           <p:cNvPr id="47" name="正方形/長方形 46">
             <a:extLst>
               <a:ext uri="{FF2B5EF4-FFF2-40B4-BE49-F238E27FC236}">
-                <a16:creationId xmlns:a16="http://schemas.microsoft.com/office/drawing/2014/main" id="{0686B735-41F2-415E-A6ED-E9CE9789A82E}"/>
+                <a16:creationId xmlns:a16="http://schemas.microsoft.com/office/drawing/2014/main" id="{98D5FC18-6384-472D-B2E2-756902A81DD7}"/>
               </a:ext>
             </a:extLst>
           </p:cNvPr>
@@ -13989,7 +13531,7 @@
           <p:cNvPr id="48" name="正方形/長方形 47">
             <a:extLst>
               <a:ext uri="{FF2B5EF4-FFF2-40B4-BE49-F238E27FC236}">
-                <a16:creationId xmlns:a16="http://schemas.microsoft.com/office/drawing/2014/main" id="{9A578C45-B276-47F6-959B-9856FE36CC07}"/>
+                <a16:creationId xmlns:a16="http://schemas.microsoft.com/office/drawing/2014/main" id="{A3B22EBE-FADF-4696-AA3B-803C0F654D1D}"/>
               </a:ext>
             </a:extLst>
           </p:cNvPr>
@@ -14077,7 +13619,7 @@
           <p:cNvPr id="50" name="正方形/長方形 49">
             <a:extLst>
               <a:ext uri="{FF2B5EF4-FFF2-40B4-BE49-F238E27FC236}">
-                <a16:creationId xmlns:a16="http://schemas.microsoft.com/office/drawing/2014/main" id="{68DA9CF9-1F3E-4591-90C3-F92B2CF3A9D6}"/>
+                <a16:creationId xmlns:a16="http://schemas.microsoft.com/office/drawing/2014/main" id="{FD668497-8987-40E4-A148-60C4B499F8CE}"/>
               </a:ext>
             </a:extLst>
           </p:cNvPr>
@@ -14110,7 +13652,7 @@
           <p:cNvPr id="51" name="正方形/長方形 50">
             <a:extLst>
               <a:ext uri="{FF2B5EF4-FFF2-40B4-BE49-F238E27FC236}">
-                <a16:creationId xmlns:a16="http://schemas.microsoft.com/office/drawing/2014/main" id="{7998324E-ECA7-42D0-AEAA-8D8B5F07F157}"/>
+                <a16:creationId xmlns:a16="http://schemas.microsoft.com/office/drawing/2014/main" id="{92B41DF8-DA75-4337-9B68-E199739F9EFD}"/>
               </a:ext>
             </a:extLst>
           </p:cNvPr>
@@ -14172,7 +13714,7 @@
           <p:cNvPr id="52" name="正方形/長方形 51">
             <a:extLst>
               <a:ext uri="{FF2B5EF4-FFF2-40B4-BE49-F238E27FC236}">
-                <a16:creationId xmlns:a16="http://schemas.microsoft.com/office/drawing/2014/main" id="{1BDFFCCF-C7EC-4FC1-B78D-9682B58FE57E}"/>
+                <a16:creationId xmlns:a16="http://schemas.microsoft.com/office/drawing/2014/main" id="{BD769D3B-5A5D-4BC8-A057-92107A7E322A}"/>
               </a:ext>
             </a:extLst>
           </p:cNvPr>
@@ -14234,7 +13776,7 @@
           <p:cNvPr id="53" name="正方形/長方形 52">
             <a:extLst>
               <a:ext uri="{FF2B5EF4-FFF2-40B4-BE49-F238E27FC236}">
-                <a16:creationId xmlns:a16="http://schemas.microsoft.com/office/drawing/2014/main" id="{C44FEE87-8358-49B9-BCC2-888740729FCD}"/>
+                <a16:creationId xmlns:a16="http://schemas.microsoft.com/office/drawing/2014/main" id="{5A0AE8B0-6FA3-4402-A467-09796B1A2BEB}"/>
               </a:ext>
             </a:extLst>
           </p:cNvPr>
@@ -14296,7 +13838,7 @@
           <p:cNvPr id="54" name="正方形/長方形 53">
             <a:extLst>
               <a:ext uri="{FF2B5EF4-FFF2-40B4-BE49-F238E27FC236}">
-                <a16:creationId xmlns:a16="http://schemas.microsoft.com/office/drawing/2014/main" id="{7407CB80-B880-4076-88E1-A7099D9C4042}"/>
+                <a16:creationId xmlns:a16="http://schemas.microsoft.com/office/drawing/2014/main" id="{8AD3701D-5142-4BE4-A732-E44A5B0CB440}"/>
               </a:ext>
             </a:extLst>
           </p:cNvPr>
@@ -14329,7 +13871,7 @@
           <p:cNvPr id="55" name="正方形/長方形 54">
             <a:extLst>
               <a:ext uri="{FF2B5EF4-FFF2-40B4-BE49-F238E27FC236}">
-                <a16:creationId xmlns:a16="http://schemas.microsoft.com/office/drawing/2014/main" id="{1F01C4EA-2B15-4C64-B7DF-4083737A9096}"/>
+                <a16:creationId xmlns:a16="http://schemas.microsoft.com/office/drawing/2014/main" id="{6C478B64-52C5-4884-93E6-1F5CE82D891D}"/>
               </a:ext>
             </a:extLst>
           </p:cNvPr>
@@ -14391,7 +13933,7 @@
           <p:cNvPr id="56" name="正方形/長方形 55">
             <a:extLst>
               <a:ext uri="{FF2B5EF4-FFF2-40B4-BE49-F238E27FC236}">
-                <a16:creationId xmlns:a16="http://schemas.microsoft.com/office/drawing/2014/main" id="{071DBFB3-7B92-4753-A16D-2AB5F47284F4}"/>
+                <a16:creationId xmlns:a16="http://schemas.microsoft.com/office/drawing/2014/main" id="{92CE0218-0F1F-4127-B5D4-58A2205DDA99}"/>
               </a:ext>
             </a:extLst>
           </p:cNvPr>
@@ -14453,7 +13995,7 @@
           <p:cNvPr id="57" name="正方形/長方形 56">
             <a:extLst>
               <a:ext uri="{FF2B5EF4-FFF2-40B4-BE49-F238E27FC236}">
-                <a16:creationId xmlns:a16="http://schemas.microsoft.com/office/drawing/2014/main" id="{FFDD715E-C2F0-402F-BB91-3DF91D1E3527}"/>
+                <a16:creationId xmlns:a16="http://schemas.microsoft.com/office/drawing/2014/main" id="{5C32F9D1-A656-4D7A-B3F4-14BDF0EA2C60}"/>
               </a:ext>
             </a:extLst>
           </p:cNvPr>
@@ -14515,7 +14057,7 @@
           <p:cNvPr id="58" name="正方形/長方形 57">
             <a:extLst>
               <a:ext uri="{FF2B5EF4-FFF2-40B4-BE49-F238E27FC236}">
-                <a16:creationId xmlns:a16="http://schemas.microsoft.com/office/drawing/2014/main" id="{AA4BD67D-BA74-4E1D-AB62-7CDCC309BE43}"/>
+                <a16:creationId xmlns:a16="http://schemas.microsoft.com/office/drawing/2014/main" id="{BA4E28F6-6B37-45CD-AAB1-4368658C1C7C}"/>
               </a:ext>
             </a:extLst>
           </p:cNvPr>
@@ -14548,7 +14090,7 @@
           <p:cNvPr id="59" name="正方形/長方形 58">
             <a:extLst>
               <a:ext uri="{FF2B5EF4-FFF2-40B4-BE49-F238E27FC236}">
-                <a16:creationId xmlns:a16="http://schemas.microsoft.com/office/drawing/2014/main" id="{DEA3BDA3-3DC2-488B-84F3-37B35A78A333}"/>
+                <a16:creationId xmlns:a16="http://schemas.microsoft.com/office/drawing/2014/main" id="{6731BD1B-EAE7-4E00-BF9F-63624CF87664}"/>
               </a:ext>
             </a:extLst>
           </p:cNvPr>
@@ -14610,7 +14152,7 @@
           <p:cNvPr id="60" name="正方形/長方形 59">
             <a:extLst>
               <a:ext uri="{FF2B5EF4-FFF2-40B4-BE49-F238E27FC236}">
-                <a16:creationId xmlns:a16="http://schemas.microsoft.com/office/drawing/2014/main" id="{7C43DBA6-48E0-47F0-AA30-F96546001007}"/>
+                <a16:creationId xmlns:a16="http://schemas.microsoft.com/office/drawing/2014/main" id="{FE4768A6-1058-4B35-8074-D43585D2B5F3}"/>
               </a:ext>
             </a:extLst>
           </p:cNvPr>
@@ -14672,7 +14214,7 @@
           <p:cNvPr id="61" name="正方形/長方形 60">
             <a:extLst>
               <a:ext uri="{FF2B5EF4-FFF2-40B4-BE49-F238E27FC236}">
-                <a16:creationId xmlns:a16="http://schemas.microsoft.com/office/drawing/2014/main" id="{F88FC170-CEC5-4363-8807-0691910D5745}"/>
+                <a16:creationId xmlns:a16="http://schemas.microsoft.com/office/drawing/2014/main" id="{75E93653-E664-4ECC-AC7A-63A643038A3A}"/>
               </a:ext>
             </a:extLst>
           </p:cNvPr>
@@ -14734,7 +14276,7 @@
           <p:cNvPr id="62" name="正方形/長方形 61">
             <a:extLst>
               <a:ext uri="{FF2B5EF4-FFF2-40B4-BE49-F238E27FC236}">
-                <a16:creationId xmlns:a16="http://schemas.microsoft.com/office/drawing/2014/main" id="{32BD4123-F850-49EE-B39B-9FCCCC11241D}"/>
+                <a16:creationId xmlns:a16="http://schemas.microsoft.com/office/drawing/2014/main" id="{AAB4088D-FF95-4311-8C2A-61C67FE14679}"/>
               </a:ext>
             </a:extLst>
           </p:cNvPr>
@@ -14796,7 +14338,7 @@
           <p:cNvPr id="63" name="直線コネクタ 62">
             <a:extLst>
               <a:ext uri="{FF2B5EF4-FFF2-40B4-BE49-F238E27FC236}">
-                <a16:creationId xmlns:a16="http://schemas.microsoft.com/office/drawing/2014/main" id="{ACDD31E3-801D-477C-8A68-886A55EF88BD}"/>
+                <a16:creationId xmlns:a16="http://schemas.microsoft.com/office/drawing/2014/main" id="{4ECBA716-AD44-4941-9F7D-C5FFF5F24632}"/>
               </a:ext>
             </a:extLst>
           </p:cNvPr>
@@ -14827,7 +14369,7 @@
           <p:cNvPr id="64" name="正方形/長方形 63">
             <a:extLst>
               <a:ext uri="{FF2B5EF4-FFF2-40B4-BE49-F238E27FC236}">
-                <a16:creationId xmlns:a16="http://schemas.microsoft.com/office/drawing/2014/main" id="{905F4AB7-9210-439B-99EF-56516025E904}"/>
+                <a16:creationId xmlns:a16="http://schemas.microsoft.com/office/drawing/2014/main" id="{A0B20E81-5230-4DB1-A12F-1118CD1BBAA9}"/>
               </a:ext>
             </a:extLst>
           </p:cNvPr>
@@ -14889,7 +14431,7 @@
           <p:cNvPr id="65" name="正方形/長方形 64">
             <a:extLst>
               <a:ext uri="{FF2B5EF4-FFF2-40B4-BE49-F238E27FC236}">
-                <a16:creationId xmlns:a16="http://schemas.microsoft.com/office/drawing/2014/main" id="{E56AB03D-91EF-4DC8-A63D-6752D2CFC779}"/>
+                <a16:creationId xmlns:a16="http://schemas.microsoft.com/office/drawing/2014/main" id="{A12A7A1C-7710-4394-9F80-66DCD41FAB2C}"/>
               </a:ext>
             </a:extLst>
           </p:cNvPr>
@@ -14951,7 +14493,7 @@
           <p:cNvPr id="66" name="直線コネクタ 65">
             <a:extLst>
               <a:ext uri="{FF2B5EF4-FFF2-40B4-BE49-F238E27FC236}">
-                <a16:creationId xmlns:a16="http://schemas.microsoft.com/office/drawing/2014/main" id="{62EB3659-B27F-4BC9-B449-4A49FFDFC6DB}"/>
+                <a16:creationId xmlns:a16="http://schemas.microsoft.com/office/drawing/2014/main" id="{E7ADED6C-289E-4250-9AD6-2B21E38F46FB}"/>
               </a:ext>
             </a:extLst>
           </p:cNvPr>
@@ -14982,7 +14524,7 @@
           <p:cNvPr id="67" name="正方形/長方形 66">
             <a:extLst>
               <a:ext uri="{FF2B5EF4-FFF2-40B4-BE49-F238E27FC236}">
-                <a16:creationId xmlns:a16="http://schemas.microsoft.com/office/drawing/2014/main" id="{F288040E-2BB2-4D8C-A878-8FC5D15F036F}"/>
+                <a16:creationId xmlns:a16="http://schemas.microsoft.com/office/drawing/2014/main" id="{250A84B7-2E8A-4BD2-94FB-744D00330E30}"/>
               </a:ext>
             </a:extLst>
           </p:cNvPr>
@@ -15044,7 +14586,7 @@
           <p:cNvPr id="68" name="正方形/長方形 67">
             <a:extLst>
               <a:ext uri="{FF2B5EF4-FFF2-40B4-BE49-F238E27FC236}">
-                <a16:creationId xmlns:a16="http://schemas.microsoft.com/office/drawing/2014/main" id="{57177105-7BD0-4C53-9CF7-62EFDF37D8F4}"/>
+                <a16:creationId xmlns:a16="http://schemas.microsoft.com/office/drawing/2014/main" id="{0C48F76B-2AFC-408A-861C-CCE9908E6DF0}"/>
               </a:ext>
             </a:extLst>
           </p:cNvPr>
@@ -15106,7 +14648,7 @@
           <p:cNvPr id="69" name="直線コネクタ 68">
             <a:extLst>
               <a:ext uri="{FF2B5EF4-FFF2-40B4-BE49-F238E27FC236}">
-                <a16:creationId xmlns:a16="http://schemas.microsoft.com/office/drawing/2014/main" id="{74C6A4CB-1EDE-4412-90AF-FDACE93A53E9}"/>
+                <a16:creationId xmlns:a16="http://schemas.microsoft.com/office/drawing/2014/main" id="{343014F5-326A-426F-8E1D-2C909F7ACE37}"/>
               </a:ext>
             </a:extLst>
           </p:cNvPr>
@@ -15137,7 +14679,7 @@
           <p:cNvPr id="70" name="正方形/長方形 69">
             <a:extLst>
               <a:ext uri="{FF2B5EF4-FFF2-40B4-BE49-F238E27FC236}">
-                <a16:creationId xmlns:a16="http://schemas.microsoft.com/office/drawing/2014/main" id="{1D649BCC-D549-4243-B8AA-9A2912388E11}"/>
+                <a16:creationId xmlns:a16="http://schemas.microsoft.com/office/drawing/2014/main" id="{DA780EE9-2752-425E-BEBB-81BFEE1451A4}"/>
               </a:ext>
             </a:extLst>
           </p:cNvPr>
@@ -15199,7 +14741,7 @@
           <p:cNvPr id="71" name="正方形/長方形 70">
             <a:extLst>
               <a:ext uri="{FF2B5EF4-FFF2-40B4-BE49-F238E27FC236}">
-                <a16:creationId xmlns:a16="http://schemas.microsoft.com/office/drawing/2014/main" id="{DB36FC93-CA44-4630-8B4C-F1F8F5F3D938}"/>
+                <a16:creationId xmlns:a16="http://schemas.microsoft.com/office/drawing/2014/main" id="{F4F5D7D5-6D5F-4F5B-8D48-64C7898DCD00}"/>
               </a:ext>
             </a:extLst>
           </p:cNvPr>
@@ -15261,7 +14803,7 @@
           <p:cNvPr id="72" name="直線コネクタ 71">
             <a:extLst>
               <a:ext uri="{FF2B5EF4-FFF2-40B4-BE49-F238E27FC236}">
-                <a16:creationId xmlns:a16="http://schemas.microsoft.com/office/drawing/2014/main" id="{1576E52D-965A-4671-B7BE-A67B3515038B}"/>
+                <a16:creationId xmlns:a16="http://schemas.microsoft.com/office/drawing/2014/main" id="{F1A20479-2A6C-4BC0-8627-4C2BF5269C89}"/>
               </a:ext>
             </a:extLst>
           </p:cNvPr>
@@ -15292,7 +14834,7 @@
           <p:cNvPr id="73" name="正方形/長方形 72">
             <a:extLst>
               <a:ext uri="{FF2B5EF4-FFF2-40B4-BE49-F238E27FC236}">
-                <a16:creationId xmlns:a16="http://schemas.microsoft.com/office/drawing/2014/main" id="{5C56E3D0-446E-4F19-B917-B5A43C284C3C}"/>
+                <a16:creationId xmlns:a16="http://schemas.microsoft.com/office/drawing/2014/main" id="{9C50040C-8DE4-4308-B6B5-D914AD635CA4}"/>
               </a:ext>
             </a:extLst>
           </p:cNvPr>
@@ -15354,7 +14896,7 @@
           <p:cNvPr id="74" name="正方形/長方形 73">
             <a:extLst>
               <a:ext uri="{FF2B5EF4-FFF2-40B4-BE49-F238E27FC236}">
-                <a16:creationId xmlns:a16="http://schemas.microsoft.com/office/drawing/2014/main" id="{CB9C84F1-6E32-48FC-A73E-E715AB473A22}"/>
+                <a16:creationId xmlns:a16="http://schemas.microsoft.com/office/drawing/2014/main" id="{AF566CB9-28B1-4354-926E-842BC2825DDA}"/>
               </a:ext>
             </a:extLst>
           </p:cNvPr>
@@ -15416,7 +14958,7 @@
           <p:cNvPr id="75" name="正方形/長方形 74">
             <a:extLst>
               <a:ext uri="{FF2B5EF4-FFF2-40B4-BE49-F238E27FC236}">
-                <a16:creationId xmlns:a16="http://schemas.microsoft.com/office/drawing/2014/main" id="{38467D18-32EE-40CF-BB14-039F2199A704}"/>
+                <a16:creationId xmlns:a16="http://schemas.microsoft.com/office/drawing/2014/main" id="{5B4795C1-9805-4E4D-B694-704A76EF321E}"/>
               </a:ext>
             </a:extLst>
           </p:cNvPr>
@@ -15447,7 +14989,7 @@
           <p:cNvPr id="76" name="正方形/長方形 75">
             <a:extLst>
               <a:ext uri="{FF2B5EF4-FFF2-40B4-BE49-F238E27FC236}">
-                <a16:creationId xmlns:a16="http://schemas.microsoft.com/office/drawing/2014/main" id="{A779788B-98D2-4062-B259-90C5E6C172B4}"/>
+                <a16:creationId xmlns:a16="http://schemas.microsoft.com/office/drawing/2014/main" id="{2CA66596-0BC4-4389-9FAE-0EDA996ED5C8}"/>
               </a:ext>
             </a:extLst>
           </p:cNvPr>
@@ -15507,7 +15049,7 @@
     </p:spTree>
     <p:extLst>
       <p:ext uri="{BB962C8B-B14F-4D97-AF65-F5344CB8AC3E}">
-        <p14:creationId xmlns:p14="http://schemas.microsoft.com/office/powerpoint/2010/main" val="1285119014"/>
+        <p14:creationId xmlns:p14="http://schemas.microsoft.com/office/powerpoint/2010/main" val="92154666"/>
       </p:ext>
     </p:extLst>
   </p:cSld>
@@ -15544,10 +15086,10 @@
       </p:grpSpPr>
       <p:sp>
         <p:nvSpPr>
-          <p:cNvPr id="27" name="正方形/長方形 26">
-            <a:extLst>
-              <a:ext uri="{FF2B5EF4-FFF2-40B4-BE49-F238E27FC236}">
-                <a16:creationId xmlns:a16="http://schemas.microsoft.com/office/drawing/2014/main" id="{8A3EA2E4-4F52-4112-B996-BBB4DD23B789}"/>
+          <p:cNvPr id="26" name="正方形/長方形 25">
+            <a:extLst>
+              <a:ext uri="{FF2B5EF4-FFF2-40B4-BE49-F238E27FC236}">
+                <a16:creationId xmlns:a16="http://schemas.microsoft.com/office/drawing/2014/main" id="{5D3C5BE7-035B-446F-BF82-00C1CD47032C}"/>
               </a:ext>
             </a:extLst>
           </p:cNvPr>
@@ -15578,7 +15120,7 @@
           <p:cNvPr id="2" name="正方形/長方形 1">
             <a:extLst>
               <a:ext uri="{FF2B5EF4-FFF2-40B4-BE49-F238E27FC236}">
-                <a16:creationId xmlns:a16="http://schemas.microsoft.com/office/drawing/2014/main" id="{F3BF37A8-FB44-4198-BE6A-589C79B2D56F}"/>
+                <a16:creationId xmlns:a16="http://schemas.microsoft.com/office/drawing/2014/main" id="{51A65AA7-D917-4D88-883E-FBC697CB0F09}"/>
               </a:ext>
             </a:extLst>
           </p:cNvPr>
@@ -15640,7 +15182,7 @@
           <p:cNvPr id="3" name="正方形/長方形 2">
             <a:extLst>
               <a:ext uri="{FF2B5EF4-FFF2-40B4-BE49-F238E27FC236}">
-                <a16:creationId xmlns:a16="http://schemas.microsoft.com/office/drawing/2014/main" id="{22AB5F38-BC8F-4B24-8FC9-F7EE41D40447}"/>
+                <a16:creationId xmlns:a16="http://schemas.microsoft.com/office/drawing/2014/main" id="{8F8E7C2F-B43A-4CA9-BAE3-B8C375AC61BC}"/>
               </a:ext>
             </a:extLst>
           </p:cNvPr>
@@ -15692,7 +15234,7 @@
                 <a:ea typeface="Yu Gothic"/>
                 <a:cs typeface="Yu Gothic"/>
               </a:rPr>
-              <a:t>11の外部caseは平均0.143 K、意図したmodel gapは9.823 K</a:t>
+              <a:t>外部11ケースは精度基準内、F11は構造不一致として分離</a:t>
             </a:r>
           </a:p>
         </p:txBody>
@@ -15702,7 +15244,7 @@
           <p:cNvPr id="4" name="正方形/長方形 3">
             <a:extLst>
               <a:ext uri="{FF2B5EF4-FFF2-40B4-BE49-F238E27FC236}">
-                <a16:creationId xmlns:a16="http://schemas.microsoft.com/office/drawing/2014/main" id="{E724D335-6F75-42AF-97F6-8D23E217954A}"/>
+                <a16:creationId xmlns:a16="http://schemas.microsoft.com/office/drawing/2014/main" id="{C755BFFC-B1D2-4CD0-AC6A-5DC2A53807C7}"/>
               </a:ext>
             </a:extLst>
           </p:cNvPr>
@@ -15754,7 +15296,7 @@
                 <a:ea typeface="Yu Gothic"/>
                 <a:cs typeface="Yu Gothic"/>
               </a:rPr>
-              <a:t>低い平均誤差だけでなく、観測不足と構造不一致をworst caseとして残す</a:t>
+              <a:t>予測誤差は低いほど良い。negative controlのF11だけは高い誤差が正しい判定となる</a:t>
             </a:r>
           </a:p>
         </p:txBody>
@@ -15764,7 +15306,7 @@
           <p:cNvPr id="5" name="直線コネクタ 4">
             <a:extLst>
               <a:ext uri="{FF2B5EF4-FFF2-40B4-BE49-F238E27FC236}">
-                <a16:creationId xmlns:a16="http://schemas.microsoft.com/office/drawing/2014/main" id="{049F368E-4487-4DDA-B6F2-46FF100C5A9B}"/>
+                <a16:creationId xmlns:a16="http://schemas.microsoft.com/office/drawing/2014/main" id="{780A3B53-669D-48CD-A005-E690DF2C1FBE}"/>
               </a:ext>
             </a:extLst>
           </p:cNvPr>
@@ -15795,7 +15337,7 @@
           <p:cNvPr id="6" name="直線コネクタ 5">
             <a:extLst>
               <a:ext uri="{FF2B5EF4-FFF2-40B4-BE49-F238E27FC236}">
-                <a16:creationId xmlns:a16="http://schemas.microsoft.com/office/drawing/2014/main" id="{2C838D46-4F74-4550-AE61-6AA922BBA93A}"/>
+                <a16:creationId xmlns:a16="http://schemas.microsoft.com/office/drawing/2014/main" id="{E1739F4A-749A-4E52-AA48-341D56829EC2}"/>
               </a:ext>
             </a:extLst>
           </p:cNvPr>
@@ -15826,7 +15368,7 @@
           <p:cNvPr id="7" name="正方形/長方形 6">
             <a:extLst>
               <a:ext uri="{FF2B5EF4-FFF2-40B4-BE49-F238E27FC236}">
-                <a16:creationId xmlns:a16="http://schemas.microsoft.com/office/drawing/2014/main" id="{CCA646B0-6EDD-468F-BBBD-27D58E0B02DC}"/>
+                <a16:creationId xmlns:a16="http://schemas.microsoft.com/office/drawing/2014/main" id="{0CD5647A-904F-4EE4-8476-41522E8B83B2}"/>
               </a:ext>
             </a:extLst>
           </p:cNvPr>
@@ -15888,7 +15430,7 @@
           <p:cNvPr id="8" name="正方形/長方形 7">
             <a:extLst>
               <a:ext uri="{FF2B5EF4-FFF2-40B4-BE49-F238E27FC236}">
-                <a16:creationId xmlns:a16="http://schemas.microsoft.com/office/drawing/2014/main" id="{07DB74F1-8718-450E-B730-7B51A4DD3673}"/>
+                <a16:creationId xmlns:a16="http://schemas.microsoft.com/office/drawing/2014/main" id="{758A7B93-4E5B-4432-A2E2-31C20F47EF25}"/>
               </a:ext>
             </a:extLst>
           </p:cNvPr>
@@ -15950,7 +15492,7 @@
           <p:cNvPr id="9" name="正方形/長方形 8">
             <a:extLst>
               <a:ext uri="{FF2B5EF4-FFF2-40B4-BE49-F238E27FC236}">
-                <a16:creationId xmlns:a16="http://schemas.microsoft.com/office/drawing/2014/main" id="{92AD14B4-22AE-441C-B7AA-CE75A13B3248}"/>
+                <a16:creationId xmlns:a16="http://schemas.microsoft.com/office/drawing/2014/main" id="{C662A60E-C378-42C0-A97C-71E593E788CB}"/>
               </a:ext>
             </a:extLst>
           </p:cNvPr>
@@ -16012,7 +15554,7 @@
           <p:cNvPr id="10" name="正方形/長方形 9">
             <a:extLst>
               <a:ext uri="{FF2B5EF4-FFF2-40B4-BE49-F238E27FC236}">
-                <a16:creationId xmlns:a16="http://schemas.microsoft.com/office/drawing/2014/main" id="{3193A069-69E3-449E-9050-5BC34E84251C}"/>
+                <a16:creationId xmlns:a16="http://schemas.microsoft.com/office/drawing/2014/main" id="{71C9C8EA-4981-4322-BEE6-8EAAD2F897CB}"/>
               </a:ext>
             </a:extLst>
           </p:cNvPr>
@@ -16024,7 +15566,7 @@
         <p:spPr>
           <a:xfrm>
             <a:off x="847725" y="1362075"/>
-            <a:ext cx="6257925" cy="228600"/>
+            <a:ext cx="5038725" cy="228600"/>
           </a:xfrm>
           <a:prstGeom prst="rect">
             <a:avLst/>
@@ -16064,20 +15606,20 @@
                 <a:ea typeface="Yu Gothic"/>
                 <a:cs typeface="Yu Gothic"/>
               </a:rPr>
-              <a:t>core group mean RMSE</a:t>
+              <a:t>予測精度と合格上限（低いほど良い）</a:t>
             </a:r>
           </a:p>
         </p:txBody>
       </p:sp>
       <p:graphicFrame>
         <p:nvGraphicFramePr>
-          <p:cNvPr id="37" name="Chart"/>
+          <p:cNvPr id="36" name="Chart"/>
           <p:cNvGraphicFramePr/>
           <p:nvPr/>
         </p:nvGraphicFramePr>
         <p:xfrm>
           <a:off x="552450" y="1676400"/>
-          <a:ext cx="6553200" cy="3486150"/>
+          <a:ext cx="5334000" cy="3333750"/>
         </p:xfrm>
         <a:graphic>
           <a:graphicData uri="http://schemas.openxmlformats.org/drawingml/2006/chart">
@@ -16090,18 +15632,18 @@
           <p:cNvPr id="12" name="正方形/長方形 11">
             <a:extLst>
               <a:ext uri="{FF2B5EF4-FFF2-40B4-BE49-F238E27FC236}">
-                <a16:creationId xmlns:a16="http://schemas.microsoft.com/office/drawing/2014/main" id="{B27B4028-E760-4B37-B0C2-E40BD8E1E4BA}"/>
-              </a:ext>
-            </a:extLst>
-          </p:cNvPr>
-          <p:cNvSpPr>
-            <a:spLocks noGrp="1"/>
-          </p:cNvSpPr>
-          <p:nvPr/>
-        </p:nvSpPr>
-        <p:spPr>
-          <a:xfrm>
-            <a:off x="7524750" y="1362075"/>
+                <a16:creationId xmlns:a16="http://schemas.microsoft.com/office/drawing/2014/main" id="{601C5602-D8E2-4026-ADC8-44D37A6FC6B1}"/>
+              </a:ext>
+            </a:extLst>
+          </p:cNvPr>
+          <p:cNvSpPr>
+            <a:spLocks noGrp="1"/>
+          </p:cNvSpPr>
+          <p:nvPr/>
+        </p:nvSpPr>
+        <p:spPr>
+          <a:xfrm>
+            <a:off x="6286500" y="1362075"/>
             <a:ext cx="266700" cy="228600"/>
           </a:xfrm>
           <a:prstGeom prst="rect">
@@ -16152,19 +15694,19 @@
           <p:cNvPr id="13" name="正方形/長方形 12">
             <a:extLst>
               <a:ext uri="{FF2B5EF4-FFF2-40B4-BE49-F238E27FC236}">
-                <a16:creationId xmlns:a16="http://schemas.microsoft.com/office/drawing/2014/main" id="{3999D71A-46DB-4D42-802E-56EF320336F9}"/>
-              </a:ext>
-            </a:extLst>
-          </p:cNvPr>
-          <p:cNvSpPr>
-            <a:spLocks noGrp="1"/>
-          </p:cNvSpPr>
-          <p:nvPr/>
-        </p:nvSpPr>
-        <p:spPr>
-          <a:xfrm>
-            <a:off x="7820025" y="1362075"/>
-            <a:ext cx="3819525" cy="228600"/>
+                <a16:creationId xmlns:a16="http://schemas.microsoft.com/office/drawing/2014/main" id="{D04D8F19-1690-405F-9B09-AA0BB5CEE7F4}"/>
+              </a:ext>
+            </a:extLst>
+          </p:cNvPr>
+          <p:cNvSpPr>
+            <a:spLocks noGrp="1"/>
+          </p:cNvSpPr>
+          <p:nvPr/>
+        </p:nvSpPr>
+        <p:spPr>
+          <a:xfrm>
+            <a:off x="6581775" y="1362075"/>
+            <a:ext cx="5057775" cy="228600"/>
           </a:xfrm>
           <a:prstGeom prst="rect">
             <a:avLst/>
@@ -16204,20 +15746,20 @@
                 <a:ea typeface="Yu Gothic"/>
                 <a:cs typeface="Yu Gothic"/>
               </a:rPr>
-              <a:t>adequacy separation</a:t>
+              <a:t>学習効果とmodel-gap検出</a:t>
             </a:r>
           </a:p>
         </p:txBody>
       </p:sp>
       <p:graphicFrame>
         <p:nvGraphicFramePr>
-          <p:cNvPr id="40" name="Chart"/>
+          <p:cNvPr id="39" name="Chart"/>
           <p:cNvGraphicFramePr/>
           <p:nvPr/>
         </p:nvGraphicFramePr>
         <p:xfrm>
-          <a:off x="7524750" y="1676400"/>
-          <a:ext cx="4114800" cy="3486150"/>
+          <a:off x="6286500" y="1676400"/>
+          <a:ext cx="5353050" cy="3333750"/>
         </p:xfrm>
         <a:graphic>
           <a:graphicData uri="http://schemas.openxmlformats.org/drawingml/2006/chart">
@@ -16230,19 +15772,19 @@
           <p:cNvPr id="15" name="直線コネクタ 14">
             <a:extLst>
               <a:ext uri="{FF2B5EF4-FFF2-40B4-BE49-F238E27FC236}">
-                <a16:creationId xmlns:a16="http://schemas.microsoft.com/office/drawing/2014/main" id="{82DA45EB-79EF-421C-AC13-19983C964753}"/>
-              </a:ext>
-            </a:extLst>
-          </p:cNvPr>
-          <p:cNvSpPr>
-            <a:spLocks noGrp="1"/>
-          </p:cNvSpPr>
-          <p:nvPr/>
-        </p:nvSpPr>
-        <p:spPr>
-          <a:xfrm>
-            <a:off x="552450" y="5448300"/>
-            <a:ext cx="2457450" cy="0"/>
+                <a16:creationId xmlns:a16="http://schemas.microsoft.com/office/drawing/2014/main" id="{C176D175-CA0D-4BE0-8B57-4B655958F988}"/>
+              </a:ext>
+            </a:extLst>
+          </p:cNvPr>
+          <p:cNvSpPr>
+            <a:spLocks noGrp="1"/>
+          </p:cNvSpPr>
+          <p:nvPr/>
+        </p:nvSpPr>
+        <p:spPr>
+          <a:xfrm>
+            <a:off x="552450" y="5314950"/>
+            <a:ext cx="3143250" cy="0"/>
           </a:xfrm>
           <a:prstGeom prst="line">
             <a:avLst/>
@@ -16250,7 +15792,7 @@
           <a:noFill/>
           <a:ln w="38100">
             <a:solidFill>
-              <a:srgbClr val="00A5D8"/>
+              <a:srgbClr val="4D8710"/>
             </a:solidFill>
             <a:prstDash val="solid"/>
           </a:ln>
@@ -16261,19 +15803,19 @@
           <p:cNvPr id="16" name="正方形/長方形 15">
             <a:extLst>
               <a:ext uri="{FF2B5EF4-FFF2-40B4-BE49-F238E27FC236}">
-                <a16:creationId xmlns:a16="http://schemas.microsoft.com/office/drawing/2014/main" id="{F1F8B98A-143F-4636-9D63-9CE73470AA63}"/>
-              </a:ext>
-            </a:extLst>
-          </p:cNvPr>
-          <p:cNvSpPr>
-            <a:spLocks noGrp="1"/>
-          </p:cNvSpPr>
-          <p:nvPr/>
-        </p:nvSpPr>
-        <p:spPr>
-          <a:xfrm>
-            <a:off x="552450" y="5524500"/>
-            <a:ext cx="2457450" cy="333375"/>
+                <a16:creationId xmlns:a16="http://schemas.microsoft.com/office/drawing/2014/main" id="{B1FEEDC4-B299-464D-833E-0DAE3164BC5D}"/>
+              </a:ext>
+            </a:extLst>
+          </p:cNvPr>
+          <p:cNvSpPr>
+            <a:spLocks noGrp="1"/>
+          </p:cNvSpPr>
+          <p:nvPr/>
+        </p:nvSpPr>
+        <p:spPr>
+          <a:xfrm>
+            <a:off x="552450" y="5391150"/>
+            <a:ext cx="3143250" cy="333375"/>
           </a:xfrm>
           <a:prstGeom prst="rect">
             <a:avLst/>
@@ -16313,7 +15855,7 @@
                 <a:ea typeface="Yu Gothic"/>
                 <a:cs typeface="Yu Gothic"/>
               </a:rPr>
-              <a:t>0.143 K</a:t>
+              <a:t>PASS</a:t>
             </a:r>
           </a:p>
         </p:txBody>
@@ -16323,19 +15865,19 @@
           <p:cNvPr id="17" name="正方形/長方形 16">
             <a:extLst>
               <a:ext uri="{FF2B5EF4-FFF2-40B4-BE49-F238E27FC236}">
-                <a16:creationId xmlns:a16="http://schemas.microsoft.com/office/drawing/2014/main" id="{4676E669-A057-4FA8-BAB2-51AFC904E5FC}"/>
-              </a:ext>
-            </a:extLst>
-          </p:cNvPr>
-          <p:cNvSpPr>
-            <a:spLocks noGrp="1"/>
-          </p:cNvSpPr>
-          <p:nvPr/>
-        </p:nvSpPr>
-        <p:spPr>
-          <a:xfrm>
-            <a:off x="552450" y="5848350"/>
-            <a:ext cx="2457450" cy="238125"/>
+                <a16:creationId xmlns:a16="http://schemas.microsoft.com/office/drawing/2014/main" id="{63DC0942-62CE-4F4B-8560-897ACBB5A500}"/>
+              </a:ext>
+            </a:extLst>
+          </p:cNvPr>
+          <p:cNvSpPr>
+            <a:spLocks noGrp="1"/>
+          </p:cNvSpPr>
+          <p:nvPr/>
+        </p:nvSpPr>
+        <p:spPr>
+          <a:xfrm>
+            <a:off x="552450" y="5715000"/>
+            <a:ext cx="3143250" cy="238125"/>
           </a:xfrm>
           <a:prstGeom prst="rect">
             <a:avLst/>
@@ -16375,7 +15917,7 @@
                 <a:ea typeface="Yu Gothic"/>
                 <a:cs typeface="Yu Gothic"/>
               </a:rPr>
-              <a:t>core 11ケース平均</a:t>
+              <a:t>平均 0.143 K / 上限 1.000 K</a:t>
             </a:r>
           </a:p>
         </p:txBody>
@@ -16385,19 +15927,19 @@
           <p:cNvPr id="18" name="直線コネクタ 17">
             <a:extLst>
               <a:ext uri="{FF2B5EF4-FFF2-40B4-BE49-F238E27FC236}">
-                <a16:creationId xmlns:a16="http://schemas.microsoft.com/office/drawing/2014/main" id="{4FF102E9-E955-4A7A-9FDE-E962C7DF08D4}"/>
-              </a:ext>
-            </a:extLst>
-          </p:cNvPr>
-          <p:cNvSpPr>
-            <a:spLocks noGrp="1"/>
-          </p:cNvSpPr>
-          <p:nvPr/>
-        </p:nvSpPr>
-        <p:spPr>
-          <a:xfrm>
-            <a:off x="3352800" y="5448300"/>
-            <a:ext cx="2457450" cy="0"/>
+                <a16:creationId xmlns:a16="http://schemas.microsoft.com/office/drawing/2014/main" id="{0FB8382C-2C5A-4BB1-AEC2-DC92C7BF8E42}"/>
+              </a:ext>
+            </a:extLst>
+          </p:cNvPr>
+          <p:cNvSpPr>
+            <a:spLocks noGrp="1"/>
+          </p:cNvSpPr>
+          <p:nvPr/>
+        </p:nvSpPr>
+        <p:spPr>
+          <a:xfrm>
+            <a:off x="4076700" y="5314950"/>
+            <a:ext cx="3143250" cy="0"/>
           </a:xfrm>
           <a:prstGeom prst="line">
             <a:avLst/>
@@ -16405,7 +15947,7 @@
           <a:noFill/>
           <a:ln w="38100">
             <a:solidFill>
-              <a:srgbClr val="7B2DAF"/>
+              <a:srgbClr val="4D8710"/>
             </a:solidFill>
             <a:prstDash val="solid"/>
           </a:ln>
@@ -16416,19 +15958,19 @@
           <p:cNvPr id="19" name="正方形/長方形 18">
             <a:extLst>
               <a:ext uri="{FF2B5EF4-FFF2-40B4-BE49-F238E27FC236}">
-                <a16:creationId xmlns:a16="http://schemas.microsoft.com/office/drawing/2014/main" id="{11699EA7-7B4A-4982-A5DC-18838B9A8F3B}"/>
-              </a:ext>
-            </a:extLst>
-          </p:cNvPr>
-          <p:cNvSpPr>
-            <a:spLocks noGrp="1"/>
-          </p:cNvSpPr>
-          <p:nvPr/>
-        </p:nvSpPr>
-        <p:spPr>
-          <a:xfrm>
-            <a:off x="3352800" y="5524500"/>
-            <a:ext cx="2457450" cy="333375"/>
+                <a16:creationId xmlns:a16="http://schemas.microsoft.com/office/drawing/2014/main" id="{3C8BB9C9-F3FC-4330-82EE-F2C33FCB3801}"/>
+              </a:ext>
+            </a:extLst>
+          </p:cNvPr>
+          <p:cNvSpPr>
+            <a:spLocks noGrp="1"/>
+          </p:cNvSpPr>
+          <p:nvPr/>
+        </p:nvSpPr>
+        <p:spPr>
+          <a:xfrm>
+            <a:off x="4076700" y="5391150"/>
+            <a:ext cx="3143250" cy="333375"/>
           </a:xfrm>
           <a:prstGeom prst="rect">
             <a:avLst/>
@@ -16468,7 +16010,7 @@
                 <a:ea typeface="Yu Gothic"/>
                 <a:cs typeface="Yu Gothic"/>
               </a:rPr>
-              <a:t>1.303 K</a:t>
+              <a:t>PASS</a:t>
             </a:r>
           </a:p>
         </p:txBody>
@@ -16478,19 +16020,19 @@
           <p:cNvPr id="20" name="正方形/長方形 19">
             <a:extLst>
               <a:ext uri="{FF2B5EF4-FFF2-40B4-BE49-F238E27FC236}">
-                <a16:creationId xmlns:a16="http://schemas.microsoft.com/office/drawing/2014/main" id="{3BC57F4E-531D-4EBA-83F2-2DAD9F6E8A17}"/>
-              </a:ext>
-            </a:extLst>
-          </p:cNvPr>
-          <p:cNvSpPr>
-            <a:spLocks noGrp="1"/>
-          </p:cNvSpPr>
-          <p:nvPr/>
-        </p:nvSpPr>
-        <p:spPr>
-          <a:xfrm>
-            <a:off x="3352800" y="5848350"/>
-            <a:ext cx="2457450" cy="238125"/>
+                <a16:creationId xmlns:a16="http://schemas.microsoft.com/office/drawing/2014/main" id="{190827AF-2E9B-47A2-8E03-41E3710C4E83}"/>
+              </a:ext>
+            </a:extLst>
+          </p:cNvPr>
+          <p:cNvSpPr>
+            <a:spLocks noGrp="1"/>
+          </p:cNvSpPr>
+          <p:nvPr/>
+        </p:nvSpPr>
+        <p:spPr>
+          <a:xfrm>
+            <a:off x="4076700" y="5715000"/>
+            <a:ext cx="3143250" cy="238125"/>
           </a:xfrm>
           <a:prstGeom prst="rect">
             <a:avLst/>
@@ -16530,7 +16072,7 @@
                 <a:ea typeface="Yu Gothic"/>
                 <a:cs typeface="Yu Gothic"/>
               </a:rPr>
-              <a:t>worst F09：初期観測2/4</a:t>
+              <a:t>worst 1.303 K / 上限 1.500 K</a:t>
             </a:r>
           </a:p>
         </p:txBody>
@@ -16540,19 +16082,19 @@
           <p:cNvPr id="21" name="直線コネクタ 20">
             <a:extLst>
               <a:ext uri="{FF2B5EF4-FFF2-40B4-BE49-F238E27FC236}">
-                <a16:creationId xmlns:a16="http://schemas.microsoft.com/office/drawing/2014/main" id="{2DCB468C-7F16-4ABD-8167-141624BA7CE9}"/>
-              </a:ext>
-            </a:extLst>
-          </p:cNvPr>
-          <p:cNvSpPr>
-            <a:spLocks noGrp="1"/>
-          </p:cNvSpPr>
-          <p:nvPr/>
-        </p:nvSpPr>
-        <p:spPr>
-          <a:xfrm>
-            <a:off x="6153150" y="5448300"/>
-            <a:ext cx="2457450" cy="0"/>
+                <a16:creationId xmlns:a16="http://schemas.microsoft.com/office/drawing/2014/main" id="{338A2187-2BD3-46C5-9388-72B87898EA59}"/>
+              </a:ext>
+            </a:extLst>
+          </p:cNvPr>
+          <p:cNvSpPr>
+            <a:spLocks noGrp="1"/>
+          </p:cNvSpPr>
+          <p:nvPr/>
+        </p:nvSpPr>
+        <p:spPr>
+          <a:xfrm>
+            <a:off x="7600950" y="5314950"/>
+            <a:ext cx="4038600" cy="0"/>
           </a:xfrm>
           <a:prstGeom prst="line">
             <a:avLst/>
@@ -16560,7 +16102,7 @@
           <a:noFill/>
           <a:ln w="38100">
             <a:solidFill>
-              <a:srgbClr val="76BE18"/>
+              <a:srgbClr val="4D8710"/>
             </a:solidFill>
             <a:prstDash val="solid"/>
           </a:ln>
@@ -16571,19 +16113,19 @@
           <p:cNvPr id="22" name="正方形/長方形 21">
             <a:extLst>
               <a:ext uri="{FF2B5EF4-FFF2-40B4-BE49-F238E27FC236}">
-                <a16:creationId xmlns:a16="http://schemas.microsoft.com/office/drawing/2014/main" id="{7DBAEA57-EE35-4D52-B54D-05B134ABA98B}"/>
-              </a:ext>
-            </a:extLst>
-          </p:cNvPr>
-          <p:cNvSpPr>
-            <a:spLocks noGrp="1"/>
-          </p:cNvSpPr>
-          <p:nvPr/>
-        </p:nvSpPr>
-        <p:spPr>
-          <a:xfrm>
-            <a:off x="6153150" y="5524500"/>
-            <a:ext cx="2457450" cy="333375"/>
+                <a16:creationId xmlns:a16="http://schemas.microsoft.com/office/drawing/2014/main" id="{EBE231E1-FA8C-4668-8883-00EFBB2503D0}"/>
+              </a:ext>
+            </a:extLst>
+          </p:cNvPr>
+          <p:cNvSpPr>
+            <a:spLocks noGrp="1"/>
+          </p:cNvSpPr>
+          <p:nvPr/>
+        </p:nvSpPr>
+        <p:spPr>
+          <a:xfrm>
+            <a:off x="7600950" y="5391150"/>
+            <a:ext cx="4038600" cy="333375"/>
           </a:xfrm>
           <a:prstGeom prst="rect">
             <a:avLst/>
@@ -16623,7 +16165,7 @@
                 <a:ea typeface="Yu Gothic"/>
                 <a:cs typeface="Yu Gothic"/>
               </a:rPr>
-              <a:t>98.0%</a:t>
+              <a:t>PASS</a:t>
             </a:r>
           </a:p>
         </p:txBody>
@@ -16633,19 +16175,19 @@
           <p:cNvPr id="23" name="正方形/長方形 22">
             <a:extLst>
               <a:ext uri="{FF2B5EF4-FFF2-40B4-BE49-F238E27FC236}">
-                <a16:creationId xmlns:a16="http://schemas.microsoft.com/office/drawing/2014/main" id="{0512BCC7-CAA5-424B-BD50-23A395E8480F}"/>
-              </a:ext>
-            </a:extLst>
-          </p:cNvPr>
-          <p:cNvSpPr>
-            <a:spLocks noGrp="1"/>
-          </p:cNvSpPr>
-          <p:nvPr/>
-        </p:nvSpPr>
-        <p:spPr>
-          <a:xfrm>
-            <a:off x="6153150" y="5848350"/>
-            <a:ext cx="2457450" cy="238125"/>
+                <a16:creationId xmlns:a16="http://schemas.microsoft.com/office/drawing/2014/main" id="{1CEE0D98-26C6-468C-A16F-666E23631820}"/>
+              </a:ext>
+            </a:extLst>
+          </p:cNvPr>
+          <p:cNvSpPr>
+            <a:spLocks noGrp="1"/>
+          </p:cNvSpPr>
+          <p:nvPr/>
+        </p:nvSpPr>
+        <p:spPr>
+          <a:xfrm>
+            <a:off x="7600950" y="5715000"/>
+            <a:ext cx="4038600" cy="238125"/>
           </a:xfrm>
           <a:prstGeom prst="rect">
             <a:avLst/>
@@ -16685,60 +16227,29 @@
                 <a:ea typeface="Yu Gothic"/>
                 <a:cs typeface="Yu Gothic"/>
               </a:rPr>
-              <a:t>prior平均に対する改善</a:t>
-            </a:r>
-          </a:p>
-        </p:txBody>
-      </p:sp>
-      <p:sp>
-        <p:nvSpPr>
-          <p:cNvPr id="24" name="直線コネクタ 23">
-            <a:extLst>
-              <a:ext uri="{FF2B5EF4-FFF2-40B4-BE49-F238E27FC236}">
-                <a16:creationId xmlns:a16="http://schemas.microsoft.com/office/drawing/2014/main" id="{F80150D9-64BA-415A-8BEB-14522B492D92}"/>
-              </a:ext>
-            </a:extLst>
-          </p:cNvPr>
-          <p:cNvSpPr>
-            <a:spLocks noGrp="1"/>
-          </p:cNvSpPr>
-          <p:nvPr/>
-        </p:nvSpPr>
-        <p:spPr>
-          <a:xfrm>
-            <a:off x="8953500" y="5448300"/>
-            <a:ext cx="2686050" cy="0"/>
-          </a:xfrm>
-          <a:prstGeom prst="line">
-            <a:avLst/>
-          </a:prstGeom>
-          <a:noFill/>
-          <a:ln w="38100">
-            <a:solidFill>
-              <a:srgbClr val="C4493D"/>
-            </a:solidFill>
-            <a:prstDash val="solid"/>
-          </a:ln>
-        </p:spPr>
-      </p:sp>
-      <p:sp>
-        <p:nvSpPr>
-          <p:cNvPr id="25" name="正方形/長方形 24">
-            <a:extLst>
-              <a:ext uri="{FF2B5EF4-FFF2-40B4-BE49-F238E27FC236}">
-                <a16:creationId xmlns:a16="http://schemas.microsoft.com/office/drawing/2014/main" id="{2C1F87AF-16DB-4D0D-ABA0-2BEBE9783595}"/>
-              </a:ext>
-            </a:extLst>
-          </p:cNvPr>
-          <p:cNvSpPr>
-            <a:spLocks noGrp="1"/>
-          </p:cNvSpPr>
-          <p:nvPr/>
-        </p:nvSpPr>
-        <p:spPr>
-          <a:xfrm>
-            <a:off x="8953500" y="5524500"/>
-            <a:ext cx="2686050" cy="333375"/>
+              <a:t>F11 9.823 K / 検出下限 0.500 K</a:t>
+            </a:r>
+          </a:p>
+        </p:txBody>
+      </p:sp>
+      <p:sp>
+        <p:nvSpPr>
+          <p:cNvPr id="24" name="正方形/長方形 23">
+            <a:extLst>
+              <a:ext uri="{FF2B5EF4-FFF2-40B4-BE49-F238E27FC236}">
+                <a16:creationId xmlns:a16="http://schemas.microsoft.com/office/drawing/2014/main" id="{85DF3CF9-4FA6-4539-9701-A80DCBFE5312}"/>
+              </a:ext>
+            </a:extLst>
+          </p:cNvPr>
+          <p:cNvSpPr>
+            <a:spLocks noGrp="1"/>
+          </p:cNvSpPr>
+          <p:nvPr/>
+        </p:nvSpPr>
+        <p:spPr>
+          <a:xfrm>
+            <a:off x="6286500" y="4972050"/>
+            <a:ext cx="2571750" cy="228600"/>
           </a:xfrm>
           <a:prstGeom prst="rect">
             <a:avLst/>
@@ -16755,52 +16266,52 @@
           </a:bodyPr>
           <a:lstStyle/>
           <a:p>
-            <a:pPr algn="l">
+            <a:pPr algn="ctr">
               <a:lnSpc>
                 <a:spcPct val="100000"/>
               </a:lnSpc>
               <a:buNone/>
-              <a:defRPr sz="1875" b="1" i="0">
-                <a:solidFill>
-                  <a:srgbClr val="333333"/>
-                </a:solidFill>
-                <a:latin typeface="Yu Gothic"/>
-                <a:ea typeface="Yu Gothic"/>
-                <a:cs typeface="Yu Gothic"/>
-              </a:defRPr>
-            </a:pPr>
-            <a:r>
-              <a:rPr sz="1875" b="1" i="0">
-                <a:solidFill>
-                  <a:srgbClr val="333333"/>
+              <a:defRPr sz="938" b="1" i="0">
+                <a:solidFill>
+                  <a:srgbClr val="007FA8"/>
+                </a:solidFill>
+                <a:latin typeface="Yu Gothic"/>
+                <a:ea typeface="Yu Gothic"/>
+                <a:cs typeface="Yu Gothic"/>
+              </a:defRPr>
+            </a:pPr>
+            <a:r>
+              <a:rPr sz="938" b="1" i="0">
+                <a:solidFill>
+                  <a:srgbClr val="007FA8"/>
                 </a:solidFill>
                 <a:latin typeface="Yu Gothic"/>
                 <a:ea typeface="Yu Gothic"/>
                 <a:cs typeface="Yu Gothic"/>
               </a:rPr>
-              <a:t>9.823 K</a:t>
-            </a:r>
-          </a:p>
-        </p:txBody>
-      </p:sp>
-      <p:sp>
-        <p:nvSpPr>
-          <p:cNvPr id="26" name="正方形/長方形 25">
-            <a:extLst>
-              <a:ext uri="{FF2B5EF4-FFF2-40B4-BE49-F238E27FC236}">
-                <a16:creationId xmlns:a16="http://schemas.microsoft.com/office/drawing/2014/main" id="{F50A6911-E494-477C-AF7F-7720868B8CB5}"/>
-              </a:ext>
-            </a:extLst>
-          </p:cNvPr>
-          <p:cNvSpPr>
-            <a:spLocks noGrp="1"/>
-          </p:cNvSpPr>
-          <p:nvPr/>
-        </p:nvSpPr>
-        <p:spPr>
-          <a:xfrm>
-            <a:off x="8953500" y="5848350"/>
-            <a:ext cx="2686050" cy="238125"/>
+              <a:t>学習前から 98.0% 改善</a:t>
+            </a:r>
+          </a:p>
+        </p:txBody>
+      </p:sp>
+      <p:sp>
+        <p:nvSpPr>
+          <p:cNvPr id="25" name="正方形/長方形 24">
+            <a:extLst>
+              <a:ext uri="{FF2B5EF4-FFF2-40B4-BE49-F238E27FC236}">
+                <a16:creationId xmlns:a16="http://schemas.microsoft.com/office/drawing/2014/main" id="{2CC8D285-345D-4069-8197-BC57B1B2357B}"/>
+              </a:ext>
+            </a:extLst>
+          </p:cNvPr>
+          <p:cNvSpPr>
+            <a:spLocks noGrp="1"/>
+          </p:cNvSpPr>
+          <p:nvPr/>
+        </p:nvSpPr>
+        <p:spPr>
+          <a:xfrm>
+            <a:off x="8972550" y="4972050"/>
+            <a:ext cx="2667000" cy="228600"/>
           </a:xfrm>
           <a:prstGeom prst="rect">
             <a:avLst/>
@@ -16817,30 +16328,30 @@
           </a:bodyPr>
           <a:lstStyle/>
           <a:p>
-            <a:pPr algn="l">
+            <a:pPr algn="ctr">
               <a:lnSpc>
                 <a:spcPct val="100000"/>
               </a:lnSpc>
               <a:buNone/>
-              <a:defRPr sz="863" b="0" i="0">
-                <a:solidFill>
-                  <a:srgbClr val="555555"/>
-                </a:solidFill>
-                <a:latin typeface="Yu Gothic"/>
-                <a:ea typeface="Yu Gothic"/>
-                <a:cs typeface="Yu Gothic"/>
-              </a:defRPr>
-            </a:pPr>
-            <a:r>
-              <a:rPr sz="863" b="0" i="0">
-                <a:solidFill>
-                  <a:srgbClr val="555555"/>
+              <a:defRPr sz="938" b="1" i="0">
+                <a:solidFill>
+                  <a:srgbClr val="C4493D"/>
+                </a:solidFill>
+                <a:latin typeface="Yu Gothic"/>
+                <a:ea typeface="Yu Gothic"/>
+                <a:cs typeface="Yu Gothic"/>
+              </a:defRPr>
+            </a:pPr>
+            <a:r>
+              <a:rPr sz="938" b="1" i="0">
+                <a:solidFill>
+                  <a:srgbClr val="C4493D"/>
                 </a:solidFill>
                 <a:latin typeface="Yu Gothic"/>
                 <a:ea typeface="Yu Gothic"/>
                 <a:cs typeface="Yu Gothic"/>
               </a:rPr>
-              <a:t>F11：温度依存損失</a:t>
+              <a:t>model gapは下限の 19.6倍</a:t>
             </a:r>
           </a:p>
         </p:txBody>
@@ -16848,7 +16359,7 @@
     </p:spTree>
     <p:extLst>
       <p:ext uri="{BB962C8B-B14F-4D97-AF65-F5344CB8AC3E}">
-        <p14:creationId xmlns:p14="http://schemas.microsoft.com/office/powerpoint/2010/main" val="1430647085"/>
+        <p14:creationId xmlns:p14="http://schemas.microsoft.com/office/powerpoint/2010/main" val="661024220"/>
       </p:ext>
     </p:extLst>
   </p:cSld>
@@ -16888,7 +16399,7 @@
           <p:cNvPr id="34" name="正方形/長方形 33">
             <a:extLst>
               <a:ext uri="{FF2B5EF4-FFF2-40B4-BE49-F238E27FC236}">
-                <a16:creationId xmlns:a16="http://schemas.microsoft.com/office/drawing/2014/main" id="{3ED50005-3D82-484A-B544-612FA1EA8C32}"/>
+                <a16:creationId xmlns:a16="http://schemas.microsoft.com/office/drawing/2014/main" id="{B1F29E5E-423E-4835-BAD0-F24A6391C676}"/>
               </a:ext>
             </a:extLst>
           </p:cNvPr>
@@ -16919,7 +16430,7 @@
           <p:cNvPr id="2" name="正方形/長方形 1">
             <a:extLst>
               <a:ext uri="{FF2B5EF4-FFF2-40B4-BE49-F238E27FC236}">
-                <a16:creationId xmlns:a16="http://schemas.microsoft.com/office/drawing/2014/main" id="{0A3D6889-CC01-48FB-A05E-DEB1F3AAB25E}"/>
+                <a16:creationId xmlns:a16="http://schemas.microsoft.com/office/drawing/2014/main" id="{4DAF06C4-8304-410D-B77C-0F8721923A91}"/>
               </a:ext>
             </a:extLst>
           </p:cNvPr>
@@ -16981,7 +16492,7 @@
           <p:cNvPr id="3" name="正方形/長方形 2">
             <a:extLst>
               <a:ext uri="{FF2B5EF4-FFF2-40B4-BE49-F238E27FC236}">
-                <a16:creationId xmlns:a16="http://schemas.microsoft.com/office/drawing/2014/main" id="{5CC8E612-026D-4959-8242-CD06662AD96B}"/>
+                <a16:creationId xmlns:a16="http://schemas.microsoft.com/office/drawing/2014/main" id="{9310D384-EBCD-4CC9-B2F8-71B9A96BFE19}"/>
               </a:ext>
             </a:extLst>
           </p:cNvPr>
@@ -17033,7 +16544,7 @@
                 <a:ea typeface="Yu Gothic"/>
                 <a:cs typeface="Yu Gothic"/>
               </a:rPr>
-              <a:t>20 sの因果履歴で同一評価窓RMSEを90.1%低減</a:t>
+              <a:t>20秒の因果履歴で同一評価窓RMSEを90.1%低減</a:t>
             </a:r>
           </a:p>
         </p:txBody>
@@ -17043,7 +16554,7 @@
           <p:cNvPr id="4" name="正方形/長方形 3">
             <a:extLst>
               <a:ext uri="{FF2B5EF4-FFF2-40B4-BE49-F238E27FC236}">
-                <a16:creationId xmlns:a16="http://schemas.microsoft.com/office/drawing/2014/main" id="{9700A6D8-050B-4DDB-987D-6BC1D5AFBFF4}"/>
+                <a16:creationId xmlns:a16="http://schemas.microsoft.com/office/drawing/2014/main" id="{27C9146C-C788-40FF-9DAB-727F4DA98C0A}"/>
               </a:ext>
             </a:extLst>
           </p:cNvPr>
@@ -17095,7 +16606,7 @@
                 <a:ea typeface="Yu Gothic"/>
                 <a:cs typeface="Yu Gothic"/>
               </a:rPr>
-              <a:t>観測点数が同じでも、履歴が熱結合を通じて未観測nodeの初期状態を拘束する</a:t>
+              <a:t>同じ2センサでも、履歴を使うと未観測nodeの初期状態を熱結合から推定できる</a:t>
             </a:r>
           </a:p>
         </p:txBody>
@@ -17105,7 +16616,7 @@
           <p:cNvPr id="5" name="直線コネクタ 4">
             <a:extLst>
               <a:ext uri="{FF2B5EF4-FFF2-40B4-BE49-F238E27FC236}">
-                <a16:creationId xmlns:a16="http://schemas.microsoft.com/office/drawing/2014/main" id="{F5A9D6CC-B9BE-44EE-A323-CE01569005B3}"/>
+                <a16:creationId xmlns:a16="http://schemas.microsoft.com/office/drawing/2014/main" id="{C8B7953E-B210-4C90-AD7D-71E02A5738E1}"/>
               </a:ext>
             </a:extLst>
           </p:cNvPr>
@@ -17136,7 +16647,7 @@
           <p:cNvPr id="6" name="直線コネクタ 5">
             <a:extLst>
               <a:ext uri="{FF2B5EF4-FFF2-40B4-BE49-F238E27FC236}">
-                <a16:creationId xmlns:a16="http://schemas.microsoft.com/office/drawing/2014/main" id="{BED48FA3-BCEB-4D71-9608-33A7DCBF479D}"/>
+                <a16:creationId xmlns:a16="http://schemas.microsoft.com/office/drawing/2014/main" id="{DA633724-B090-46AD-BD36-B67ED6374262}"/>
               </a:ext>
             </a:extLst>
           </p:cNvPr>
@@ -17167,7 +16678,7 @@
           <p:cNvPr id="7" name="正方形/長方形 6">
             <a:extLst>
               <a:ext uri="{FF2B5EF4-FFF2-40B4-BE49-F238E27FC236}">
-                <a16:creationId xmlns:a16="http://schemas.microsoft.com/office/drawing/2014/main" id="{817532FA-7B12-4F8A-99B1-07CC03B2862D}"/>
+                <a16:creationId xmlns:a16="http://schemas.microsoft.com/office/drawing/2014/main" id="{B5EEC64D-0576-4BBD-AFAE-0BADC6B293D9}"/>
               </a:ext>
             </a:extLst>
           </p:cNvPr>
@@ -17229,7 +16740,7 @@
           <p:cNvPr id="8" name="正方形/長方形 7">
             <a:extLst>
               <a:ext uri="{FF2B5EF4-FFF2-40B4-BE49-F238E27FC236}">
-                <a16:creationId xmlns:a16="http://schemas.microsoft.com/office/drawing/2014/main" id="{1D9B72CD-0D06-41D5-91D2-3BDCAA1DDC2C}"/>
+                <a16:creationId xmlns:a16="http://schemas.microsoft.com/office/drawing/2014/main" id="{ECD49CB8-010E-42C9-ADE5-0D2B5D3CD67B}"/>
               </a:ext>
             </a:extLst>
           </p:cNvPr>
@@ -17291,7 +16802,7 @@
           <p:cNvPr id="9" name="正方形/長方形 8">
             <a:extLst>
               <a:ext uri="{FF2B5EF4-FFF2-40B4-BE49-F238E27FC236}">
-                <a16:creationId xmlns:a16="http://schemas.microsoft.com/office/drawing/2014/main" id="{6EE602E8-3735-485F-8FD1-81429636AE94}"/>
+                <a16:creationId xmlns:a16="http://schemas.microsoft.com/office/drawing/2014/main" id="{08692A18-A931-4F2A-A054-B1D6397CAD82}"/>
               </a:ext>
             </a:extLst>
           </p:cNvPr>
@@ -17353,7 +16864,7 @@
           <p:cNvPr id="10" name="正方形/長方形 9">
             <a:extLst>
               <a:ext uri="{FF2B5EF4-FFF2-40B4-BE49-F238E27FC236}">
-                <a16:creationId xmlns:a16="http://schemas.microsoft.com/office/drawing/2014/main" id="{BFEFBE81-D56D-473E-A943-2DE2CE367AD3}"/>
+                <a16:creationId xmlns:a16="http://schemas.microsoft.com/office/drawing/2014/main" id="{D4A99503-FCB7-4967-9EDE-4880198942B1}"/>
               </a:ext>
             </a:extLst>
           </p:cNvPr>
@@ -17415,7 +16926,7 @@
           <p:cNvPr id="11" name="直線コネクタ 10">
             <a:extLst>
               <a:ext uri="{FF2B5EF4-FFF2-40B4-BE49-F238E27FC236}">
-                <a16:creationId xmlns:a16="http://schemas.microsoft.com/office/drawing/2014/main" id="{8BE6B3E6-CAAC-4751-9109-C2BB6F70F944}"/>
+                <a16:creationId xmlns:a16="http://schemas.microsoft.com/office/drawing/2014/main" id="{F4BF2168-9D4C-4D66-A30A-FC111E57AC7D}"/>
               </a:ext>
             </a:extLst>
           </p:cNvPr>
@@ -17446,7 +16957,7 @@
           <p:cNvPr id="12" name="正方形/長方形 11">
             <a:extLst>
               <a:ext uri="{FF2B5EF4-FFF2-40B4-BE49-F238E27FC236}">
-                <a16:creationId xmlns:a16="http://schemas.microsoft.com/office/drawing/2014/main" id="{7D90565A-FCD9-4769-A52E-8A8D8C09CBE4}"/>
+                <a16:creationId xmlns:a16="http://schemas.microsoft.com/office/drawing/2014/main" id="{8EF98309-DBBE-4766-83EB-D5E00A884E2C}"/>
               </a:ext>
             </a:extLst>
           </p:cNvPr>
@@ -17508,7 +17019,7 @@
           <p:cNvPr id="13" name="正方形/長方形 12">
             <a:extLst>
               <a:ext uri="{FF2B5EF4-FFF2-40B4-BE49-F238E27FC236}">
-                <a16:creationId xmlns:a16="http://schemas.microsoft.com/office/drawing/2014/main" id="{E420AFA1-C538-4CF4-8E69-1EAC243562AA}"/>
+                <a16:creationId xmlns:a16="http://schemas.microsoft.com/office/drawing/2014/main" id="{B3E6C49B-B73E-45D6-A497-1D352B505EC9}"/>
               </a:ext>
             </a:extLst>
           </p:cNvPr>
@@ -17570,7 +17081,7 @@
           <p:cNvPr id="14" name="正方形/長方形 13">
             <a:extLst>
               <a:ext uri="{FF2B5EF4-FFF2-40B4-BE49-F238E27FC236}">
-                <a16:creationId xmlns:a16="http://schemas.microsoft.com/office/drawing/2014/main" id="{5EAE9F1B-0506-434F-AFE0-BC3166DECEF5}"/>
+                <a16:creationId xmlns:a16="http://schemas.microsoft.com/office/drawing/2014/main" id="{1987B7D9-F2DA-4905-BAEE-2C2D0E7F8102}"/>
               </a:ext>
             </a:extLst>
           </p:cNvPr>
@@ -17632,7 +17143,7 @@
           <p:cNvPr id="15" name="楕円 14">
             <a:extLst>
               <a:ext uri="{FF2B5EF4-FFF2-40B4-BE49-F238E27FC236}">
-                <a16:creationId xmlns:a16="http://schemas.microsoft.com/office/drawing/2014/main" id="{3FDA395A-2449-4F11-9298-143091CCF979}"/>
+                <a16:creationId xmlns:a16="http://schemas.microsoft.com/office/drawing/2014/main" id="{66CE9483-53E5-4830-9CAE-50B092463E4D}"/>
               </a:ext>
             </a:extLst>
           </p:cNvPr>
@@ -17663,7 +17174,7 @@
           <p:cNvPr id="16" name="正方形/長方形 15">
             <a:extLst>
               <a:ext uri="{FF2B5EF4-FFF2-40B4-BE49-F238E27FC236}">
-                <a16:creationId xmlns:a16="http://schemas.microsoft.com/office/drawing/2014/main" id="{5D73E00E-BAF5-47C8-B5B4-773324F17752}"/>
+                <a16:creationId xmlns:a16="http://schemas.microsoft.com/office/drawing/2014/main" id="{D45E179D-6458-4367-94F9-F72B7592E048}"/>
               </a:ext>
             </a:extLst>
           </p:cNvPr>
@@ -17694,7 +17205,7 @@
           <p:cNvPr id="17" name="正方形/長方形 16">
             <a:extLst>
               <a:ext uri="{FF2B5EF4-FFF2-40B4-BE49-F238E27FC236}">
-                <a16:creationId xmlns:a16="http://schemas.microsoft.com/office/drawing/2014/main" id="{6FCBFFF5-B4C8-46A8-B2C8-51664F0ADBFE}"/>
+                <a16:creationId xmlns:a16="http://schemas.microsoft.com/office/drawing/2014/main" id="{62DD2848-6236-4C0C-A530-1CAB1AB7D16B}"/>
               </a:ext>
             </a:extLst>
           </p:cNvPr>
@@ -17756,7 +17267,7 @@
           <p:cNvPr id="18" name="正方形/長方形 17">
             <a:extLst>
               <a:ext uri="{FF2B5EF4-FFF2-40B4-BE49-F238E27FC236}">
-                <a16:creationId xmlns:a16="http://schemas.microsoft.com/office/drawing/2014/main" id="{93ACEB12-C9D2-469A-AEC3-5AE6BC38D9C3}"/>
+                <a16:creationId xmlns:a16="http://schemas.microsoft.com/office/drawing/2014/main" id="{2B70437F-FAAF-4642-99F1-49BC77F8F890}"/>
               </a:ext>
             </a:extLst>
           </p:cNvPr>
@@ -17818,7 +17329,7 @@
           <p:cNvPr id="19" name="直線コネクタ 18">
             <a:extLst>
               <a:ext uri="{FF2B5EF4-FFF2-40B4-BE49-F238E27FC236}">
-                <a16:creationId xmlns:a16="http://schemas.microsoft.com/office/drawing/2014/main" id="{81CC545A-2E64-4893-A7B3-A3A8DDFB853B}"/>
+                <a16:creationId xmlns:a16="http://schemas.microsoft.com/office/drawing/2014/main" id="{4D86396C-406A-4ED1-8342-81DEA13778CA}"/>
               </a:ext>
             </a:extLst>
           </p:cNvPr>
@@ -17849,7 +17360,7 @@
           <p:cNvPr id="20" name="正方形/長方形 19">
             <a:extLst>
               <a:ext uri="{FF2B5EF4-FFF2-40B4-BE49-F238E27FC236}">
-                <a16:creationId xmlns:a16="http://schemas.microsoft.com/office/drawing/2014/main" id="{AA5D3F92-2D19-4FEA-B96E-D666EB9EDED4}"/>
+                <a16:creationId xmlns:a16="http://schemas.microsoft.com/office/drawing/2014/main" id="{CA2C9A5D-4274-4773-AA17-C3DEFF1B81F3}"/>
               </a:ext>
             </a:extLst>
           </p:cNvPr>
@@ -17911,7 +17422,7 @@
           <p:cNvPr id="21" name="正方形/長方形 20">
             <a:extLst>
               <a:ext uri="{FF2B5EF4-FFF2-40B4-BE49-F238E27FC236}">
-                <a16:creationId xmlns:a16="http://schemas.microsoft.com/office/drawing/2014/main" id="{DA1F810F-79A8-4077-9A7B-C3A419AF15F3}"/>
+                <a16:creationId xmlns:a16="http://schemas.microsoft.com/office/drawing/2014/main" id="{E01E1593-BDEC-4E8D-93C9-900F5918AC14}"/>
               </a:ext>
             </a:extLst>
           </p:cNvPr>
@@ -17973,7 +17484,7 @@
           <p:cNvPr id="22" name="正方形/長方形 21">
             <a:extLst>
               <a:ext uri="{FF2B5EF4-FFF2-40B4-BE49-F238E27FC236}">
-                <a16:creationId xmlns:a16="http://schemas.microsoft.com/office/drawing/2014/main" id="{98E4984B-C4AF-4FDB-B9E1-CBA099D0D747}"/>
+                <a16:creationId xmlns:a16="http://schemas.microsoft.com/office/drawing/2014/main" id="{043B9200-65FE-4B96-B749-E64349787093}"/>
               </a:ext>
             </a:extLst>
           </p:cNvPr>
@@ -17985,7 +17496,7 @@
         <p:spPr>
           <a:xfrm>
             <a:off x="847725" y="2571750"/>
-            <a:ext cx="8048625" cy="228600"/>
+            <a:ext cx="7038975" cy="228600"/>
           </a:xfrm>
           <a:prstGeom prst="rect">
             <a:avLst/>
@@ -18025,7 +17536,7 @@
                 <a:ea typeface="Yu Gothic"/>
                 <a:cs typeface="Yu Gothic"/>
               </a:rPr>
-              <a:t>4-node instantaneous RMSE from t = 20 s</a:t>
+              <a:t>履歴後の瞬時4-node RMSE（低いほど良い）</a:t>
             </a:r>
           </a:p>
         </p:txBody>
@@ -18038,7 +17549,7 @@
         </p:nvGraphicFramePr>
         <p:xfrm>
           <a:off x="552450" y="2895600"/>
-          <a:ext cx="8343900" cy="2828925"/>
+          <a:ext cx="7334250" cy="2743200"/>
         </p:xfrm>
         <a:graphic>
           <a:graphicData uri="http://schemas.openxmlformats.org/drawingml/2006/chart">
@@ -18051,52 +17562,19 @@
           <p:cNvPr id="24" name="正方形/長方形 23">
             <a:extLst>
               <a:ext uri="{FF2B5EF4-FFF2-40B4-BE49-F238E27FC236}">
-                <a16:creationId xmlns:a16="http://schemas.microsoft.com/office/drawing/2014/main" id="{FC8AD055-C0EC-4CB2-8587-BD337E31E1DD}"/>
-              </a:ext>
-            </a:extLst>
-          </p:cNvPr>
-          <p:cNvSpPr>
-            <a:spLocks noGrp="1"/>
-          </p:cNvSpPr>
-          <p:nvPr/>
-        </p:nvSpPr>
-        <p:spPr>
-          <a:xfrm>
-            <a:off x="9258300" y="2876550"/>
-            <a:ext cx="2381250" cy="2847975"/>
-          </a:xfrm>
-          <a:prstGeom prst="rect">
-            <a:avLst/>
-          </a:prstGeom>
-          <a:solidFill>
-            <a:srgbClr val="F7F7F7"/>
-          </a:solidFill>
-          <a:ln w="9525">
-            <a:solidFill>
-              <a:srgbClr val="D3D3D3"/>
-            </a:solidFill>
-            <a:prstDash val="solid"/>
-          </a:ln>
-        </p:spPr>
-      </p:sp>
-      <p:sp>
-        <p:nvSpPr>
-          <p:cNvPr id="25" name="正方形/長方形 24">
-            <a:extLst>
-              <a:ext uri="{FF2B5EF4-FFF2-40B4-BE49-F238E27FC236}">
-                <a16:creationId xmlns:a16="http://schemas.microsoft.com/office/drawing/2014/main" id="{F11127A1-17AE-4B91-A543-A081F7EEE49C}"/>
-              </a:ext>
-            </a:extLst>
-          </p:cNvPr>
-          <p:cNvSpPr>
-            <a:spLocks noGrp="1"/>
-          </p:cNvSpPr>
-          <p:nvPr/>
-        </p:nvSpPr>
-        <p:spPr>
-          <a:xfrm>
-            <a:off x="9467850" y="3067050"/>
-            <a:ext cx="1962150" cy="238125"/>
+                <a16:creationId xmlns:a16="http://schemas.microsoft.com/office/drawing/2014/main" id="{2B8BBE04-D820-46E5-B209-0B0FE107AFA7}"/>
+              </a:ext>
+            </a:extLst>
+          </p:cNvPr>
+          <p:cNvSpPr>
+            <a:spLocks noGrp="1"/>
+          </p:cNvSpPr>
+          <p:nvPr/>
+        </p:nvSpPr>
+        <p:spPr>
+          <a:xfrm>
+            <a:off x="8248650" y="2571750"/>
+            <a:ext cx="266700" cy="228600"/>
           </a:xfrm>
           <a:prstGeom prst="rect">
             <a:avLst/>
@@ -18113,52 +17591,52 @@
           </a:bodyPr>
           <a:lstStyle/>
           <a:p>
-            <a:pPr algn="ctr">
+            <a:pPr algn="l">
               <a:lnSpc>
                 <a:spcPct val="100000"/>
               </a:lnSpc>
               <a:buNone/>
-              <a:defRPr sz="1050" b="1" i="0">
-                <a:solidFill>
-                  <a:srgbClr val="777777"/>
-                </a:solidFill>
-                <a:latin typeface="Yu Gothic"/>
-                <a:ea typeface="Yu Gothic"/>
-                <a:cs typeface="Yu Gothic"/>
-              </a:defRPr>
-            </a:pPr>
-            <a:r>
-              <a:rPr sz="1050" b="1" i="0">
-                <a:solidFill>
-                  <a:srgbClr val="777777"/>
+              <a:defRPr sz="900" b="1" i="0">
+                <a:solidFill>
+                  <a:srgbClr val="007FA8"/>
+                </a:solidFill>
+                <a:latin typeface="Yu Gothic"/>
+                <a:ea typeface="Yu Gothic"/>
+                <a:cs typeface="Yu Gothic"/>
+              </a:defRPr>
+            </a:pPr>
+            <a:r>
+              <a:rPr sz="900" b="1" i="0">
+                <a:solidFill>
+                  <a:srgbClr val="007FA8"/>
                 </a:solidFill>
                 <a:latin typeface="Yu Gothic"/>
                 <a:ea typeface="Yu Gothic"/>
                 <a:cs typeface="Yu Gothic"/>
               </a:rPr>
-              <a:t>同一時間窓</a:t>
-            </a:r>
-          </a:p>
-        </p:txBody>
-      </p:sp>
-      <p:sp>
-        <p:nvSpPr>
-          <p:cNvPr id="26" name="正方形/長方形 25">
-            <a:extLst>
-              <a:ext uri="{FF2B5EF4-FFF2-40B4-BE49-F238E27FC236}">
-                <a16:creationId xmlns:a16="http://schemas.microsoft.com/office/drawing/2014/main" id="{8F0171C2-06F4-42CA-A5CF-2923A1C44C35}"/>
-              </a:ext>
-            </a:extLst>
-          </p:cNvPr>
-          <p:cNvSpPr>
-            <a:spLocks noGrp="1"/>
-          </p:cNvSpPr>
-          <p:nvPr/>
-        </p:nvSpPr>
-        <p:spPr>
-          <a:xfrm>
-            <a:off x="9467850" y="3448050"/>
-            <a:ext cx="1962150" cy="409575"/>
+              <a:t>(c)</a:t>
+            </a:r>
+          </a:p>
+        </p:txBody>
+      </p:sp>
+      <p:sp>
+        <p:nvSpPr>
+          <p:cNvPr id="25" name="正方形/長方形 24">
+            <a:extLst>
+              <a:ext uri="{FF2B5EF4-FFF2-40B4-BE49-F238E27FC236}">
+                <a16:creationId xmlns:a16="http://schemas.microsoft.com/office/drawing/2014/main" id="{55121C95-3971-48D9-93E8-E66598B6FCD4}"/>
+              </a:ext>
+            </a:extLst>
+          </p:cNvPr>
+          <p:cNvSpPr>
+            <a:spLocks noGrp="1"/>
+          </p:cNvSpPr>
+          <p:nvPr/>
+        </p:nvSpPr>
+        <p:spPr>
+          <a:xfrm>
+            <a:off x="8543925" y="2571750"/>
+            <a:ext cx="3095625" cy="228600"/>
           </a:xfrm>
           <a:prstGeom prst="rect">
             <a:avLst/>
@@ -18175,52 +17653,99 @@
           </a:bodyPr>
           <a:lstStyle/>
           <a:p>
-            <a:pPr algn="ctr">
+            <a:pPr algn="l">
               <a:lnSpc>
                 <a:spcPct val="100000"/>
               </a:lnSpc>
               <a:buNone/>
-              <a:defRPr sz="2325" b="1" i="0">
-                <a:solidFill>
-                  <a:srgbClr val="7B2DAF"/>
-                </a:solidFill>
-                <a:latin typeface="Yu Gothic"/>
-                <a:ea typeface="Yu Gothic"/>
-                <a:cs typeface="Yu Gothic"/>
-              </a:defRPr>
-            </a:pPr>
-            <a:r>
-              <a:rPr sz="2325" b="1" i="0">
-                <a:solidFill>
-                  <a:srgbClr val="7B2DAF"/>
+              <a:defRPr sz="1163" b="1" i="0">
+                <a:solidFill>
+                  <a:srgbClr val="333333"/>
+                </a:solidFill>
+                <a:latin typeface="Yu Gothic"/>
+                <a:ea typeface="Yu Gothic"/>
+                <a:cs typeface="Yu Gothic"/>
+              </a:defRPr>
+            </a:pPr>
+            <a:r>
+              <a:rPr sz="1163" b="1" i="0">
+                <a:solidFill>
+                  <a:srgbClr val="333333"/>
                 </a:solidFill>
                 <a:latin typeface="Yu Gothic"/>
                 <a:ea typeface="Yu Gothic"/>
                 <a:cs typeface="Yu Gothic"/>
               </a:rPr>
-              <a:t>0.384 K</a:t>
-            </a:r>
-          </a:p>
-        </p:txBody>
-      </p:sp>
-      <p:sp>
-        <p:nvSpPr>
-          <p:cNvPr id="27" name="正方形/長方形 26">
-            <a:extLst>
-              <a:ext uri="{FF2B5EF4-FFF2-40B4-BE49-F238E27FC236}">
-                <a16:creationId xmlns:a16="http://schemas.microsoft.com/office/drawing/2014/main" id="{F3FE7D85-F967-4DE6-93D7-FFD9B3B09270}"/>
-              </a:ext>
-            </a:extLst>
-          </p:cNvPr>
-          <p:cNvSpPr>
-            <a:spLocks noGrp="1"/>
-          </p:cNvSpPr>
-          <p:nvPr/>
-        </p:nvSpPr>
-        <p:spPr>
-          <a:xfrm>
-            <a:off x="9467850" y="3857625"/>
-            <a:ext cx="1962150" cy="219075"/>
+              <a:t>一次判定 F12 / F09（低いほど良い）</a:t>
+            </a:r>
+          </a:p>
+        </p:txBody>
+      </p:sp>
+      <p:graphicFrame>
+        <p:nvGraphicFramePr>
+          <p:cNvPr id="59" name="Chart"/>
+          <p:cNvGraphicFramePr/>
+          <p:nvPr/>
+        </p:nvGraphicFramePr>
+        <p:xfrm>
+          <a:off x="8248650" y="2895600"/>
+          <a:ext cx="3390900" cy="2266950"/>
+        </p:xfrm>
+        <a:graphic>
+          <a:graphicData uri="http://schemas.openxmlformats.org/drawingml/2006/chart">
+            <c:chart xmlns:c="http://schemas.openxmlformats.org/drawingml/2006/chart" xmlns:r="http://schemas.openxmlformats.org/officeDocument/2006/relationships" r:id="rId4"/>
+          </a:graphicData>
+        </a:graphic>
+      </p:graphicFrame>
+      <p:sp>
+        <p:nvSpPr>
+          <p:cNvPr id="27" name="直線コネクタ 26">
+            <a:extLst>
+              <a:ext uri="{FF2B5EF4-FFF2-40B4-BE49-F238E27FC236}">
+                <a16:creationId xmlns:a16="http://schemas.microsoft.com/office/drawing/2014/main" id="{C806D4C9-9E84-4736-A5FA-84823507F315}"/>
+              </a:ext>
+            </a:extLst>
+          </p:cNvPr>
+          <p:cNvSpPr>
+            <a:spLocks noGrp="1"/>
+          </p:cNvSpPr>
+          <p:nvPr/>
+        </p:nvSpPr>
+        <p:spPr>
+          <a:xfrm>
+            <a:off x="8248650" y="5334000"/>
+            <a:ext cx="3390900" cy="0"/>
+          </a:xfrm>
+          <a:prstGeom prst="line">
+            <a:avLst/>
+          </a:prstGeom>
+          <a:noFill/>
+          <a:ln w="38100">
+            <a:solidFill>
+              <a:srgbClr val="4D8710"/>
+            </a:solidFill>
+            <a:prstDash val="solid"/>
+          </a:ln>
+        </p:spPr>
+      </p:sp>
+      <p:sp>
+        <p:nvSpPr>
+          <p:cNvPr id="28" name="正方形/長方形 27">
+            <a:extLst>
+              <a:ext uri="{FF2B5EF4-FFF2-40B4-BE49-F238E27FC236}">
+                <a16:creationId xmlns:a16="http://schemas.microsoft.com/office/drawing/2014/main" id="{EA1AB01C-F1A2-46CE-9377-B3E28B24E4FA}"/>
+              </a:ext>
+            </a:extLst>
+          </p:cNvPr>
+          <p:cNvSpPr>
+            <a:spLocks noGrp="1"/>
+          </p:cNvSpPr>
+          <p:nvPr/>
+        </p:nvSpPr>
+        <p:spPr>
+          <a:xfrm>
+            <a:off x="8248650" y="5410200"/>
+            <a:ext cx="3390900" cy="333375"/>
           </a:xfrm>
           <a:prstGeom prst="rect">
             <a:avLst/>
@@ -18237,83 +17762,52 @@
           </a:bodyPr>
           <a:lstStyle/>
           <a:p>
-            <a:pPr algn="ctr">
+            <a:pPr algn="l">
               <a:lnSpc>
                 <a:spcPct val="100000"/>
               </a:lnSpc>
               <a:buNone/>
-              <a:defRPr sz="975" b="0" i="0">
-                <a:solidFill>
-                  <a:srgbClr val="555555"/>
-                </a:solidFill>
-                <a:latin typeface="Yu Gothic"/>
-                <a:ea typeface="Yu Gothic"/>
-                <a:cs typeface="Yu Gothic"/>
-              </a:defRPr>
-            </a:pPr>
-            <a:r>
-              <a:rPr sz="975" b="0" i="0">
-                <a:solidFill>
-                  <a:srgbClr val="555555"/>
+              <a:defRPr sz="1875" b="1" i="0">
+                <a:solidFill>
+                  <a:srgbClr val="333333"/>
+                </a:solidFill>
+                <a:latin typeface="Yu Gothic"/>
+                <a:ea typeface="Yu Gothic"/>
+                <a:cs typeface="Yu Gothic"/>
+              </a:defRPr>
+            </a:pPr>
+            <a:r>
+              <a:rPr sz="1875" b="1" i="0">
+                <a:solidFill>
+                  <a:srgbClr val="333333"/>
                 </a:solidFill>
                 <a:latin typeface="Yu Gothic"/>
                 <a:ea typeface="Yu Gothic"/>
                 <a:cs typeface="Yu Gothic"/>
               </a:rPr>
-              <a:t>F09</a:t>
-            </a:r>
-          </a:p>
-        </p:txBody>
-      </p:sp>
-      <p:sp>
-        <p:nvSpPr>
-          <p:cNvPr id="28" name="直線コネクタ 27">
-            <a:extLst>
-              <a:ext uri="{FF2B5EF4-FFF2-40B4-BE49-F238E27FC236}">
-                <a16:creationId xmlns:a16="http://schemas.microsoft.com/office/drawing/2014/main" id="{F19E19C3-365D-4961-B4BE-08CE06B8E51E}"/>
-              </a:ext>
-            </a:extLst>
-          </p:cNvPr>
-          <p:cNvSpPr>
-            <a:spLocks noGrp="1"/>
-          </p:cNvSpPr>
-          <p:nvPr/>
-        </p:nvSpPr>
-        <p:spPr>
-          <a:xfrm>
-            <a:off x="9639300" y="4276725"/>
-            <a:ext cx="1619250" cy="0"/>
-          </a:xfrm>
-          <a:prstGeom prst="line">
-            <a:avLst/>
-          </a:prstGeom>
-          <a:noFill/>
-          <a:ln w="9525">
-            <a:solidFill>
-              <a:srgbClr val="D3D3D3"/>
-            </a:solidFill>
-            <a:prstDash val="solid"/>
-          </a:ln>
-        </p:spPr>
+              <a:t>PASS</a:t>
+            </a:r>
+          </a:p>
+        </p:txBody>
       </p:sp>
       <p:sp>
         <p:nvSpPr>
           <p:cNvPr id="29" name="正方形/長方形 28">
             <a:extLst>
               <a:ext uri="{FF2B5EF4-FFF2-40B4-BE49-F238E27FC236}">
-                <a16:creationId xmlns:a16="http://schemas.microsoft.com/office/drawing/2014/main" id="{BE90EC2D-DFD8-4543-BC96-2CF0406633FB}"/>
-              </a:ext>
-            </a:extLst>
-          </p:cNvPr>
-          <p:cNvSpPr>
-            <a:spLocks noGrp="1"/>
-          </p:cNvSpPr>
-          <p:nvPr/>
-        </p:nvSpPr>
-        <p:spPr>
-          <a:xfrm>
-            <a:off x="9467850" y="4448175"/>
-            <a:ext cx="1962150" cy="409575"/>
+                <a16:creationId xmlns:a16="http://schemas.microsoft.com/office/drawing/2014/main" id="{9715ABF0-A2A8-4B0F-AD95-1C65BEF8439E}"/>
+              </a:ext>
+            </a:extLst>
+          </p:cNvPr>
+          <p:cNvSpPr>
+            <a:spLocks noGrp="1"/>
+          </p:cNvSpPr>
+          <p:nvPr/>
+        </p:nvSpPr>
+        <p:spPr>
+          <a:xfrm>
+            <a:off x="8248650" y="5734050"/>
+            <a:ext cx="3390900" cy="238125"/>
           </a:xfrm>
           <a:prstGeom prst="rect">
             <a:avLst/>
@@ -18330,30 +17824,30 @@
           </a:bodyPr>
           <a:lstStyle/>
           <a:p>
-            <a:pPr algn="ctr">
+            <a:pPr algn="l">
               <a:lnSpc>
                 <a:spcPct val="100000"/>
               </a:lnSpc>
               <a:buNone/>
-              <a:defRPr sz="2325" b="1" i="0">
-                <a:solidFill>
-                  <a:srgbClr val="4D8710"/>
-                </a:solidFill>
-                <a:latin typeface="Yu Gothic"/>
-                <a:ea typeface="Yu Gothic"/>
-                <a:cs typeface="Yu Gothic"/>
-              </a:defRPr>
-            </a:pPr>
-            <a:r>
-              <a:rPr sz="2325" b="1" i="0">
-                <a:solidFill>
-                  <a:srgbClr val="4D8710"/>
+              <a:defRPr sz="863" b="0" i="0">
+                <a:solidFill>
+                  <a:srgbClr val="555555"/>
+                </a:solidFill>
+                <a:latin typeface="Yu Gothic"/>
+                <a:ea typeface="Yu Gothic"/>
+                <a:cs typeface="Yu Gothic"/>
+              </a:defRPr>
+            </a:pPr>
+            <a:r>
+              <a:rPr sz="863" b="0" i="0">
+                <a:solidFill>
+                  <a:srgbClr val="555555"/>
                 </a:solidFill>
                 <a:latin typeface="Yu Gothic"/>
                 <a:ea typeface="Yu Gothic"/>
                 <a:cs typeface="Yu Gothic"/>
               </a:rPr>
-              <a:t>0.038 K</a:t>
+              <a:t>2.9% / 上限 25%</a:t>
             </a:r>
           </a:p>
         </p:txBody>
@@ -18363,143 +17857,19 @@
           <p:cNvPr id="30" name="正方形/長方形 29">
             <a:extLst>
               <a:ext uri="{FF2B5EF4-FFF2-40B4-BE49-F238E27FC236}">
-                <a16:creationId xmlns:a16="http://schemas.microsoft.com/office/drawing/2014/main" id="{23D87E4A-F386-4A37-9DFF-5138371AC781}"/>
-              </a:ext>
-            </a:extLst>
-          </p:cNvPr>
-          <p:cNvSpPr>
-            <a:spLocks noGrp="1"/>
-          </p:cNvSpPr>
-          <p:nvPr/>
-        </p:nvSpPr>
-        <p:spPr>
-          <a:xfrm>
-            <a:off x="9467850" y="4857750"/>
-            <a:ext cx="1962150" cy="219075"/>
-          </a:xfrm>
-          <a:prstGeom prst="rect">
-            <a:avLst/>
-          </a:prstGeom>
-          <a:noFill/>
-          <a:ln w="0">
-            <a:noFill/>
-            <a:prstDash val="solid"/>
-          </a:ln>
-        </p:spPr>
-        <p:txBody>
-          <a:bodyPr wrap="square" lIns="28575" tIns="19050" rIns="28575" bIns="19050" anchor="ctr">
-            <a:normAutofit/>
-          </a:bodyPr>
-          <a:lstStyle/>
-          <a:p>
-            <a:pPr algn="ctr">
-              <a:lnSpc>
-                <a:spcPct val="100000"/>
-              </a:lnSpc>
-              <a:buNone/>
-              <a:defRPr sz="975" b="0" i="0">
-                <a:solidFill>
-                  <a:srgbClr val="555555"/>
-                </a:solidFill>
-                <a:latin typeface="Yu Gothic"/>
-                <a:ea typeface="Yu Gothic"/>
-                <a:cs typeface="Yu Gothic"/>
-              </a:defRPr>
-            </a:pPr>
-            <a:r>
-              <a:rPr sz="975" b="0" i="0">
-                <a:solidFill>
-                  <a:srgbClr val="555555"/>
-                </a:solidFill>
-                <a:latin typeface="Yu Gothic"/>
-                <a:ea typeface="Yu Gothic"/>
-                <a:cs typeface="Yu Gothic"/>
-              </a:rPr>
-              <a:t>F12</a:t>
-            </a:r>
-          </a:p>
-        </p:txBody>
-      </p:sp>
-      <p:sp>
-        <p:nvSpPr>
-          <p:cNvPr id="31" name="正方形/長方形 30">
-            <a:extLst>
-              <a:ext uri="{FF2B5EF4-FFF2-40B4-BE49-F238E27FC236}">
-                <a16:creationId xmlns:a16="http://schemas.microsoft.com/office/drawing/2014/main" id="{D8C8BCD1-A298-4966-9FB4-D7244418BCB7}"/>
-              </a:ext>
-            </a:extLst>
-          </p:cNvPr>
-          <p:cNvSpPr>
-            <a:spLocks noGrp="1"/>
-          </p:cNvSpPr>
-          <p:nvPr/>
-        </p:nvSpPr>
-        <p:spPr>
-          <a:xfrm>
-            <a:off x="9467850" y="5267325"/>
-            <a:ext cx="1962150" cy="295275"/>
-          </a:xfrm>
-          <a:prstGeom prst="rect">
-            <a:avLst/>
-          </a:prstGeom>
-          <a:noFill/>
-          <a:ln w="0">
-            <a:noFill/>
-            <a:prstDash val="solid"/>
-          </a:ln>
-        </p:spPr>
-        <p:txBody>
-          <a:bodyPr wrap="square" lIns="28575" tIns="19050" rIns="28575" bIns="19050" anchor="ctr">
-            <a:normAutofit/>
-          </a:bodyPr>
-          <a:lstStyle/>
-          <a:p>
-            <a:pPr algn="ctr">
-              <a:lnSpc>
-                <a:spcPct val="100000"/>
-              </a:lnSpc>
-              <a:buNone/>
-              <a:defRPr sz="1500" b="1" i="0">
-                <a:solidFill>
-                  <a:srgbClr val="4D8710"/>
-                </a:solidFill>
-                <a:latin typeface="Yu Gothic"/>
-                <a:ea typeface="Yu Gothic"/>
-                <a:cs typeface="Yu Gothic"/>
-              </a:defRPr>
-            </a:pPr>
-            <a:r>
-              <a:rPr sz="1500" b="1" i="0">
-                <a:solidFill>
-                  <a:srgbClr val="4D8710"/>
-                </a:solidFill>
-                <a:latin typeface="Yu Gothic"/>
-                <a:ea typeface="Yu Gothic"/>
-                <a:cs typeface="Yu Gothic"/>
-              </a:rPr>
-              <a:t>−90.1%</a:t>
-            </a:r>
-          </a:p>
-        </p:txBody>
-      </p:sp>
-      <p:sp>
-        <p:nvSpPr>
-          <p:cNvPr id="32" name="正方形/長方形 31">
-            <a:extLst>
-              <a:ext uri="{FF2B5EF4-FFF2-40B4-BE49-F238E27FC236}">
-                <a16:creationId xmlns:a16="http://schemas.microsoft.com/office/drawing/2014/main" id="{2C071574-70CD-4232-A244-A16A172378CA}"/>
-              </a:ext>
-            </a:extLst>
-          </p:cNvPr>
-          <p:cNvSpPr>
-            <a:spLocks noGrp="1"/>
-          </p:cNvSpPr>
-          <p:nvPr/>
-        </p:nvSpPr>
-        <p:spPr>
-          <a:xfrm>
-            <a:off x="552450" y="5924550"/>
-            <a:ext cx="1562100" cy="228600"/>
+                <a16:creationId xmlns:a16="http://schemas.microsoft.com/office/drawing/2014/main" id="{28910671-FB7C-457B-B067-7866A527706E}"/>
+              </a:ext>
+            </a:extLst>
+          </p:cNvPr>
+          <p:cNvSpPr>
+            <a:spLocks noGrp="1"/>
+          </p:cNvSpPr>
+          <p:nvPr/>
+        </p:nvSpPr>
+        <p:spPr>
+          <a:xfrm>
+            <a:off x="552450" y="5867400"/>
+            <a:ext cx="990600" cy="228600"/>
           </a:xfrm>
           <a:prstGeom prst="rect">
             <a:avLst/>
@@ -18539,29 +17909,29 @@
                 <a:ea typeface="Yu Gothic"/>
                 <a:cs typeface="Yu Gothic"/>
               </a:rPr>
-              <a:t>Benchmark primary score</a:t>
-            </a:r>
-          </a:p>
-        </p:txBody>
-      </p:sp>
-      <p:sp>
-        <p:nvSpPr>
-          <p:cNvPr id="33" name="正方形/長方形 32">
-            <a:extLst>
-              <a:ext uri="{FF2B5EF4-FFF2-40B4-BE49-F238E27FC236}">
-                <a16:creationId xmlns:a16="http://schemas.microsoft.com/office/drawing/2014/main" id="{AF5CBDC7-2EF6-494F-BD04-1613619DD1B4}"/>
-              </a:ext>
-            </a:extLst>
-          </p:cNvPr>
-          <p:cNvSpPr>
-            <a:spLocks noGrp="1"/>
-          </p:cNvSpPr>
-          <p:nvPr/>
-        </p:nvSpPr>
-        <p:spPr>
-          <a:xfrm>
-            <a:off x="2171700" y="5905500"/>
-            <a:ext cx="9467850" cy="257175"/>
+              <a:t>同一評価窓</a:t>
+            </a:r>
+          </a:p>
+        </p:txBody>
+      </p:sp>
+      <p:sp>
+        <p:nvSpPr>
+          <p:cNvPr id="31" name="正方形/長方形 30">
+            <a:extLst>
+              <a:ext uri="{FF2B5EF4-FFF2-40B4-BE49-F238E27FC236}">
+                <a16:creationId xmlns:a16="http://schemas.microsoft.com/office/drawing/2014/main" id="{1BF5C936-9D82-4084-A7DA-989020578BA9}"/>
+              </a:ext>
+            </a:extLst>
+          </p:cNvPr>
+          <p:cNvSpPr>
+            <a:spLocks noGrp="1"/>
+          </p:cNvSpPr>
+          <p:nvPr/>
+        </p:nvSpPr>
+        <p:spPr>
+          <a:xfrm>
+            <a:off x="1581150" y="5848350"/>
+            <a:ext cx="6305550" cy="257175"/>
           </a:xfrm>
           <a:prstGeom prst="rect">
             <a:avLst/>
@@ -18601,7 +17971,131 @@
                 <a:ea typeface="Yu Gothic"/>
                 <a:cs typeface="Yu Gothic"/>
               </a:rPr>
-              <a:t>F09 1.303 K（t=0開始） / F12 0.038 K（t=20開始） ＝ 97.1%低減</a:t>
+              <a:t>F09 0.384 K　F12 0.038 K　90.1%低減</a:t>
+            </a:r>
+          </a:p>
+        </p:txBody>
+      </p:sp>
+      <p:sp>
+        <p:nvSpPr>
+          <p:cNvPr id="32" name="正方形/長方形 31">
+            <a:extLst>
+              <a:ext uri="{FF2B5EF4-FFF2-40B4-BE49-F238E27FC236}">
+                <a16:creationId xmlns:a16="http://schemas.microsoft.com/office/drawing/2014/main" id="{89CDB62B-B85A-40CA-9171-AA9829B3EF97}"/>
+              </a:ext>
+            </a:extLst>
+          </p:cNvPr>
+          <p:cNvSpPr>
+            <a:spLocks noGrp="1"/>
+          </p:cNvSpPr>
+          <p:nvPr/>
+        </p:nvSpPr>
+        <p:spPr>
+          <a:xfrm>
+            <a:off x="8248650" y="5867400"/>
+            <a:ext cx="723900" cy="228600"/>
+          </a:xfrm>
+          <a:prstGeom prst="rect">
+            <a:avLst/>
+          </a:prstGeom>
+          <a:noFill/>
+          <a:ln w="0">
+            <a:noFill/>
+            <a:prstDash val="solid"/>
+          </a:ln>
+        </p:spPr>
+        <p:txBody>
+          <a:bodyPr wrap="square" lIns="28575" tIns="19050" rIns="28575" bIns="19050" anchor="ctr">
+            <a:normAutofit/>
+          </a:bodyPr>
+          <a:lstStyle/>
+          <a:p>
+            <a:pPr algn="l">
+              <a:lnSpc>
+                <a:spcPct val="100000"/>
+              </a:lnSpc>
+              <a:buNone/>
+              <a:defRPr sz="863" b="1" i="0">
+                <a:solidFill>
+                  <a:srgbClr val="777777"/>
+                </a:solidFill>
+                <a:latin typeface="Yu Gothic"/>
+                <a:ea typeface="Yu Gothic"/>
+                <a:cs typeface="Yu Gothic"/>
+              </a:defRPr>
+            </a:pPr>
+            <a:r>
+              <a:rPr sz="863" b="1" i="0">
+                <a:solidFill>
+                  <a:srgbClr val="777777"/>
+                </a:solidFill>
+                <a:latin typeface="Yu Gothic"/>
+                <a:ea typeface="Yu Gothic"/>
+                <a:cs typeface="Yu Gothic"/>
+              </a:rPr>
+              <a:t>一次指標</a:t>
+            </a:r>
+          </a:p>
+        </p:txBody>
+      </p:sp>
+      <p:sp>
+        <p:nvSpPr>
+          <p:cNvPr id="33" name="正方形/長方形 32">
+            <a:extLst>
+              <a:ext uri="{FF2B5EF4-FFF2-40B4-BE49-F238E27FC236}">
+                <a16:creationId xmlns:a16="http://schemas.microsoft.com/office/drawing/2014/main" id="{D4C6DFBF-23DD-4C8A-900C-07A0C0B295C5}"/>
+              </a:ext>
+            </a:extLst>
+          </p:cNvPr>
+          <p:cNvSpPr>
+            <a:spLocks noGrp="1"/>
+          </p:cNvSpPr>
+          <p:nvPr/>
+        </p:nvSpPr>
+        <p:spPr>
+          <a:xfrm>
+            <a:off x="9010650" y="5848350"/>
+            <a:ext cx="2628900" cy="257175"/>
+          </a:xfrm>
+          <a:prstGeom prst="rect">
+            <a:avLst/>
+          </a:prstGeom>
+          <a:noFill/>
+          <a:ln w="0">
+            <a:noFill/>
+            <a:prstDash val="solid"/>
+          </a:ln>
+        </p:spPr>
+        <p:txBody>
+          <a:bodyPr wrap="square" lIns="28575" tIns="19050" rIns="28575" bIns="19050" anchor="ctr">
+            <a:normAutofit/>
+          </a:bodyPr>
+          <a:lstStyle/>
+          <a:p>
+            <a:pPr algn="l">
+              <a:lnSpc>
+                <a:spcPct val="100000"/>
+              </a:lnSpc>
+              <a:buNone/>
+              <a:defRPr sz="938" b="0" i="0">
+                <a:solidFill>
+                  <a:srgbClr val="555555"/>
+                </a:solidFill>
+                <a:latin typeface="Yu Gothic"/>
+                <a:ea typeface="Yu Gothic"/>
+                <a:cs typeface="Yu Gothic"/>
+              </a:defRPr>
+            </a:pPr>
+            <a:r>
+              <a:rPr sz="938" b="0" i="0">
+                <a:solidFill>
+                  <a:srgbClr val="555555"/>
+                </a:solidFill>
+                <a:latin typeface="Yu Gothic"/>
+                <a:ea typeface="Yu Gothic"/>
+                <a:cs typeface="Yu Gothic"/>
+              </a:rPr>
+              <a:t>F09 1.303 K　F12 0.038 K</a:t>
             </a:r>
           </a:p>
         </p:txBody>
@@ -18609,7 +18103,7 @@
     </p:spTree>
     <p:extLst>
       <p:ext uri="{BB962C8B-B14F-4D97-AF65-F5344CB8AC3E}">
-        <p14:creationId xmlns:p14="http://schemas.microsoft.com/office/powerpoint/2010/main" val="1728625916"/>
+        <p14:creationId xmlns:p14="http://schemas.microsoft.com/office/powerpoint/2010/main" val="2112031678"/>
       </p:ext>
     </p:extLst>
   </p:cSld>
@@ -18646,10 +18140,10 @@
       </p:grpSpPr>
       <p:sp>
         <p:nvSpPr>
-          <p:cNvPr id="31" name="正方形/長方形 30">
-            <a:extLst>
-              <a:ext uri="{FF2B5EF4-FFF2-40B4-BE49-F238E27FC236}">
-                <a16:creationId xmlns:a16="http://schemas.microsoft.com/office/drawing/2014/main" id="{60F738E9-A0F2-476F-B800-66D32DFF21D3}"/>
+          <p:cNvPr id="26" name="正方形/長方形 25">
+            <a:extLst>
+              <a:ext uri="{FF2B5EF4-FFF2-40B4-BE49-F238E27FC236}">
+                <a16:creationId xmlns:a16="http://schemas.microsoft.com/office/drawing/2014/main" id="{4AF7BB65-6A26-4058-A2AD-E7B286B01316}"/>
               </a:ext>
             </a:extLst>
           </p:cNvPr>
@@ -18680,7 +18174,7 @@
           <p:cNvPr id="2" name="正方形/長方形 1">
             <a:extLst>
               <a:ext uri="{FF2B5EF4-FFF2-40B4-BE49-F238E27FC236}">
-                <a16:creationId xmlns:a16="http://schemas.microsoft.com/office/drawing/2014/main" id="{C5D63A3B-F0DA-43A9-BE3E-F10E732CEA3E}"/>
+                <a16:creationId xmlns:a16="http://schemas.microsoft.com/office/drawing/2014/main" id="{E654B2CF-EB4E-4B41-87C9-C40F2BD3274C}"/>
               </a:ext>
             </a:extLst>
           </p:cNvPr>
@@ -18742,7 +18236,7 @@
           <p:cNvPr id="3" name="正方形/長方形 2">
             <a:extLst>
               <a:ext uri="{FF2B5EF4-FFF2-40B4-BE49-F238E27FC236}">
-                <a16:creationId xmlns:a16="http://schemas.microsoft.com/office/drawing/2014/main" id="{84946DA7-8584-40A4-AC98-FC5271F9B118}"/>
+                <a16:creationId xmlns:a16="http://schemas.microsoft.com/office/drawing/2014/main" id="{591E8CCC-521C-404B-BB3D-4721B792BD3D}"/>
               </a:ext>
             </a:extLst>
           </p:cNvPr>
@@ -18794,7 +18288,7 @@
                 <a:ea typeface="Yu Gothic"/>
                 <a:cs typeface="Yu Gothic"/>
               </a:rPr>
-              <a:t>センサ異常と未指令発熱を別状態として検出</a:t>
+              <a:t>監視5ケースは全基準内、異常種別も正しく帰属</a:t>
             </a:r>
           </a:p>
         </p:txBody>
@@ -18804,7 +18298,7 @@
           <p:cNvPr id="4" name="正方形/長方形 3">
             <a:extLst>
               <a:ext uri="{FF2B5EF4-FFF2-40B4-BE49-F238E27FC236}">
-                <a16:creationId xmlns:a16="http://schemas.microsoft.com/office/drawing/2014/main" id="{C2C38860-B935-41FB-A101-3F68288DB504}"/>
+                <a16:creationId xmlns:a16="http://schemas.microsoft.com/office/drawing/2014/main" id="{58BBFF0B-B229-40AD-9317-6964B34C0C97}"/>
               </a:ext>
             </a:extLst>
           </p:cNvPr>
@@ -18856,7 +18350,7 @@
                 <a:ea typeface="Yu Gothic"/>
                 <a:cs typeface="Yu Gothic"/>
               </a:rPr>
-              <a:t>innovationで異常を検出し、sensor biasと物理disturbanceのどちらが説明力を持つかを更新する</a:t>
+              <a:t>棒が100%より短ければ合格。単位の異なる指標を各受入上限で正規化して比較する</a:t>
             </a:r>
           </a:p>
         </p:txBody>
@@ -18866,7 +18360,7 @@
           <p:cNvPr id="5" name="直線コネクタ 4">
             <a:extLst>
               <a:ext uri="{FF2B5EF4-FFF2-40B4-BE49-F238E27FC236}">
-                <a16:creationId xmlns:a16="http://schemas.microsoft.com/office/drawing/2014/main" id="{A30443A3-4820-4349-AD65-B36597D70A79}"/>
+                <a16:creationId xmlns:a16="http://schemas.microsoft.com/office/drawing/2014/main" id="{89A31D22-7B0E-4EFA-BF7D-49EAAB1054AE}"/>
               </a:ext>
             </a:extLst>
           </p:cNvPr>
@@ -18897,7 +18391,7 @@
           <p:cNvPr id="6" name="直線コネクタ 5">
             <a:extLst>
               <a:ext uri="{FF2B5EF4-FFF2-40B4-BE49-F238E27FC236}">
-                <a16:creationId xmlns:a16="http://schemas.microsoft.com/office/drawing/2014/main" id="{47E40CA9-6E81-49B1-9054-1977B9910A9F}"/>
+                <a16:creationId xmlns:a16="http://schemas.microsoft.com/office/drawing/2014/main" id="{1159277A-77C6-4EF7-9FFA-276DCB6FA985}"/>
               </a:ext>
             </a:extLst>
           </p:cNvPr>
@@ -18928,7 +18422,7 @@
           <p:cNvPr id="7" name="正方形/長方形 6">
             <a:extLst>
               <a:ext uri="{FF2B5EF4-FFF2-40B4-BE49-F238E27FC236}">
-                <a16:creationId xmlns:a16="http://schemas.microsoft.com/office/drawing/2014/main" id="{D18C60ED-9D92-4B34-ADF4-654A7D4B00CC}"/>
+                <a16:creationId xmlns:a16="http://schemas.microsoft.com/office/drawing/2014/main" id="{A589873E-9D87-40E0-9D46-BC8DE9832D97}"/>
               </a:ext>
             </a:extLst>
           </p:cNvPr>
@@ -18990,7 +18484,7 @@
           <p:cNvPr id="8" name="正方形/長方形 7">
             <a:extLst>
               <a:ext uri="{FF2B5EF4-FFF2-40B4-BE49-F238E27FC236}">
-                <a16:creationId xmlns:a16="http://schemas.microsoft.com/office/drawing/2014/main" id="{E45D2C74-5887-4302-A0E5-1C20B2467354}"/>
+                <a16:creationId xmlns:a16="http://schemas.microsoft.com/office/drawing/2014/main" id="{D7485654-DA06-408C-9E2A-8357E7FB4B6E}"/>
               </a:ext>
             </a:extLst>
           </p:cNvPr>
@@ -19052,7 +18546,7 @@
           <p:cNvPr id="9" name="正方形/長方形 8">
             <a:extLst>
               <a:ext uri="{FF2B5EF4-FFF2-40B4-BE49-F238E27FC236}">
-                <a16:creationId xmlns:a16="http://schemas.microsoft.com/office/drawing/2014/main" id="{BDA69AEA-382C-4ACB-8AEB-BAAA0CDDA067}"/>
+                <a16:creationId xmlns:a16="http://schemas.microsoft.com/office/drawing/2014/main" id="{041017E9-7E03-48C9-886B-05CE31783003}"/>
               </a:ext>
             </a:extLst>
           </p:cNvPr>
@@ -19114,7 +18608,7 @@
           <p:cNvPr id="10" name="正方形/長方形 9">
             <a:extLst>
               <a:ext uri="{FF2B5EF4-FFF2-40B4-BE49-F238E27FC236}">
-                <a16:creationId xmlns:a16="http://schemas.microsoft.com/office/drawing/2014/main" id="{EFD1E45D-C0E3-47C1-B8C9-30895DD13208}"/>
+                <a16:creationId xmlns:a16="http://schemas.microsoft.com/office/drawing/2014/main" id="{5D95A051-346B-4005-ACDC-A79BBF7DFBF7}"/>
               </a:ext>
             </a:extLst>
           </p:cNvPr>
@@ -19126,7 +18620,7 @@
         <p:spPr>
           <a:xfrm>
             <a:off x="847725" y="1362075"/>
-            <a:ext cx="4924425" cy="228600"/>
+            <a:ext cx="7229475" cy="228600"/>
           </a:xfrm>
           <a:prstGeom prst="rect">
             <a:avLst/>
@@ -19166,20 +18660,20 @@
                 <a:ea typeface="Yu Gothic"/>
                 <a:cs typeface="Yu Gothic"/>
               </a:rPr>
-              <a:t>M03  chip sensor offset</a:t>
+              <a:t>受入上限の使用率（100%未満で合格）</a:t>
             </a:r>
           </a:p>
         </p:txBody>
       </p:sp>
       <p:graphicFrame>
         <p:nvGraphicFramePr>
-          <p:cNvPr id="41" name="Chart"/>
+          <p:cNvPr id="36" name="Chart"/>
           <p:cNvGraphicFramePr/>
           <p:nvPr/>
         </p:nvGraphicFramePr>
         <p:xfrm>
-          <a:off x="552450" y="1695450"/>
-          <a:ext cx="5219700" cy="3209925"/>
+          <a:off x="552450" y="1676400"/>
+          <a:ext cx="7524750" cy="3781425"/>
         </p:xfrm>
         <a:graphic>
           <a:graphicData uri="http://schemas.openxmlformats.org/drawingml/2006/chart">
@@ -19189,114 +18683,21 @@
       </p:graphicFrame>
       <p:sp>
         <p:nvSpPr>
-          <p:cNvPr id="12" name="直線コネクタ 11">
-            <a:extLst>
-              <a:ext uri="{FF2B5EF4-FFF2-40B4-BE49-F238E27FC236}">
-                <a16:creationId xmlns:a16="http://schemas.microsoft.com/office/drawing/2014/main" id="{791474C9-7619-4AE6-86C8-9218AA7D6046}"/>
-              </a:ext>
-            </a:extLst>
-          </p:cNvPr>
-          <p:cNvSpPr>
-            <a:spLocks noGrp="1"/>
-          </p:cNvSpPr>
-          <p:nvPr/>
-        </p:nvSpPr>
-        <p:spPr>
-          <a:xfrm>
-            <a:off x="3057525" y="1819275"/>
-            <a:ext cx="0" cy="2324100"/>
-          </a:xfrm>
-          <a:prstGeom prst="line">
-            <a:avLst/>
-          </a:prstGeom>
-          <a:noFill/>
-          <a:ln w="14288">
-            <a:solidFill>
-              <a:srgbClr val="C4493D"/>
-            </a:solidFill>
-            <a:prstDash val="dash"/>
-          </a:ln>
-        </p:spPr>
-      </p:sp>
-      <p:sp>
-        <p:nvSpPr>
-          <p:cNvPr id="13" name="正方形/長方形 12">
-            <a:extLst>
-              <a:ext uri="{FF2B5EF4-FFF2-40B4-BE49-F238E27FC236}">
-                <a16:creationId xmlns:a16="http://schemas.microsoft.com/office/drawing/2014/main" id="{109F3E73-14F9-4C7F-A047-B9B16E249143}"/>
-              </a:ext>
-            </a:extLst>
-          </p:cNvPr>
-          <p:cNvSpPr>
-            <a:spLocks noGrp="1"/>
-          </p:cNvSpPr>
-          <p:nvPr/>
-        </p:nvSpPr>
-        <p:spPr>
-          <a:xfrm>
-            <a:off x="3152775" y="1838325"/>
-            <a:ext cx="1000125" cy="190500"/>
-          </a:xfrm>
-          <a:prstGeom prst="rect">
-            <a:avLst/>
-          </a:prstGeom>
-          <a:noFill/>
-          <a:ln w="0">
-            <a:noFill/>
-            <a:prstDash val="solid"/>
-          </a:ln>
-        </p:spPr>
-        <p:txBody>
-          <a:bodyPr wrap="square" lIns="28575" tIns="19050" rIns="28575" bIns="19050" anchor="ctr">
-            <a:normAutofit/>
-          </a:bodyPr>
-          <a:lstStyle/>
-          <a:p>
-            <a:pPr algn="l">
-              <a:lnSpc>
-                <a:spcPct val="100000"/>
-              </a:lnSpc>
-              <a:buNone/>
-              <a:defRPr sz="713" b="1" i="0">
-                <a:solidFill>
-                  <a:srgbClr val="C4493D"/>
-                </a:solidFill>
-                <a:latin typeface="Yu Gothic"/>
-                <a:ea typeface="Yu Gothic"/>
-                <a:cs typeface="Yu Gothic"/>
-              </a:defRPr>
-            </a:pPr>
-            <a:r>
-              <a:rPr sz="713" b="1" i="0">
-                <a:solidFill>
-                  <a:srgbClr val="C4493D"/>
-                </a:solidFill>
-                <a:latin typeface="Yu Gothic"/>
-                <a:ea typeface="Yu Gothic"/>
-                <a:cs typeface="Yu Gothic"/>
-              </a:rPr>
-              <a:t>event 300 s</a:t>
-            </a:r>
-          </a:p>
-        </p:txBody>
-      </p:sp>
-      <p:sp>
-        <p:nvSpPr>
-          <p:cNvPr id="14" name="正方形/長方形 13">
-            <a:extLst>
-              <a:ext uri="{FF2B5EF4-FFF2-40B4-BE49-F238E27FC236}">
-                <a16:creationId xmlns:a16="http://schemas.microsoft.com/office/drawing/2014/main" id="{1D1AD10B-A7A8-4049-B604-78C802288A83}"/>
-              </a:ext>
-            </a:extLst>
-          </p:cNvPr>
-          <p:cNvSpPr>
-            <a:spLocks noGrp="1"/>
-          </p:cNvSpPr>
-          <p:nvPr/>
-        </p:nvSpPr>
-        <p:spPr>
-          <a:xfrm>
-            <a:off x="6419850" y="1362075"/>
+          <p:cNvPr id="12" name="正方形/長方形 11">
+            <a:extLst>
+              <a:ext uri="{FF2B5EF4-FFF2-40B4-BE49-F238E27FC236}">
+                <a16:creationId xmlns:a16="http://schemas.microsoft.com/office/drawing/2014/main" id="{54C5CF23-9519-4676-9072-2EB32D5D6155}"/>
+              </a:ext>
+            </a:extLst>
+          </p:cNvPr>
+          <p:cNvSpPr>
+            <a:spLocks noGrp="1"/>
+          </p:cNvSpPr>
+          <p:nvPr/>
+        </p:nvSpPr>
+        <p:spPr>
+          <a:xfrm>
+            <a:off x="8477250" y="1362075"/>
             <a:ext cx="266700" cy="228600"/>
           </a:xfrm>
           <a:prstGeom prst="rect">
@@ -19344,22 +18745,22 @@
       </p:sp>
       <p:sp>
         <p:nvSpPr>
-          <p:cNvPr id="15" name="正方形/長方形 14">
-            <a:extLst>
-              <a:ext uri="{FF2B5EF4-FFF2-40B4-BE49-F238E27FC236}">
-                <a16:creationId xmlns:a16="http://schemas.microsoft.com/office/drawing/2014/main" id="{4F07F624-116E-48AB-8531-28EC1A5DBE28}"/>
-              </a:ext>
-            </a:extLst>
-          </p:cNvPr>
-          <p:cNvSpPr>
-            <a:spLocks noGrp="1"/>
-          </p:cNvSpPr>
-          <p:nvPr/>
-        </p:nvSpPr>
-        <p:spPr>
-          <a:xfrm>
-            <a:off x="6715125" y="1362075"/>
-            <a:ext cx="4924425" cy="228600"/>
+          <p:cNvPr id="13" name="正方形/長方形 12">
+            <a:extLst>
+              <a:ext uri="{FF2B5EF4-FFF2-40B4-BE49-F238E27FC236}">
+                <a16:creationId xmlns:a16="http://schemas.microsoft.com/office/drawing/2014/main" id="{5EE42821-60F5-4CBD-B509-B7FCB86BD249}"/>
+              </a:ext>
+            </a:extLst>
+          </p:cNvPr>
+          <p:cNvSpPr>
+            <a:spLocks noGrp="1"/>
+          </p:cNvSpPr>
+          <p:nvPr/>
+        </p:nvSpPr>
+        <p:spPr>
+          <a:xfrm>
+            <a:off x="8772525" y="1362075"/>
+            <a:ext cx="2867025" cy="228600"/>
           </a:xfrm>
           <a:prstGeom prst="rect">
             <a:avLst/>
@@ -19399,76 +18800,29 @@
                 <a:ea typeface="Yu Gothic"/>
                 <a:cs typeface="Yu Gothic"/>
               </a:rPr>
-              <a:t>M05  uncommanded chip heat</a:t>
-            </a:r>
-          </a:p>
-        </p:txBody>
-      </p:sp>
-      <p:graphicFrame>
-        <p:nvGraphicFramePr>
-          <p:cNvPr id="46" name="Chart"/>
-          <p:cNvGraphicFramePr/>
-          <p:nvPr/>
-        </p:nvGraphicFramePr>
-        <p:xfrm>
-          <a:off x="6419850" y="1695450"/>
-          <a:ext cx="5219700" cy="3209925"/>
-        </p:xfrm>
-        <a:graphic>
-          <a:graphicData uri="http://schemas.openxmlformats.org/drawingml/2006/chart">
-            <c:chart xmlns:c="http://schemas.openxmlformats.org/drawingml/2006/chart" xmlns:r="http://schemas.openxmlformats.org/officeDocument/2006/relationships" r:id="rId4"/>
-          </a:graphicData>
-        </a:graphic>
-      </p:graphicFrame>
-      <p:sp>
-        <p:nvSpPr>
-          <p:cNvPr id="17" name="直線コネクタ 16">
-            <a:extLst>
-              <a:ext uri="{FF2B5EF4-FFF2-40B4-BE49-F238E27FC236}">
-                <a16:creationId xmlns:a16="http://schemas.microsoft.com/office/drawing/2014/main" id="{9AB8EE5F-0F0F-482E-8D5E-19EE28B91E29}"/>
-              </a:ext>
-            </a:extLst>
-          </p:cNvPr>
-          <p:cNvSpPr>
-            <a:spLocks noGrp="1"/>
-          </p:cNvSpPr>
-          <p:nvPr/>
-        </p:nvSpPr>
-        <p:spPr>
-          <a:xfrm>
-            <a:off x="8810625" y="1819275"/>
-            <a:ext cx="0" cy="2324100"/>
-          </a:xfrm>
-          <a:prstGeom prst="line">
-            <a:avLst/>
-          </a:prstGeom>
-          <a:noFill/>
-          <a:ln w="14288">
-            <a:solidFill>
-              <a:srgbClr val="C4493D"/>
-            </a:solidFill>
-            <a:prstDash val="dash"/>
-          </a:ln>
-        </p:spPr>
-      </p:sp>
-      <p:sp>
-        <p:nvSpPr>
-          <p:cNvPr id="18" name="正方形/長方形 17">
-            <a:extLst>
-              <a:ext uri="{FF2B5EF4-FFF2-40B4-BE49-F238E27FC236}">
-                <a16:creationId xmlns:a16="http://schemas.microsoft.com/office/drawing/2014/main" id="{11B93434-0385-467A-BA9E-4C75DD87894C}"/>
-              </a:ext>
-            </a:extLst>
-          </p:cNvPr>
-          <p:cNvSpPr>
-            <a:spLocks noGrp="1"/>
-          </p:cNvSpPr>
-          <p:nvPr/>
-        </p:nvSpPr>
-        <p:spPr>
-          <a:xfrm>
-            <a:off x="8905875" y="1838325"/>
-            <a:ext cx="1000125" cy="190500"/>
+              <a:t>帰属結果</a:t>
+            </a:r>
+          </a:p>
+        </p:txBody>
+      </p:sp>
+      <p:sp>
+        <p:nvSpPr>
+          <p:cNvPr id="14" name="正方形/長方形 13">
+            <a:extLst>
+              <a:ext uri="{FF2B5EF4-FFF2-40B4-BE49-F238E27FC236}">
+                <a16:creationId xmlns:a16="http://schemas.microsoft.com/office/drawing/2014/main" id="{74EE8B1F-9215-447C-8747-9C1D1581E86F}"/>
+              </a:ext>
+            </a:extLst>
+          </p:cNvPr>
+          <p:cNvSpPr>
+            <a:spLocks noGrp="1"/>
+          </p:cNvSpPr>
+          <p:nvPr/>
+        </p:nvSpPr>
+        <p:spPr>
+          <a:xfrm>
+            <a:off x="8477250" y="1790700"/>
+            <a:ext cx="3162300" cy="266700"/>
           </a:xfrm>
           <a:prstGeom prst="rect">
             <a:avLst/>
@@ -19490,78 +18844,47 @@
                 <a:spcPct val="100000"/>
               </a:lnSpc>
               <a:buNone/>
-              <a:defRPr sz="713" b="1" i="0">
-                <a:solidFill>
-                  <a:srgbClr val="C4493D"/>
-                </a:solidFill>
-                <a:latin typeface="Yu Gothic"/>
-                <a:ea typeface="Yu Gothic"/>
-                <a:cs typeface="Yu Gothic"/>
-              </a:defRPr>
-            </a:pPr>
-            <a:r>
-              <a:rPr sz="713" b="1" i="0">
-                <a:solidFill>
-                  <a:srgbClr val="C4493D"/>
+              <a:defRPr sz="1200" b="1" i="0">
+                <a:solidFill>
+                  <a:srgbClr val="7B2DAF"/>
+                </a:solidFill>
+                <a:latin typeface="Yu Gothic"/>
+                <a:ea typeface="Yu Gothic"/>
+                <a:cs typeface="Yu Gothic"/>
+              </a:defRPr>
+            </a:pPr>
+            <a:r>
+              <a:rPr sz="1200" b="1" i="0">
+                <a:solidFill>
+                  <a:srgbClr val="7B2DAF"/>
                 </a:solidFill>
                 <a:latin typeface="Yu Gothic"/>
                 <a:ea typeface="Yu Gothic"/>
                 <a:cs typeface="Yu Gothic"/>
               </a:rPr>
-              <a:t>event 282 s</a:t>
-            </a:r>
-          </a:p>
-        </p:txBody>
-      </p:sp>
-      <p:sp>
-        <p:nvSpPr>
-          <p:cNvPr id="19" name="直線コネクタ 18">
-            <a:extLst>
-              <a:ext uri="{FF2B5EF4-FFF2-40B4-BE49-F238E27FC236}">
-                <a16:creationId xmlns:a16="http://schemas.microsoft.com/office/drawing/2014/main" id="{FC03FE95-D54D-4083-990F-1A11CD1DB010}"/>
-              </a:ext>
-            </a:extLst>
-          </p:cNvPr>
-          <p:cNvSpPr>
-            <a:spLocks noGrp="1"/>
-          </p:cNvSpPr>
-          <p:nvPr/>
-        </p:nvSpPr>
-        <p:spPr>
-          <a:xfrm>
-            <a:off x="552450" y="5219700"/>
-            <a:ext cx="2457450" cy="0"/>
-          </a:xfrm>
-          <a:prstGeom prst="line">
-            <a:avLst/>
-          </a:prstGeom>
-          <a:noFill/>
-          <a:ln w="38100">
-            <a:solidFill>
-              <a:srgbClr val="7B2DAF"/>
-            </a:solidFill>
-            <a:prstDash val="solid"/>
-          </a:ln>
-        </p:spPr>
-      </p:sp>
-      <p:sp>
-        <p:nvSpPr>
-          <p:cNvPr id="20" name="正方形/長方形 19">
-            <a:extLst>
-              <a:ext uri="{FF2B5EF4-FFF2-40B4-BE49-F238E27FC236}">
-                <a16:creationId xmlns:a16="http://schemas.microsoft.com/office/drawing/2014/main" id="{DD3D10D3-B884-49F0-9649-CF6C8E953352}"/>
-              </a:ext>
-            </a:extLst>
-          </p:cNvPr>
-          <p:cNvSpPr>
-            <a:spLocks noGrp="1"/>
-          </p:cNvSpPr>
-          <p:nvPr/>
-        </p:nvSpPr>
-        <p:spPr>
-          <a:xfrm>
-            <a:off x="552450" y="5295900"/>
-            <a:ext cx="2457450" cy="333375"/>
+              <a:t>M03  sensor step fault</a:t>
+            </a:r>
+          </a:p>
+        </p:txBody>
+      </p:sp>
+      <p:sp>
+        <p:nvSpPr>
+          <p:cNvPr id="15" name="正方形/長方形 14">
+            <a:extLst>
+              <a:ext uri="{FF2B5EF4-FFF2-40B4-BE49-F238E27FC236}">
+                <a16:creationId xmlns:a16="http://schemas.microsoft.com/office/drawing/2014/main" id="{352379CE-3EFE-437C-B665-A80D66B5D863}"/>
+              </a:ext>
+            </a:extLst>
+          </p:cNvPr>
+          <p:cNvSpPr>
+            <a:spLocks noGrp="1"/>
+          </p:cNvSpPr>
+          <p:nvPr/>
+        </p:nvSpPr>
+        <p:spPr>
+          <a:xfrm>
+            <a:off x="8477250" y="2133600"/>
+            <a:ext cx="876300" cy="323850"/>
           </a:xfrm>
           <a:prstGeom prst="rect">
             <a:avLst/>
@@ -19583,47 +18906,47 @@
                 <a:spcPct val="100000"/>
               </a:lnSpc>
               <a:buNone/>
-              <a:defRPr sz="1875" b="1" i="0">
-                <a:solidFill>
-                  <a:srgbClr val="333333"/>
-                </a:solidFill>
-                <a:latin typeface="Yu Gothic"/>
-                <a:ea typeface="Yu Gothic"/>
-                <a:cs typeface="Yu Gothic"/>
-              </a:defRPr>
-            </a:pPr>
-            <a:r>
-              <a:rPr sz="1875" b="1" i="0">
-                <a:solidFill>
-                  <a:srgbClr val="333333"/>
+              <a:defRPr sz="1800" b="1" i="0">
+                <a:solidFill>
+                  <a:srgbClr val="4D8710"/>
+                </a:solidFill>
+                <a:latin typeface="Yu Gothic"/>
+                <a:ea typeface="Yu Gothic"/>
+                <a:cs typeface="Yu Gothic"/>
+              </a:defRPr>
+            </a:pPr>
+            <a:r>
+              <a:rPr sz="1800" b="1" i="0">
+                <a:solidFill>
+                  <a:srgbClr val="4D8710"/>
                 </a:solidFill>
                 <a:latin typeface="Yu Gothic"/>
                 <a:ea typeface="Yu Gothic"/>
                 <a:cs typeface="Yu Gothic"/>
               </a:rPr>
-              <a:t>0 s</a:t>
-            </a:r>
-          </a:p>
-        </p:txBody>
-      </p:sp>
-      <p:sp>
-        <p:nvSpPr>
-          <p:cNvPr id="21" name="正方形/長方形 20">
-            <a:extLst>
-              <a:ext uri="{FF2B5EF4-FFF2-40B4-BE49-F238E27FC236}">
-                <a16:creationId xmlns:a16="http://schemas.microsoft.com/office/drawing/2014/main" id="{5B901F80-0A2E-4953-B0D1-FC247C9CFA9A}"/>
-              </a:ext>
-            </a:extLst>
-          </p:cNvPr>
-          <p:cNvSpPr>
-            <a:spLocks noGrp="1"/>
-          </p:cNvSpPr>
-          <p:nvPr/>
-        </p:nvSpPr>
-        <p:spPr>
-          <a:xfrm>
-            <a:off x="552450" y="5619750"/>
-            <a:ext cx="2457450" cy="238125"/>
+              <a:t>PASS</a:t>
+            </a:r>
+          </a:p>
+        </p:txBody>
+      </p:sp>
+      <p:sp>
+        <p:nvSpPr>
+          <p:cNvPr id="16" name="正方形/長方形 15">
+            <a:extLst>
+              <a:ext uri="{FF2B5EF4-FFF2-40B4-BE49-F238E27FC236}">
+                <a16:creationId xmlns:a16="http://schemas.microsoft.com/office/drawing/2014/main" id="{0C34EB2C-95EF-4131-AB01-4D91B9D53FD5}"/>
+              </a:ext>
+            </a:extLst>
+          </p:cNvPr>
+          <p:cNvSpPr>
+            <a:spLocks noGrp="1"/>
+          </p:cNvSpPr>
+          <p:nvPr/>
+        </p:nvSpPr>
+        <p:spPr>
+          <a:xfrm>
+            <a:off x="9467850" y="2114550"/>
+            <a:ext cx="2171700" cy="266700"/>
           </a:xfrm>
           <a:prstGeom prst="rect">
             <a:avLst/>
@@ -19645,7 +18968,69 @@
                 <a:spcPct val="100000"/>
               </a:lnSpc>
               <a:buNone/>
-              <a:defRPr sz="863" b="0" i="0">
+              <a:defRPr sz="1200" b="1" i="0">
+                <a:solidFill>
+                  <a:srgbClr val="333333"/>
+                </a:solidFill>
+                <a:latin typeface="Yu Gothic"/>
+                <a:ea typeface="Yu Gothic"/>
+                <a:cs typeface="Yu Gothic"/>
+              </a:defRPr>
+            </a:pPr>
+            <a:r>
+              <a:rPr sz="1200" b="1" i="0">
+                <a:solidFill>
+                  <a:srgbClr val="333333"/>
+                </a:solidFill>
+                <a:latin typeface="Yu Gothic"/>
+                <a:ea typeface="Yu Gothic"/>
+                <a:cs typeface="Yu Gothic"/>
+              </a:rPr>
+              <a:t>0 sで検出</a:t>
+            </a:r>
+          </a:p>
+        </p:txBody>
+      </p:sp>
+      <p:sp>
+        <p:nvSpPr>
+          <p:cNvPr id="17" name="正方形/長方形 16">
+            <a:extLst>
+              <a:ext uri="{FF2B5EF4-FFF2-40B4-BE49-F238E27FC236}">
+                <a16:creationId xmlns:a16="http://schemas.microsoft.com/office/drawing/2014/main" id="{9935A068-80B8-4883-9AA9-76E26BD51144}"/>
+              </a:ext>
+            </a:extLst>
+          </p:cNvPr>
+          <p:cNvSpPr>
+            <a:spLocks noGrp="1"/>
+          </p:cNvSpPr>
+          <p:nvPr/>
+        </p:nvSpPr>
+        <p:spPr>
+          <a:xfrm>
+            <a:off x="8477250" y="2524125"/>
+            <a:ext cx="3162300" cy="781050"/>
+          </a:xfrm>
+          <a:prstGeom prst="rect">
+            <a:avLst/>
+          </a:prstGeom>
+          <a:noFill/>
+          <a:ln w="0">
+            <a:noFill/>
+            <a:prstDash val="solid"/>
+          </a:ln>
+        </p:spPr>
+        <p:txBody>
+          <a:bodyPr wrap="square" lIns="28575" tIns="19050" rIns="28575" bIns="19050" anchor="t">
+            <a:normAutofit/>
+          </a:bodyPr>
+          <a:lstStyle/>
+          <a:p>
+            <a:pPr algn="l">
+              <a:lnSpc>
+                <a:spcPct val="108000"/>
+              </a:lnSpc>
+              <a:buNone/>
+              <a:defRPr sz="975" b="0" i="0">
                 <a:solidFill>
                   <a:srgbClr val="555555"/>
                 </a:solidFill>
@@ -19655,7 +19040,7 @@
               </a:defRPr>
             </a:pPr>
             <a:r>
-              <a:rPr sz="863" b="0" i="0">
+              <a:rPr sz="975" b="0" i="0">
                 <a:solidFill>
                   <a:srgbClr val="555555"/>
                 </a:solidFill>
@@ -19663,37 +19048,91 @@
                 <a:ea typeface="Yu Gothic"/>
                 <a:cs typeface="Yu Gothic"/>
               </a:rPr>
-              <a:t>M03 detection delay</a:t>
-            </a:r>
-          </a:p>
-        </p:txBody>
-      </p:sp>
-      <p:sp>
-        <p:nvSpPr>
-          <p:cNvPr id="22" name="直線コネクタ 21">
-            <a:extLst>
-              <a:ext uri="{FF2B5EF4-FFF2-40B4-BE49-F238E27FC236}">
-                <a16:creationId xmlns:a16="http://schemas.microsoft.com/office/drawing/2014/main" id="{B4B8290E-A99D-49EA-989F-A28074A41422}"/>
-              </a:ext>
-            </a:extLst>
-          </p:cNvPr>
-          <p:cNvSpPr>
-            <a:spLocks noGrp="1"/>
-          </p:cNvSpPr>
-          <p:nvPr/>
-        </p:nvSpPr>
-        <p:spPr>
-          <a:xfrm>
-            <a:off x="3352800" y="5219700"/>
-            <a:ext cx="2457450" cy="0"/>
+              <a:t>first alert: CP</a:t>
+            </a:r>
+          </a:p>
+          <a:p>
+            <a:pPr algn="l">
+              <a:lnSpc>
+                <a:spcPct val="108000"/>
+              </a:lnSpc>
+              <a:buNone/>
+              <a:defRPr sz="975" b="0" i="0">
+                <a:solidFill>
+                  <a:srgbClr val="555555"/>
+                </a:solidFill>
+                <a:latin typeface="Yu Gothic"/>
+                <a:ea typeface="Yu Gothic"/>
+                <a:cs typeface="Yu Gothic"/>
+              </a:defRPr>
+            </a:pPr>
+            <a:r>
+              <a:rPr sz="975" b="0" i="0">
+                <a:solidFill>
+                  <a:srgbClr val="555555"/>
+                </a:solidFill>
+                <a:latin typeface="Yu Gothic"/>
+                <a:ea typeface="Yu Gothic"/>
+                <a:cs typeface="Yu Gothic"/>
+              </a:rPr>
+              <a:t>peak NIS: 279.2</a:t>
+            </a:r>
+          </a:p>
+          <a:p>
+            <a:pPr algn="l">
+              <a:lnSpc>
+                <a:spcPct val="108000"/>
+              </a:lnSpc>
+              <a:buNone/>
+              <a:defRPr sz="975" b="0" i="0">
+                <a:solidFill>
+                  <a:srgbClr val="555555"/>
+                </a:solidFill>
+                <a:latin typeface="Yu Gothic"/>
+                <a:ea typeface="Yu Gothic"/>
+                <a:cs typeface="Yu Gothic"/>
+              </a:defRPr>
+            </a:pPr>
+            <a:r>
+              <a:rPr sz="975" b="0" i="0">
+                <a:solidFill>
+                  <a:srgbClr val="555555"/>
+                </a:solidFill>
+                <a:latin typeface="Yu Gothic"/>
+                <a:ea typeface="Yu Gothic"/>
+                <a:cs typeface="Yu Gothic"/>
+              </a:rPr>
+              <a:t>判定: sensor bias</a:t>
+            </a:r>
+          </a:p>
+        </p:txBody>
+      </p:sp>
+      <p:sp>
+        <p:nvSpPr>
+          <p:cNvPr id="18" name="直線コネクタ 17">
+            <a:extLst>
+              <a:ext uri="{FF2B5EF4-FFF2-40B4-BE49-F238E27FC236}">
+                <a16:creationId xmlns:a16="http://schemas.microsoft.com/office/drawing/2014/main" id="{278C8487-BE02-4CBE-938E-83EEDE920B0C}"/>
+              </a:ext>
+            </a:extLst>
+          </p:cNvPr>
+          <p:cNvSpPr>
+            <a:spLocks noGrp="1"/>
+          </p:cNvSpPr>
+          <p:nvPr/>
+        </p:nvSpPr>
+        <p:spPr>
+          <a:xfrm>
+            <a:off x="8477250" y="3505200"/>
+            <a:ext cx="3162300" cy="0"/>
           </a:xfrm>
           <a:prstGeom prst="line">
             <a:avLst/>
           </a:prstGeom>
           <a:noFill/>
-          <a:ln w="38100">
+          <a:ln w="9525">
             <a:solidFill>
-              <a:srgbClr val="C4493D"/>
+              <a:srgbClr val="D3D3D3"/>
             </a:solidFill>
             <a:prstDash val="solid"/>
           </a:ln>
@@ -19701,22 +19140,22 @@
       </p:sp>
       <p:sp>
         <p:nvSpPr>
-          <p:cNvPr id="23" name="正方形/長方形 22">
-            <a:extLst>
-              <a:ext uri="{FF2B5EF4-FFF2-40B4-BE49-F238E27FC236}">
-                <a16:creationId xmlns:a16="http://schemas.microsoft.com/office/drawing/2014/main" id="{8FEFFB98-97F3-4768-9019-727E5C61237C}"/>
-              </a:ext>
-            </a:extLst>
-          </p:cNvPr>
-          <p:cNvSpPr>
-            <a:spLocks noGrp="1"/>
-          </p:cNvSpPr>
-          <p:nvPr/>
-        </p:nvSpPr>
-        <p:spPr>
-          <a:xfrm>
-            <a:off x="3352800" y="5295900"/>
-            <a:ext cx="2457450" cy="333375"/>
+          <p:cNvPr id="19" name="正方形/長方形 18">
+            <a:extLst>
+              <a:ext uri="{FF2B5EF4-FFF2-40B4-BE49-F238E27FC236}">
+                <a16:creationId xmlns:a16="http://schemas.microsoft.com/office/drawing/2014/main" id="{5AA4BA7A-BCC1-43AB-B07F-222FAB03849E}"/>
+              </a:ext>
+            </a:extLst>
+          </p:cNvPr>
+          <p:cNvSpPr>
+            <a:spLocks noGrp="1"/>
+          </p:cNvSpPr>
+          <p:nvPr/>
+        </p:nvSpPr>
+        <p:spPr>
+          <a:xfrm>
+            <a:off x="8477250" y="3705225"/>
+            <a:ext cx="3162300" cy="266700"/>
           </a:xfrm>
           <a:prstGeom prst="rect">
             <a:avLst/>
@@ -19738,47 +19177,47 @@
                 <a:spcPct val="100000"/>
               </a:lnSpc>
               <a:buNone/>
-              <a:defRPr sz="1875" b="1" i="0">
-                <a:solidFill>
-                  <a:srgbClr val="333333"/>
-                </a:solidFill>
-                <a:latin typeface="Yu Gothic"/>
-                <a:ea typeface="Yu Gothic"/>
-                <a:cs typeface="Yu Gothic"/>
-              </a:defRPr>
-            </a:pPr>
-            <a:r>
-              <a:rPr sz="1875" b="1" i="0">
-                <a:solidFill>
-                  <a:srgbClr val="333333"/>
+              <a:defRPr sz="1200" b="1" i="0">
+                <a:solidFill>
+                  <a:srgbClr val="007FA8"/>
+                </a:solidFill>
+                <a:latin typeface="Yu Gothic"/>
+                <a:ea typeface="Yu Gothic"/>
+                <a:cs typeface="Yu Gothic"/>
+              </a:defRPr>
+            </a:pPr>
+            <a:r>
+              <a:rPr sz="1200" b="1" i="0">
+                <a:solidFill>
+                  <a:srgbClr val="007FA8"/>
                 </a:solidFill>
                 <a:latin typeface="Yu Gothic"/>
                 <a:ea typeface="Yu Gothic"/>
                 <a:cs typeface="Yu Gothic"/>
               </a:rPr>
-              <a:t>403.3</a:t>
-            </a:r>
-          </a:p>
-        </p:txBody>
-      </p:sp>
-      <p:sp>
-        <p:nvSpPr>
-          <p:cNvPr id="24" name="正方形/長方形 23">
-            <a:extLst>
-              <a:ext uri="{FF2B5EF4-FFF2-40B4-BE49-F238E27FC236}">
-                <a16:creationId xmlns:a16="http://schemas.microsoft.com/office/drawing/2014/main" id="{0B82081F-752F-4339-88B3-B265F59F0B8F}"/>
-              </a:ext>
-            </a:extLst>
-          </p:cNvPr>
-          <p:cNvSpPr>
-            <a:spLocks noGrp="1"/>
-          </p:cNvSpPr>
-          <p:nvPr/>
-        </p:nvSpPr>
-        <p:spPr>
-          <a:xfrm>
-            <a:off x="3352800" y="5619750"/>
-            <a:ext cx="2457450" cy="238125"/>
+              <a:t>M05  unmodeled heat</a:t>
+            </a:r>
+          </a:p>
+        </p:txBody>
+      </p:sp>
+      <p:sp>
+        <p:nvSpPr>
+          <p:cNvPr id="20" name="正方形/長方形 19">
+            <a:extLst>
+              <a:ext uri="{FF2B5EF4-FFF2-40B4-BE49-F238E27FC236}">
+                <a16:creationId xmlns:a16="http://schemas.microsoft.com/office/drawing/2014/main" id="{C643F752-EB4F-4037-82A5-CDA589D845A2}"/>
+              </a:ext>
+            </a:extLst>
+          </p:cNvPr>
+          <p:cNvSpPr>
+            <a:spLocks noGrp="1"/>
+          </p:cNvSpPr>
+          <p:nvPr/>
+        </p:nvSpPr>
+        <p:spPr>
+          <a:xfrm>
+            <a:off x="8477250" y="4048125"/>
+            <a:ext cx="876300" cy="323850"/>
           </a:xfrm>
           <a:prstGeom prst="rect">
             <a:avLst/>
@@ -19800,78 +19239,47 @@
                 <a:spcPct val="100000"/>
               </a:lnSpc>
               <a:buNone/>
-              <a:defRPr sz="863" b="0" i="0">
-                <a:solidFill>
-                  <a:srgbClr val="555555"/>
-                </a:solidFill>
-                <a:latin typeface="Yu Gothic"/>
-                <a:ea typeface="Yu Gothic"/>
-                <a:cs typeface="Yu Gothic"/>
-              </a:defRPr>
-            </a:pPr>
-            <a:r>
-              <a:rPr sz="863" b="0" i="0">
-                <a:solidFill>
-                  <a:srgbClr val="555555"/>
+              <a:defRPr sz="1800" b="1" i="0">
+                <a:solidFill>
+                  <a:srgbClr val="4D8710"/>
+                </a:solidFill>
+                <a:latin typeface="Yu Gothic"/>
+                <a:ea typeface="Yu Gothic"/>
+                <a:cs typeface="Yu Gothic"/>
+              </a:defRPr>
+            </a:pPr>
+            <a:r>
+              <a:rPr sz="1800" b="1" i="0">
+                <a:solidFill>
+                  <a:srgbClr val="4D8710"/>
                 </a:solidFill>
                 <a:latin typeface="Yu Gothic"/>
                 <a:ea typeface="Yu Gothic"/>
                 <a:cs typeface="Yu Gothic"/>
               </a:rPr>
-              <a:t>M03 peak NIS</a:t>
-            </a:r>
-          </a:p>
-        </p:txBody>
-      </p:sp>
-      <p:sp>
-        <p:nvSpPr>
-          <p:cNvPr id="25" name="直線コネクタ 24">
-            <a:extLst>
-              <a:ext uri="{FF2B5EF4-FFF2-40B4-BE49-F238E27FC236}">
-                <a16:creationId xmlns:a16="http://schemas.microsoft.com/office/drawing/2014/main" id="{50493892-EA18-48ED-B370-0C6BADB85322}"/>
-              </a:ext>
-            </a:extLst>
-          </p:cNvPr>
-          <p:cNvSpPr>
-            <a:spLocks noGrp="1"/>
-          </p:cNvSpPr>
-          <p:nvPr/>
-        </p:nvSpPr>
-        <p:spPr>
-          <a:xfrm>
-            <a:off x="6153150" y="5219700"/>
-            <a:ext cx="2457450" cy="0"/>
-          </a:xfrm>
-          <a:prstGeom prst="line">
-            <a:avLst/>
-          </a:prstGeom>
-          <a:noFill/>
-          <a:ln w="38100">
-            <a:solidFill>
-              <a:srgbClr val="00A5D8"/>
-            </a:solidFill>
-            <a:prstDash val="solid"/>
-          </a:ln>
-        </p:spPr>
-      </p:sp>
-      <p:sp>
-        <p:nvSpPr>
-          <p:cNvPr id="26" name="正方形/長方形 25">
-            <a:extLst>
-              <a:ext uri="{FF2B5EF4-FFF2-40B4-BE49-F238E27FC236}">
-                <a16:creationId xmlns:a16="http://schemas.microsoft.com/office/drawing/2014/main" id="{9C4E31AA-A89F-4F91-926B-A6BD49FE34F8}"/>
-              </a:ext>
-            </a:extLst>
-          </p:cNvPr>
-          <p:cNvSpPr>
-            <a:spLocks noGrp="1"/>
-          </p:cNvSpPr>
-          <p:nvPr/>
-        </p:nvSpPr>
-        <p:spPr>
-          <a:xfrm>
-            <a:off x="6153150" y="5295900"/>
-            <a:ext cx="2457450" cy="333375"/>
+              <a:t>PASS</a:t>
+            </a:r>
+          </a:p>
+        </p:txBody>
+      </p:sp>
+      <p:sp>
+        <p:nvSpPr>
+          <p:cNvPr id="21" name="正方形/長方形 20">
+            <a:extLst>
+              <a:ext uri="{FF2B5EF4-FFF2-40B4-BE49-F238E27FC236}">
+                <a16:creationId xmlns:a16="http://schemas.microsoft.com/office/drawing/2014/main" id="{F770612F-6BEB-44C0-9CD9-C3EE67999471}"/>
+              </a:ext>
+            </a:extLst>
+          </p:cNvPr>
+          <p:cNvSpPr>
+            <a:spLocks noGrp="1"/>
+          </p:cNvSpPr>
+          <p:nvPr/>
+        </p:nvSpPr>
+        <p:spPr>
+          <a:xfrm>
+            <a:off x="9467850" y="4029075"/>
+            <a:ext cx="2171700" cy="266700"/>
           </a:xfrm>
           <a:prstGeom prst="rect">
             <a:avLst/>
@@ -19893,7 +19301,7 @@
                 <a:spcPct val="100000"/>
               </a:lnSpc>
               <a:buNone/>
-              <a:defRPr sz="1875" b="1" i="0">
+              <a:defRPr sz="1200" b="1" i="0">
                 <a:solidFill>
                   <a:srgbClr val="333333"/>
                 </a:solidFill>
@@ -19903,7 +19311,7 @@
               </a:defRPr>
             </a:pPr>
             <a:r>
-              <a:rPr sz="1875" b="1" i="0">
+              <a:rPr sz="1200" b="1" i="0">
                 <a:solidFill>
                   <a:srgbClr val="333333"/>
                 </a:solidFill>
@@ -19911,29 +19319,176 @@
                 <a:ea typeface="Yu Gothic"/>
                 <a:cs typeface="Yu Gothic"/>
               </a:rPr>
-              <a:t>10 s</a:t>
-            </a:r>
-          </a:p>
-        </p:txBody>
-      </p:sp>
-      <p:sp>
-        <p:nvSpPr>
-          <p:cNvPr id="27" name="正方形/長方形 26">
-            <a:extLst>
-              <a:ext uri="{FF2B5EF4-FFF2-40B4-BE49-F238E27FC236}">
-                <a16:creationId xmlns:a16="http://schemas.microsoft.com/office/drawing/2014/main" id="{7740AFD2-FA06-402E-BD33-83C4B764B8F3}"/>
-              </a:ext>
-            </a:extLst>
-          </p:cNvPr>
-          <p:cNvSpPr>
-            <a:spLocks noGrp="1"/>
-          </p:cNvSpPr>
-          <p:nvPr/>
-        </p:nvSpPr>
-        <p:spPr>
-          <a:xfrm>
-            <a:off x="6153150" y="5619750"/>
-            <a:ext cx="2457450" cy="238125"/>
+              <a:t>1 sで検出</a:t>
+            </a:r>
+          </a:p>
+        </p:txBody>
+      </p:sp>
+      <p:sp>
+        <p:nvSpPr>
+          <p:cNvPr id="22" name="正方形/長方形 21">
+            <a:extLst>
+              <a:ext uri="{FF2B5EF4-FFF2-40B4-BE49-F238E27FC236}">
+                <a16:creationId xmlns:a16="http://schemas.microsoft.com/office/drawing/2014/main" id="{FDF3349D-359B-44F9-A6C5-74A0AC7AA03C}"/>
+              </a:ext>
+            </a:extLst>
+          </p:cNvPr>
+          <p:cNvSpPr>
+            <a:spLocks noGrp="1"/>
+          </p:cNvSpPr>
+          <p:nvPr/>
+        </p:nvSpPr>
+        <p:spPr>
+          <a:xfrm>
+            <a:off x="8477250" y="4438650"/>
+            <a:ext cx="3162300" cy="781050"/>
+          </a:xfrm>
+          <a:prstGeom prst="rect">
+            <a:avLst/>
+          </a:prstGeom>
+          <a:noFill/>
+          <a:ln w="0">
+            <a:noFill/>
+            <a:prstDash val="solid"/>
+          </a:ln>
+        </p:spPr>
+        <p:txBody>
+          <a:bodyPr wrap="square" lIns="28575" tIns="19050" rIns="28575" bIns="19050" anchor="t">
+            <a:normAutofit/>
+          </a:bodyPr>
+          <a:lstStyle/>
+          <a:p>
+            <a:pPr algn="l">
+              <a:lnSpc>
+                <a:spcPct val="108000"/>
+              </a:lnSpc>
+              <a:buNone/>
+              <a:defRPr sz="975" b="0" i="0">
+                <a:solidFill>
+                  <a:srgbClr val="555555"/>
+                </a:solidFill>
+                <a:latin typeface="Yu Gothic"/>
+                <a:ea typeface="Yu Gothic"/>
+                <a:cs typeface="Yu Gothic"/>
+              </a:defRPr>
+            </a:pPr>
+            <a:r>
+              <a:rPr sz="975" b="0" i="0">
+                <a:solidFill>
+                  <a:srgbClr val="555555"/>
+                </a:solidFill>
+                <a:latin typeface="Yu Gothic"/>
+                <a:ea typeface="Yu Gothic"/>
+                <a:cs typeface="Yu Gothic"/>
+              </a:rPr>
+              <a:t>peak estimate: 0.757 W</a:t>
+            </a:r>
+          </a:p>
+          <a:p>
+            <a:pPr algn="l">
+              <a:lnSpc>
+                <a:spcPct val="108000"/>
+              </a:lnSpc>
+              <a:buNone/>
+              <a:defRPr sz="975" b="0" i="0">
+                <a:solidFill>
+                  <a:srgbClr val="555555"/>
+                </a:solidFill>
+                <a:latin typeface="Yu Gothic"/>
+                <a:ea typeface="Yu Gothic"/>
+                <a:cs typeface="Yu Gothic"/>
+              </a:defRPr>
+            </a:pPr>
+            <a:r>
+              <a:rPr sz="975" b="0" i="0">
+                <a:solidFill>
+                  <a:srgbClr val="555555"/>
+                </a:solidFill>
+                <a:latin typeface="Yu Gothic"/>
+                <a:ea typeface="Yu Gothic"/>
+                <a:cs typeface="Yu Gothic"/>
+              </a:rPr>
+              <a:t>heat RMSE: 0.135 W</a:t>
+            </a:r>
+          </a:p>
+          <a:p>
+            <a:pPr algn="l">
+              <a:lnSpc>
+                <a:spcPct val="108000"/>
+              </a:lnSpc>
+              <a:buNone/>
+              <a:defRPr sz="975" b="0" i="0">
+                <a:solidFill>
+                  <a:srgbClr val="555555"/>
+                </a:solidFill>
+                <a:latin typeface="Yu Gothic"/>
+                <a:ea typeface="Yu Gothic"/>
+                <a:cs typeface="Yu Gothic"/>
+              </a:defRPr>
+            </a:pPr>
+            <a:r>
+              <a:rPr sz="975" b="0" i="0">
+                <a:solidFill>
+                  <a:srgbClr val="555555"/>
+                </a:solidFill>
+                <a:latin typeface="Yu Gothic"/>
+                <a:ea typeface="Yu Gothic"/>
+                <a:cs typeface="Yu Gothic"/>
+              </a:rPr>
+              <a:t>判定: physical disturbance</a:t>
+            </a:r>
+          </a:p>
+        </p:txBody>
+      </p:sp>
+      <p:sp>
+        <p:nvSpPr>
+          <p:cNvPr id="23" name="正方形/長方形 22">
+            <a:extLst>
+              <a:ext uri="{FF2B5EF4-FFF2-40B4-BE49-F238E27FC236}">
+                <a16:creationId xmlns:a16="http://schemas.microsoft.com/office/drawing/2014/main" id="{6DF28CCE-63B3-4520-9891-CCC791CF4E6F}"/>
+              </a:ext>
+            </a:extLst>
+          </p:cNvPr>
+          <p:cNvSpPr>
+            <a:spLocks noGrp="1"/>
+          </p:cNvSpPr>
+          <p:nvPr/>
+        </p:nvSpPr>
+        <p:spPr>
+          <a:xfrm>
+            <a:off x="552450" y="5743575"/>
+            <a:ext cx="11087100" cy="495300"/>
+          </a:xfrm>
+          <a:prstGeom prst="rect">
+            <a:avLst/>
+          </a:prstGeom>
+          <a:solidFill>
+            <a:srgbClr val="201445"/>
+          </a:solidFill>
+          <a:ln w="0">
+            <a:noFill/>
+            <a:prstDash val="solid"/>
+          </a:ln>
+        </p:spPr>
+      </p:sp>
+      <p:sp>
+        <p:nvSpPr>
+          <p:cNvPr id="24" name="正方形/長方形 23">
+            <a:extLst>
+              <a:ext uri="{FF2B5EF4-FFF2-40B4-BE49-F238E27FC236}">
+                <a16:creationId xmlns:a16="http://schemas.microsoft.com/office/drawing/2014/main" id="{4EB4AA50-721F-4B48-B349-793F9CE541CB}"/>
+              </a:ext>
+            </a:extLst>
+          </p:cNvPr>
+          <p:cNvSpPr>
+            <a:spLocks noGrp="1"/>
+          </p:cNvSpPr>
+          <p:nvPr/>
+        </p:nvSpPr>
+        <p:spPr>
+          <a:xfrm>
+            <a:off x="762000" y="5848350"/>
+            <a:ext cx="4000500" cy="285750"/>
           </a:xfrm>
           <a:prstGeom prst="rect">
             <a:avLst/>
@@ -19955,78 +19510,47 @@
                 <a:spcPct val="100000"/>
               </a:lnSpc>
               <a:buNone/>
-              <a:defRPr sz="863" b="0" i="0">
-                <a:solidFill>
-                  <a:srgbClr val="555555"/>
-                </a:solidFill>
-                <a:latin typeface="Yu Gothic"/>
-                <a:ea typeface="Yu Gothic"/>
-                <a:cs typeface="Yu Gothic"/>
-              </a:defRPr>
-            </a:pPr>
-            <a:r>
-              <a:rPr sz="863" b="0" i="0">
-                <a:solidFill>
-                  <a:srgbClr val="555555"/>
+              <a:defRPr sz="1275" b="1" i="0">
+                <a:solidFill>
+                  <a:srgbClr val="76BE18"/>
+                </a:solidFill>
+                <a:latin typeface="Yu Gothic"/>
+                <a:ea typeface="Yu Gothic"/>
+                <a:cs typeface="Yu Gothic"/>
+              </a:defRPr>
+            </a:pPr>
+            <a:r>
+              <a:rPr sz="1275" b="1" i="0">
+                <a:solidFill>
+                  <a:srgbClr val="76BE18"/>
                 </a:solidFill>
                 <a:latin typeface="Yu Gothic"/>
                 <a:ea typeface="Yu Gothic"/>
                 <a:cs typeface="Yu Gothic"/>
               </a:rPr>
-              <a:t>M05 detection delay</a:t>
-            </a:r>
-          </a:p>
-        </p:txBody>
-      </p:sp>
-      <p:sp>
-        <p:nvSpPr>
-          <p:cNvPr id="28" name="直線コネクタ 27">
-            <a:extLst>
-              <a:ext uri="{FF2B5EF4-FFF2-40B4-BE49-F238E27FC236}">
-                <a16:creationId xmlns:a16="http://schemas.microsoft.com/office/drawing/2014/main" id="{ADD6E4BF-B905-4BD2-9DAF-8F66205A8018}"/>
-              </a:ext>
-            </a:extLst>
-          </p:cNvPr>
-          <p:cNvSpPr>
-            <a:spLocks noGrp="1"/>
-          </p:cNvSpPr>
-          <p:nvPr/>
-        </p:nvSpPr>
-        <p:spPr>
-          <a:xfrm>
-            <a:off x="8953500" y="5219700"/>
-            <a:ext cx="2686050" cy="0"/>
-          </a:xfrm>
-          <a:prstGeom prst="line">
-            <a:avLst/>
-          </a:prstGeom>
-          <a:noFill/>
-          <a:ln w="38100">
-            <a:solidFill>
-              <a:srgbClr val="76BE18"/>
-            </a:solidFill>
-            <a:prstDash val="solid"/>
-          </a:ln>
-        </p:spPr>
-      </p:sp>
-      <p:sp>
-        <p:nvSpPr>
-          <p:cNvPr id="29" name="正方形/長方形 28">
-            <a:extLst>
-              <a:ext uri="{FF2B5EF4-FFF2-40B4-BE49-F238E27FC236}">
-                <a16:creationId xmlns:a16="http://schemas.microsoft.com/office/drawing/2014/main" id="{C88A2351-EDBD-44C6-B56B-DF0ED71830B6}"/>
-              </a:ext>
-            </a:extLst>
-          </p:cNvPr>
-          <p:cNvSpPr>
-            <a:spLocks noGrp="1"/>
-          </p:cNvSpPr>
-          <p:nvPr/>
-        </p:nvSpPr>
-        <p:spPr>
-          <a:xfrm>
-            <a:off x="8953500" y="5295900"/>
-            <a:ext cx="2686050" cy="333375"/>
+              <a:t>MONITOR  8 / 8 CHECKS PASS</a:t>
+            </a:r>
+          </a:p>
+        </p:txBody>
+      </p:sp>
+      <p:sp>
+        <p:nvSpPr>
+          <p:cNvPr id="25" name="正方形/長方形 24">
+            <a:extLst>
+              <a:ext uri="{FF2B5EF4-FFF2-40B4-BE49-F238E27FC236}">
+                <a16:creationId xmlns:a16="http://schemas.microsoft.com/office/drawing/2014/main" id="{D1E4A6CE-F4EF-4710-8CA1-F41F56E28B08}"/>
+              </a:ext>
+            </a:extLst>
+          </p:cNvPr>
+          <p:cNvSpPr>
+            <a:spLocks noGrp="1"/>
+          </p:cNvSpPr>
+          <p:nvPr/>
+        </p:nvSpPr>
+        <p:spPr>
+          <a:xfrm>
+            <a:off x="4848225" y="5829300"/>
+            <a:ext cx="6524625" cy="304800"/>
           </a:xfrm>
           <a:prstGeom prst="rect">
             <a:avLst/>
@@ -20043,92 +19567,30 @@
           </a:bodyPr>
           <a:lstStyle/>
           <a:p>
-            <a:pPr algn="l">
+            <a:pPr algn="r">
               <a:lnSpc>
                 <a:spcPct val="100000"/>
               </a:lnSpc>
               <a:buNone/>
-              <a:defRPr sz="1875" b="1" i="0">
-                <a:solidFill>
-                  <a:srgbClr val="333333"/>
-                </a:solidFill>
-                <a:latin typeface="Yu Gothic"/>
-                <a:ea typeface="Yu Gothic"/>
-                <a:cs typeface="Yu Gothic"/>
-              </a:defRPr>
-            </a:pPr>
-            <a:r>
-              <a:rPr sz="1875" b="1" i="0">
-                <a:solidFill>
-                  <a:srgbClr val="333333"/>
+              <a:defRPr sz="1200" b="1" i="0">
+                <a:solidFill>
+                  <a:srgbClr val="FFFFFF"/>
+                </a:solidFill>
+                <a:latin typeface="Yu Gothic"/>
+                <a:ea typeface="Yu Gothic"/>
+                <a:cs typeface="Yu Gothic"/>
+              </a:defRPr>
+            </a:pPr>
+            <a:r>
+              <a:rPr sz="1200" b="1" i="0">
+                <a:solidFill>
+                  <a:srgbClr val="FFFFFF"/>
                 </a:solidFill>
                 <a:latin typeface="Yu Gothic"/>
                 <a:ea typeface="Yu Gothic"/>
                 <a:cs typeface="Yu Gothic"/>
               </a:rPr>
-              <a:t>3.182 W</a:t>
-            </a:r>
-          </a:p>
-        </p:txBody>
-      </p:sp>
-      <p:sp>
-        <p:nvSpPr>
-          <p:cNvPr id="30" name="正方形/長方形 29">
-            <a:extLst>
-              <a:ext uri="{FF2B5EF4-FFF2-40B4-BE49-F238E27FC236}">
-                <a16:creationId xmlns:a16="http://schemas.microsoft.com/office/drawing/2014/main" id="{23561A9D-3F6B-4E2F-B074-8A600B9F3A8E}"/>
-              </a:ext>
-            </a:extLst>
-          </p:cNvPr>
-          <p:cNvSpPr>
-            <a:spLocks noGrp="1"/>
-          </p:cNvSpPr>
-          <p:nvPr/>
-        </p:nvSpPr>
-        <p:spPr>
-          <a:xfrm>
-            <a:off x="8953500" y="5619750"/>
-            <a:ext cx="2686050" cy="238125"/>
-          </a:xfrm>
-          <a:prstGeom prst="rect">
-            <a:avLst/>
-          </a:prstGeom>
-          <a:noFill/>
-          <a:ln w="0">
-            <a:noFill/>
-            <a:prstDash val="solid"/>
-          </a:ln>
-        </p:spPr>
-        <p:txBody>
-          <a:bodyPr wrap="square" lIns="28575" tIns="19050" rIns="28575" bIns="19050" anchor="ctr">
-            <a:normAutofit/>
-          </a:bodyPr>
-          <a:lstStyle/>
-          <a:p>
-            <a:pPr algn="l">
-              <a:lnSpc>
-                <a:spcPct val="100000"/>
-              </a:lnSpc>
-              <a:buNone/>
-              <a:defRPr sz="863" b="0" i="0">
-                <a:solidFill>
-                  <a:srgbClr val="555555"/>
-                </a:solidFill>
-                <a:latin typeface="Yu Gothic"/>
-                <a:ea typeface="Yu Gothic"/>
-                <a:cs typeface="Yu Gothic"/>
-              </a:defRPr>
-            </a:pPr>
-            <a:r>
-              <a:rPr sz="863" b="0" i="0">
-                <a:solidFill>
-                  <a:srgbClr val="555555"/>
-                </a:solidFill>
-                <a:latin typeface="Yu Gothic"/>
-                <a:ea typeface="Yu Gothic"/>
-                <a:cs typeface="Yu Gothic"/>
-              </a:rPr>
-              <a:t>M05 peak estimate  |  bias ≤ 0.061 K</a:t>
+              <a:t>故障検出だけでなく、センサ起因か熱負荷起因かを分離</a:t>
             </a:r>
           </a:p>
         </p:txBody>
@@ -20136,7 +19598,7 @@
     </p:spTree>
     <p:extLst>
       <p:ext uri="{BB962C8B-B14F-4D97-AF65-F5344CB8AC3E}">
-        <p14:creationId xmlns:p14="http://schemas.microsoft.com/office/powerpoint/2010/main" val="422696022"/>
+        <p14:creationId xmlns:p14="http://schemas.microsoft.com/office/powerpoint/2010/main" val="1884527444"/>
       </p:ext>
     </p:extLst>
   </p:cSld>
@@ -20176,7 +19638,7 @@
           <p:cNvPr id="28" name="正方形/長方形 27">
             <a:extLst>
               <a:ext uri="{FF2B5EF4-FFF2-40B4-BE49-F238E27FC236}">
-                <a16:creationId xmlns:a16="http://schemas.microsoft.com/office/drawing/2014/main" id="{6A956D1F-B324-4BC6-964D-33F2E0CC05E3}"/>
+                <a16:creationId xmlns:a16="http://schemas.microsoft.com/office/drawing/2014/main" id="{679299C4-08F6-43CB-B41E-77888AB48F01}"/>
               </a:ext>
             </a:extLst>
           </p:cNvPr>
@@ -20207,7 +19669,7 @@
           <p:cNvPr id="2" name="正方形/長方形 1">
             <a:extLst>
               <a:ext uri="{FF2B5EF4-FFF2-40B4-BE49-F238E27FC236}">
-                <a16:creationId xmlns:a16="http://schemas.microsoft.com/office/drawing/2014/main" id="{D10797E3-EC3B-452E-8E1F-A246E0EC0772}"/>
+                <a16:creationId xmlns:a16="http://schemas.microsoft.com/office/drawing/2014/main" id="{9DDA3D1E-B94D-4E71-A7D1-50BB6A65F2E3}"/>
               </a:ext>
             </a:extLst>
           </p:cNvPr>
@@ -20269,7 +19731,7 @@
           <p:cNvPr id="3" name="正方形/長方形 2">
             <a:extLst>
               <a:ext uri="{FF2B5EF4-FFF2-40B4-BE49-F238E27FC236}">
-                <a16:creationId xmlns:a16="http://schemas.microsoft.com/office/drawing/2014/main" id="{407279FA-15EC-4865-9081-CC492EA3B0C6}"/>
+                <a16:creationId xmlns:a16="http://schemas.microsoft.com/office/drawing/2014/main" id="{A8F2E64B-8C32-4BC0-B8A8-41DA965C1977}"/>
               </a:ext>
             </a:extLst>
           </p:cNvPr>
@@ -20321,7 +19783,7 @@
                 <a:ea typeface="Yu Gothic"/>
                 <a:cs typeface="Yu Gothic"/>
               </a:rPr>
-              <a:t>平均予測は改善したが、放射感度の再現には至らない</a:t>
+              <a:t>平均温度はスクリーニング可能、放射感度は未再現</a:t>
             </a:r>
           </a:p>
         </p:txBody>
@@ -20331,7 +19793,7 @@
           <p:cNvPr id="4" name="正方形/長方形 3">
             <a:extLst>
               <a:ext uri="{FF2B5EF4-FFF2-40B4-BE49-F238E27FC236}">
-                <a16:creationId xmlns:a16="http://schemas.microsoft.com/office/drawing/2014/main" id="{A53D72E0-1FFC-4A97-BFB3-0FC849E1C69D}"/>
+                <a16:creationId xmlns:a16="http://schemas.microsoft.com/office/drawing/2014/main" id="{49398240-B80D-4E27-89ED-843035224248}"/>
               </a:ext>
             </a:extLst>
           </p:cNvPr>
@@ -20383,7 +19845,7 @@
                 <a:ea typeface="Yu Gothic"/>
                 <a:cs typeface="Yu Gothic"/>
               </a:rPr>
-              <a:t>mesh収束、volume-average精度、物理差分を別々に評価し、設計保証へ昇格させない</a:t>
+              <a:t>mesh、絶対温度、物理差分を別々に判定し、用途をvolume-average screeningへ限定する</a:t>
             </a:r>
           </a:p>
         </p:txBody>
@@ -20393,7 +19855,7 @@
           <p:cNvPr id="5" name="直線コネクタ 4">
             <a:extLst>
               <a:ext uri="{FF2B5EF4-FFF2-40B4-BE49-F238E27FC236}">
-                <a16:creationId xmlns:a16="http://schemas.microsoft.com/office/drawing/2014/main" id="{886418BE-E8D3-4010-88A6-C454911D1746}"/>
+                <a16:creationId xmlns:a16="http://schemas.microsoft.com/office/drawing/2014/main" id="{492CE6C7-1753-443D-A488-5F1643D27E24}"/>
               </a:ext>
             </a:extLst>
           </p:cNvPr>
@@ -20424,7 +19886,7 @@
           <p:cNvPr id="6" name="直線コネクタ 5">
             <a:extLst>
               <a:ext uri="{FF2B5EF4-FFF2-40B4-BE49-F238E27FC236}">
-                <a16:creationId xmlns:a16="http://schemas.microsoft.com/office/drawing/2014/main" id="{6BB6B08B-D51C-4AAB-88C7-6D66071A4DB4}"/>
+                <a16:creationId xmlns:a16="http://schemas.microsoft.com/office/drawing/2014/main" id="{FE6C2482-DF3E-4FC5-947D-003E3406D484}"/>
               </a:ext>
             </a:extLst>
           </p:cNvPr>
@@ -20455,7 +19917,7 @@
           <p:cNvPr id="7" name="正方形/長方形 6">
             <a:extLst>
               <a:ext uri="{FF2B5EF4-FFF2-40B4-BE49-F238E27FC236}">
-                <a16:creationId xmlns:a16="http://schemas.microsoft.com/office/drawing/2014/main" id="{1F19AA87-BBB7-4F04-B57F-8A7C86CAA8F3}"/>
+                <a16:creationId xmlns:a16="http://schemas.microsoft.com/office/drawing/2014/main" id="{A0232F11-4A0B-4A18-8192-90CECC7D971B}"/>
               </a:ext>
             </a:extLst>
           </p:cNvPr>
@@ -20517,7 +19979,7 @@
           <p:cNvPr id="8" name="正方形/長方形 7">
             <a:extLst>
               <a:ext uri="{FF2B5EF4-FFF2-40B4-BE49-F238E27FC236}">
-                <a16:creationId xmlns:a16="http://schemas.microsoft.com/office/drawing/2014/main" id="{F0A48F57-DCBE-41A1-8E4E-B084EDBC39DD}"/>
+                <a16:creationId xmlns:a16="http://schemas.microsoft.com/office/drawing/2014/main" id="{EFCCF124-DA3C-4B30-BB87-71434FB31F55}"/>
               </a:ext>
             </a:extLst>
           </p:cNvPr>
@@ -20579,7 +20041,7 @@
           <p:cNvPr id="9" name="正方形/長方形 8">
             <a:extLst>
               <a:ext uri="{FF2B5EF4-FFF2-40B4-BE49-F238E27FC236}">
-                <a16:creationId xmlns:a16="http://schemas.microsoft.com/office/drawing/2014/main" id="{8302007B-C31C-4A39-A075-431E7CF276FA}"/>
+                <a16:creationId xmlns:a16="http://schemas.microsoft.com/office/drawing/2014/main" id="{1DDB5B81-FC46-4C38-82BC-3448753A5F61}"/>
               </a:ext>
             </a:extLst>
           </p:cNvPr>
@@ -20641,7 +20103,7 @@
           <p:cNvPr id="10" name="正方形/長方形 9">
             <a:extLst>
               <a:ext uri="{FF2B5EF4-FFF2-40B4-BE49-F238E27FC236}">
-                <a16:creationId xmlns:a16="http://schemas.microsoft.com/office/drawing/2014/main" id="{969F7940-7B32-4515-90ED-2FA4F6645D80}"/>
+                <a16:creationId xmlns:a16="http://schemas.microsoft.com/office/drawing/2014/main" id="{E419DBC9-42D0-486D-B03F-D2A08974EDA8}"/>
               </a:ext>
             </a:extLst>
           </p:cNvPr>
@@ -20653,7 +20115,7 @@
         <p:spPr>
           <a:xfrm>
             <a:off x="847725" y="1362075"/>
-            <a:ext cx="4676775" cy="228600"/>
+            <a:ext cx="5038725" cy="228600"/>
           </a:xfrm>
           <a:prstGeom prst="rect">
             <a:avLst/>
@@ -20693,7 +20155,7 @@
                 <a:ea typeface="Yu Gothic"/>
                 <a:cs typeface="Yu Gothic"/>
               </a:rPr>
-              <a:t>local-medium − local-fine</a:t>
+              <a:t>medium−fine差と用途別上限（低いほど良い）</a:t>
             </a:r>
           </a:p>
         </p:txBody>
@@ -20706,7 +20168,7 @@
         </p:nvGraphicFramePr>
         <p:xfrm>
           <a:off x="552450" y="1695450"/>
-          <a:ext cx="4972050" cy="3171825"/>
+          <a:ext cx="5334000" cy="3171825"/>
         </p:xfrm>
         <a:graphic>
           <a:graphicData uri="http://schemas.openxmlformats.org/drawingml/2006/chart">
@@ -20719,18 +20181,142 @@
           <p:cNvPr id="12" name="正方形/長方形 11">
             <a:extLst>
               <a:ext uri="{FF2B5EF4-FFF2-40B4-BE49-F238E27FC236}">
-                <a16:creationId xmlns:a16="http://schemas.microsoft.com/office/drawing/2014/main" id="{02034564-E0C2-43C8-9F64-881FF38500A5}"/>
-              </a:ext>
-            </a:extLst>
-          </p:cNvPr>
-          <p:cNvSpPr>
-            <a:spLocks noGrp="1"/>
-          </p:cNvSpPr>
-          <p:nvPr/>
-        </p:nvSpPr>
-        <p:spPr>
-          <a:xfrm>
-            <a:off x="5924550" y="1362075"/>
+                <a16:creationId xmlns:a16="http://schemas.microsoft.com/office/drawing/2014/main" id="{3698D6DC-D334-46A1-AFE4-C413D28D3947}"/>
+              </a:ext>
+            </a:extLst>
+          </p:cNvPr>
+          <p:cNvSpPr>
+            <a:spLocks noGrp="1"/>
+          </p:cNvSpPr>
+          <p:nvPr/>
+        </p:nvSpPr>
+        <p:spPr>
+          <a:xfrm>
+            <a:off x="552450" y="4905375"/>
+            <a:ext cx="2571750" cy="247650"/>
+          </a:xfrm>
+          <a:prstGeom prst="rect">
+            <a:avLst/>
+          </a:prstGeom>
+          <a:noFill/>
+          <a:ln w="0">
+            <a:noFill/>
+            <a:prstDash val="solid"/>
+          </a:ln>
+        </p:spPr>
+        <p:txBody>
+          <a:bodyPr wrap="square" lIns="28575" tIns="19050" rIns="28575" bIns="19050" anchor="ctr">
+            <a:normAutofit/>
+          </a:bodyPr>
+          <a:lstStyle/>
+          <a:p>
+            <a:pPr algn="ctr">
+              <a:lnSpc>
+                <a:spcPct val="100000"/>
+              </a:lnSpc>
+              <a:buNone/>
+              <a:defRPr sz="975" b="1" i="0">
+                <a:solidFill>
+                  <a:srgbClr val="C4493D"/>
+                </a:solidFill>
+                <a:latin typeface="Yu Gothic"/>
+                <a:ea typeface="Yu Gothic"/>
+                <a:cs typeface="Yu Gothic"/>
+              </a:defRPr>
+            </a:pPr>
+            <a:r>
+              <a:rPr sz="975" b="1" i="0">
+                <a:solidFill>
+                  <a:srgbClr val="C4493D"/>
+                </a:solidFill>
+                <a:latin typeface="Yu Gothic"/>
+                <a:ea typeface="Yu Gothic"/>
+                <a:cs typeface="Yu Gothic"/>
+              </a:rPr>
+              <a:t>strict 1/2 pass</a:t>
+            </a:r>
+          </a:p>
+        </p:txBody>
+      </p:sp>
+      <p:sp>
+        <p:nvSpPr>
+          <p:cNvPr id="13" name="正方形/長方形 12">
+            <a:extLst>
+              <a:ext uri="{FF2B5EF4-FFF2-40B4-BE49-F238E27FC236}">
+                <a16:creationId xmlns:a16="http://schemas.microsoft.com/office/drawing/2014/main" id="{9DF2FAD7-4831-43A7-9413-FC0C826A1A4C}"/>
+              </a:ext>
+            </a:extLst>
+          </p:cNvPr>
+          <p:cNvSpPr>
+            <a:spLocks noGrp="1"/>
+          </p:cNvSpPr>
+          <p:nvPr/>
+        </p:nvSpPr>
+        <p:spPr>
+          <a:xfrm>
+            <a:off x="3143250" y="4905375"/>
+            <a:ext cx="2743200" cy="247650"/>
+          </a:xfrm>
+          <a:prstGeom prst="rect">
+            <a:avLst/>
+          </a:prstGeom>
+          <a:noFill/>
+          <a:ln w="0">
+            <a:noFill/>
+            <a:prstDash val="solid"/>
+          </a:ln>
+        </p:spPr>
+        <p:txBody>
+          <a:bodyPr wrap="square" lIns="28575" tIns="19050" rIns="28575" bIns="19050" anchor="ctr">
+            <a:normAutofit/>
+          </a:bodyPr>
+          <a:lstStyle/>
+          <a:p>
+            <a:pPr algn="ctr">
+              <a:lnSpc>
+                <a:spcPct val="100000"/>
+              </a:lnSpc>
+              <a:buNone/>
+              <a:defRPr sz="975" b="1" i="0">
+                <a:solidFill>
+                  <a:srgbClr val="4D8710"/>
+                </a:solidFill>
+                <a:latin typeface="Yu Gothic"/>
+                <a:ea typeface="Yu Gothic"/>
+                <a:cs typeface="Yu Gothic"/>
+              </a:defRPr>
+            </a:pPr>
+            <a:r>
+              <a:rPr sz="975" b="1" i="0">
+                <a:solidFill>
+                  <a:srgbClr val="4D8710"/>
+                </a:solidFill>
+                <a:latin typeface="Yu Gothic"/>
+                <a:ea typeface="Yu Gothic"/>
+                <a:cs typeface="Yu Gothic"/>
+              </a:rPr>
+              <a:t>benchmark 2/2 pass</a:t>
+            </a:r>
+          </a:p>
+        </p:txBody>
+      </p:sp>
+      <p:sp>
+        <p:nvSpPr>
+          <p:cNvPr id="14" name="正方形/長方形 13">
+            <a:extLst>
+              <a:ext uri="{FF2B5EF4-FFF2-40B4-BE49-F238E27FC236}">
+                <a16:creationId xmlns:a16="http://schemas.microsoft.com/office/drawing/2014/main" id="{E8950C48-F136-4BA4-8DD2-ED0A1C20EE85}"/>
+              </a:ext>
+            </a:extLst>
+          </p:cNvPr>
+          <p:cNvSpPr>
+            <a:spLocks noGrp="1"/>
+          </p:cNvSpPr>
+          <p:nvPr/>
+        </p:nvSpPr>
+        <p:spPr>
+          <a:xfrm>
+            <a:off x="6286500" y="1362075"/>
             <a:ext cx="266700" cy="228600"/>
           </a:xfrm>
           <a:prstGeom prst="rect">
@@ -20778,22 +20364,22 @@
       </p:sp>
       <p:sp>
         <p:nvSpPr>
-          <p:cNvPr id="13" name="正方形/長方形 12">
-            <a:extLst>
-              <a:ext uri="{FF2B5EF4-FFF2-40B4-BE49-F238E27FC236}">
-                <a16:creationId xmlns:a16="http://schemas.microsoft.com/office/drawing/2014/main" id="{CE261721-39A9-483F-B4A8-53787E1D9755}"/>
-              </a:ext>
-            </a:extLst>
-          </p:cNvPr>
-          <p:cNvSpPr>
-            <a:spLocks noGrp="1"/>
-          </p:cNvSpPr>
-          <p:nvPr/>
-        </p:nvSpPr>
-        <p:spPr>
-          <a:xfrm>
-            <a:off x="6219825" y="1362075"/>
-            <a:ext cx="5419725" cy="228600"/>
+          <p:cNvPr id="15" name="正方形/長方形 14">
+            <a:extLst>
+              <a:ext uri="{FF2B5EF4-FFF2-40B4-BE49-F238E27FC236}">
+                <a16:creationId xmlns:a16="http://schemas.microsoft.com/office/drawing/2014/main" id="{9294E7B2-8793-4DB0-A3E0-7FD8101B3CB4}"/>
+              </a:ext>
+            </a:extLst>
+          </p:cNvPr>
+          <p:cNvSpPr>
+            <a:spLocks noGrp="1"/>
+          </p:cNvSpPr>
+          <p:nvPr/>
+        </p:nvSpPr>
+        <p:spPr>
+          <a:xfrm>
+            <a:off x="6581775" y="1362075"/>
+            <a:ext cx="5057775" cy="228600"/>
           </a:xfrm>
           <a:prstGeom prst="rect">
             <a:avLst/>
@@ -20833,20 +20419,20 @@
                 <a:ea typeface="Yu Gothic"/>
                 <a:cs typeface="Yu Gothic"/>
               </a:rPr>
-              <a:t>radiation pair response</a:t>
+              <a:t>220秒時点の放射効果（絶対値）</a:t>
             </a:r>
           </a:p>
         </p:txBody>
       </p:sp>
       <p:graphicFrame>
         <p:nvGraphicFramePr>
-          <p:cNvPr id="41" name="Chart"/>
+          <p:cNvPr id="43" name="Chart"/>
           <p:cNvGraphicFramePr/>
           <p:nvPr/>
         </p:nvGraphicFramePr>
         <p:xfrm>
-          <a:off x="5924550" y="1695450"/>
-          <a:ext cx="5715000" cy="3171825"/>
+          <a:off x="6286500" y="1695450"/>
+          <a:ext cx="5353050" cy="3171825"/>
         </p:xfrm>
         <a:graphic>
           <a:graphicData uri="http://schemas.openxmlformats.org/drawingml/2006/chart">
@@ -20856,22 +20442,84 @@
       </p:graphicFrame>
       <p:sp>
         <p:nvSpPr>
-          <p:cNvPr id="15" name="直線コネクタ 14">
-            <a:extLst>
-              <a:ext uri="{FF2B5EF4-FFF2-40B4-BE49-F238E27FC236}">
-                <a16:creationId xmlns:a16="http://schemas.microsoft.com/office/drawing/2014/main" id="{780FD720-AFF1-428B-918F-9F15EF9471A4}"/>
-              </a:ext>
-            </a:extLst>
-          </p:cNvPr>
-          <p:cNvSpPr>
-            <a:spLocks noGrp="1"/>
-          </p:cNvSpPr>
-          <p:nvPr/>
-        </p:nvSpPr>
-        <p:spPr>
-          <a:xfrm>
-            <a:off x="552450" y="5219700"/>
-            <a:ext cx="2457450" cy="0"/>
+          <p:cNvPr id="17" name="正方形/長方形 16">
+            <a:extLst>
+              <a:ext uri="{FF2B5EF4-FFF2-40B4-BE49-F238E27FC236}">
+                <a16:creationId xmlns:a16="http://schemas.microsoft.com/office/drawing/2014/main" id="{582CB740-DFA4-456E-94AA-50D602D552E2}"/>
+              </a:ext>
+            </a:extLst>
+          </p:cNvPr>
+          <p:cNvSpPr>
+            <a:spLocks noGrp="1"/>
+          </p:cNvSpPr>
+          <p:nvPr/>
+        </p:nvSpPr>
+        <p:spPr>
+          <a:xfrm>
+            <a:off x="6286500" y="4905375"/>
+            <a:ext cx="5353050" cy="247650"/>
+          </a:xfrm>
+          <a:prstGeom prst="rect">
+            <a:avLst/>
+          </a:prstGeom>
+          <a:noFill/>
+          <a:ln w="0">
+            <a:noFill/>
+            <a:prstDash val="solid"/>
+          </a:ln>
+        </p:spPr>
+        <p:txBody>
+          <a:bodyPr wrap="square" lIns="28575" tIns="19050" rIns="28575" bIns="19050" anchor="ctr">
+            <a:normAutofit/>
+          </a:bodyPr>
+          <a:lstStyle/>
+          <a:p>
+            <a:pPr algn="ctr">
+              <a:lnSpc>
+                <a:spcPct val="100000"/>
+              </a:lnSpc>
+              <a:buNone/>
+              <a:defRPr sz="975" b="1" i="0">
+                <a:solidFill>
+                  <a:srgbClr val="C4493D"/>
+                </a:solidFill>
+                <a:latin typeface="Yu Gothic"/>
+                <a:ea typeface="Yu Gothic"/>
+                <a:cs typeface="Yu Gothic"/>
+              </a:defRPr>
+            </a:pPr>
+            <a:r>
+              <a:rPr sz="975" b="1" i="0">
+                <a:solidFill>
+                  <a:srgbClr val="C4493D"/>
+                </a:solidFill>
+                <a:latin typeface="Yu Gothic"/>
+                <a:ea typeface="Yu Gothic"/>
+                <a:cs typeface="Yu Gothic"/>
+              </a:rPr>
+              <a:t>同じ冷却方向　大きさの再現率 0.3%</a:t>
+            </a:r>
+          </a:p>
+        </p:txBody>
+      </p:sp>
+      <p:sp>
+        <p:nvSpPr>
+          <p:cNvPr id="18" name="直線コネクタ 17">
+            <a:extLst>
+              <a:ext uri="{FF2B5EF4-FFF2-40B4-BE49-F238E27FC236}">
+                <a16:creationId xmlns:a16="http://schemas.microsoft.com/office/drawing/2014/main" id="{0225CDE8-29CC-4DD1-91A0-C2778821D933}"/>
+              </a:ext>
+            </a:extLst>
+          </p:cNvPr>
+          <p:cNvSpPr>
+            <a:spLocks noGrp="1"/>
+          </p:cNvSpPr>
+          <p:nvPr/>
+        </p:nvSpPr>
+        <p:spPr>
+          <a:xfrm>
+            <a:off x="552450" y="5314950"/>
+            <a:ext cx="3143250" cy="0"/>
           </a:xfrm>
           <a:prstGeom prst="line">
             <a:avLst/>
@@ -20879,7 +20527,7 @@
           <a:noFill/>
           <a:ln w="38100">
             <a:solidFill>
-              <a:srgbClr val="00A5D8"/>
+              <a:srgbClr val="4D8710"/>
             </a:solidFill>
             <a:prstDash val="solid"/>
           </a:ln>
@@ -20887,22 +20535,22 @@
       </p:sp>
       <p:sp>
         <p:nvSpPr>
-          <p:cNvPr id="16" name="正方形/長方形 15">
-            <a:extLst>
-              <a:ext uri="{FF2B5EF4-FFF2-40B4-BE49-F238E27FC236}">
-                <a16:creationId xmlns:a16="http://schemas.microsoft.com/office/drawing/2014/main" id="{E5A76B3A-9BAF-4386-899E-A5B334EBFF1B}"/>
-              </a:ext>
-            </a:extLst>
-          </p:cNvPr>
-          <p:cNvSpPr>
-            <a:spLocks noGrp="1"/>
-          </p:cNvSpPr>
-          <p:nvPr/>
-        </p:nvSpPr>
-        <p:spPr>
-          <a:xfrm>
-            <a:off x="552450" y="5295900"/>
-            <a:ext cx="2457450" cy="333375"/>
+          <p:cNvPr id="19" name="正方形/長方形 18">
+            <a:extLst>
+              <a:ext uri="{FF2B5EF4-FFF2-40B4-BE49-F238E27FC236}">
+                <a16:creationId xmlns:a16="http://schemas.microsoft.com/office/drawing/2014/main" id="{460C5CC0-CDF2-468E-8794-7909949284F6}"/>
+              </a:ext>
+            </a:extLst>
+          </p:cNvPr>
+          <p:cNvSpPr>
+            <a:spLocks noGrp="1"/>
+          </p:cNvSpPr>
+          <p:nvPr/>
+        </p:nvSpPr>
+        <p:spPr>
+          <a:xfrm>
+            <a:off x="552450" y="5391150"/>
+            <a:ext cx="3143250" cy="333375"/>
           </a:xfrm>
           <a:prstGeom prst="rect">
             <a:avLst/>
@@ -20942,29 +20590,29 @@
                 <a:ea typeface="Yu Gothic"/>
                 <a:cs typeface="Yu Gothic"/>
               </a:rPr>
-              <a:t>0.048 K</a:t>
-            </a:r>
-          </a:p>
-        </p:txBody>
-      </p:sp>
-      <p:sp>
-        <p:nvSpPr>
-          <p:cNvPr id="17" name="正方形/長方形 16">
-            <a:extLst>
-              <a:ext uri="{FF2B5EF4-FFF2-40B4-BE49-F238E27FC236}">
-                <a16:creationId xmlns:a16="http://schemas.microsoft.com/office/drawing/2014/main" id="{9898E294-47D3-4D53-80EC-53A02342DB2E}"/>
-              </a:ext>
-            </a:extLst>
-          </p:cNvPr>
-          <p:cNvSpPr>
-            <a:spLocks noGrp="1"/>
-          </p:cNvSpPr>
-          <p:nvPr/>
-        </p:nvSpPr>
-        <p:spPr>
-          <a:xfrm>
-            <a:off x="552450" y="5619750"/>
-            <a:ext cx="2457450" cy="238125"/>
+              <a:t>PASS</a:t>
+            </a:r>
+          </a:p>
+        </p:txBody>
+      </p:sp>
+      <p:sp>
+        <p:nvSpPr>
+          <p:cNvPr id="20" name="正方形/長方形 19">
+            <a:extLst>
+              <a:ext uri="{FF2B5EF4-FFF2-40B4-BE49-F238E27FC236}">
+                <a16:creationId xmlns:a16="http://schemas.microsoft.com/office/drawing/2014/main" id="{A86937B4-A967-41A2-821F-6FABB458745E}"/>
+              </a:ext>
+            </a:extLst>
+          </p:cNvPr>
+          <p:cNvSpPr>
+            <a:spLocks noGrp="1"/>
+          </p:cNvSpPr>
+          <p:nvPr/>
+        </p:nvSpPr>
+        <p:spPr>
+          <a:xfrm>
+            <a:off x="552450" y="5715000"/>
+            <a:ext cx="3143250" cy="238125"/>
           </a:xfrm>
           <a:prstGeom prst="rect">
             <a:avLst/>
@@ -21004,29 +20652,29 @@
                 <a:ea typeface="Yu Gothic"/>
                 <a:cs typeface="Yu Gothic"/>
               </a:rPr>
-              <a:t>HV01 external RMSE</a:t>
-            </a:r>
-          </a:p>
-        </p:txBody>
-      </p:sp>
-      <p:sp>
-        <p:nvSpPr>
-          <p:cNvPr id="18" name="直線コネクタ 17">
-            <a:extLst>
-              <a:ext uri="{FF2B5EF4-FFF2-40B4-BE49-F238E27FC236}">
-                <a16:creationId xmlns:a16="http://schemas.microsoft.com/office/drawing/2014/main" id="{78CA3A2C-AD5F-40D4-A5A9-D94B5BF1EF4C}"/>
-              </a:ext>
-            </a:extLst>
-          </p:cNvPr>
-          <p:cNvSpPr>
-            <a:spLocks noGrp="1"/>
-          </p:cNvSpPr>
-          <p:nvPr/>
-        </p:nvSpPr>
-        <p:spPr>
-          <a:xfrm>
-            <a:off x="3352800" y="5219700"/>
-            <a:ext cx="2457450" cy="0"/>
+              <a:t>平均RMSE 0.096 K　worst 0.144 K</a:t>
+            </a:r>
+          </a:p>
+        </p:txBody>
+      </p:sp>
+      <p:sp>
+        <p:nvSpPr>
+          <p:cNvPr id="21" name="直線コネクタ 20">
+            <a:extLst>
+              <a:ext uri="{FF2B5EF4-FFF2-40B4-BE49-F238E27FC236}">
+                <a16:creationId xmlns:a16="http://schemas.microsoft.com/office/drawing/2014/main" id="{48B15A3E-074B-4CAE-8E2E-43D62B5B6DD1}"/>
+              </a:ext>
+            </a:extLst>
+          </p:cNvPr>
+          <p:cNvSpPr>
+            <a:spLocks noGrp="1"/>
+          </p:cNvSpPr>
+          <p:nvPr/>
+        </p:nvSpPr>
+        <p:spPr>
+          <a:xfrm>
+            <a:off x="4076700" y="5314950"/>
+            <a:ext cx="3143250" cy="0"/>
           </a:xfrm>
           <a:prstGeom prst="line">
             <a:avLst/>
@@ -21034,7 +20682,7 @@
           <a:noFill/>
           <a:ln w="38100">
             <a:solidFill>
-              <a:srgbClr val="00A5D8"/>
+              <a:srgbClr val="8A6500"/>
             </a:solidFill>
             <a:prstDash val="solid"/>
           </a:ln>
@@ -21042,22 +20690,22 @@
       </p:sp>
       <p:sp>
         <p:nvSpPr>
-          <p:cNvPr id="19" name="正方形/長方形 18">
-            <a:extLst>
-              <a:ext uri="{FF2B5EF4-FFF2-40B4-BE49-F238E27FC236}">
-                <a16:creationId xmlns:a16="http://schemas.microsoft.com/office/drawing/2014/main" id="{C41CA615-2CC0-415A-959E-F293A983A7F4}"/>
-              </a:ext>
-            </a:extLst>
-          </p:cNvPr>
-          <p:cNvSpPr>
-            <a:spLocks noGrp="1"/>
-          </p:cNvSpPr>
-          <p:nvPr/>
-        </p:nvSpPr>
-        <p:spPr>
-          <a:xfrm>
-            <a:off x="3352800" y="5295900"/>
-            <a:ext cx="2457450" cy="333375"/>
+          <p:cNvPr id="22" name="正方形/長方形 21">
+            <a:extLst>
+              <a:ext uri="{FF2B5EF4-FFF2-40B4-BE49-F238E27FC236}">
+                <a16:creationId xmlns:a16="http://schemas.microsoft.com/office/drawing/2014/main" id="{2213045F-4479-465F-91CC-D9C0689EE9F5}"/>
+              </a:ext>
+            </a:extLst>
+          </p:cNvPr>
+          <p:cNvSpPr>
+            <a:spLocks noGrp="1"/>
+          </p:cNvSpPr>
+          <p:nvPr/>
+        </p:nvSpPr>
+        <p:spPr>
+          <a:xfrm>
+            <a:off x="4076700" y="5391150"/>
+            <a:ext cx="3143250" cy="333375"/>
           </a:xfrm>
           <a:prstGeom prst="rect">
             <a:avLst/>
@@ -21097,29 +20745,29 @@
                 <a:ea typeface="Yu Gothic"/>
                 <a:cs typeface="Yu Gothic"/>
               </a:rPr>
-              <a:t>0.144 K</a:t>
-            </a:r>
-          </a:p>
-        </p:txBody>
-      </p:sp>
-      <p:sp>
-        <p:nvSpPr>
-          <p:cNvPr id="20" name="正方形/長方形 19">
-            <a:extLst>
-              <a:ext uri="{FF2B5EF4-FFF2-40B4-BE49-F238E27FC236}">
-                <a16:creationId xmlns:a16="http://schemas.microsoft.com/office/drawing/2014/main" id="{4888D7AC-1B5D-4F60-A07F-69424D86C909}"/>
-              </a:ext>
-            </a:extLst>
-          </p:cNvPr>
-          <p:cNvSpPr>
-            <a:spLocks noGrp="1"/>
-          </p:cNvSpPr>
-          <p:nvPr/>
-        </p:nvSpPr>
-        <p:spPr>
-          <a:xfrm>
-            <a:off x="3352800" y="5619750"/>
-            <a:ext cx="2457450" cy="238125"/>
+              <a:t>CONDITIONAL</a:t>
+            </a:r>
+          </a:p>
+        </p:txBody>
+      </p:sp>
+      <p:sp>
+        <p:nvSpPr>
+          <p:cNvPr id="23" name="正方形/長方形 22">
+            <a:extLst>
+              <a:ext uri="{FF2B5EF4-FFF2-40B4-BE49-F238E27FC236}">
+                <a16:creationId xmlns:a16="http://schemas.microsoft.com/office/drawing/2014/main" id="{8719AEEF-5AC9-42C6-8EF4-BC59AC05E29F}"/>
+              </a:ext>
+            </a:extLst>
+          </p:cNvPr>
+          <p:cNvSpPr>
+            <a:spLocks noGrp="1"/>
+          </p:cNvSpPr>
+          <p:nvPr/>
+        </p:nvSpPr>
+        <p:spPr>
+          <a:xfrm>
+            <a:off x="4076700" y="5715000"/>
+            <a:ext cx="3143250" cy="238125"/>
           </a:xfrm>
           <a:prstGeom prst="rect">
             <a:avLst/>
@@ -21159,29 +20807,29 @@
                 <a:ea typeface="Yu Gothic"/>
                 <a:cs typeface="Yu Gothic"/>
               </a:rPr>
-              <a:t>HV02 external RMSE</a:t>
-            </a:r>
-          </a:p>
-        </p:txBody>
-      </p:sp>
-      <p:sp>
-        <p:nvSpPr>
-          <p:cNvPr id="21" name="直線コネクタ 20">
-            <a:extLst>
-              <a:ext uri="{FF2B5EF4-FFF2-40B4-BE49-F238E27FC236}">
-                <a16:creationId xmlns:a16="http://schemas.microsoft.com/office/drawing/2014/main" id="{00CCD4CC-E9AC-4354-A2E2-B5F4F2C367D6}"/>
-              </a:ext>
-            </a:extLst>
-          </p:cNvPr>
-          <p:cNvSpPr>
-            <a:spLocks noGrp="1"/>
-          </p:cNvSpPr>
-          <p:nvPr/>
-        </p:nvSpPr>
-        <p:spPr>
-          <a:xfrm>
-            <a:off x="6153150" y="5219700"/>
-            <a:ext cx="2457450" cy="0"/>
+              <a:t>mesh strict 1/2　benchmark 2/2</a:t>
+            </a:r>
+          </a:p>
+        </p:txBody>
+      </p:sp>
+      <p:sp>
+        <p:nvSpPr>
+          <p:cNvPr id="24" name="直線コネクタ 23">
+            <a:extLst>
+              <a:ext uri="{FF2B5EF4-FFF2-40B4-BE49-F238E27FC236}">
+                <a16:creationId xmlns:a16="http://schemas.microsoft.com/office/drawing/2014/main" id="{061C3B0F-DE61-44C3-AC0A-9D32CF03EC39}"/>
+              </a:ext>
+            </a:extLst>
+          </p:cNvPr>
+          <p:cNvSpPr>
+            <a:spLocks noGrp="1"/>
+          </p:cNvSpPr>
+          <p:nvPr/>
+        </p:nvSpPr>
+        <p:spPr>
+          <a:xfrm>
+            <a:off x="7600950" y="5314950"/>
+            <a:ext cx="4038600" cy="0"/>
           </a:xfrm>
           <a:prstGeom prst="line">
             <a:avLst/>
@@ -21189,7 +20837,7 @@
           <a:noFill/>
           <a:ln w="38100">
             <a:solidFill>
-              <a:srgbClr val="7B2DAF"/>
+              <a:srgbClr val="C4493D"/>
             </a:solidFill>
             <a:prstDash val="solid"/>
           </a:ln>
@@ -21197,22 +20845,22 @@
       </p:sp>
       <p:sp>
         <p:nvSpPr>
-          <p:cNvPr id="22" name="正方形/長方形 21">
-            <a:extLst>
-              <a:ext uri="{FF2B5EF4-FFF2-40B4-BE49-F238E27FC236}">
-                <a16:creationId xmlns:a16="http://schemas.microsoft.com/office/drawing/2014/main" id="{390BE370-02D0-4023-BED7-8161FEDE98DA}"/>
-              </a:ext>
-            </a:extLst>
-          </p:cNvPr>
-          <p:cNvSpPr>
-            <a:spLocks noGrp="1"/>
-          </p:cNvSpPr>
-          <p:nvPr/>
-        </p:nvSpPr>
-        <p:spPr>
-          <a:xfrm>
-            <a:off x="6153150" y="5295900"/>
-            <a:ext cx="2457450" cy="333375"/>
+          <p:cNvPr id="25" name="正方形/長方形 24">
+            <a:extLst>
+              <a:ext uri="{FF2B5EF4-FFF2-40B4-BE49-F238E27FC236}">
+                <a16:creationId xmlns:a16="http://schemas.microsoft.com/office/drawing/2014/main" id="{B083B6EF-7FBD-48F7-8441-6989BE3A0BA2}"/>
+              </a:ext>
+            </a:extLst>
+          </p:cNvPr>
+          <p:cNvSpPr>
+            <a:spLocks noGrp="1"/>
+          </p:cNvSpPr>
+          <p:nvPr/>
+        </p:nvSpPr>
+        <p:spPr>
+          <a:xfrm>
+            <a:off x="7600950" y="5391150"/>
+            <a:ext cx="4038600" cy="333375"/>
           </a:xfrm>
           <a:prstGeom prst="rect">
             <a:avLst/>
@@ -21252,29 +20900,29 @@
                 <a:ea typeface="Yu Gothic"/>
                 <a:cs typeface="Yu Gothic"/>
               </a:rPr>
-              <a:t>−0.381 K</a:t>
-            </a:r>
-          </a:p>
-        </p:txBody>
-      </p:sp>
-      <p:sp>
-        <p:nvSpPr>
-          <p:cNvPr id="23" name="正方形/長方形 22">
-            <a:extLst>
-              <a:ext uri="{FF2B5EF4-FFF2-40B4-BE49-F238E27FC236}">
-                <a16:creationId xmlns:a16="http://schemas.microsoft.com/office/drawing/2014/main" id="{4DB1DFB6-CE68-4A58-858E-F4A454F06BEB}"/>
-              </a:ext>
-            </a:extLst>
-          </p:cNvPr>
-          <p:cNvSpPr>
-            <a:spLocks noGrp="1"/>
-          </p:cNvSpPr>
-          <p:nvPr/>
-        </p:nvSpPr>
-        <p:spPr>
-          <a:xfrm>
-            <a:off x="6153150" y="5619750"/>
-            <a:ext cx="2457450" cy="238125"/>
+              <a:t>FAIL</a:t>
+            </a:r>
+          </a:p>
+        </p:txBody>
+      </p:sp>
+      <p:sp>
+        <p:nvSpPr>
+          <p:cNvPr id="26" name="正方形/長方形 25">
+            <a:extLst>
+              <a:ext uri="{FF2B5EF4-FFF2-40B4-BE49-F238E27FC236}">
+                <a16:creationId xmlns:a16="http://schemas.microsoft.com/office/drawing/2014/main" id="{4422E491-037A-4AD6-9597-4D997BEB3899}"/>
+              </a:ext>
+            </a:extLst>
+          </p:cNvPr>
+          <p:cNvSpPr>
+            <a:spLocks noGrp="1"/>
+          </p:cNvSpPr>
+          <p:nvPr/>
+        </p:nvSpPr>
+        <p:spPr>
+          <a:xfrm>
+            <a:off x="7600950" y="5715000"/>
+            <a:ext cx="4038600" cy="238125"/>
           </a:xfrm>
           <a:prstGeom prst="rect">
             <a:avLst/>
@@ -21314,162 +20962,7 @@
                 <a:ea typeface="Yu Gothic"/>
                 <a:cs typeface="Yu Gothic"/>
               </a:rPr>
-              <a:t>CAE radiation effect at 220 s</a:t>
-            </a:r>
-          </a:p>
-        </p:txBody>
-      </p:sp>
-      <p:sp>
-        <p:nvSpPr>
-          <p:cNvPr id="24" name="直線コネクタ 23">
-            <a:extLst>
-              <a:ext uri="{FF2B5EF4-FFF2-40B4-BE49-F238E27FC236}">
-                <a16:creationId xmlns:a16="http://schemas.microsoft.com/office/drawing/2014/main" id="{7CF8254A-6078-4925-BCBF-90B026B9A46F}"/>
-              </a:ext>
-            </a:extLst>
-          </p:cNvPr>
-          <p:cNvSpPr>
-            <a:spLocks noGrp="1"/>
-          </p:cNvSpPr>
-          <p:nvPr/>
-        </p:nvSpPr>
-        <p:spPr>
-          <a:xfrm>
-            <a:off x="8953500" y="5219700"/>
-            <a:ext cx="2686050" cy="0"/>
-          </a:xfrm>
-          <a:prstGeom prst="line">
-            <a:avLst/>
-          </a:prstGeom>
-          <a:noFill/>
-          <a:ln w="38100">
-            <a:solidFill>
-              <a:srgbClr val="C4493D"/>
-            </a:solidFill>
-            <a:prstDash val="solid"/>
-          </a:ln>
-        </p:spPr>
-      </p:sp>
-      <p:sp>
-        <p:nvSpPr>
-          <p:cNvPr id="25" name="正方形/長方形 24">
-            <a:extLst>
-              <a:ext uri="{FF2B5EF4-FFF2-40B4-BE49-F238E27FC236}">
-                <a16:creationId xmlns:a16="http://schemas.microsoft.com/office/drawing/2014/main" id="{ED5F0D82-2520-4A02-9DB2-9043CCA3A113}"/>
-              </a:ext>
-            </a:extLst>
-          </p:cNvPr>
-          <p:cNvSpPr>
-            <a:spLocks noGrp="1"/>
-          </p:cNvSpPr>
-          <p:nvPr/>
-        </p:nvSpPr>
-        <p:spPr>
-          <a:xfrm>
-            <a:off x="8953500" y="5295900"/>
-            <a:ext cx="2686050" cy="333375"/>
-          </a:xfrm>
-          <a:prstGeom prst="rect">
-            <a:avLst/>
-          </a:prstGeom>
-          <a:noFill/>
-          <a:ln w="0">
-            <a:noFill/>
-            <a:prstDash val="solid"/>
-          </a:ln>
-        </p:spPr>
-        <p:txBody>
-          <a:bodyPr wrap="square" lIns="28575" tIns="19050" rIns="28575" bIns="19050" anchor="ctr">
-            <a:normAutofit/>
-          </a:bodyPr>
-          <a:lstStyle/>
-          <a:p>
-            <a:pPr algn="l">
-              <a:lnSpc>
-                <a:spcPct val="100000"/>
-              </a:lnSpc>
-              <a:buNone/>
-              <a:defRPr sz="1875" b="1" i="0">
-                <a:solidFill>
-                  <a:srgbClr val="333333"/>
-                </a:solidFill>
-                <a:latin typeface="Yu Gothic"/>
-                <a:ea typeface="Yu Gothic"/>
-                <a:cs typeface="Yu Gothic"/>
-              </a:defRPr>
-            </a:pPr>
-            <a:r>
-              <a:rPr sz="1875" b="1" i="0">
-                <a:solidFill>
-                  <a:srgbClr val="333333"/>
-                </a:solidFill>
-                <a:latin typeface="Yu Gothic"/>
-                <a:ea typeface="Yu Gothic"/>
-                <a:cs typeface="Yu Gothic"/>
-              </a:rPr>
-              <a:t>−0.001 K</a:t>
-            </a:r>
-          </a:p>
-        </p:txBody>
-      </p:sp>
-      <p:sp>
-        <p:nvSpPr>
-          <p:cNvPr id="26" name="正方形/長方形 25">
-            <a:extLst>
-              <a:ext uri="{FF2B5EF4-FFF2-40B4-BE49-F238E27FC236}">
-                <a16:creationId xmlns:a16="http://schemas.microsoft.com/office/drawing/2014/main" id="{9C8E3B92-E19F-4BB9-9F6F-289CBF2A2B38}"/>
-              </a:ext>
-            </a:extLst>
-          </p:cNvPr>
-          <p:cNvSpPr>
-            <a:spLocks noGrp="1"/>
-          </p:cNvSpPr>
-          <p:nvPr/>
-        </p:nvSpPr>
-        <p:spPr>
-          <a:xfrm>
-            <a:off x="8953500" y="5619750"/>
-            <a:ext cx="2686050" cy="238125"/>
-          </a:xfrm>
-          <a:prstGeom prst="rect">
-            <a:avLst/>
-          </a:prstGeom>
-          <a:noFill/>
-          <a:ln w="0">
-            <a:noFill/>
-            <a:prstDash val="solid"/>
-          </a:ln>
-        </p:spPr>
-        <p:txBody>
-          <a:bodyPr wrap="square" lIns="28575" tIns="19050" rIns="28575" bIns="19050" anchor="ctr">
-            <a:normAutofit/>
-          </a:bodyPr>
-          <a:lstStyle/>
-          <a:p>
-            <a:pPr algn="l">
-              <a:lnSpc>
-                <a:spcPct val="100000"/>
-              </a:lnSpc>
-              <a:buNone/>
-              <a:defRPr sz="863" b="0" i="0">
-                <a:solidFill>
-                  <a:srgbClr val="555555"/>
-                </a:solidFill>
-                <a:latin typeface="Yu Gothic"/>
-                <a:ea typeface="Yu Gothic"/>
-                <a:cs typeface="Yu Gothic"/>
-              </a:defRPr>
-            </a:pPr>
-            <a:r>
-              <a:rPr sz="863" b="0" i="0">
-                <a:solidFill>
-                  <a:srgbClr val="555555"/>
-                </a:solidFill>
-                <a:latin typeface="Yu Gothic"/>
-                <a:ea typeface="Yu Gothic"/>
-                <a:cs typeface="Yu Gothic"/>
-              </a:rPr>
-              <a:t>RC predicted effect at 220 s</a:t>
+              <a:t>放射効果 0.001 / 0.381 K</a:t>
             </a:r>
           </a:p>
         </p:txBody>
@@ -21479,7 +20972,7 @@
           <p:cNvPr id="27" name="正方形/長方形 26">
             <a:extLst>
               <a:ext uri="{FF2B5EF4-FFF2-40B4-BE49-F238E27FC236}">
-                <a16:creationId xmlns:a16="http://schemas.microsoft.com/office/drawing/2014/main" id="{1C0F096E-B6A8-4F8F-B0D8-5C7D59B30A5A}"/>
+                <a16:creationId xmlns:a16="http://schemas.microsoft.com/office/drawing/2014/main" id="{3ADB3D88-A622-49AE-A9DD-D4ABF7E94C49}"/>
               </a:ext>
             </a:extLst>
           </p:cNvPr>
@@ -21531,7 +21024,7 @@
                 <a:ea typeface="Yu Gothic"/>
                 <a:cs typeface="Yu Gothic"/>
               </a:rPr>
-              <a:t>判定境界：benchmark meshは用途限定でqualified。strict mesh、時間刻み収束、実験妥当化は未完了。</a:t>
+              <a:t>判定境界：66点の平均温度screeningに使用可。hotspot、放射設計、interlockには使用不可。</a:t>
             </a:r>
           </a:p>
         </p:txBody>
@@ -21539,7 +21032,7 @@
     </p:spTree>
     <p:extLst>
       <p:ext uri="{BB962C8B-B14F-4D97-AF65-F5344CB8AC3E}">
-        <p14:creationId xmlns:p14="http://schemas.microsoft.com/office/powerpoint/2010/main" val="261889251"/>
+        <p14:creationId xmlns:p14="http://schemas.microsoft.com/office/powerpoint/2010/main" val="2096571105"/>
       </p:ext>
     </p:extLst>
   </p:cSld>
@@ -21579,7 +21072,7 @@
           <p:cNvPr id="43" name="正方形/長方形 42">
             <a:extLst>
               <a:ext uri="{FF2B5EF4-FFF2-40B4-BE49-F238E27FC236}">
-                <a16:creationId xmlns:a16="http://schemas.microsoft.com/office/drawing/2014/main" id="{381B2BF5-06DE-4D4E-9755-89E4665387A8}"/>
+                <a16:creationId xmlns:a16="http://schemas.microsoft.com/office/drawing/2014/main" id="{594520C3-E1F0-49E7-AD15-28E3F93363B1}"/>
               </a:ext>
             </a:extLst>
           </p:cNvPr>
@@ -21610,7 +21103,7 @@
           <p:cNvPr id="2" name="正方形/長方形 1">
             <a:extLst>
               <a:ext uri="{FF2B5EF4-FFF2-40B4-BE49-F238E27FC236}">
-                <a16:creationId xmlns:a16="http://schemas.microsoft.com/office/drawing/2014/main" id="{16874452-4D7F-4A09-8BC2-A10BD3672304}"/>
+                <a16:creationId xmlns:a16="http://schemas.microsoft.com/office/drawing/2014/main" id="{283BFF73-E81B-47C2-86BB-48186341096E}"/>
               </a:ext>
             </a:extLst>
           </p:cNvPr>
@@ -21672,7 +21165,7 @@
           <p:cNvPr id="3" name="正方形/長方形 2">
             <a:extLst>
               <a:ext uri="{FF2B5EF4-FFF2-40B4-BE49-F238E27FC236}">
-                <a16:creationId xmlns:a16="http://schemas.microsoft.com/office/drawing/2014/main" id="{44DBE9BC-8D0B-44D0-AA42-961C3CD0D1B6}"/>
+                <a16:creationId xmlns:a16="http://schemas.microsoft.com/office/drawing/2014/main" id="{A35A7F1B-D428-46FB-AA80-C008D145A09F}"/>
               </a:ext>
             </a:extLst>
           </p:cNvPr>
@@ -21734,7 +21227,7 @@
           <p:cNvPr id="4" name="正方形/長方形 3">
             <a:extLst>
               <a:ext uri="{FF2B5EF4-FFF2-40B4-BE49-F238E27FC236}">
-                <a16:creationId xmlns:a16="http://schemas.microsoft.com/office/drawing/2014/main" id="{5B167E2D-C870-47DD-B36B-E8F22079D413}"/>
+                <a16:creationId xmlns:a16="http://schemas.microsoft.com/office/drawing/2014/main" id="{537D8018-C6FD-4D14-B4E1-BB910E01291B}"/>
               </a:ext>
             </a:extLst>
           </p:cNvPr>
@@ -21796,7 +21289,7 @@
           <p:cNvPr id="5" name="直線コネクタ 4">
             <a:extLst>
               <a:ext uri="{FF2B5EF4-FFF2-40B4-BE49-F238E27FC236}">
-                <a16:creationId xmlns:a16="http://schemas.microsoft.com/office/drawing/2014/main" id="{7A20467A-97C4-4D0F-B162-4AE513CC8053}"/>
+                <a16:creationId xmlns:a16="http://schemas.microsoft.com/office/drawing/2014/main" id="{DD2E3333-DDAD-4598-A951-063B142BF182}"/>
               </a:ext>
             </a:extLst>
           </p:cNvPr>
@@ -21827,7 +21320,7 @@
           <p:cNvPr id="6" name="直線コネクタ 5">
             <a:extLst>
               <a:ext uri="{FF2B5EF4-FFF2-40B4-BE49-F238E27FC236}">
-                <a16:creationId xmlns:a16="http://schemas.microsoft.com/office/drawing/2014/main" id="{998319AA-C1C6-4FF1-8AC2-34B2E40C2714}"/>
+                <a16:creationId xmlns:a16="http://schemas.microsoft.com/office/drawing/2014/main" id="{46167994-341F-4243-9E05-986AACDA4B47}"/>
               </a:ext>
             </a:extLst>
           </p:cNvPr>
@@ -21858,7 +21351,7 @@
           <p:cNvPr id="7" name="正方形/長方形 6">
             <a:extLst>
               <a:ext uri="{FF2B5EF4-FFF2-40B4-BE49-F238E27FC236}">
-                <a16:creationId xmlns:a16="http://schemas.microsoft.com/office/drawing/2014/main" id="{9645C8CC-07E5-4B0E-A209-DB9F6AE8D44A}"/>
+                <a16:creationId xmlns:a16="http://schemas.microsoft.com/office/drawing/2014/main" id="{D7481A00-2002-4ED0-824C-0F1812EDA8FD}"/>
               </a:ext>
             </a:extLst>
           </p:cNvPr>
@@ -21920,7 +21413,7 @@
           <p:cNvPr id="8" name="正方形/長方形 7">
             <a:extLst>
               <a:ext uri="{FF2B5EF4-FFF2-40B4-BE49-F238E27FC236}">
-                <a16:creationId xmlns:a16="http://schemas.microsoft.com/office/drawing/2014/main" id="{0326A547-64E9-420B-AE1E-122D17FC93C3}"/>
+                <a16:creationId xmlns:a16="http://schemas.microsoft.com/office/drawing/2014/main" id="{52BD76A6-276C-467D-BE2D-C4C06B9FFB09}"/>
               </a:ext>
             </a:extLst>
           </p:cNvPr>
@@ -21982,7 +21475,7 @@
           <p:cNvPr id="9" name="正方形/長方形 8">
             <a:extLst>
               <a:ext uri="{FF2B5EF4-FFF2-40B4-BE49-F238E27FC236}">
-                <a16:creationId xmlns:a16="http://schemas.microsoft.com/office/drawing/2014/main" id="{51572AAB-81C8-436D-9C39-8A2C431C42AB}"/>
+                <a16:creationId xmlns:a16="http://schemas.microsoft.com/office/drawing/2014/main" id="{ECF12A00-1254-4A36-9E1E-5BB93A6567E9}"/>
               </a:ext>
             </a:extLst>
           </p:cNvPr>
@@ -22044,7 +21537,7 @@
           <p:cNvPr id="10" name="正方形/長方形 9">
             <a:extLst>
               <a:ext uri="{FF2B5EF4-FFF2-40B4-BE49-F238E27FC236}">
-                <a16:creationId xmlns:a16="http://schemas.microsoft.com/office/drawing/2014/main" id="{5A5FCBE6-685D-49E5-9E1F-7A7DA7B574C6}"/>
+                <a16:creationId xmlns:a16="http://schemas.microsoft.com/office/drawing/2014/main" id="{79D0500F-6931-4670-93F0-E724AFC1AC2E}"/>
               </a:ext>
             </a:extLst>
           </p:cNvPr>
@@ -22077,7 +21570,7 @@
           <p:cNvPr id="11" name="正方形/長方形 10">
             <a:extLst>
               <a:ext uri="{FF2B5EF4-FFF2-40B4-BE49-F238E27FC236}">
-                <a16:creationId xmlns:a16="http://schemas.microsoft.com/office/drawing/2014/main" id="{C32A8E5E-B3C5-49C5-BEB8-EE623F95612A}"/>
+                <a16:creationId xmlns:a16="http://schemas.microsoft.com/office/drawing/2014/main" id="{FFE645DE-B2D2-493F-B080-3A2DB876F410}"/>
               </a:ext>
             </a:extLst>
           </p:cNvPr>
@@ -22108,7 +21601,7 @@
           <p:cNvPr id="12" name="正方形/長方形 11">
             <a:extLst>
               <a:ext uri="{FF2B5EF4-FFF2-40B4-BE49-F238E27FC236}">
-                <a16:creationId xmlns:a16="http://schemas.microsoft.com/office/drawing/2014/main" id="{800EB831-E727-4C53-95AA-FE29C77450A6}"/>
+                <a16:creationId xmlns:a16="http://schemas.microsoft.com/office/drawing/2014/main" id="{FA2E9744-68D4-4784-BFD6-234754C2AD06}"/>
               </a:ext>
             </a:extLst>
           </p:cNvPr>
@@ -22160,7 +21653,7 @@
                 <a:ea typeface="Yu Gothic"/>
                 <a:cs typeface="Yu Gothic"/>
               </a:rPr>
-              <a:t>現時点で使用可能</a:t>
+              <a:t>使用可能</a:t>
             </a:r>
           </a:p>
         </p:txBody>
@@ -22170,7 +21663,7 @@
           <p:cNvPr id="13" name="正方形/長方形 12">
             <a:extLst>
               <a:ext uri="{FF2B5EF4-FFF2-40B4-BE49-F238E27FC236}">
-                <a16:creationId xmlns:a16="http://schemas.microsoft.com/office/drawing/2014/main" id="{E4C954EE-FA6B-4F45-90A7-FEA79EC741DA}"/>
+                <a16:creationId xmlns:a16="http://schemas.microsoft.com/office/drawing/2014/main" id="{69273BCC-C772-41B6-BC56-EE65DDDEBEAD}"/>
               </a:ext>
             </a:extLst>
           </p:cNvPr>
@@ -22222,7 +21715,7 @@
                 <a:ea typeface="Yu Gothic"/>
                 <a:cs typeface="Yu Gothic"/>
               </a:rPr>
-              <a:t>volume-average温度のscreeningと異常帰属</a:t>
+              <a:t>TopCell予測・監視と線形CAE screening</a:t>
             </a:r>
           </a:p>
         </p:txBody>
@@ -22232,7 +21725,7 @@
           <p:cNvPr id="14" name="正方形/長方形 13">
             <a:extLst>
               <a:ext uri="{FF2B5EF4-FFF2-40B4-BE49-F238E27FC236}">
-                <a16:creationId xmlns:a16="http://schemas.microsoft.com/office/drawing/2014/main" id="{5AF87DF2-5016-4765-AB2D-7F28DD9DF238}"/>
+                <a16:creationId xmlns:a16="http://schemas.microsoft.com/office/drawing/2014/main" id="{ABDCB3E6-6946-4454-B641-B1F7BC6D125D}"/>
               </a:ext>
             </a:extLst>
           </p:cNvPr>
@@ -22284,7 +21777,7 @@
                 <a:ea typeface="Yu Gothic"/>
                 <a:cs typeface="Yu Gothic"/>
               </a:rPr>
-              <a:t>TopCell pass、線形COMSOL 10/10、外部forecast平均0.036 K</a:t>
+              <a:t>外部11ケース精度基準内、monitor 8/8、線形COMSOL 10/10</a:t>
             </a:r>
           </a:p>
         </p:txBody>
@@ -22294,7 +21787,7 @@
           <p:cNvPr id="15" name="正方形/長方形 14">
             <a:extLst>
               <a:ext uri="{FF2B5EF4-FFF2-40B4-BE49-F238E27FC236}">
-                <a16:creationId xmlns:a16="http://schemas.microsoft.com/office/drawing/2014/main" id="{AA92AC54-D65B-41FA-8B1A-6B20415D3711}"/>
+                <a16:creationId xmlns:a16="http://schemas.microsoft.com/office/drawing/2014/main" id="{47D41049-97DE-486D-AE46-3B66D1E186CE}"/>
               </a:ext>
             </a:extLst>
           </p:cNvPr>
@@ -22327,7 +21820,7 @@
           <p:cNvPr id="16" name="正方形/長方形 15">
             <a:extLst>
               <a:ext uri="{FF2B5EF4-FFF2-40B4-BE49-F238E27FC236}">
-                <a16:creationId xmlns:a16="http://schemas.microsoft.com/office/drawing/2014/main" id="{19A12A4D-0F3E-4167-A15A-3E5CB7671D9D}"/>
+                <a16:creationId xmlns:a16="http://schemas.microsoft.com/office/drawing/2014/main" id="{7D6AFFF4-2233-4A8F-BC5C-CE4361DA871C}"/>
               </a:ext>
             </a:extLst>
           </p:cNvPr>
@@ -22358,7 +21851,7 @@
           <p:cNvPr id="17" name="正方形/長方形 16">
             <a:extLst>
               <a:ext uri="{FF2B5EF4-FFF2-40B4-BE49-F238E27FC236}">
-                <a16:creationId xmlns:a16="http://schemas.microsoft.com/office/drawing/2014/main" id="{30C5BCD5-C055-461E-991E-CC6AABD7875E}"/>
+                <a16:creationId xmlns:a16="http://schemas.microsoft.com/office/drawing/2014/main" id="{0CADAE50-6EF0-4AE4-A800-58A1A83135F7}"/>
               </a:ext>
             </a:extLst>
           </p:cNvPr>
@@ -22420,7 +21913,7 @@
           <p:cNvPr id="18" name="正方形/長方形 17">
             <a:extLst>
               <a:ext uri="{FF2B5EF4-FFF2-40B4-BE49-F238E27FC236}">
-                <a16:creationId xmlns:a16="http://schemas.microsoft.com/office/drawing/2014/main" id="{0BB5D1B0-E210-4D29-96EC-68FDFB2BBCFF}"/>
+                <a16:creationId xmlns:a16="http://schemas.microsoft.com/office/drawing/2014/main" id="{389D4606-0324-4A41-BC10-F09ACC5F20A1}"/>
               </a:ext>
             </a:extLst>
           </p:cNvPr>
@@ -22472,7 +21965,7 @@
                 <a:ea typeface="Yu Gothic"/>
                 <a:cs typeface="Yu Gothic"/>
               </a:rPr>
-              <a:t>shadow運用での予測・monitor</a:t>
+              <a:t>高忠実度のvolume-average screening</a:t>
             </a:r>
           </a:p>
         </p:txBody>
@@ -22482,7 +21975,7 @@
           <p:cNvPr id="19" name="正方形/長方形 18">
             <a:extLst>
               <a:ext uri="{FF2B5EF4-FFF2-40B4-BE49-F238E27FC236}">
-                <a16:creationId xmlns:a16="http://schemas.microsoft.com/office/drawing/2014/main" id="{786AF04E-2C30-4C35-AB48-FF7BC0511791}"/>
+                <a16:creationId xmlns:a16="http://schemas.microsoft.com/office/drawing/2014/main" id="{AE00AE6D-460C-4E83-BEF3-7E340E1D80E5}"/>
               </a:ext>
             </a:extLst>
           </p:cNvPr>
@@ -22534,7 +22027,7 @@
                 <a:ea typeface="Yu Gothic"/>
                 <a:cs typeface="Yu Gothic"/>
               </a:rPr>
-              <a:t>運転域照合、drift監視、装置別thresholdを併用</a:t>
+              <a:t>平均RMSE 0.096 K、benchmark mesh 2/2、strict mesh 1/2</a:t>
             </a:r>
           </a:p>
         </p:txBody>
@@ -22544,7 +22037,7 @@
           <p:cNvPr id="20" name="正方形/長方形 19">
             <a:extLst>
               <a:ext uri="{FF2B5EF4-FFF2-40B4-BE49-F238E27FC236}">
-                <a16:creationId xmlns:a16="http://schemas.microsoft.com/office/drawing/2014/main" id="{15211822-8C02-46B4-83EE-1DB84E608AF9}"/>
+                <a16:creationId xmlns:a16="http://schemas.microsoft.com/office/drawing/2014/main" id="{7F158D19-B14C-49F5-B14D-AACCDB44783E}"/>
               </a:ext>
             </a:extLst>
           </p:cNvPr>
@@ -22577,7 +22070,7 @@
           <p:cNvPr id="21" name="正方形/長方形 20">
             <a:extLst>
               <a:ext uri="{FF2B5EF4-FFF2-40B4-BE49-F238E27FC236}">
-                <a16:creationId xmlns:a16="http://schemas.microsoft.com/office/drawing/2014/main" id="{5802459A-80EB-46D5-8BA2-A4DDA3D84D91}"/>
+                <a16:creationId xmlns:a16="http://schemas.microsoft.com/office/drawing/2014/main" id="{B23AC175-B72D-424E-8A38-BEF40DDB95A7}"/>
               </a:ext>
             </a:extLst>
           </p:cNvPr>
@@ -22608,7 +22101,7 @@
           <p:cNvPr id="22" name="正方形/長方形 21">
             <a:extLst>
               <a:ext uri="{FF2B5EF4-FFF2-40B4-BE49-F238E27FC236}">
-                <a16:creationId xmlns:a16="http://schemas.microsoft.com/office/drawing/2014/main" id="{887CC893-92A5-4854-A5BF-E4449D3C7BA0}"/>
+                <a16:creationId xmlns:a16="http://schemas.microsoft.com/office/drawing/2014/main" id="{10A9987A-8BF3-439D-AB78-18288BE13F64}"/>
               </a:ext>
             </a:extLst>
           </p:cNvPr>
@@ -22670,7 +22163,7 @@
           <p:cNvPr id="23" name="正方形/長方形 22">
             <a:extLst>
               <a:ext uri="{FF2B5EF4-FFF2-40B4-BE49-F238E27FC236}">
-                <a16:creationId xmlns:a16="http://schemas.microsoft.com/office/drawing/2014/main" id="{8CB31C66-AA0D-4228-929E-6B0AA4D1D9C0}"/>
+                <a16:creationId xmlns:a16="http://schemas.microsoft.com/office/drawing/2014/main" id="{6D42329B-B51B-409C-ABAD-4EB3B031CF0F}"/>
               </a:ext>
             </a:extLst>
           </p:cNvPr>
@@ -22722,7 +22215,7 @@
                 <a:ea typeface="Yu Gothic"/>
                 <a:cs typeface="Yu Gothic"/>
               </a:rPr>
-              <a:t>hotspot安全、interlock、製品受入</a:t>
+              <a:t>放射感度、hotspot安全、interlock</a:t>
             </a:r>
           </a:p>
         </p:txBody>
@@ -22732,7 +22225,7 @@
           <p:cNvPr id="24" name="正方形/長方形 23">
             <a:extLst>
               <a:ext uri="{FF2B5EF4-FFF2-40B4-BE49-F238E27FC236}">
-                <a16:creationId xmlns:a16="http://schemas.microsoft.com/office/drawing/2014/main" id="{34B33835-095E-426B-98B4-9D345211ECB3}"/>
+                <a16:creationId xmlns:a16="http://schemas.microsoft.com/office/drawing/2014/main" id="{3F41793C-D129-4FC9-A771-8FD4958C972F}"/>
               </a:ext>
             </a:extLst>
           </p:cNvPr>
@@ -22784,7 +22277,7 @@
                 <a:ea typeface="Yu Gothic"/>
                 <a:cs typeface="Yu Gothic"/>
               </a:rPr>
-              <a:t>放射感度、strict mesh、時間刻み、実験比較が不足</a:t>
+              <a:t>放射効果の再現率 0.3%、時間刻み収束と実験比較は未実施</a:t>
             </a:r>
           </a:p>
         </p:txBody>
@@ -22794,7 +22287,7 @@
           <p:cNvPr id="25" name="正方形/長方形 24">
             <a:extLst>
               <a:ext uri="{FF2B5EF4-FFF2-40B4-BE49-F238E27FC236}">
-                <a16:creationId xmlns:a16="http://schemas.microsoft.com/office/drawing/2014/main" id="{C86FA28B-5309-41D2-8D46-A6C3D22091DB}"/>
+                <a16:creationId xmlns:a16="http://schemas.microsoft.com/office/drawing/2014/main" id="{70583A20-CC89-4720-85D5-89056BF7B11E}"/>
               </a:ext>
             </a:extLst>
           </p:cNvPr>
@@ -22856,7 +22349,7 @@
           <p:cNvPr id="26" name="楕円 25">
             <a:extLst>
               <a:ext uri="{FF2B5EF4-FFF2-40B4-BE49-F238E27FC236}">
-                <a16:creationId xmlns:a16="http://schemas.microsoft.com/office/drawing/2014/main" id="{E7C24C59-7339-4CB3-9EC7-D9286C7CBC2E}"/>
+                <a16:creationId xmlns:a16="http://schemas.microsoft.com/office/drawing/2014/main" id="{D9F39773-061F-4914-96E1-564C333EF982}"/>
               </a:ext>
             </a:extLst>
           </p:cNvPr>
@@ -22887,7 +22380,7 @@
           <p:cNvPr id="27" name="正方形/長方形 26">
             <a:extLst>
               <a:ext uri="{FF2B5EF4-FFF2-40B4-BE49-F238E27FC236}">
-                <a16:creationId xmlns:a16="http://schemas.microsoft.com/office/drawing/2014/main" id="{35DCE479-7DA8-426E-A806-3827053DE71C}"/>
+                <a16:creationId xmlns:a16="http://schemas.microsoft.com/office/drawing/2014/main" id="{39D05314-0151-4A8F-B067-A07E9D7F0F89}"/>
               </a:ext>
             </a:extLst>
           </p:cNvPr>
@@ -22949,7 +22442,7 @@
           <p:cNvPr id="28" name="正方形/長方形 27">
             <a:extLst>
               <a:ext uri="{FF2B5EF4-FFF2-40B4-BE49-F238E27FC236}">
-                <a16:creationId xmlns:a16="http://schemas.microsoft.com/office/drawing/2014/main" id="{EAA0392D-59F5-4E17-A02D-FEA49D703BF8}"/>
+                <a16:creationId xmlns:a16="http://schemas.microsoft.com/office/drawing/2014/main" id="{A1F233CC-6BD0-493A-A16E-C6A5869CAFCD}"/>
               </a:ext>
             </a:extLst>
           </p:cNvPr>
@@ -23011,7 +22504,7 @@
           <p:cNvPr id="29" name="正方形/長方形 28">
             <a:extLst>
               <a:ext uri="{FF2B5EF4-FFF2-40B4-BE49-F238E27FC236}">
-                <a16:creationId xmlns:a16="http://schemas.microsoft.com/office/drawing/2014/main" id="{1293892D-DBC0-48B3-AD26-16507ED03FBD}"/>
+                <a16:creationId xmlns:a16="http://schemas.microsoft.com/office/drawing/2014/main" id="{0CF45F13-6FA0-4969-9832-56F8B8876293}"/>
               </a:ext>
             </a:extLst>
           </p:cNvPr>
@@ -23073,7 +22566,7 @@
           <p:cNvPr id="30" name="直線コネクタ 29">
             <a:extLst>
               <a:ext uri="{FF2B5EF4-FFF2-40B4-BE49-F238E27FC236}">
-                <a16:creationId xmlns:a16="http://schemas.microsoft.com/office/drawing/2014/main" id="{1105DE9D-A5A3-4005-8B0A-A88BDBCCBB44}"/>
+                <a16:creationId xmlns:a16="http://schemas.microsoft.com/office/drawing/2014/main" id="{C7A13A93-B819-4529-8B5F-839E36FBEA5C}"/>
               </a:ext>
             </a:extLst>
           </p:cNvPr>
@@ -23104,7 +22597,7 @@
           <p:cNvPr id="31" name="楕円 30">
             <a:extLst>
               <a:ext uri="{FF2B5EF4-FFF2-40B4-BE49-F238E27FC236}">
-                <a16:creationId xmlns:a16="http://schemas.microsoft.com/office/drawing/2014/main" id="{97268DB0-6537-4C77-94D2-A94B2BE29922}"/>
+                <a16:creationId xmlns:a16="http://schemas.microsoft.com/office/drawing/2014/main" id="{818CB928-B39C-4FE9-92AE-23AEE084EFCD}"/>
               </a:ext>
             </a:extLst>
           </p:cNvPr>
@@ -23135,7 +22628,7 @@
           <p:cNvPr id="32" name="正方形/長方形 31">
             <a:extLst>
               <a:ext uri="{FF2B5EF4-FFF2-40B4-BE49-F238E27FC236}">
-                <a16:creationId xmlns:a16="http://schemas.microsoft.com/office/drawing/2014/main" id="{E086B7D4-E4DC-4E61-AAC4-4F0D332406C5}"/>
+                <a16:creationId xmlns:a16="http://schemas.microsoft.com/office/drawing/2014/main" id="{1FC08A86-2CA7-415A-B831-C180379234D1}"/>
               </a:ext>
             </a:extLst>
           </p:cNvPr>
@@ -23197,7 +22690,7 @@
           <p:cNvPr id="33" name="正方形/長方形 32">
             <a:extLst>
               <a:ext uri="{FF2B5EF4-FFF2-40B4-BE49-F238E27FC236}">
-                <a16:creationId xmlns:a16="http://schemas.microsoft.com/office/drawing/2014/main" id="{C298C3F5-25BE-456B-AEFE-E306EAEC91D3}"/>
+                <a16:creationId xmlns:a16="http://schemas.microsoft.com/office/drawing/2014/main" id="{77AE1489-98A1-4AD8-9A65-1A1ACB4EFBB9}"/>
               </a:ext>
             </a:extLst>
           </p:cNvPr>
@@ -23259,7 +22752,7 @@
           <p:cNvPr id="34" name="正方形/長方形 33">
             <a:extLst>
               <a:ext uri="{FF2B5EF4-FFF2-40B4-BE49-F238E27FC236}">
-                <a16:creationId xmlns:a16="http://schemas.microsoft.com/office/drawing/2014/main" id="{7EAFC76D-8BAE-421D-91E7-1EED4030132F}"/>
+                <a16:creationId xmlns:a16="http://schemas.microsoft.com/office/drawing/2014/main" id="{890DD23D-EAE7-4248-9C59-4FC4EAD0F7AC}"/>
               </a:ext>
             </a:extLst>
           </p:cNvPr>
@@ -23321,7 +22814,7 @@
           <p:cNvPr id="35" name="直線コネクタ 34">
             <a:extLst>
               <a:ext uri="{FF2B5EF4-FFF2-40B4-BE49-F238E27FC236}">
-                <a16:creationId xmlns:a16="http://schemas.microsoft.com/office/drawing/2014/main" id="{B03B7291-94E8-484D-AA42-50938F0DA0FF}"/>
+                <a16:creationId xmlns:a16="http://schemas.microsoft.com/office/drawing/2014/main" id="{425D3AED-477F-4EE4-871B-94466A59CB93}"/>
               </a:ext>
             </a:extLst>
           </p:cNvPr>
@@ -23352,7 +22845,7 @@
           <p:cNvPr id="36" name="楕円 35">
             <a:extLst>
               <a:ext uri="{FF2B5EF4-FFF2-40B4-BE49-F238E27FC236}">
-                <a16:creationId xmlns:a16="http://schemas.microsoft.com/office/drawing/2014/main" id="{D22381D9-0CD4-4CF8-BDF8-61F280681044}"/>
+                <a16:creationId xmlns:a16="http://schemas.microsoft.com/office/drawing/2014/main" id="{590AF7E0-D3A5-4A6B-922C-118DDDD49641}"/>
               </a:ext>
             </a:extLst>
           </p:cNvPr>
@@ -23383,7 +22876,7 @@
           <p:cNvPr id="37" name="正方形/長方形 36">
             <a:extLst>
               <a:ext uri="{FF2B5EF4-FFF2-40B4-BE49-F238E27FC236}">
-                <a16:creationId xmlns:a16="http://schemas.microsoft.com/office/drawing/2014/main" id="{6679F91A-40A4-47D5-B8C0-47510DC04DD7}"/>
+                <a16:creationId xmlns:a16="http://schemas.microsoft.com/office/drawing/2014/main" id="{15A56520-E47E-45E5-AB21-4EA0BB5B2DDD}"/>
               </a:ext>
             </a:extLst>
           </p:cNvPr>
@@ -23445,7 +22938,7 @@
           <p:cNvPr id="38" name="正方形/長方形 37">
             <a:extLst>
               <a:ext uri="{FF2B5EF4-FFF2-40B4-BE49-F238E27FC236}">
-                <a16:creationId xmlns:a16="http://schemas.microsoft.com/office/drawing/2014/main" id="{573BFAAB-C301-41AA-B5C1-0472A1AF0862}"/>
+                <a16:creationId xmlns:a16="http://schemas.microsoft.com/office/drawing/2014/main" id="{9B420744-6A17-4DD8-AB10-ED65DF957994}"/>
               </a:ext>
             </a:extLst>
           </p:cNvPr>
@@ -23507,7 +23000,7 @@
           <p:cNvPr id="39" name="正方形/長方形 38">
             <a:extLst>
               <a:ext uri="{FF2B5EF4-FFF2-40B4-BE49-F238E27FC236}">
-                <a16:creationId xmlns:a16="http://schemas.microsoft.com/office/drawing/2014/main" id="{FC3BBC65-F4C0-4FCC-A926-3540A0011D54}"/>
+                <a16:creationId xmlns:a16="http://schemas.microsoft.com/office/drawing/2014/main" id="{474B26AF-6559-461C-AAB3-BFDD8F2ABA80}"/>
               </a:ext>
             </a:extLst>
           </p:cNvPr>
@@ -23569,7 +23062,7 @@
           <p:cNvPr id="40" name="正方形/長方形 39">
             <a:extLst>
               <a:ext uri="{FF2B5EF4-FFF2-40B4-BE49-F238E27FC236}">
-                <a16:creationId xmlns:a16="http://schemas.microsoft.com/office/drawing/2014/main" id="{34B27842-9749-46A0-99F6-55F09F695109}"/>
+                <a16:creationId xmlns:a16="http://schemas.microsoft.com/office/drawing/2014/main" id="{CED28D63-D1BA-4EE9-BE7C-B5C7EAC8CD7B}"/>
               </a:ext>
             </a:extLst>
           </p:cNvPr>
@@ -23600,7 +23093,7 @@
           <p:cNvPr id="41" name="正方形/長方形 40">
             <a:extLst>
               <a:ext uri="{FF2B5EF4-FFF2-40B4-BE49-F238E27FC236}">
-                <a16:creationId xmlns:a16="http://schemas.microsoft.com/office/drawing/2014/main" id="{0407ECE9-D073-4E51-BC34-D1B72C54CE3B}"/>
+                <a16:creationId xmlns:a16="http://schemas.microsoft.com/office/drawing/2014/main" id="{E05033BA-B54E-4FC4-9E00-F5255BD874A2}"/>
               </a:ext>
             </a:extLst>
           </p:cNvPr>
@@ -23662,7 +23155,7 @@
           <p:cNvPr id="42" name="正方形/長方形 41">
             <a:extLst>
               <a:ext uri="{FF2B5EF4-FFF2-40B4-BE49-F238E27FC236}">
-                <a16:creationId xmlns:a16="http://schemas.microsoft.com/office/drawing/2014/main" id="{5068EDF2-BFDD-4A92-974B-34C408E33BEE}"/>
+                <a16:creationId xmlns:a16="http://schemas.microsoft.com/office/drawing/2014/main" id="{DD7F4093-2789-4C88-9EF4-20C0784840ED}"/>
               </a:ext>
             </a:extLst>
           </p:cNvPr>
@@ -23722,7 +23215,7 @@
     </p:spTree>
     <p:extLst>
       <p:ext uri="{BB962C8B-B14F-4D97-AF65-F5344CB8AC3E}">
-        <p14:creationId xmlns:p14="http://schemas.microsoft.com/office/powerpoint/2010/main" val="1241830328"/>
+        <p14:creationId xmlns:p14="http://schemas.microsoft.com/office/powerpoint/2010/main" val="1146233233"/>
       </p:ext>
     </p:extLst>
   </p:cSld>
